--- a/presentations/Кровотечение_Обзорный_осмотр_пострадавшего.pptx
+++ b/presentations/Кровотечение_Обзорный_осмотр_пострадавшего.pptx
@@ -3099,12 +3099,20 @@
         <p:nvPr/>
       </p:nvGrpSpPr>
       <p:grpSpPr/>
-      <p:sp>
-        <p:nvSpPr>
-          <p:cNvPr id="2" name="Rectangle 1"/>
-          <p:cNvSpPr/>
-          <p:nvPr/>
-        </p:nvSpPr>
+      <p:pic>
+        <p:nvPicPr>
+          <p:cNvPr id="2" name="Picture 1" descr="suot_title_bg.png"/>
+          <p:cNvPicPr>
+            <a:picLocks noChangeAspect="1"/>
+          </p:cNvPicPr>
+          <p:nvPr/>
+        </p:nvPicPr>
+        <p:blipFill>
+          <a:blip r:embed="rId2"/>
+          <a:stretch>
+            <a:fillRect/>
+          </a:stretch>
+        </p:blipFill>
         <p:spPr>
           <a:xfrm>
             <a:off x="0" y="0"/>
@@ -3113,8 +3121,26 @@
           <a:prstGeom prst="rect">
             <a:avLst/>
           </a:prstGeom>
-          <a:solidFill>
-            <a:srgbClr val="F8F8F8"/>
+        </p:spPr>
+      </p:pic>
+      <p:sp>
+        <p:nvSpPr>
+          <p:cNvPr id="3" name="Rectangle 2"/>
+          <p:cNvSpPr/>
+          <p:nvPr/>
+        </p:nvSpPr>
+        <p:spPr>
+          <a:xfrm>
+            <a:off x="0" y="2600000"/>
+            <a:ext cx="12191695" cy="2000000"/>
+          </a:xfrm>
+          <a:prstGeom prst="rect">
+            <a:avLst/>
+          </a:prstGeom>
+          <a:solidFill>
+            <a:srgbClr val="415762">
+              <a:alpha val="85000"/>
+            </a:srgbClr>
           </a:solidFill>
           <a:ln>
             <a:noFill/>
@@ -3144,100 +3170,14 @@
       </p:sp>
       <p:sp>
         <p:nvSpPr>
-          <p:cNvPr id="3" name="Rectangle 2"/>
-          <p:cNvSpPr/>
-          <p:nvPr/>
-        </p:nvSpPr>
-        <p:spPr>
-          <a:xfrm>
-            <a:off x="8800000" y="0"/>
-            <a:ext cx="3400000" cy="6858000"/>
-          </a:xfrm>
-          <a:prstGeom prst="rect">
-            <a:avLst/>
-          </a:prstGeom>
-          <a:solidFill>
-            <a:srgbClr val="DDDDDD"/>
-          </a:solidFill>
-          <a:ln>
-            <a:noFill/>
-          </a:ln>
-        </p:spPr>
-        <p:style>
-          <a:lnRef idx="1">
-            <a:schemeClr val="accent1"/>
-          </a:lnRef>
-          <a:fillRef idx="3">
-            <a:schemeClr val="accent1"/>
-          </a:fillRef>
-          <a:effectRef idx="2">
-            <a:schemeClr val="accent1"/>
-          </a:effectRef>
-          <a:fontRef idx="minor">
-            <a:schemeClr val="lt1"/>
-          </a:fontRef>
-        </p:style>
-        <p:txBody>
-          <a:bodyPr rtlCol="0" anchor="ctr"/>
-          <a:lstStyle/>
-          <a:p>
-            <a:pPr algn="ctr"/>
-          </a:p>
-        </p:txBody>
-      </p:sp>
-      <p:sp>
-        <p:nvSpPr>
-          <p:cNvPr id="4" name="Rectangle 3"/>
-          <p:cNvSpPr/>
-          <p:nvPr/>
-        </p:nvSpPr>
-        <p:spPr>
-          <a:xfrm>
-            <a:off x="0" y="2800000"/>
-            <a:ext cx="2800000" cy="1800000"/>
-          </a:xfrm>
-          <a:prstGeom prst="rect">
-            <a:avLst/>
-          </a:prstGeom>
-          <a:solidFill>
-            <a:srgbClr val="DDDDDD"/>
-          </a:solidFill>
-          <a:ln>
-            <a:noFill/>
-          </a:ln>
-        </p:spPr>
-        <p:style>
-          <a:lnRef idx="1">
-            <a:schemeClr val="accent1"/>
-          </a:lnRef>
-          <a:fillRef idx="3">
-            <a:schemeClr val="accent1"/>
-          </a:fillRef>
-          <a:effectRef idx="2">
-            <a:schemeClr val="accent1"/>
-          </a:effectRef>
-          <a:fontRef idx="minor">
-            <a:schemeClr val="lt1"/>
-          </a:fontRef>
-        </p:style>
-        <p:txBody>
-          <a:bodyPr rtlCol="0" anchor="ctr"/>
-          <a:lstStyle/>
-          <a:p>
-            <a:pPr algn="ctr"/>
-          </a:p>
-        </p:txBody>
-      </p:sp>
-      <p:sp>
-        <p:nvSpPr>
-          <p:cNvPr id="5" name="TextBox 4"/>
+          <p:cNvPr id="4" name="TextBox 3"/>
           <p:cNvSpPr txBox="1"/>
           <p:nvPr/>
         </p:nvSpPr>
         <p:spPr>
           <a:xfrm>
-            <a:off x="700000" y="3000000"/>
-            <a:ext cx="7800000" cy="1400000"/>
+            <a:off x="800000" y="2900000"/>
+            <a:ext cx="10500000" cy="1400000"/>
           </a:xfrm>
           <a:prstGeom prst="rect">
             <a:avLst/>
@@ -3245,104 +3185,24 @@
           <a:noFill/>
         </p:spPr>
         <p:txBody>
-          <a:bodyPr wrap="square" anchor="t">
+          <a:bodyPr wrap="square" anchor="ctr">
             <a:spAutoFit/>
           </a:bodyPr>
           <a:lstStyle/>
           <a:p>
-            <a:pPr algn="l"/>
+            <a:pPr algn="ctr"/>
             <a:r>
               <a:rPr sz="2800" b="1">
                 <a:solidFill>
-                  <a:srgbClr val="333333"/>
-                </a:solidFill>
-                <a:latin typeface="Open Sans"/>
-                <a:ea typeface="Open Sans"/>
-                <a:cs typeface="Open Sans"/>
+                  <a:srgbClr val="FFFFFF"/>
+                </a:solidFill>
+                <a:latin typeface="Calibri"/>
+                <a:ea typeface="Calibri"/>
+                <a:cs typeface="Calibri"/>
               </a:rPr>
               <a:t>КРОВОТЕЧЕНИЕ.
 ОБЗОРНЫЙ ОСМОТР ПОСТРАДАВШЕГО
 (ПОСТРАДАВШИХ)</a:t>
-            </a:r>
-          </a:p>
-        </p:txBody>
-      </p:sp>
-      <p:sp>
-        <p:nvSpPr>
-          <p:cNvPr id="6" name="Rectangle 5"/>
-          <p:cNvSpPr/>
-          <p:nvPr/>
-        </p:nvSpPr>
-        <p:spPr>
-          <a:xfrm>
-            <a:off x="700000" y="4600000"/>
-            <a:ext cx="5500000" cy="30000"/>
-          </a:xfrm>
-          <a:prstGeom prst="rect">
-            <a:avLst/>
-          </a:prstGeom>
-          <a:solidFill>
-            <a:srgbClr val="333333"/>
-          </a:solidFill>
-          <a:ln>
-            <a:noFill/>
-          </a:ln>
-        </p:spPr>
-        <p:style>
-          <a:lnRef idx="1">
-            <a:schemeClr val="accent1"/>
-          </a:lnRef>
-          <a:fillRef idx="3">
-            <a:schemeClr val="accent1"/>
-          </a:fillRef>
-          <a:effectRef idx="2">
-            <a:schemeClr val="accent1"/>
-          </a:effectRef>
-          <a:fontRef idx="minor">
-            <a:schemeClr val="lt1"/>
-          </a:fontRef>
-        </p:style>
-        <p:txBody>
-          <a:bodyPr rtlCol="0" anchor="ctr"/>
-          <a:lstStyle/>
-          <a:p>
-            <a:pPr algn="ctr"/>
-          </a:p>
-        </p:txBody>
-      </p:sp>
-      <p:sp>
-        <p:nvSpPr>
-          <p:cNvPr id="7" name="TextBox 6"/>
-          <p:cNvSpPr txBox="1"/>
-          <p:nvPr/>
-        </p:nvSpPr>
-        <p:spPr>
-          <a:xfrm>
-            <a:off x="700000" y="4800000"/>
-            <a:ext cx="7500000" cy="500000"/>
-          </a:xfrm>
-          <a:prstGeom prst="rect">
-            <a:avLst/>
-          </a:prstGeom>
-          <a:noFill/>
-        </p:spPr>
-        <p:txBody>
-          <a:bodyPr wrap="square" anchor="t">
-            <a:spAutoFit/>
-          </a:bodyPr>
-          <a:lstStyle/>
-          <a:p>
-            <a:pPr algn="l"/>
-            <a:r>
-              <a:rPr sz="1400" b="0">
-                <a:solidFill>
-                  <a:srgbClr val="666666"/>
-                </a:solidFill>
-                <a:latin typeface="Open Sans"/>
-                <a:ea typeface="Open Sans"/>
-                <a:cs typeface="Open Sans"/>
-              </a:rPr>
-              <a:t>Тема 2 · Оказание первой помощи при наружных кровотечениях</a:t>
             </a:r>
           </a:p>
         </p:txBody>
@@ -3410,57 +3270,20 @@
       </p:sp>
       <p:sp>
         <p:nvSpPr>
-          <p:cNvPr id="3" name="TextBox 2"/>
-          <p:cNvSpPr txBox="1"/>
-          <p:nvPr/>
-        </p:nvSpPr>
-        <p:spPr>
-          <a:xfrm>
-            <a:off x="700000" y="280000"/>
-            <a:ext cx="11000000" cy="550000"/>
-          </a:xfrm>
-          <a:prstGeom prst="rect">
-            <a:avLst/>
-          </a:prstGeom>
-          <a:noFill/>
-        </p:spPr>
-        <p:txBody>
-          <a:bodyPr wrap="square" anchor="t">
-            <a:spAutoFit/>
-          </a:bodyPr>
-          <a:lstStyle/>
-          <a:p>
-            <a:pPr algn="l"/>
-            <a:r>
-              <a:rPr sz="2600" b="1">
-                <a:solidFill>
-                  <a:srgbClr val="333333"/>
-                </a:solidFill>
-                <a:latin typeface="Open Sans"/>
-                <a:ea typeface="Open Sans"/>
-                <a:cs typeface="Open Sans"/>
-              </a:rPr>
-              <a:t>ОБЗОРНЫЙ И ПОДРОБНЫЙ ОСМОТР</a:t>
-            </a:r>
-          </a:p>
-        </p:txBody>
-      </p:sp>
-      <p:sp>
-        <p:nvSpPr>
-          <p:cNvPr id="4" name="Rectangle 3"/>
+          <p:cNvPr id="3" name="Rectangle 2"/>
           <p:cNvSpPr/>
           <p:nvPr/>
         </p:nvSpPr>
         <p:spPr>
           <a:xfrm>
-            <a:off x="700000" y="880000"/>
-            <a:ext cx="9000000" cy="25000"/>
-          </a:xfrm>
-          <a:prstGeom prst="rect">
-            <a:avLst/>
-          </a:prstGeom>
-          <a:solidFill>
-            <a:srgbClr val="555555"/>
+            <a:off x="0" y="0"/>
+            <a:ext cx="12191695" cy="1300000"/>
+          </a:xfrm>
+          <a:prstGeom prst="rect">
+            <a:avLst/>
+          </a:prstGeom>
+          <a:solidFill>
+            <a:srgbClr val="F8F8F8"/>
           </a:solidFill>
           <a:ln>
             <a:noFill/>
@@ -3490,14 +3313,14 @@
       </p:sp>
       <p:sp>
         <p:nvSpPr>
-          <p:cNvPr id="5" name="TextBox 4"/>
+          <p:cNvPr id="4" name="TextBox 3"/>
           <p:cNvSpPr txBox="1"/>
           <p:nvPr/>
         </p:nvSpPr>
         <p:spPr>
           <a:xfrm>
-            <a:off x="700000" y="950000"/>
-            <a:ext cx="11000000" cy="350000"/>
+            <a:off x="700000" y="220000"/>
+            <a:ext cx="11200000" cy="550000"/>
           </a:xfrm>
           <a:prstGeom prst="rect">
             <a:avLst/>
@@ -3512,35 +3335,35 @@
           <a:p>
             <a:pPr algn="l"/>
             <a:r>
-              <a:rPr sz="1200" b="0">
-                <a:solidFill>
-                  <a:srgbClr val="666666"/>
-                </a:solidFill>
-                <a:latin typeface="Open Sans"/>
-                <a:ea typeface="Open Sans"/>
-                <a:cs typeface="Open Sans"/>
+              <a:rPr sz="2000" b="1">
+                <a:solidFill>
+                  <a:srgbClr val="333333"/>
+                </a:solidFill>
+                <a:latin typeface="Calibri"/>
+                <a:ea typeface="Calibri"/>
+                <a:cs typeface="Calibri"/>
               </a:rPr>
-              <a:t>Оказание первой помощи при наружных кровотечениях</a:t>
-            </a:r>
-          </a:p>
-        </p:txBody>
-      </p:sp>
-      <p:sp>
-        <p:nvSpPr>
-          <p:cNvPr id="6" name="Rectangle 5"/>
+              <a:t>ОБЗОРНЫЙ И ПОДРОБНЫЙ ОСМОТР</a:t>
+            </a:r>
+          </a:p>
+        </p:txBody>
+      </p:sp>
+      <p:sp>
+        <p:nvSpPr>
+          <p:cNvPr id="5" name="Rectangle 4"/>
           <p:cNvSpPr/>
           <p:nvPr/>
         </p:nvSpPr>
         <p:spPr>
           <a:xfrm>
-            <a:off x="0" y="2800000"/>
-            <a:ext cx="420000" cy="420000"/>
-          </a:xfrm>
-          <a:prstGeom prst="rect">
-            <a:avLst/>
-          </a:prstGeom>
-          <a:solidFill>
-            <a:srgbClr val="555555"/>
+            <a:off x="700000" y="820000"/>
+            <a:ext cx="8500000" cy="28000"/>
+          </a:xfrm>
+          <a:prstGeom prst="rect">
+            <a:avLst/>
+          </a:prstGeom>
+          <a:solidFill>
+            <a:srgbClr val="606060"/>
           </a:solidFill>
           <a:ln>
             <a:noFill/>
@@ -3570,14 +3393,14 @@
       </p:sp>
       <p:sp>
         <p:nvSpPr>
-          <p:cNvPr id="7" name="TextBox 6"/>
+          <p:cNvPr id="6" name="TextBox 5"/>
           <p:cNvSpPr txBox="1"/>
           <p:nvPr/>
         </p:nvSpPr>
         <p:spPr>
           <a:xfrm>
-            <a:off x="0" y="2800000"/>
-            <a:ext cx="420000" cy="420000"/>
+            <a:off x="700000" y="880000"/>
+            <a:ext cx="11000000" cy="320000"/>
           </a:xfrm>
           <a:prstGeom prst="rect">
             <a:avLst/>
@@ -3585,47 +3408,45 @@
           <a:noFill/>
         </p:spPr>
         <p:txBody>
-          <a:bodyPr wrap="square" anchor="ctr">
+          <a:bodyPr wrap="square" anchor="t">
             <a:spAutoFit/>
           </a:bodyPr>
           <a:lstStyle/>
           <a:p>
-            <a:pPr algn="ctr"/>
-            <a:r>
-              <a:rPr sz="1400" b="1">
-                <a:solidFill>
-                  <a:srgbClr val="FFFFFF"/>
-                </a:solidFill>
-                <a:latin typeface="Open Sans"/>
-                <a:ea typeface="Open Sans"/>
-                <a:cs typeface="Open Sans"/>
+            <a:pPr algn="l"/>
+            <a:r>
+              <a:rPr sz="1100" b="0">
+                <a:solidFill>
+                  <a:srgbClr val="777777"/>
+                </a:solidFill>
+                <a:latin typeface="Calibri"/>
+                <a:ea typeface="Calibri"/>
+                <a:cs typeface="Calibri"/>
               </a:rPr>
-              <a:t>10</a:t>
-            </a:r>
-          </a:p>
-        </p:txBody>
-      </p:sp>
-      <p:sp>
-        <p:nvSpPr>
-          <p:cNvPr id="8" name="Rectangle 7"/>
+              <a:t>Оказание первой помощи при наружных кровотечениях</a:t>
+            </a:r>
+          </a:p>
+        </p:txBody>
+      </p:sp>
+      <p:sp>
+        <p:nvSpPr>
+          <p:cNvPr id="7" name="Rectangle 6"/>
           <p:cNvSpPr/>
           <p:nvPr/>
         </p:nvSpPr>
         <p:spPr>
           <a:xfrm>
-            <a:off x="700000" y="1550000"/>
-            <a:ext cx="5400000" cy="4800000"/>
-          </a:xfrm>
-          <a:prstGeom prst="rect">
-            <a:avLst/>
-          </a:prstGeom>
-          <a:solidFill>
-            <a:srgbClr val="FFFFFF"/>
-          </a:solidFill>
-          <a:ln w="12700">
-            <a:solidFill>
-              <a:srgbClr val="999999"/>
-            </a:solidFill>
+            <a:off x="0" y="2700000"/>
+            <a:ext cx="400000" cy="400000"/>
+          </a:xfrm>
+          <a:prstGeom prst="rect">
+            <a:avLst/>
+          </a:prstGeom>
+          <a:solidFill>
+            <a:srgbClr val="606060"/>
+          </a:solidFill>
+          <a:ln>
+            <a:noFill/>
           </a:ln>
         </p:spPr>
         <p:style>
@@ -3652,23 +3473,62 @@
       </p:sp>
       <p:sp>
         <p:nvSpPr>
-          <p:cNvPr id="9" name="Rectangle 8"/>
+          <p:cNvPr id="8" name="TextBox 7"/>
+          <p:cNvSpPr txBox="1"/>
+          <p:nvPr/>
+        </p:nvSpPr>
+        <p:spPr>
+          <a:xfrm>
+            <a:off x="0" y="2700000"/>
+            <a:ext cx="400000" cy="400000"/>
+          </a:xfrm>
+          <a:prstGeom prst="rect">
+            <a:avLst/>
+          </a:prstGeom>
+          <a:noFill/>
+        </p:spPr>
+        <p:txBody>
+          <a:bodyPr wrap="square" anchor="ctr">
+            <a:spAutoFit/>
+          </a:bodyPr>
+          <a:lstStyle/>
+          <a:p>
+            <a:pPr algn="ctr"/>
+            <a:r>
+              <a:rPr sz="1300" b="1">
+                <a:solidFill>
+                  <a:srgbClr val="FFFFFF"/>
+                </a:solidFill>
+                <a:latin typeface="Calibri"/>
+                <a:ea typeface="Calibri"/>
+                <a:cs typeface="Calibri"/>
+              </a:rPr>
+              <a:t>10</a:t>
+            </a:r>
+          </a:p>
+        </p:txBody>
+      </p:sp>
+      <p:sp>
+        <p:nvSpPr>
+          <p:cNvPr id="9" name="Rounded Rectangle 8"/>
           <p:cNvSpPr/>
           <p:nvPr/>
         </p:nvSpPr>
         <p:spPr>
           <a:xfrm>
             <a:off x="700000" y="1550000"/>
-            <a:ext cx="5400000" cy="700000"/>
-          </a:xfrm>
-          <a:prstGeom prst="rect">
-            <a:avLst/>
-          </a:prstGeom>
-          <a:solidFill>
-            <a:srgbClr val="555555"/>
-          </a:solidFill>
-          <a:ln>
-            <a:noFill/>
+            <a:ext cx="5400000" cy="4800000"/>
+          </a:xfrm>
+          <a:prstGeom prst="roundRect">
+            <a:avLst/>
+          </a:prstGeom>
+          <a:solidFill>
+            <a:srgbClr val="FFFFFF"/>
+          </a:solidFill>
+          <a:ln w="15875">
+            <a:solidFill>
+              <a:srgbClr val="8DDBCD"/>
+            </a:solidFill>
           </a:ln>
         </p:spPr>
         <p:style>
@@ -3695,157 +3555,23 @@
       </p:sp>
       <p:sp>
         <p:nvSpPr>
-          <p:cNvPr id="10" name="TextBox 9"/>
-          <p:cNvSpPr txBox="1"/>
-          <p:nvPr/>
-        </p:nvSpPr>
-        <p:spPr>
-          <a:xfrm>
-            <a:off x="900000" y="1650000"/>
-            <a:ext cx="5000000" cy="500000"/>
-          </a:xfrm>
-          <a:prstGeom prst="rect">
-            <a:avLst/>
-          </a:prstGeom>
-          <a:noFill/>
-        </p:spPr>
-        <p:txBody>
-          <a:bodyPr wrap="square" anchor="t">
-            <a:spAutoFit/>
-          </a:bodyPr>
-          <a:lstStyle/>
-          <a:p>
-            <a:pPr algn="ctr"/>
-            <a:r>
-              <a:rPr sz="1800" b="1">
-                <a:solidFill>
-                  <a:srgbClr val="FFFFFF"/>
-                </a:solidFill>
-                <a:latin typeface="Open Sans"/>
-                <a:ea typeface="Open Sans"/>
-                <a:cs typeface="Open Sans"/>
-              </a:rPr>
-              <a:t>Обзорный осмотр</a:t>
-            </a:r>
-          </a:p>
-        </p:txBody>
-      </p:sp>
-      <p:sp>
-        <p:nvSpPr>
-          <p:cNvPr id="11" name="TextBox 10"/>
-          <p:cNvSpPr txBox="1"/>
-          <p:nvPr/>
-        </p:nvSpPr>
-        <p:spPr>
-          <a:xfrm>
-            <a:off x="950000" y="2500000"/>
-            <a:ext cx="4900000" cy="3500000"/>
-          </a:xfrm>
-          <a:prstGeom prst="rect">
-            <a:avLst/>
-          </a:prstGeom>
-          <a:noFill/>
-        </p:spPr>
-        <p:txBody>
-          <a:bodyPr wrap="square">
-            <a:spAutoFit/>
-          </a:bodyPr>
-          <a:lstStyle/>
-          <a:p>
-            <a:pPr algn="l">
-              <a:spcAft>
-                <a:spcPts val="800"/>
-              </a:spcAft>
-            </a:pPr>
-            <a:r>
-              <a:rPr sz="1500" b="0">
-                <a:solidFill>
-                  <a:srgbClr val="333333"/>
-                </a:solidFill>
-                <a:latin typeface="Open Sans"/>
-                <a:ea typeface="Open Sans"/>
-                <a:cs typeface="Open Sans"/>
-              </a:rPr>
-              <a:t>•  Цель: найти наружное кровотечение</a:t>
-            </a:r>
-          </a:p>
-          <a:p>
-            <a:pPr algn="l">
-              <a:spcAft>
-                <a:spcPts val="800"/>
-              </a:spcAft>
-            </a:pPr>
-            <a:r>
-              <a:rPr sz="1500" b="0">
-                <a:solidFill>
-                  <a:srgbClr val="333333"/>
-                </a:solidFill>
-                <a:latin typeface="Open Sans"/>
-                <a:ea typeface="Open Sans"/>
-                <a:cs typeface="Open Sans"/>
-              </a:rPr>
-              <a:t>•  Время: несколько секунд</a:t>
-            </a:r>
-          </a:p>
-          <a:p>
-            <a:pPr algn="l">
-              <a:spcAft>
-                <a:spcPts val="800"/>
-              </a:spcAft>
-            </a:pPr>
-            <a:r>
-              <a:rPr sz="1500" b="0">
-                <a:solidFill>
-                  <a:srgbClr val="333333"/>
-                </a:solidFill>
-                <a:latin typeface="Open Sans"/>
-                <a:ea typeface="Open Sans"/>
-                <a:cs typeface="Open Sans"/>
-              </a:rPr>
-              <a:t>•  Объём: быстро с головы до ног</a:t>
-            </a:r>
-          </a:p>
-          <a:p>
-            <a:pPr algn="l">
-              <a:spcAft>
-                <a:spcPts val="800"/>
-              </a:spcAft>
-            </a:pPr>
-            <a:r>
-              <a:rPr sz="1500" b="0">
-                <a:solidFill>
-                  <a:srgbClr val="333333"/>
-                </a:solidFill>
-                <a:latin typeface="Open Sans"/>
-                <a:ea typeface="Open Sans"/>
-                <a:cs typeface="Open Sans"/>
-              </a:rPr>
-              <a:t>•  Когда: сразу после оценки обстановки</a:t>
-            </a:r>
-          </a:p>
-        </p:txBody>
-      </p:sp>
-      <p:sp>
-        <p:nvSpPr>
-          <p:cNvPr id="12" name="Rectangle 11"/>
+          <p:cNvPr id="10" name="Rectangle 9"/>
           <p:cNvSpPr/>
           <p:nvPr/>
         </p:nvSpPr>
         <p:spPr>
           <a:xfrm>
-            <a:off x="6500000" y="1550000"/>
-            <a:ext cx="5400000" cy="4800000"/>
-          </a:xfrm>
-          <a:prstGeom prst="rect">
-            <a:avLst/>
-          </a:prstGeom>
-          <a:solidFill>
-            <a:srgbClr val="FFFFFF"/>
-          </a:solidFill>
-          <a:ln w="12700">
-            <a:solidFill>
-              <a:srgbClr val="999999"/>
-            </a:solidFill>
+            <a:off x="700000" y="1550000"/>
+            <a:ext cx="5400000" cy="700000"/>
+          </a:xfrm>
+          <a:prstGeom prst="rect">
+            <a:avLst/>
+          </a:prstGeom>
+          <a:solidFill>
+            <a:srgbClr val="8DDBCD"/>
+          </a:solidFill>
+          <a:ln>
+            <a:noFill/>
           </a:ln>
         </p:spPr>
         <p:style>
@@ -3872,23 +3598,157 @@
       </p:sp>
       <p:sp>
         <p:nvSpPr>
-          <p:cNvPr id="13" name="Rectangle 12"/>
+          <p:cNvPr id="11" name="TextBox 10"/>
+          <p:cNvSpPr txBox="1"/>
+          <p:nvPr/>
+        </p:nvSpPr>
+        <p:spPr>
+          <a:xfrm>
+            <a:off x="900000" y="1650000"/>
+            <a:ext cx="5000000" cy="500000"/>
+          </a:xfrm>
+          <a:prstGeom prst="rect">
+            <a:avLst/>
+          </a:prstGeom>
+          <a:noFill/>
+        </p:spPr>
+        <p:txBody>
+          <a:bodyPr wrap="square" anchor="t">
+            <a:spAutoFit/>
+          </a:bodyPr>
+          <a:lstStyle/>
+          <a:p>
+            <a:pPr algn="ctr"/>
+            <a:r>
+              <a:rPr sz="1600" b="1">
+                <a:solidFill>
+                  <a:srgbClr val="0D6B60"/>
+                </a:solidFill>
+                <a:latin typeface="Calibri"/>
+                <a:ea typeface="Calibri"/>
+                <a:cs typeface="Calibri"/>
+              </a:rPr>
+              <a:t>Обзорный осмотр</a:t>
+            </a:r>
+          </a:p>
+        </p:txBody>
+      </p:sp>
+      <p:sp>
+        <p:nvSpPr>
+          <p:cNvPr id="12" name="TextBox 11"/>
+          <p:cNvSpPr txBox="1"/>
+          <p:nvPr/>
+        </p:nvSpPr>
+        <p:spPr>
+          <a:xfrm>
+            <a:off x="950000" y="2500000"/>
+            <a:ext cx="4900000" cy="3500000"/>
+          </a:xfrm>
+          <a:prstGeom prst="rect">
+            <a:avLst/>
+          </a:prstGeom>
+          <a:noFill/>
+        </p:spPr>
+        <p:txBody>
+          <a:bodyPr wrap="square">
+            <a:spAutoFit/>
+          </a:bodyPr>
+          <a:lstStyle/>
+          <a:p>
+            <a:pPr algn="l">
+              <a:spcAft>
+                <a:spcPts val="700"/>
+              </a:spcAft>
+            </a:pPr>
+            <a:r>
+              <a:rPr sz="1400" b="0">
+                <a:solidFill>
+                  <a:srgbClr val="333333"/>
+                </a:solidFill>
+                <a:latin typeface="Calibri"/>
+                <a:ea typeface="Calibri"/>
+                <a:cs typeface="Calibri"/>
+              </a:rPr>
+              <a:t>•  Цель: найти наружное кровотечение</a:t>
+            </a:r>
+          </a:p>
+          <a:p>
+            <a:pPr algn="l">
+              <a:spcAft>
+                <a:spcPts val="700"/>
+              </a:spcAft>
+            </a:pPr>
+            <a:r>
+              <a:rPr sz="1400" b="0">
+                <a:solidFill>
+                  <a:srgbClr val="333333"/>
+                </a:solidFill>
+                <a:latin typeface="Calibri"/>
+                <a:ea typeface="Calibri"/>
+                <a:cs typeface="Calibri"/>
+              </a:rPr>
+              <a:t>•  Время: несколько секунд</a:t>
+            </a:r>
+          </a:p>
+          <a:p>
+            <a:pPr algn="l">
+              <a:spcAft>
+                <a:spcPts val="700"/>
+              </a:spcAft>
+            </a:pPr>
+            <a:r>
+              <a:rPr sz="1400" b="0">
+                <a:solidFill>
+                  <a:srgbClr val="333333"/>
+                </a:solidFill>
+                <a:latin typeface="Calibri"/>
+                <a:ea typeface="Calibri"/>
+                <a:cs typeface="Calibri"/>
+              </a:rPr>
+              <a:t>•  Объём: быстро с головы до ног</a:t>
+            </a:r>
+          </a:p>
+          <a:p>
+            <a:pPr algn="l">
+              <a:spcAft>
+                <a:spcPts val="700"/>
+              </a:spcAft>
+            </a:pPr>
+            <a:r>
+              <a:rPr sz="1400" b="0">
+                <a:solidFill>
+                  <a:srgbClr val="333333"/>
+                </a:solidFill>
+                <a:latin typeface="Calibri"/>
+                <a:ea typeface="Calibri"/>
+                <a:cs typeface="Calibri"/>
+              </a:rPr>
+              <a:t>•  Когда: сразу после оценки обстановки</a:t>
+            </a:r>
+          </a:p>
+        </p:txBody>
+      </p:sp>
+      <p:sp>
+        <p:nvSpPr>
+          <p:cNvPr id="13" name="Rounded Rectangle 12"/>
           <p:cNvSpPr/>
           <p:nvPr/>
         </p:nvSpPr>
         <p:spPr>
           <a:xfrm>
             <a:off x="6500000" y="1550000"/>
-            <a:ext cx="5400000" cy="700000"/>
-          </a:xfrm>
-          <a:prstGeom prst="rect">
-            <a:avLst/>
-          </a:prstGeom>
-          <a:solidFill>
-            <a:srgbClr val="DDDDDD"/>
-          </a:solidFill>
-          <a:ln>
-            <a:noFill/>
+            <a:ext cx="5400000" cy="4800000"/>
+          </a:xfrm>
+          <a:prstGeom prst="roundRect">
+            <a:avLst/>
+          </a:prstGeom>
+          <a:solidFill>
+            <a:srgbClr val="FFFFFF"/>
+          </a:solidFill>
+          <a:ln w="15875">
+            <a:solidFill>
+              <a:srgbClr val="999999"/>
+            </a:solidFill>
           </a:ln>
         </p:spPr>
         <p:style>
@@ -3915,7 +3775,50 @@
       </p:sp>
       <p:sp>
         <p:nvSpPr>
-          <p:cNvPr id="14" name="TextBox 13"/>
+          <p:cNvPr id="14" name="Rectangle 13"/>
+          <p:cNvSpPr/>
+          <p:nvPr/>
+        </p:nvSpPr>
+        <p:spPr>
+          <a:xfrm>
+            <a:off x="6500000" y="1550000"/>
+            <a:ext cx="5400000" cy="700000"/>
+          </a:xfrm>
+          <a:prstGeom prst="rect">
+            <a:avLst/>
+          </a:prstGeom>
+          <a:solidFill>
+            <a:srgbClr val="F0F0F0"/>
+          </a:solidFill>
+          <a:ln>
+            <a:noFill/>
+          </a:ln>
+        </p:spPr>
+        <p:style>
+          <a:lnRef idx="1">
+            <a:schemeClr val="accent1"/>
+          </a:lnRef>
+          <a:fillRef idx="3">
+            <a:schemeClr val="accent1"/>
+          </a:fillRef>
+          <a:effectRef idx="2">
+            <a:schemeClr val="accent1"/>
+          </a:effectRef>
+          <a:fontRef idx="minor">
+            <a:schemeClr val="lt1"/>
+          </a:fontRef>
+        </p:style>
+        <p:txBody>
+          <a:bodyPr rtlCol="0" anchor="ctr"/>
+          <a:lstStyle/>
+          <a:p>
+            <a:pPr algn="ctr"/>
+          </a:p>
+        </p:txBody>
+      </p:sp>
+      <p:sp>
+        <p:nvSpPr>
+          <p:cNvPr id="15" name="TextBox 14"/>
           <p:cNvSpPr txBox="1"/>
           <p:nvPr/>
         </p:nvSpPr>
@@ -3937,13 +3840,13 @@
           <a:p>
             <a:pPr algn="ctr"/>
             <a:r>
-              <a:rPr sz="1800" b="1">
+              <a:rPr sz="1600" b="1">
                 <a:solidFill>
                   <a:srgbClr val="333333"/>
                 </a:solidFill>
-                <a:latin typeface="Open Sans"/>
-                <a:ea typeface="Open Sans"/>
-                <a:cs typeface="Open Sans"/>
+                <a:latin typeface="Calibri"/>
+                <a:ea typeface="Calibri"/>
+                <a:cs typeface="Calibri"/>
               </a:rPr>
               <a:t>Подробный осмотр</a:t>
             </a:r>
@@ -3952,7 +3855,7 @@
       </p:sp>
       <p:sp>
         <p:nvSpPr>
-          <p:cNvPr id="15" name="TextBox 14"/>
+          <p:cNvPr id="16" name="TextBox 15"/>
           <p:cNvSpPr txBox="1"/>
           <p:nvPr/>
         </p:nvSpPr>
@@ -3974,17 +3877,17 @@
           <a:p>
             <a:pPr algn="l">
               <a:spcAft>
-                <a:spcPts val="800"/>
+                <a:spcPts val="700"/>
               </a:spcAft>
             </a:pPr>
             <a:r>
-              <a:rPr sz="1500" b="0">
+              <a:rPr sz="1400" b="0">
                 <a:solidFill>
                   <a:srgbClr val="333333"/>
                 </a:solidFill>
-                <a:latin typeface="Open Sans"/>
-                <a:ea typeface="Open Sans"/>
-                <a:cs typeface="Open Sans"/>
+                <a:latin typeface="Calibri"/>
+                <a:ea typeface="Calibri"/>
+                <a:cs typeface="Calibri"/>
               </a:rPr>
               <a:t>•  Цель: выявить травмы и другие угрозы</a:t>
             </a:r>
@@ -3992,17 +3895,17 @@
           <a:p>
             <a:pPr algn="l">
               <a:spcAft>
-                <a:spcPts val="800"/>
+                <a:spcPts val="700"/>
               </a:spcAft>
             </a:pPr>
             <a:r>
-              <a:rPr sz="1500" b="0">
+              <a:rPr sz="1400" b="0">
                 <a:solidFill>
                   <a:srgbClr val="333333"/>
                 </a:solidFill>
-                <a:latin typeface="Open Sans"/>
-                <a:ea typeface="Open Sans"/>
-                <a:cs typeface="Open Sans"/>
+                <a:latin typeface="Calibri"/>
+                <a:ea typeface="Calibri"/>
+                <a:cs typeface="Calibri"/>
               </a:rPr>
               <a:t>•  Время: несколько минут</a:t>
             </a:r>
@@ -4010,17 +3913,17 @@
           <a:p>
             <a:pPr algn="l">
               <a:spcAft>
-                <a:spcPts val="800"/>
+                <a:spcPts val="700"/>
               </a:spcAft>
             </a:pPr>
             <a:r>
-              <a:rPr sz="1500" b="0">
+              <a:rPr sz="1400" b="0">
                 <a:solidFill>
                   <a:srgbClr val="333333"/>
                 </a:solidFill>
-                <a:latin typeface="Open Sans"/>
-                <a:ea typeface="Open Sans"/>
-                <a:cs typeface="Open Sans"/>
+                <a:latin typeface="Calibri"/>
+                <a:ea typeface="Calibri"/>
+                <a:cs typeface="Calibri"/>
               </a:rPr>
               <a:t>•  Объём: голова → шея → грудь → … → руки</a:t>
             </a:r>
@@ -4028,17 +3931,17 @@
           <a:p>
             <a:pPr algn="l">
               <a:spcAft>
-                <a:spcPts val="800"/>
+                <a:spcPts val="700"/>
               </a:spcAft>
             </a:pPr>
             <a:r>
-              <a:rPr sz="1500" b="0">
+              <a:rPr sz="1400" b="0">
                 <a:solidFill>
                   <a:srgbClr val="333333"/>
                 </a:solidFill>
-                <a:latin typeface="Open Sans"/>
-                <a:ea typeface="Open Sans"/>
-                <a:cs typeface="Open Sans"/>
+                <a:latin typeface="Calibri"/>
+                <a:ea typeface="Calibri"/>
+                <a:cs typeface="Calibri"/>
               </a:rPr>
               <a:t>•  Когда: после остановки кровотечения</a:t>
             </a:r>
@@ -4108,57 +4011,20 @@
       </p:sp>
       <p:sp>
         <p:nvSpPr>
-          <p:cNvPr id="3" name="TextBox 2"/>
-          <p:cNvSpPr txBox="1"/>
-          <p:nvPr/>
-        </p:nvSpPr>
-        <p:spPr>
-          <a:xfrm>
-            <a:off x="700000" y="280000"/>
-            <a:ext cx="11000000" cy="550000"/>
-          </a:xfrm>
-          <a:prstGeom prst="rect">
-            <a:avLst/>
-          </a:prstGeom>
-          <a:noFill/>
-        </p:spPr>
-        <p:txBody>
-          <a:bodyPr wrap="square" anchor="t">
-            <a:spAutoFit/>
-          </a:bodyPr>
-          <a:lstStyle/>
-          <a:p>
-            <a:pPr algn="l"/>
-            <a:r>
-              <a:rPr sz="2600" b="1">
-                <a:solidFill>
-                  <a:srgbClr val="333333"/>
-                </a:solidFill>
-                <a:latin typeface="Open Sans"/>
-                <a:ea typeface="Open Sans"/>
-                <a:cs typeface="Open Sans"/>
-              </a:rPr>
-              <a:t>ГЛАВНОЕ ЗАПОМНИТЬ</a:t>
-            </a:r>
-          </a:p>
-        </p:txBody>
-      </p:sp>
-      <p:sp>
-        <p:nvSpPr>
-          <p:cNvPr id="4" name="Rectangle 3"/>
+          <p:cNvPr id="3" name="Rectangle 2"/>
           <p:cNvSpPr/>
           <p:nvPr/>
         </p:nvSpPr>
         <p:spPr>
           <a:xfrm>
-            <a:off x="700000" y="880000"/>
-            <a:ext cx="9000000" cy="25000"/>
-          </a:xfrm>
-          <a:prstGeom prst="rect">
-            <a:avLst/>
-          </a:prstGeom>
-          <a:solidFill>
-            <a:srgbClr val="555555"/>
+            <a:off x="0" y="0"/>
+            <a:ext cx="12191695" cy="1300000"/>
+          </a:xfrm>
+          <a:prstGeom prst="rect">
+            <a:avLst/>
+          </a:prstGeom>
+          <a:solidFill>
+            <a:srgbClr val="F8F8F8"/>
           </a:solidFill>
           <a:ln>
             <a:noFill/>
@@ -4188,14 +4054,14 @@
       </p:sp>
       <p:sp>
         <p:nvSpPr>
-          <p:cNvPr id="5" name="TextBox 4"/>
+          <p:cNvPr id="4" name="TextBox 3"/>
           <p:cNvSpPr txBox="1"/>
           <p:nvPr/>
         </p:nvSpPr>
         <p:spPr>
           <a:xfrm>
-            <a:off x="700000" y="950000"/>
-            <a:ext cx="11000000" cy="350000"/>
+            <a:off x="700000" y="220000"/>
+            <a:ext cx="11200000" cy="550000"/>
           </a:xfrm>
           <a:prstGeom prst="rect">
             <a:avLst/>
@@ -4210,35 +4076,35 @@
           <a:p>
             <a:pPr algn="l"/>
             <a:r>
-              <a:rPr sz="1200" b="0">
-                <a:solidFill>
-                  <a:srgbClr val="666666"/>
-                </a:solidFill>
-                <a:latin typeface="Open Sans"/>
-                <a:ea typeface="Open Sans"/>
-                <a:cs typeface="Open Sans"/>
+              <a:rPr sz="2000" b="1">
+                <a:solidFill>
+                  <a:srgbClr val="333333"/>
+                </a:solidFill>
+                <a:latin typeface="Calibri"/>
+                <a:ea typeface="Calibri"/>
+                <a:cs typeface="Calibri"/>
               </a:rPr>
-              <a:t>Оказание первой помощи при наружных кровотечениях</a:t>
-            </a:r>
-          </a:p>
-        </p:txBody>
-      </p:sp>
-      <p:sp>
-        <p:nvSpPr>
-          <p:cNvPr id="6" name="Rectangle 5"/>
+              <a:t>ГЛАВНОЕ ЗАПОМНИТЬ</a:t>
+            </a:r>
+          </a:p>
+        </p:txBody>
+      </p:sp>
+      <p:sp>
+        <p:nvSpPr>
+          <p:cNvPr id="5" name="Rectangle 4"/>
           <p:cNvSpPr/>
           <p:nvPr/>
         </p:nvSpPr>
         <p:spPr>
           <a:xfrm>
-            <a:off x="0" y="2800000"/>
-            <a:ext cx="420000" cy="420000"/>
-          </a:xfrm>
-          <a:prstGeom prst="rect">
-            <a:avLst/>
-          </a:prstGeom>
-          <a:solidFill>
-            <a:srgbClr val="555555"/>
+            <a:off x="700000" y="820000"/>
+            <a:ext cx="8500000" cy="28000"/>
+          </a:xfrm>
+          <a:prstGeom prst="rect">
+            <a:avLst/>
+          </a:prstGeom>
+          <a:solidFill>
+            <a:srgbClr val="606060"/>
           </a:solidFill>
           <a:ln>
             <a:noFill/>
@@ -4268,14 +4134,14 @@
       </p:sp>
       <p:sp>
         <p:nvSpPr>
-          <p:cNvPr id="7" name="TextBox 6"/>
+          <p:cNvPr id="6" name="TextBox 5"/>
           <p:cNvSpPr txBox="1"/>
           <p:nvPr/>
         </p:nvSpPr>
         <p:spPr>
           <a:xfrm>
-            <a:off x="0" y="2800000"/>
-            <a:ext cx="420000" cy="420000"/>
+            <a:off x="700000" y="880000"/>
+            <a:ext cx="11000000" cy="320000"/>
           </a:xfrm>
           <a:prstGeom prst="rect">
             <a:avLst/>
@@ -4283,47 +4149,45 @@
           <a:noFill/>
         </p:spPr>
         <p:txBody>
-          <a:bodyPr wrap="square" anchor="ctr">
+          <a:bodyPr wrap="square" anchor="t">
             <a:spAutoFit/>
           </a:bodyPr>
           <a:lstStyle/>
           <a:p>
-            <a:pPr algn="ctr"/>
-            <a:r>
-              <a:rPr sz="1400" b="1">
-                <a:solidFill>
-                  <a:srgbClr val="FFFFFF"/>
-                </a:solidFill>
-                <a:latin typeface="Open Sans"/>
-                <a:ea typeface="Open Sans"/>
-                <a:cs typeface="Open Sans"/>
+            <a:pPr algn="l"/>
+            <a:r>
+              <a:rPr sz="1100" b="0">
+                <a:solidFill>
+                  <a:srgbClr val="777777"/>
+                </a:solidFill>
+                <a:latin typeface="Calibri"/>
+                <a:ea typeface="Calibri"/>
+                <a:cs typeface="Calibri"/>
               </a:rPr>
-              <a:t>11</a:t>
-            </a:r>
-          </a:p>
-        </p:txBody>
-      </p:sp>
-      <p:sp>
-        <p:nvSpPr>
-          <p:cNvPr id="8" name="Rectangle 7"/>
+              <a:t>Оказание первой помощи при наружных кровотечениях</a:t>
+            </a:r>
+          </a:p>
+        </p:txBody>
+      </p:sp>
+      <p:sp>
+        <p:nvSpPr>
+          <p:cNvPr id="7" name="Rectangle 6"/>
           <p:cNvSpPr/>
           <p:nvPr/>
         </p:nvSpPr>
         <p:spPr>
           <a:xfrm>
-            <a:off x="700000" y="1600000"/>
-            <a:ext cx="11000000" cy="1000000"/>
-          </a:xfrm>
-          <a:prstGeom prst="rect">
-            <a:avLst/>
-          </a:prstGeom>
-          <a:solidFill>
-            <a:srgbClr val="FFFFFF"/>
-          </a:solidFill>
-          <a:ln w="12700">
-            <a:solidFill>
-              <a:srgbClr val="999999"/>
-            </a:solidFill>
+            <a:off x="0" y="2700000"/>
+            <a:ext cx="400000" cy="400000"/>
+          </a:xfrm>
+          <a:prstGeom prst="rect">
+            <a:avLst/>
+          </a:prstGeom>
+          <a:solidFill>
+            <a:srgbClr val="606060"/>
+          </a:solidFill>
+          <a:ln>
+            <a:noFill/>
           </a:ln>
         </p:spPr>
         <p:style>
@@ -4350,20 +4214,57 @@
       </p:sp>
       <p:sp>
         <p:nvSpPr>
-          <p:cNvPr id="9" name="Rectangle 8"/>
+          <p:cNvPr id="8" name="TextBox 7"/>
+          <p:cNvSpPr txBox="1"/>
+          <p:nvPr/>
+        </p:nvSpPr>
+        <p:spPr>
+          <a:xfrm>
+            <a:off x="0" y="2700000"/>
+            <a:ext cx="400000" cy="400000"/>
+          </a:xfrm>
+          <a:prstGeom prst="rect">
+            <a:avLst/>
+          </a:prstGeom>
+          <a:noFill/>
+        </p:spPr>
+        <p:txBody>
+          <a:bodyPr wrap="square" anchor="ctr">
+            <a:spAutoFit/>
+          </a:bodyPr>
+          <a:lstStyle/>
+          <a:p>
+            <a:pPr algn="ctr"/>
+            <a:r>
+              <a:rPr sz="1300" b="1">
+                <a:solidFill>
+                  <a:srgbClr val="FFFFFF"/>
+                </a:solidFill>
+                <a:latin typeface="Calibri"/>
+                <a:ea typeface="Calibri"/>
+                <a:cs typeface="Calibri"/>
+              </a:rPr>
+              <a:t>11</a:t>
+            </a:r>
+          </a:p>
+        </p:txBody>
+      </p:sp>
+      <p:sp>
+        <p:nvSpPr>
+          <p:cNvPr id="9" name="Rounded Rectangle 8"/>
           <p:cNvSpPr/>
           <p:nvPr/>
         </p:nvSpPr>
         <p:spPr>
           <a:xfrm>
-            <a:off x="700000" y="1600000"/>
-            <a:ext cx="90000" cy="1000000"/>
-          </a:xfrm>
-          <a:prstGeom prst="rect">
-            <a:avLst/>
-          </a:prstGeom>
-          <a:solidFill>
-            <a:srgbClr val="ED1C24"/>
+            <a:off x="700000" y="1550000"/>
+            <a:ext cx="11000000" cy="1000000"/>
+          </a:xfrm>
+          <a:prstGeom prst="roundRect">
+            <a:avLst/>
+          </a:prstGeom>
+          <a:solidFill>
+            <a:srgbClr val="F0F0F0"/>
           </a:solidFill>
           <a:ln>
             <a:noFill/>
@@ -4393,62 +4294,23 @@
       </p:sp>
       <p:sp>
         <p:nvSpPr>
-          <p:cNvPr id="10" name="TextBox 9"/>
-          <p:cNvSpPr txBox="1"/>
-          <p:nvPr/>
-        </p:nvSpPr>
-        <p:spPr>
-          <a:xfrm>
-            <a:off x="1000000" y="1800000"/>
-            <a:ext cx="10400000" cy="600000"/>
-          </a:xfrm>
-          <a:prstGeom prst="rect">
-            <a:avLst/>
-          </a:prstGeom>
-          <a:noFill/>
-        </p:spPr>
-        <p:txBody>
-          <a:bodyPr wrap="square" anchor="ctr">
-            <a:spAutoFit/>
-          </a:bodyPr>
-          <a:lstStyle/>
-          <a:p>
-            <a:pPr algn="l"/>
-            <a:r>
-              <a:rPr sz="1600" b="0">
-                <a:solidFill>
-                  <a:srgbClr val="333333"/>
-                </a:solidFill>
-                <a:latin typeface="Open Sans"/>
-                <a:ea typeface="Open Sans"/>
-                <a:cs typeface="Open Sans"/>
-              </a:rPr>
-              <a:t>Кровотечение — выход крови из сосудов с риском кровопотери.</a:t>
-            </a:r>
-          </a:p>
-        </p:txBody>
-      </p:sp>
-      <p:sp>
-        <p:nvSpPr>
-          <p:cNvPr id="11" name="Rectangle 10"/>
+          <p:cNvPr id="10" name="Oval 9"/>
           <p:cNvSpPr/>
           <p:nvPr/>
         </p:nvSpPr>
         <p:spPr>
           <a:xfrm>
-            <a:off x="700000" y="2750000"/>
-            <a:ext cx="11000000" cy="1000000"/>
-          </a:xfrm>
-          <a:prstGeom prst="rect">
-            <a:avLst/>
-          </a:prstGeom>
-          <a:solidFill>
-            <a:srgbClr val="FFFFFF"/>
-          </a:solidFill>
-          <a:ln w="12700">
-            <a:solidFill>
-              <a:srgbClr val="999999"/>
-            </a:solidFill>
+            <a:off x="900000" y="1800000"/>
+            <a:ext cx="500000" cy="500000"/>
+          </a:xfrm>
+          <a:prstGeom prst="ellipse">
+            <a:avLst/>
+          </a:prstGeom>
+          <a:solidFill>
+            <a:srgbClr val="8DDBCD"/>
+          </a:solidFill>
+          <a:ln>
+            <a:noFill/>
           </a:ln>
         </p:spPr>
         <p:style>
@@ -4475,20 +4337,57 @@
       </p:sp>
       <p:sp>
         <p:nvSpPr>
-          <p:cNvPr id="12" name="Rectangle 11"/>
+          <p:cNvPr id="11" name="TextBox 10"/>
+          <p:cNvSpPr txBox="1"/>
+          <p:nvPr/>
+        </p:nvSpPr>
+        <p:spPr>
+          <a:xfrm>
+            <a:off x="1600000" y="1750000"/>
+            <a:ext cx="9800000" cy="600000"/>
+          </a:xfrm>
+          <a:prstGeom prst="rect">
+            <a:avLst/>
+          </a:prstGeom>
+          <a:noFill/>
+        </p:spPr>
+        <p:txBody>
+          <a:bodyPr wrap="square" anchor="ctr">
+            <a:spAutoFit/>
+          </a:bodyPr>
+          <a:lstStyle/>
+          <a:p>
+            <a:pPr algn="l"/>
+            <a:r>
+              <a:rPr sz="1400" b="0">
+                <a:solidFill>
+                  <a:srgbClr val="333333"/>
+                </a:solidFill>
+                <a:latin typeface="Calibri"/>
+                <a:ea typeface="Calibri"/>
+                <a:cs typeface="Calibri"/>
+              </a:rPr>
+              <a:t>Кровотечение — выход крови из сосудов с риском кровопотери.</a:t>
+            </a:r>
+          </a:p>
+        </p:txBody>
+      </p:sp>
+      <p:sp>
+        <p:nvSpPr>
+          <p:cNvPr id="12" name="Rounded Rectangle 11"/>
           <p:cNvSpPr/>
           <p:nvPr/>
         </p:nvSpPr>
         <p:spPr>
           <a:xfrm>
-            <a:off x="700000" y="2750000"/>
-            <a:ext cx="90000" cy="1000000"/>
-          </a:xfrm>
-          <a:prstGeom prst="rect">
-            <a:avLst/>
-          </a:prstGeom>
-          <a:solidFill>
-            <a:srgbClr val="ED1C24"/>
+            <a:off x="700000" y="2700000"/>
+            <a:ext cx="11000000" cy="1000000"/>
+          </a:xfrm>
+          <a:prstGeom prst="roundRect">
+            <a:avLst/>
+          </a:prstGeom>
+          <a:solidFill>
+            <a:srgbClr val="F0F0F0"/>
           </a:solidFill>
           <a:ln>
             <a:noFill/>
@@ -4518,62 +4417,23 @@
       </p:sp>
       <p:sp>
         <p:nvSpPr>
-          <p:cNvPr id="13" name="TextBox 12"/>
-          <p:cNvSpPr txBox="1"/>
-          <p:nvPr/>
-        </p:nvSpPr>
-        <p:spPr>
-          <a:xfrm>
-            <a:off x="1000000" y="2950000"/>
-            <a:ext cx="10400000" cy="600000"/>
-          </a:xfrm>
-          <a:prstGeom prst="rect">
-            <a:avLst/>
-          </a:prstGeom>
-          <a:noFill/>
-        </p:spPr>
-        <p:txBody>
-          <a:bodyPr wrap="square" anchor="ctr">
-            <a:spAutoFit/>
-          </a:bodyPr>
-          <a:lstStyle/>
-          <a:p>
-            <a:pPr algn="l"/>
-            <a:r>
-              <a:rPr sz="1600" b="0">
-                <a:solidFill>
-                  <a:srgbClr val="333333"/>
-                </a:solidFill>
-                <a:latin typeface="Open Sans"/>
-                <a:ea typeface="Open Sans"/>
-                <a:cs typeface="Open Sans"/>
-              </a:rPr>
-              <a:t>Обзорный осмотр — быстрый поиск интенсивного наружного кровотечения.</a:t>
-            </a:r>
-          </a:p>
-        </p:txBody>
-      </p:sp>
-      <p:sp>
-        <p:nvSpPr>
-          <p:cNvPr id="14" name="Rectangle 13"/>
+          <p:cNvPr id="13" name="Oval 12"/>
           <p:cNvSpPr/>
           <p:nvPr/>
         </p:nvSpPr>
         <p:spPr>
           <a:xfrm>
-            <a:off x="700000" y="3900000"/>
-            <a:ext cx="11000000" cy="1000000"/>
-          </a:xfrm>
-          <a:prstGeom prst="rect">
-            <a:avLst/>
-          </a:prstGeom>
-          <a:solidFill>
-            <a:srgbClr val="FFFFFF"/>
-          </a:solidFill>
-          <a:ln w="12700">
-            <a:solidFill>
-              <a:srgbClr val="999999"/>
-            </a:solidFill>
+            <a:off x="900000" y="2950000"/>
+            <a:ext cx="500000" cy="500000"/>
+          </a:xfrm>
+          <a:prstGeom prst="ellipse">
+            <a:avLst/>
+          </a:prstGeom>
+          <a:solidFill>
+            <a:srgbClr val="8DDBCD"/>
+          </a:solidFill>
+          <a:ln>
+            <a:noFill/>
           </a:ln>
         </p:spPr>
         <p:style>
@@ -4600,20 +4460,57 @@
       </p:sp>
       <p:sp>
         <p:nvSpPr>
-          <p:cNvPr id="15" name="Rectangle 14"/>
+          <p:cNvPr id="14" name="TextBox 13"/>
+          <p:cNvSpPr txBox="1"/>
+          <p:nvPr/>
+        </p:nvSpPr>
+        <p:spPr>
+          <a:xfrm>
+            <a:off x="1600000" y="2900000"/>
+            <a:ext cx="9800000" cy="600000"/>
+          </a:xfrm>
+          <a:prstGeom prst="rect">
+            <a:avLst/>
+          </a:prstGeom>
+          <a:noFill/>
+        </p:spPr>
+        <p:txBody>
+          <a:bodyPr wrap="square" anchor="ctr">
+            <a:spAutoFit/>
+          </a:bodyPr>
+          <a:lstStyle/>
+          <a:p>
+            <a:pPr algn="l"/>
+            <a:r>
+              <a:rPr sz="1400" b="0">
+                <a:solidFill>
+                  <a:srgbClr val="333333"/>
+                </a:solidFill>
+                <a:latin typeface="Calibri"/>
+                <a:ea typeface="Calibri"/>
+                <a:cs typeface="Calibri"/>
+              </a:rPr>
+              <a:t>Обзорный осмотр — быстрый поиск интенсивного наружного кровотечения.</a:t>
+            </a:r>
+          </a:p>
+        </p:txBody>
+      </p:sp>
+      <p:sp>
+        <p:nvSpPr>
+          <p:cNvPr id="15" name="Rounded Rectangle 14"/>
           <p:cNvSpPr/>
           <p:nvPr/>
         </p:nvSpPr>
         <p:spPr>
           <a:xfrm>
-            <a:off x="700000" y="3900000"/>
-            <a:ext cx="90000" cy="1000000"/>
-          </a:xfrm>
-          <a:prstGeom prst="rect">
-            <a:avLst/>
-          </a:prstGeom>
-          <a:solidFill>
-            <a:srgbClr val="ED1C24"/>
+            <a:off x="700000" y="3850000"/>
+            <a:ext cx="11000000" cy="1000000"/>
+          </a:xfrm>
+          <a:prstGeom prst="roundRect">
+            <a:avLst/>
+          </a:prstGeom>
+          <a:solidFill>
+            <a:srgbClr val="F0F0F0"/>
           </a:solidFill>
           <a:ln>
             <a:noFill/>
@@ -4643,62 +4540,23 @@
       </p:sp>
       <p:sp>
         <p:nvSpPr>
-          <p:cNvPr id="16" name="TextBox 15"/>
-          <p:cNvSpPr txBox="1"/>
-          <p:nvPr/>
-        </p:nvSpPr>
-        <p:spPr>
-          <a:xfrm>
-            <a:off x="1000000" y="4100000"/>
-            <a:ext cx="10400000" cy="600000"/>
-          </a:xfrm>
-          <a:prstGeom prst="rect">
-            <a:avLst/>
-          </a:prstGeom>
-          <a:noFill/>
-        </p:spPr>
-        <p:txBody>
-          <a:bodyPr wrap="square" anchor="ctr">
-            <a:spAutoFit/>
-          </a:bodyPr>
-          <a:lstStyle/>
-          <a:p>
-            <a:pPr algn="l"/>
-            <a:r>
-              <a:rPr sz="1600" b="0">
-                <a:solidFill>
-                  <a:srgbClr val="333333"/>
-                </a:solidFill>
-                <a:latin typeface="Open Sans"/>
-                <a:ea typeface="Open Sans"/>
-                <a:cs typeface="Open Sans"/>
-              </a:rPr>
-              <a:t>Осмотр — за несколько секунд, с головы до ног.</a:t>
-            </a:r>
-          </a:p>
-        </p:txBody>
-      </p:sp>
-      <p:sp>
-        <p:nvSpPr>
-          <p:cNvPr id="17" name="Rectangle 16"/>
+          <p:cNvPr id="16" name="Oval 15"/>
           <p:cNvSpPr/>
           <p:nvPr/>
         </p:nvSpPr>
         <p:spPr>
           <a:xfrm>
-            <a:off x="700000" y="5050000"/>
-            <a:ext cx="11000000" cy="1000000"/>
-          </a:xfrm>
-          <a:prstGeom prst="rect">
-            <a:avLst/>
-          </a:prstGeom>
-          <a:solidFill>
-            <a:srgbClr val="FFFFFF"/>
-          </a:solidFill>
-          <a:ln w="12700">
-            <a:solidFill>
-              <a:srgbClr val="999999"/>
-            </a:solidFill>
+            <a:off x="900000" y="4100000"/>
+            <a:ext cx="500000" cy="500000"/>
+          </a:xfrm>
+          <a:prstGeom prst="ellipse">
+            <a:avLst/>
+          </a:prstGeom>
+          <a:solidFill>
+            <a:srgbClr val="8DDBCD"/>
+          </a:solidFill>
+          <a:ln>
+            <a:noFill/>
           </a:ln>
         </p:spPr>
         <p:style>
@@ -4725,20 +4583,57 @@
       </p:sp>
       <p:sp>
         <p:nvSpPr>
-          <p:cNvPr id="18" name="Rectangle 17"/>
+          <p:cNvPr id="17" name="TextBox 16"/>
+          <p:cNvSpPr txBox="1"/>
+          <p:nvPr/>
+        </p:nvSpPr>
+        <p:spPr>
+          <a:xfrm>
+            <a:off x="1600000" y="4050000"/>
+            <a:ext cx="9800000" cy="600000"/>
+          </a:xfrm>
+          <a:prstGeom prst="rect">
+            <a:avLst/>
+          </a:prstGeom>
+          <a:noFill/>
+        </p:spPr>
+        <p:txBody>
+          <a:bodyPr wrap="square" anchor="ctr">
+            <a:spAutoFit/>
+          </a:bodyPr>
+          <a:lstStyle/>
+          <a:p>
+            <a:pPr algn="l"/>
+            <a:r>
+              <a:rPr sz="1400" b="0">
+                <a:solidFill>
+                  <a:srgbClr val="333333"/>
+                </a:solidFill>
+                <a:latin typeface="Calibri"/>
+                <a:ea typeface="Calibri"/>
+                <a:cs typeface="Calibri"/>
+              </a:rPr>
+              <a:t>Осмотр — за несколько секунд, с головы до ног.</a:t>
+            </a:r>
+          </a:p>
+        </p:txBody>
+      </p:sp>
+      <p:sp>
+        <p:nvSpPr>
+          <p:cNvPr id="18" name="Rounded Rectangle 17"/>
           <p:cNvSpPr/>
           <p:nvPr/>
         </p:nvSpPr>
         <p:spPr>
           <a:xfrm>
-            <a:off x="700000" y="5050000"/>
-            <a:ext cx="90000" cy="1000000"/>
-          </a:xfrm>
-          <a:prstGeom prst="rect">
-            <a:avLst/>
-          </a:prstGeom>
-          <a:solidFill>
-            <a:srgbClr val="ED1C24"/>
+            <a:off x="700000" y="5000000"/>
+            <a:ext cx="11000000" cy="1000000"/>
+          </a:xfrm>
+          <a:prstGeom prst="roundRect">
+            <a:avLst/>
+          </a:prstGeom>
+          <a:solidFill>
+            <a:srgbClr val="F0F0F0"/>
           </a:solidFill>
           <a:ln>
             <a:noFill/>
@@ -4768,14 +4663,57 @@
       </p:sp>
       <p:sp>
         <p:nvSpPr>
-          <p:cNvPr id="19" name="TextBox 18"/>
+          <p:cNvPr id="19" name="Oval 18"/>
+          <p:cNvSpPr/>
+          <p:nvPr/>
+        </p:nvSpPr>
+        <p:spPr>
+          <a:xfrm>
+            <a:off x="900000" y="5250000"/>
+            <a:ext cx="500000" cy="500000"/>
+          </a:xfrm>
+          <a:prstGeom prst="ellipse">
+            <a:avLst/>
+          </a:prstGeom>
+          <a:solidFill>
+            <a:srgbClr val="8DDBCD"/>
+          </a:solidFill>
+          <a:ln>
+            <a:noFill/>
+          </a:ln>
+        </p:spPr>
+        <p:style>
+          <a:lnRef idx="1">
+            <a:schemeClr val="accent1"/>
+          </a:lnRef>
+          <a:fillRef idx="3">
+            <a:schemeClr val="accent1"/>
+          </a:fillRef>
+          <a:effectRef idx="2">
+            <a:schemeClr val="accent1"/>
+          </a:effectRef>
+          <a:fontRef idx="minor">
+            <a:schemeClr val="lt1"/>
+          </a:fontRef>
+        </p:style>
+        <p:txBody>
+          <a:bodyPr rtlCol="0" anchor="ctr"/>
+          <a:lstStyle/>
+          <a:p>
+            <a:pPr algn="ctr"/>
+          </a:p>
+        </p:txBody>
+      </p:sp>
+      <p:sp>
+        <p:nvSpPr>
+          <p:cNvPr id="20" name="TextBox 19"/>
           <p:cNvSpPr txBox="1"/>
           <p:nvPr/>
         </p:nvSpPr>
         <p:spPr>
           <a:xfrm>
-            <a:off x="1000000" y="5250000"/>
-            <a:ext cx="10400000" cy="600000"/>
+            <a:off x="1600000" y="5200000"/>
+            <a:ext cx="9800000" cy="600000"/>
           </a:xfrm>
           <a:prstGeom prst="rect">
             <a:avLst/>
@@ -4790,13 +4728,13 @@
           <a:p>
             <a:pPr algn="l"/>
             <a:r>
-              <a:rPr sz="1600" b="0">
+              <a:rPr sz="1400" b="0">
                 <a:solidFill>
                   <a:srgbClr val="333333"/>
                 </a:solidFill>
-                <a:latin typeface="Open Sans"/>
-                <a:ea typeface="Open Sans"/>
-                <a:cs typeface="Open Sans"/>
+                <a:latin typeface="Calibri"/>
+                <a:ea typeface="Calibri"/>
+                <a:cs typeface="Calibri"/>
               </a:rPr>
               <a:t>Сначала останавливаем угрожающее жизни кровотечение, затем — подробный осмотр.</a:t>
             </a:r>
@@ -4830,13 +4768,13 @@
         <p:spPr>
           <a:xfrm>
             <a:off x="0" y="0"/>
-            <a:ext cx="3200000" cy="6858000"/>
-          </a:xfrm>
-          <a:prstGeom prst="rect">
-            <a:avLst/>
-          </a:prstGeom>
-          <a:solidFill>
-            <a:srgbClr val="DDDDDD"/>
+            <a:ext cx="3600000" cy="6858000"/>
+          </a:xfrm>
+          <a:prstGeom prst="rect">
+            <a:avLst/>
+          </a:prstGeom>
+          <a:solidFill>
+            <a:srgbClr val="8A8A8A"/>
           </a:solidFill>
           <a:ln>
             <a:noFill/>
@@ -4872,8 +4810,8 @@
         </p:nvSpPr>
         <p:spPr>
           <a:xfrm>
-            <a:off x="3200000" y="0"/>
-            <a:ext cx="9000000" cy="6858000"/>
+            <a:off x="3600000" y="0"/>
+            <a:ext cx="8600000" cy="6858000"/>
           </a:xfrm>
           <a:prstGeom prst="rect">
             <a:avLst/>
@@ -4915,8 +4853,8 @@
         </p:nvSpPr>
         <p:spPr>
           <a:xfrm>
-            <a:off x="3800000" y="3000000"/>
-            <a:ext cx="7500000" cy="1000000"/>
+            <a:off x="4200000" y="3000000"/>
+            <a:ext cx="7200000" cy="1000000"/>
           </a:xfrm>
           <a:prstGeom prst="rect">
             <a:avLst/>
@@ -4931,59 +4869,16 @@
           <a:p>
             <a:pPr algn="l"/>
             <a:r>
-              <a:rPr sz="3200" b="1">
+              <a:rPr sz="3000" b="1">
                 <a:solidFill>
                   <a:srgbClr val="333333"/>
                 </a:solidFill>
-                <a:latin typeface="Open Sans"/>
-                <a:ea typeface="Open Sans"/>
-                <a:cs typeface="Open Sans"/>
+                <a:latin typeface="Calibri"/>
+                <a:ea typeface="Calibri"/>
+                <a:cs typeface="Calibri"/>
               </a:rPr>
               <a:t>БЛАГОДАРИМ ЗА ВНИМАНИЕ</a:t>
             </a:r>
-          </a:p>
-        </p:txBody>
-      </p:sp>
-      <p:sp>
-        <p:nvSpPr>
-          <p:cNvPr id="5" name="Rectangle 4"/>
-          <p:cNvSpPr/>
-          <p:nvPr/>
-        </p:nvSpPr>
-        <p:spPr>
-          <a:xfrm>
-            <a:off x="3800000" y="4100000"/>
-            <a:ext cx="4500000" cy="30000"/>
-          </a:xfrm>
-          <a:prstGeom prst="rect">
-            <a:avLst/>
-          </a:prstGeom>
-          <a:solidFill>
-            <a:srgbClr val="333333"/>
-          </a:solidFill>
-          <a:ln>
-            <a:noFill/>
-          </a:ln>
-        </p:spPr>
-        <p:style>
-          <a:lnRef idx="1">
-            <a:schemeClr val="accent1"/>
-          </a:lnRef>
-          <a:fillRef idx="3">
-            <a:schemeClr val="accent1"/>
-          </a:fillRef>
-          <a:effectRef idx="2">
-            <a:schemeClr val="accent1"/>
-          </a:effectRef>
-          <a:fontRef idx="minor">
-            <a:schemeClr val="lt1"/>
-          </a:fontRef>
-        </p:style>
-        <p:txBody>
-          <a:bodyPr rtlCol="0" anchor="ctr"/>
-          <a:lstStyle/>
-          <a:p>
-            <a:pPr algn="ctr"/>
           </a:p>
         </p:txBody>
       </p:sp>
@@ -5050,57 +4945,20 @@
       </p:sp>
       <p:sp>
         <p:nvSpPr>
-          <p:cNvPr id="3" name="TextBox 2"/>
-          <p:cNvSpPr txBox="1"/>
-          <p:nvPr/>
-        </p:nvSpPr>
-        <p:spPr>
-          <a:xfrm>
-            <a:off x="700000" y="280000"/>
-            <a:ext cx="11000000" cy="550000"/>
-          </a:xfrm>
-          <a:prstGeom prst="rect">
-            <a:avLst/>
-          </a:prstGeom>
-          <a:noFill/>
-        </p:spPr>
-        <p:txBody>
-          <a:bodyPr wrap="square" anchor="t">
-            <a:spAutoFit/>
-          </a:bodyPr>
-          <a:lstStyle/>
-          <a:p>
-            <a:pPr algn="l"/>
-            <a:r>
-              <a:rPr sz="2600" b="1">
-                <a:solidFill>
-                  <a:srgbClr val="333333"/>
-                </a:solidFill>
-                <a:latin typeface="Open Sans"/>
-                <a:ea typeface="Open Sans"/>
-                <a:cs typeface="Open Sans"/>
-              </a:rPr>
-              <a:t>СОДЕРЖАНИЕ</a:t>
-            </a:r>
-          </a:p>
-        </p:txBody>
-      </p:sp>
-      <p:sp>
-        <p:nvSpPr>
-          <p:cNvPr id="4" name="Rectangle 3"/>
+          <p:cNvPr id="3" name="Rectangle 2"/>
           <p:cNvSpPr/>
           <p:nvPr/>
         </p:nvSpPr>
         <p:spPr>
           <a:xfrm>
-            <a:off x="700000" y="880000"/>
-            <a:ext cx="9000000" cy="25000"/>
-          </a:xfrm>
-          <a:prstGeom prst="rect">
-            <a:avLst/>
-          </a:prstGeom>
-          <a:solidFill>
-            <a:srgbClr val="555555"/>
+            <a:off x="0" y="0"/>
+            <a:ext cx="12191695" cy="1300000"/>
+          </a:xfrm>
+          <a:prstGeom prst="rect">
+            <a:avLst/>
+          </a:prstGeom>
+          <a:solidFill>
+            <a:srgbClr val="F8F8F8"/>
           </a:solidFill>
           <a:ln>
             <a:noFill/>
@@ -5130,14 +4988,14 @@
       </p:sp>
       <p:sp>
         <p:nvSpPr>
-          <p:cNvPr id="5" name="TextBox 4"/>
+          <p:cNvPr id="4" name="TextBox 3"/>
           <p:cNvSpPr txBox="1"/>
           <p:nvPr/>
         </p:nvSpPr>
         <p:spPr>
           <a:xfrm>
-            <a:off x="700000" y="950000"/>
-            <a:ext cx="11000000" cy="350000"/>
+            <a:off x="700000" y="220000"/>
+            <a:ext cx="11200000" cy="550000"/>
           </a:xfrm>
           <a:prstGeom prst="rect">
             <a:avLst/>
@@ -5152,35 +5010,35 @@
           <a:p>
             <a:pPr algn="l"/>
             <a:r>
-              <a:rPr sz="1200" b="0">
-                <a:solidFill>
-                  <a:srgbClr val="666666"/>
-                </a:solidFill>
-                <a:latin typeface="Open Sans"/>
-                <a:ea typeface="Open Sans"/>
-                <a:cs typeface="Open Sans"/>
+              <a:rPr sz="2000" b="1">
+                <a:solidFill>
+                  <a:srgbClr val="333333"/>
+                </a:solidFill>
+                <a:latin typeface="Calibri"/>
+                <a:ea typeface="Calibri"/>
+                <a:cs typeface="Calibri"/>
               </a:rPr>
-              <a:t>Оказание первой помощи при наружных кровотечениях</a:t>
-            </a:r>
-          </a:p>
-        </p:txBody>
-      </p:sp>
-      <p:sp>
-        <p:nvSpPr>
-          <p:cNvPr id="6" name="Rectangle 5"/>
+              <a:t>СОДЕРЖАНИЕ</a:t>
+            </a:r>
+          </a:p>
+        </p:txBody>
+      </p:sp>
+      <p:sp>
+        <p:nvSpPr>
+          <p:cNvPr id="5" name="Rectangle 4"/>
           <p:cNvSpPr/>
           <p:nvPr/>
         </p:nvSpPr>
         <p:spPr>
           <a:xfrm>
-            <a:off x="0" y="2800000"/>
-            <a:ext cx="420000" cy="420000"/>
-          </a:xfrm>
-          <a:prstGeom prst="rect">
-            <a:avLst/>
-          </a:prstGeom>
-          <a:solidFill>
-            <a:srgbClr val="555555"/>
+            <a:off x="700000" y="820000"/>
+            <a:ext cx="8500000" cy="28000"/>
+          </a:xfrm>
+          <a:prstGeom prst="rect">
+            <a:avLst/>
+          </a:prstGeom>
+          <a:solidFill>
+            <a:srgbClr val="606060"/>
           </a:solidFill>
           <a:ln>
             <a:noFill/>
@@ -5210,14 +5068,14 @@
       </p:sp>
       <p:sp>
         <p:nvSpPr>
-          <p:cNvPr id="7" name="TextBox 6"/>
+          <p:cNvPr id="6" name="TextBox 5"/>
           <p:cNvSpPr txBox="1"/>
           <p:nvPr/>
         </p:nvSpPr>
         <p:spPr>
           <a:xfrm>
-            <a:off x="0" y="2800000"/>
-            <a:ext cx="420000" cy="420000"/>
+            <a:off x="700000" y="880000"/>
+            <a:ext cx="11000000" cy="320000"/>
           </a:xfrm>
           <a:prstGeom prst="rect">
             <a:avLst/>
@@ -5225,42 +5083,42 @@
           <a:noFill/>
         </p:spPr>
         <p:txBody>
-          <a:bodyPr wrap="square" anchor="ctr">
+          <a:bodyPr wrap="square" anchor="t">
             <a:spAutoFit/>
           </a:bodyPr>
           <a:lstStyle/>
           <a:p>
-            <a:pPr algn="ctr"/>
-            <a:r>
-              <a:rPr sz="1400" b="1">
-                <a:solidFill>
-                  <a:srgbClr val="FFFFFF"/>
-                </a:solidFill>
-                <a:latin typeface="Open Sans"/>
-                <a:ea typeface="Open Sans"/>
-                <a:cs typeface="Open Sans"/>
+            <a:pPr algn="l"/>
+            <a:r>
+              <a:rPr sz="1100" b="0">
+                <a:solidFill>
+                  <a:srgbClr val="777777"/>
+                </a:solidFill>
+                <a:latin typeface="Calibri"/>
+                <a:ea typeface="Calibri"/>
+                <a:cs typeface="Calibri"/>
               </a:rPr>
-              <a:t>2</a:t>
-            </a:r>
-          </a:p>
-        </p:txBody>
-      </p:sp>
-      <p:sp>
-        <p:nvSpPr>
-          <p:cNvPr id="8" name="Oval 7"/>
+              <a:t>Оказание первой помощи при наружных кровотечениях</a:t>
+            </a:r>
+          </a:p>
+        </p:txBody>
+      </p:sp>
+      <p:sp>
+        <p:nvSpPr>
+          <p:cNvPr id="7" name="Rectangle 6"/>
           <p:cNvSpPr/>
           <p:nvPr/>
         </p:nvSpPr>
         <p:spPr>
           <a:xfrm>
-            <a:off x="700000" y="1600000"/>
-            <a:ext cx="550000" cy="550000"/>
-          </a:xfrm>
-          <a:prstGeom prst="ellipse">
-            <a:avLst/>
-          </a:prstGeom>
-          <a:solidFill>
-            <a:srgbClr val="555555"/>
+            <a:off x="0" y="2700000"/>
+            <a:ext cx="400000" cy="400000"/>
+          </a:xfrm>
+          <a:prstGeom prst="rect">
+            <a:avLst/>
+          </a:prstGeom>
+          <a:solidFill>
+            <a:srgbClr val="606060"/>
           </a:solidFill>
           <a:ln>
             <a:noFill/>
@@ -5290,14 +5148,14 @@
       </p:sp>
       <p:sp>
         <p:nvSpPr>
-          <p:cNvPr id="9" name="TextBox 8"/>
+          <p:cNvPr id="8" name="TextBox 7"/>
           <p:cNvSpPr txBox="1"/>
           <p:nvPr/>
         </p:nvSpPr>
         <p:spPr>
           <a:xfrm>
-            <a:off x="700000" y="1600000"/>
-            <a:ext cx="550000" cy="550000"/>
+            <a:off x="0" y="2700000"/>
+            <a:ext cx="400000" cy="400000"/>
           </a:xfrm>
           <a:prstGeom prst="rect">
             <a:avLst/>
@@ -5312,75 +5170,40 @@
           <a:p>
             <a:pPr algn="ctr"/>
             <a:r>
-              <a:rPr sz="1600" b="1">
+              <a:rPr sz="1300" b="1">
                 <a:solidFill>
                   <a:srgbClr val="FFFFFF"/>
                 </a:solidFill>
-                <a:latin typeface="Open Sans"/>
-                <a:ea typeface="Open Sans"/>
-                <a:cs typeface="Open Sans"/>
+                <a:latin typeface="Calibri"/>
+                <a:ea typeface="Calibri"/>
+                <a:cs typeface="Calibri"/>
               </a:rPr>
-              <a:t>1</a:t>
-            </a:r>
-          </a:p>
-        </p:txBody>
-      </p:sp>
-      <p:sp>
-        <p:nvSpPr>
-          <p:cNvPr id="10" name="TextBox 9"/>
-          <p:cNvSpPr txBox="1"/>
-          <p:nvPr/>
-        </p:nvSpPr>
-        <p:spPr>
-          <a:xfrm>
-            <a:off x="1450000" y="1600000"/>
-            <a:ext cx="10000000" cy="550000"/>
-          </a:xfrm>
-          <a:prstGeom prst="rect">
-            <a:avLst/>
-          </a:prstGeom>
-          <a:noFill/>
-        </p:spPr>
-        <p:txBody>
-          <a:bodyPr wrap="square" anchor="ctr">
-            <a:spAutoFit/>
-          </a:bodyPr>
-          <a:lstStyle/>
-          <a:p>
-            <a:pPr algn="l"/>
-            <a:r>
-              <a:rPr sz="1800" b="0">
-                <a:solidFill>
-                  <a:srgbClr val="333333"/>
-                </a:solidFill>
-                <a:latin typeface="Open Sans"/>
-                <a:ea typeface="Open Sans"/>
-                <a:cs typeface="Open Sans"/>
-              </a:rPr>
-              <a:t>Понятие «кровотечение» и признаки кровопотери</a:t>
-            </a:r>
-          </a:p>
-        </p:txBody>
-      </p:sp>
-      <p:sp>
-        <p:nvSpPr>
-          <p:cNvPr id="11" name="Oval 10"/>
+              <a:t>2</a:t>
+            </a:r>
+          </a:p>
+        </p:txBody>
+      </p:sp>
+      <p:sp>
+        <p:nvSpPr>
+          <p:cNvPr id="9" name="Oval 8"/>
           <p:cNvSpPr/>
           <p:nvPr/>
         </p:nvSpPr>
         <p:spPr>
           <a:xfrm>
-            <a:off x="700000" y="2500000"/>
-            <a:ext cx="550000" cy="550000"/>
+            <a:off x="700000" y="1550000"/>
+            <a:ext cx="520000" cy="520000"/>
           </a:xfrm>
           <a:prstGeom prst="ellipse">
             <a:avLst/>
           </a:prstGeom>
           <a:solidFill>
-            <a:srgbClr val="555555"/>
-          </a:solidFill>
-          <a:ln>
-            <a:noFill/>
+            <a:srgbClr val="8DDBCD"/>
+          </a:solidFill>
+          <a:ln w="12700">
+            <a:solidFill>
+              <a:srgbClr val="1AA090"/>
+            </a:solidFill>
           </a:ln>
         </p:spPr>
         <p:style>
@@ -5407,14 +5230,14 @@
       </p:sp>
       <p:sp>
         <p:nvSpPr>
-          <p:cNvPr id="12" name="TextBox 11"/>
+          <p:cNvPr id="10" name="TextBox 9"/>
           <p:cNvSpPr txBox="1"/>
           <p:nvPr/>
         </p:nvSpPr>
         <p:spPr>
           <a:xfrm>
-            <a:off x="700000" y="2500000"/>
-            <a:ext cx="550000" cy="550000"/>
+            <a:off x="700000" y="1550000"/>
+            <a:ext cx="520000" cy="520000"/>
           </a:xfrm>
           <a:prstGeom prst="rect">
             <a:avLst/>
@@ -5429,72 +5252,35 @@
           <a:p>
             <a:pPr algn="ctr"/>
             <a:r>
-              <a:rPr sz="1600" b="1">
-                <a:solidFill>
-                  <a:srgbClr val="FFFFFF"/>
-                </a:solidFill>
-                <a:latin typeface="Open Sans"/>
-                <a:ea typeface="Open Sans"/>
-                <a:cs typeface="Open Sans"/>
+              <a:rPr sz="1500" b="1">
+                <a:solidFill>
+                  <a:srgbClr val="0D6B60"/>
+                </a:solidFill>
+                <a:latin typeface="Calibri"/>
+                <a:ea typeface="Calibri"/>
+                <a:cs typeface="Calibri"/>
               </a:rPr>
-              <a:t>2</a:t>
-            </a:r>
-          </a:p>
-        </p:txBody>
-      </p:sp>
-      <p:sp>
-        <p:nvSpPr>
-          <p:cNvPr id="13" name="TextBox 12"/>
-          <p:cNvSpPr txBox="1"/>
-          <p:nvPr/>
-        </p:nvSpPr>
-        <p:spPr>
-          <a:xfrm>
-            <a:off x="1450000" y="2500000"/>
-            <a:ext cx="10000000" cy="550000"/>
-          </a:xfrm>
-          <a:prstGeom prst="rect">
-            <a:avLst/>
-          </a:prstGeom>
-          <a:noFill/>
-        </p:spPr>
-        <p:txBody>
-          <a:bodyPr wrap="square" anchor="ctr">
-            <a:spAutoFit/>
-          </a:bodyPr>
-          <a:lstStyle/>
-          <a:p>
-            <a:pPr algn="l"/>
-            <a:r>
-              <a:rPr sz="1800" b="0">
-                <a:solidFill>
-                  <a:srgbClr val="333333"/>
-                </a:solidFill>
-                <a:latin typeface="Open Sans"/>
-                <a:ea typeface="Open Sans"/>
-                <a:cs typeface="Open Sans"/>
-              </a:rPr>
-              <a:t>Виды наружного кровотечения</a:t>
-            </a:r>
-          </a:p>
-        </p:txBody>
-      </p:sp>
-      <p:sp>
-        <p:nvSpPr>
-          <p:cNvPr id="14" name="Oval 13"/>
+              <a:t>1</a:t>
+            </a:r>
+          </a:p>
+        </p:txBody>
+      </p:sp>
+      <p:sp>
+        <p:nvSpPr>
+          <p:cNvPr id="11" name="Rounded Rectangle 10"/>
           <p:cNvSpPr/>
           <p:nvPr/>
         </p:nvSpPr>
         <p:spPr>
           <a:xfrm>
-            <a:off x="700000" y="3400000"/>
-            <a:ext cx="550000" cy="550000"/>
-          </a:xfrm>
-          <a:prstGeom prst="ellipse">
-            <a:avLst/>
-          </a:prstGeom>
-          <a:solidFill>
-            <a:srgbClr val="555555"/>
+            <a:off x="1400000" y="1550000"/>
+            <a:ext cx="10000000" cy="520000"/>
+          </a:xfrm>
+          <a:prstGeom prst="roundRect">
+            <a:avLst/>
+          </a:prstGeom>
+          <a:solidFill>
+            <a:srgbClr val="F0F0F0"/>
           </a:solidFill>
           <a:ln>
             <a:noFill/>
@@ -5524,14 +5310,14 @@
       </p:sp>
       <p:sp>
         <p:nvSpPr>
-          <p:cNvPr id="15" name="TextBox 14"/>
+          <p:cNvPr id="12" name="TextBox 11"/>
           <p:cNvSpPr txBox="1"/>
           <p:nvPr/>
         </p:nvSpPr>
         <p:spPr>
           <a:xfrm>
-            <a:off x="700000" y="3400000"/>
-            <a:ext cx="550000" cy="550000"/>
+            <a:off x="1650000" y="1550000"/>
+            <a:ext cx="9500000" cy="520000"/>
           </a:xfrm>
           <a:prstGeom prst="rect">
             <a:avLst/>
@@ -5544,77 +5330,42 @@
           </a:bodyPr>
           <a:lstStyle/>
           <a:p>
-            <a:pPr algn="ctr"/>
-            <a:r>
-              <a:rPr sz="1600" b="1">
-                <a:solidFill>
-                  <a:srgbClr val="FFFFFF"/>
-                </a:solidFill>
-                <a:latin typeface="Open Sans"/>
-                <a:ea typeface="Open Sans"/>
-                <a:cs typeface="Open Sans"/>
+            <a:pPr algn="l"/>
+            <a:r>
+              <a:rPr sz="1500" b="0">
+                <a:solidFill>
+                  <a:srgbClr val="333333"/>
+                </a:solidFill>
+                <a:latin typeface="Calibri"/>
+                <a:ea typeface="Calibri"/>
+                <a:cs typeface="Calibri"/>
               </a:rPr>
-              <a:t>3</a:t>
-            </a:r>
-          </a:p>
-        </p:txBody>
-      </p:sp>
-      <p:sp>
-        <p:nvSpPr>
-          <p:cNvPr id="16" name="TextBox 15"/>
-          <p:cNvSpPr txBox="1"/>
-          <p:nvPr/>
-        </p:nvSpPr>
-        <p:spPr>
-          <a:xfrm>
-            <a:off x="1450000" y="3400000"/>
-            <a:ext cx="10000000" cy="550000"/>
-          </a:xfrm>
-          <a:prstGeom prst="rect">
-            <a:avLst/>
-          </a:prstGeom>
-          <a:noFill/>
-        </p:spPr>
-        <p:txBody>
-          <a:bodyPr wrap="square" anchor="ctr">
-            <a:spAutoFit/>
-          </a:bodyPr>
-          <a:lstStyle/>
-          <a:p>
-            <a:pPr algn="l"/>
-            <a:r>
-              <a:rPr sz="1800" b="0">
-                <a:solidFill>
-                  <a:srgbClr val="333333"/>
-                </a:solidFill>
-                <a:latin typeface="Open Sans"/>
-                <a:ea typeface="Open Sans"/>
-                <a:cs typeface="Open Sans"/>
-              </a:rPr>
-              <a:t>Цель и признаки для обзорного осмотра</a:t>
-            </a:r>
-          </a:p>
-        </p:txBody>
-      </p:sp>
-      <p:sp>
-        <p:nvSpPr>
-          <p:cNvPr id="17" name="Oval 16"/>
+              <a:t>Понятие «кровотечение» и признаки кровопотери</a:t>
+            </a:r>
+          </a:p>
+        </p:txBody>
+      </p:sp>
+      <p:sp>
+        <p:nvSpPr>
+          <p:cNvPr id="13" name="Oval 12"/>
           <p:cNvSpPr/>
           <p:nvPr/>
         </p:nvSpPr>
         <p:spPr>
           <a:xfrm>
-            <a:off x="700000" y="4300000"/>
-            <a:ext cx="550000" cy="550000"/>
+            <a:off x="700000" y="2400000"/>
+            <a:ext cx="520000" cy="520000"/>
           </a:xfrm>
           <a:prstGeom prst="ellipse">
             <a:avLst/>
           </a:prstGeom>
           <a:solidFill>
-            <a:srgbClr val="555555"/>
-          </a:solidFill>
-          <a:ln>
-            <a:noFill/>
+            <a:srgbClr val="8DDBCD"/>
+          </a:solidFill>
+          <a:ln w="12700">
+            <a:solidFill>
+              <a:srgbClr val="1AA090"/>
+            </a:solidFill>
           </a:ln>
         </p:spPr>
         <p:style>
@@ -5641,14 +5392,14 @@
       </p:sp>
       <p:sp>
         <p:nvSpPr>
-          <p:cNvPr id="18" name="TextBox 17"/>
+          <p:cNvPr id="14" name="TextBox 13"/>
           <p:cNvSpPr txBox="1"/>
           <p:nvPr/>
         </p:nvSpPr>
         <p:spPr>
           <a:xfrm>
-            <a:off x="700000" y="4300000"/>
-            <a:ext cx="550000" cy="550000"/>
+            <a:off x="700000" y="2400000"/>
+            <a:ext cx="520000" cy="520000"/>
           </a:xfrm>
           <a:prstGeom prst="rect">
             <a:avLst/>
@@ -5663,72 +5414,35 @@
           <a:p>
             <a:pPr algn="ctr"/>
             <a:r>
-              <a:rPr sz="1600" b="1">
-                <a:solidFill>
-                  <a:srgbClr val="FFFFFF"/>
-                </a:solidFill>
-                <a:latin typeface="Open Sans"/>
-                <a:ea typeface="Open Sans"/>
-                <a:cs typeface="Open Sans"/>
+              <a:rPr sz="1500" b="1">
+                <a:solidFill>
+                  <a:srgbClr val="0D6B60"/>
+                </a:solidFill>
+                <a:latin typeface="Calibri"/>
+                <a:ea typeface="Calibri"/>
+                <a:cs typeface="Calibri"/>
               </a:rPr>
-              <a:t>4</a:t>
-            </a:r>
-          </a:p>
-        </p:txBody>
-      </p:sp>
-      <p:sp>
-        <p:nvSpPr>
-          <p:cNvPr id="19" name="TextBox 18"/>
-          <p:cNvSpPr txBox="1"/>
-          <p:nvPr/>
-        </p:nvSpPr>
-        <p:spPr>
-          <a:xfrm>
-            <a:off x="1450000" y="4300000"/>
-            <a:ext cx="10000000" cy="550000"/>
-          </a:xfrm>
-          <a:prstGeom prst="rect">
-            <a:avLst/>
-          </a:prstGeom>
-          <a:noFill/>
-        </p:spPr>
-        <p:txBody>
-          <a:bodyPr wrap="square" anchor="ctr">
-            <a:spAutoFit/>
-          </a:bodyPr>
-          <a:lstStyle/>
-          <a:p>
-            <a:pPr algn="l"/>
-            <a:r>
-              <a:rPr sz="1800" b="0">
-                <a:solidFill>
-                  <a:srgbClr val="333333"/>
-                </a:solidFill>
-                <a:latin typeface="Open Sans"/>
-                <a:ea typeface="Open Sans"/>
-                <a:cs typeface="Open Sans"/>
-              </a:rPr>
-              <a:t>Как проводится обзорный осмотр</a:t>
-            </a:r>
-          </a:p>
-        </p:txBody>
-      </p:sp>
-      <p:sp>
-        <p:nvSpPr>
-          <p:cNvPr id="20" name="Oval 19"/>
+              <a:t>2</a:t>
+            </a:r>
+          </a:p>
+        </p:txBody>
+      </p:sp>
+      <p:sp>
+        <p:nvSpPr>
+          <p:cNvPr id="15" name="Rounded Rectangle 14"/>
           <p:cNvSpPr/>
           <p:nvPr/>
         </p:nvSpPr>
         <p:spPr>
           <a:xfrm>
-            <a:off x="700000" y="5200000"/>
-            <a:ext cx="550000" cy="550000"/>
-          </a:xfrm>
-          <a:prstGeom prst="ellipse">
-            <a:avLst/>
-          </a:prstGeom>
-          <a:solidFill>
-            <a:srgbClr val="555555"/>
+            <a:off x="1400000" y="2400000"/>
+            <a:ext cx="10000000" cy="520000"/>
+          </a:xfrm>
+          <a:prstGeom prst="roundRect">
+            <a:avLst/>
+          </a:prstGeom>
+          <a:solidFill>
+            <a:srgbClr val="F0F0F0"/>
           </a:solidFill>
           <a:ln>
             <a:noFill/>
@@ -5758,14 +5472,14 @@
       </p:sp>
       <p:sp>
         <p:nvSpPr>
-          <p:cNvPr id="21" name="TextBox 20"/>
+          <p:cNvPr id="16" name="TextBox 15"/>
           <p:cNvSpPr txBox="1"/>
           <p:nvPr/>
         </p:nvSpPr>
         <p:spPr>
           <a:xfrm>
-            <a:off x="700000" y="5200000"/>
-            <a:ext cx="550000" cy="550000"/>
+            <a:off x="1650000" y="2400000"/>
+            <a:ext cx="9500000" cy="520000"/>
           </a:xfrm>
           <a:prstGeom prst="rect">
             <a:avLst/>
@@ -5778,31 +5492,76 @@
           </a:bodyPr>
           <a:lstStyle/>
           <a:p>
-            <a:pPr algn="ctr"/>
-            <a:r>
-              <a:rPr sz="1600" b="1">
-                <a:solidFill>
-                  <a:srgbClr val="FFFFFF"/>
-                </a:solidFill>
-                <a:latin typeface="Open Sans"/>
-                <a:ea typeface="Open Sans"/>
-                <a:cs typeface="Open Sans"/>
+            <a:pPr algn="l"/>
+            <a:r>
+              <a:rPr sz="1500" b="0">
+                <a:solidFill>
+                  <a:srgbClr val="333333"/>
+                </a:solidFill>
+                <a:latin typeface="Calibri"/>
+                <a:ea typeface="Calibri"/>
+                <a:cs typeface="Calibri"/>
               </a:rPr>
-              <a:t>5</a:t>
-            </a:r>
-          </a:p>
-        </p:txBody>
-      </p:sp>
-      <p:sp>
-        <p:nvSpPr>
-          <p:cNvPr id="22" name="TextBox 21"/>
+              <a:t>Виды наружного кровотечения</a:t>
+            </a:r>
+          </a:p>
+        </p:txBody>
+      </p:sp>
+      <p:sp>
+        <p:nvSpPr>
+          <p:cNvPr id="17" name="Oval 16"/>
+          <p:cNvSpPr/>
+          <p:nvPr/>
+        </p:nvSpPr>
+        <p:spPr>
+          <a:xfrm>
+            <a:off x="700000" y="3250000"/>
+            <a:ext cx="520000" cy="520000"/>
+          </a:xfrm>
+          <a:prstGeom prst="ellipse">
+            <a:avLst/>
+          </a:prstGeom>
+          <a:solidFill>
+            <a:srgbClr val="8DDBCD"/>
+          </a:solidFill>
+          <a:ln w="12700">
+            <a:solidFill>
+              <a:srgbClr val="1AA090"/>
+            </a:solidFill>
+          </a:ln>
+        </p:spPr>
+        <p:style>
+          <a:lnRef idx="1">
+            <a:schemeClr val="accent1"/>
+          </a:lnRef>
+          <a:fillRef idx="3">
+            <a:schemeClr val="accent1"/>
+          </a:fillRef>
+          <a:effectRef idx="2">
+            <a:schemeClr val="accent1"/>
+          </a:effectRef>
+          <a:fontRef idx="minor">
+            <a:schemeClr val="lt1"/>
+          </a:fontRef>
+        </p:style>
+        <p:txBody>
+          <a:bodyPr rtlCol="0" anchor="ctr"/>
+          <a:lstStyle/>
+          <a:p>
+            <a:pPr algn="ctr"/>
+          </a:p>
+        </p:txBody>
+      </p:sp>
+      <p:sp>
+        <p:nvSpPr>
+          <p:cNvPr id="18" name="TextBox 17"/>
           <p:cNvSpPr txBox="1"/>
           <p:nvPr/>
         </p:nvSpPr>
         <p:spPr>
           <a:xfrm>
-            <a:off x="1450000" y="5200000"/>
-            <a:ext cx="10000000" cy="550000"/>
+            <a:off x="700000" y="3250000"/>
+            <a:ext cx="520000" cy="520000"/>
           </a:xfrm>
           <a:prstGeom prst="rect">
             <a:avLst/>
@@ -5815,15 +5574,419 @@
           </a:bodyPr>
           <a:lstStyle/>
           <a:p>
+            <a:pPr algn="ctr"/>
+            <a:r>
+              <a:rPr sz="1500" b="1">
+                <a:solidFill>
+                  <a:srgbClr val="0D6B60"/>
+                </a:solidFill>
+                <a:latin typeface="Calibri"/>
+                <a:ea typeface="Calibri"/>
+                <a:cs typeface="Calibri"/>
+              </a:rPr>
+              <a:t>3</a:t>
+            </a:r>
+          </a:p>
+        </p:txBody>
+      </p:sp>
+      <p:sp>
+        <p:nvSpPr>
+          <p:cNvPr id="19" name="Rounded Rectangle 18"/>
+          <p:cNvSpPr/>
+          <p:nvPr/>
+        </p:nvSpPr>
+        <p:spPr>
+          <a:xfrm>
+            <a:off x="1400000" y="3250000"/>
+            <a:ext cx="10000000" cy="520000"/>
+          </a:xfrm>
+          <a:prstGeom prst="roundRect">
+            <a:avLst/>
+          </a:prstGeom>
+          <a:solidFill>
+            <a:srgbClr val="F0F0F0"/>
+          </a:solidFill>
+          <a:ln>
+            <a:noFill/>
+          </a:ln>
+        </p:spPr>
+        <p:style>
+          <a:lnRef idx="1">
+            <a:schemeClr val="accent1"/>
+          </a:lnRef>
+          <a:fillRef idx="3">
+            <a:schemeClr val="accent1"/>
+          </a:fillRef>
+          <a:effectRef idx="2">
+            <a:schemeClr val="accent1"/>
+          </a:effectRef>
+          <a:fontRef idx="minor">
+            <a:schemeClr val="lt1"/>
+          </a:fontRef>
+        </p:style>
+        <p:txBody>
+          <a:bodyPr rtlCol="0" anchor="ctr"/>
+          <a:lstStyle/>
+          <a:p>
+            <a:pPr algn="ctr"/>
+          </a:p>
+        </p:txBody>
+      </p:sp>
+      <p:sp>
+        <p:nvSpPr>
+          <p:cNvPr id="20" name="TextBox 19"/>
+          <p:cNvSpPr txBox="1"/>
+          <p:nvPr/>
+        </p:nvSpPr>
+        <p:spPr>
+          <a:xfrm>
+            <a:off x="1650000" y="3250000"/>
+            <a:ext cx="9500000" cy="520000"/>
+          </a:xfrm>
+          <a:prstGeom prst="rect">
+            <a:avLst/>
+          </a:prstGeom>
+          <a:noFill/>
+        </p:spPr>
+        <p:txBody>
+          <a:bodyPr wrap="square" anchor="ctr">
+            <a:spAutoFit/>
+          </a:bodyPr>
+          <a:lstStyle/>
+          <a:p>
             <a:pPr algn="l"/>
             <a:r>
-              <a:rPr sz="1800" b="0">
+              <a:rPr sz="1500" b="0">
                 <a:solidFill>
                   <a:srgbClr val="333333"/>
                 </a:solidFill>
-                <a:latin typeface="Open Sans"/>
-                <a:ea typeface="Open Sans"/>
-                <a:cs typeface="Open Sans"/>
+                <a:latin typeface="Calibri"/>
+                <a:ea typeface="Calibri"/>
+                <a:cs typeface="Calibri"/>
+              </a:rPr>
+              <a:t>Цель и признаки для обзорного осмотра</a:t>
+            </a:r>
+          </a:p>
+        </p:txBody>
+      </p:sp>
+      <p:sp>
+        <p:nvSpPr>
+          <p:cNvPr id="21" name="Oval 20"/>
+          <p:cNvSpPr/>
+          <p:nvPr/>
+        </p:nvSpPr>
+        <p:spPr>
+          <a:xfrm>
+            <a:off x="700000" y="4100000"/>
+            <a:ext cx="520000" cy="520000"/>
+          </a:xfrm>
+          <a:prstGeom prst="ellipse">
+            <a:avLst/>
+          </a:prstGeom>
+          <a:solidFill>
+            <a:srgbClr val="8DDBCD"/>
+          </a:solidFill>
+          <a:ln w="12700">
+            <a:solidFill>
+              <a:srgbClr val="1AA090"/>
+            </a:solidFill>
+          </a:ln>
+        </p:spPr>
+        <p:style>
+          <a:lnRef idx="1">
+            <a:schemeClr val="accent1"/>
+          </a:lnRef>
+          <a:fillRef idx="3">
+            <a:schemeClr val="accent1"/>
+          </a:fillRef>
+          <a:effectRef idx="2">
+            <a:schemeClr val="accent1"/>
+          </a:effectRef>
+          <a:fontRef idx="minor">
+            <a:schemeClr val="lt1"/>
+          </a:fontRef>
+        </p:style>
+        <p:txBody>
+          <a:bodyPr rtlCol="0" anchor="ctr"/>
+          <a:lstStyle/>
+          <a:p>
+            <a:pPr algn="ctr"/>
+          </a:p>
+        </p:txBody>
+      </p:sp>
+      <p:sp>
+        <p:nvSpPr>
+          <p:cNvPr id="22" name="TextBox 21"/>
+          <p:cNvSpPr txBox="1"/>
+          <p:nvPr/>
+        </p:nvSpPr>
+        <p:spPr>
+          <a:xfrm>
+            <a:off x="700000" y="4100000"/>
+            <a:ext cx="520000" cy="520000"/>
+          </a:xfrm>
+          <a:prstGeom prst="rect">
+            <a:avLst/>
+          </a:prstGeom>
+          <a:noFill/>
+        </p:spPr>
+        <p:txBody>
+          <a:bodyPr wrap="square" anchor="ctr">
+            <a:spAutoFit/>
+          </a:bodyPr>
+          <a:lstStyle/>
+          <a:p>
+            <a:pPr algn="ctr"/>
+            <a:r>
+              <a:rPr sz="1500" b="1">
+                <a:solidFill>
+                  <a:srgbClr val="0D6B60"/>
+                </a:solidFill>
+                <a:latin typeface="Calibri"/>
+                <a:ea typeface="Calibri"/>
+                <a:cs typeface="Calibri"/>
+              </a:rPr>
+              <a:t>4</a:t>
+            </a:r>
+          </a:p>
+        </p:txBody>
+      </p:sp>
+      <p:sp>
+        <p:nvSpPr>
+          <p:cNvPr id="23" name="Rounded Rectangle 22"/>
+          <p:cNvSpPr/>
+          <p:nvPr/>
+        </p:nvSpPr>
+        <p:spPr>
+          <a:xfrm>
+            <a:off x="1400000" y="4100000"/>
+            <a:ext cx="10000000" cy="520000"/>
+          </a:xfrm>
+          <a:prstGeom prst="roundRect">
+            <a:avLst/>
+          </a:prstGeom>
+          <a:solidFill>
+            <a:srgbClr val="F0F0F0"/>
+          </a:solidFill>
+          <a:ln>
+            <a:noFill/>
+          </a:ln>
+        </p:spPr>
+        <p:style>
+          <a:lnRef idx="1">
+            <a:schemeClr val="accent1"/>
+          </a:lnRef>
+          <a:fillRef idx="3">
+            <a:schemeClr val="accent1"/>
+          </a:fillRef>
+          <a:effectRef idx="2">
+            <a:schemeClr val="accent1"/>
+          </a:effectRef>
+          <a:fontRef idx="minor">
+            <a:schemeClr val="lt1"/>
+          </a:fontRef>
+        </p:style>
+        <p:txBody>
+          <a:bodyPr rtlCol="0" anchor="ctr"/>
+          <a:lstStyle/>
+          <a:p>
+            <a:pPr algn="ctr"/>
+          </a:p>
+        </p:txBody>
+      </p:sp>
+      <p:sp>
+        <p:nvSpPr>
+          <p:cNvPr id="24" name="TextBox 23"/>
+          <p:cNvSpPr txBox="1"/>
+          <p:nvPr/>
+        </p:nvSpPr>
+        <p:spPr>
+          <a:xfrm>
+            <a:off x="1650000" y="4100000"/>
+            <a:ext cx="9500000" cy="520000"/>
+          </a:xfrm>
+          <a:prstGeom prst="rect">
+            <a:avLst/>
+          </a:prstGeom>
+          <a:noFill/>
+        </p:spPr>
+        <p:txBody>
+          <a:bodyPr wrap="square" anchor="ctr">
+            <a:spAutoFit/>
+          </a:bodyPr>
+          <a:lstStyle/>
+          <a:p>
+            <a:pPr algn="l"/>
+            <a:r>
+              <a:rPr sz="1500" b="0">
+                <a:solidFill>
+                  <a:srgbClr val="333333"/>
+                </a:solidFill>
+                <a:latin typeface="Calibri"/>
+                <a:ea typeface="Calibri"/>
+                <a:cs typeface="Calibri"/>
+              </a:rPr>
+              <a:t>Как проводится обзорный осмотр</a:t>
+            </a:r>
+          </a:p>
+        </p:txBody>
+      </p:sp>
+      <p:sp>
+        <p:nvSpPr>
+          <p:cNvPr id="25" name="Oval 24"/>
+          <p:cNvSpPr/>
+          <p:nvPr/>
+        </p:nvSpPr>
+        <p:spPr>
+          <a:xfrm>
+            <a:off x="700000" y="4950000"/>
+            <a:ext cx="520000" cy="520000"/>
+          </a:xfrm>
+          <a:prstGeom prst="ellipse">
+            <a:avLst/>
+          </a:prstGeom>
+          <a:solidFill>
+            <a:srgbClr val="8DDBCD"/>
+          </a:solidFill>
+          <a:ln w="12700">
+            <a:solidFill>
+              <a:srgbClr val="1AA090"/>
+            </a:solidFill>
+          </a:ln>
+        </p:spPr>
+        <p:style>
+          <a:lnRef idx="1">
+            <a:schemeClr val="accent1"/>
+          </a:lnRef>
+          <a:fillRef idx="3">
+            <a:schemeClr val="accent1"/>
+          </a:fillRef>
+          <a:effectRef idx="2">
+            <a:schemeClr val="accent1"/>
+          </a:effectRef>
+          <a:fontRef idx="minor">
+            <a:schemeClr val="lt1"/>
+          </a:fontRef>
+        </p:style>
+        <p:txBody>
+          <a:bodyPr rtlCol="0" anchor="ctr"/>
+          <a:lstStyle/>
+          <a:p>
+            <a:pPr algn="ctr"/>
+          </a:p>
+        </p:txBody>
+      </p:sp>
+      <p:sp>
+        <p:nvSpPr>
+          <p:cNvPr id="26" name="TextBox 25"/>
+          <p:cNvSpPr txBox="1"/>
+          <p:nvPr/>
+        </p:nvSpPr>
+        <p:spPr>
+          <a:xfrm>
+            <a:off x="700000" y="4950000"/>
+            <a:ext cx="520000" cy="520000"/>
+          </a:xfrm>
+          <a:prstGeom prst="rect">
+            <a:avLst/>
+          </a:prstGeom>
+          <a:noFill/>
+        </p:spPr>
+        <p:txBody>
+          <a:bodyPr wrap="square" anchor="ctr">
+            <a:spAutoFit/>
+          </a:bodyPr>
+          <a:lstStyle/>
+          <a:p>
+            <a:pPr algn="ctr"/>
+            <a:r>
+              <a:rPr sz="1500" b="1">
+                <a:solidFill>
+                  <a:srgbClr val="0D6B60"/>
+                </a:solidFill>
+                <a:latin typeface="Calibri"/>
+                <a:ea typeface="Calibri"/>
+                <a:cs typeface="Calibri"/>
+              </a:rPr>
+              <a:t>5</a:t>
+            </a:r>
+          </a:p>
+        </p:txBody>
+      </p:sp>
+      <p:sp>
+        <p:nvSpPr>
+          <p:cNvPr id="27" name="Rounded Rectangle 26"/>
+          <p:cNvSpPr/>
+          <p:nvPr/>
+        </p:nvSpPr>
+        <p:spPr>
+          <a:xfrm>
+            <a:off x="1400000" y="4950000"/>
+            <a:ext cx="10000000" cy="520000"/>
+          </a:xfrm>
+          <a:prstGeom prst="roundRect">
+            <a:avLst/>
+          </a:prstGeom>
+          <a:solidFill>
+            <a:srgbClr val="F0F0F0"/>
+          </a:solidFill>
+          <a:ln>
+            <a:noFill/>
+          </a:ln>
+        </p:spPr>
+        <p:style>
+          <a:lnRef idx="1">
+            <a:schemeClr val="accent1"/>
+          </a:lnRef>
+          <a:fillRef idx="3">
+            <a:schemeClr val="accent1"/>
+          </a:fillRef>
+          <a:effectRef idx="2">
+            <a:schemeClr val="accent1"/>
+          </a:effectRef>
+          <a:fontRef idx="minor">
+            <a:schemeClr val="lt1"/>
+          </a:fontRef>
+        </p:style>
+        <p:txBody>
+          <a:bodyPr rtlCol="0" anchor="ctr"/>
+          <a:lstStyle/>
+          <a:p>
+            <a:pPr algn="ctr"/>
+          </a:p>
+        </p:txBody>
+      </p:sp>
+      <p:sp>
+        <p:nvSpPr>
+          <p:cNvPr id="28" name="TextBox 27"/>
+          <p:cNvSpPr txBox="1"/>
+          <p:nvPr/>
+        </p:nvSpPr>
+        <p:spPr>
+          <a:xfrm>
+            <a:off x="1650000" y="4950000"/>
+            <a:ext cx="9500000" cy="520000"/>
+          </a:xfrm>
+          <a:prstGeom prst="rect">
+            <a:avLst/>
+          </a:prstGeom>
+          <a:noFill/>
+        </p:spPr>
+        <p:txBody>
+          <a:bodyPr wrap="square" anchor="ctr">
+            <a:spAutoFit/>
+          </a:bodyPr>
+          <a:lstStyle/>
+          <a:p>
+            <a:pPr algn="l"/>
+            <a:r>
+              <a:rPr sz="1500" b="0">
+                <a:solidFill>
+                  <a:srgbClr val="333333"/>
+                </a:solidFill>
+                <a:latin typeface="Calibri"/>
+                <a:ea typeface="Calibri"/>
+                <a:cs typeface="Calibri"/>
               </a:rPr>
               <a:t>Действия при обнаружении кровотечения</a:t>
             </a:r>
@@ -5893,57 +6056,20 @@
       </p:sp>
       <p:sp>
         <p:nvSpPr>
-          <p:cNvPr id="3" name="TextBox 2"/>
-          <p:cNvSpPr txBox="1"/>
-          <p:nvPr/>
-        </p:nvSpPr>
-        <p:spPr>
-          <a:xfrm>
-            <a:off x="700000" y="280000"/>
-            <a:ext cx="11000000" cy="550000"/>
-          </a:xfrm>
-          <a:prstGeom prst="rect">
-            <a:avLst/>
-          </a:prstGeom>
-          <a:noFill/>
-        </p:spPr>
-        <p:txBody>
-          <a:bodyPr wrap="square" anchor="t">
-            <a:spAutoFit/>
-          </a:bodyPr>
-          <a:lstStyle/>
-          <a:p>
-            <a:pPr algn="l"/>
-            <a:r>
-              <a:rPr sz="2600" b="1">
-                <a:solidFill>
-                  <a:srgbClr val="333333"/>
-                </a:solidFill>
-                <a:latin typeface="Open Sans"/>
-                <a:ea typeface="Open Sans"/>
-                <a:cs typeface="Open Sans"/>
-              </a:rPr>
-              <a:t>ПОНЯТИЕ «КРОВОТЕЧЕНИЕ»</a:t>
-            </a:r>
-          </a:p>
-        </p:txBody>
-      </p:sp>
-      <p:sp>
-        <p:nvSpPr>
-          <p:cNvPr id="4" name="Rectangle 3"/>
+          <p:cNvPr id="3" name="Rectangle 2"/>
           <p:cNvSpPr/>
           <p:nvPr/>
         </p:nvSpPr>
         <p:spPr>
           <a:xfrm>
-            <a:off x="700000" y="880000"/>
-            <a:ext cx="9000000" cy="25000"/>
-          </a:xfrm>
-          <a:prstGeom prst="rect">
-            <a:avLst/>
-          </a:prstGeom>
-          <a:solidFill>
-            <a:srgbClr val="555555"/>
+            <a:off x="0" y="0"/>
+            <a:ext cx="12191695" cy="1300000"/>
+          </a:xfrm>
+          <a:prstGeom prst="rect">
+            <a:avLst/>
+          </a:prstGeom>
+          <a:solidFill>
+            <a:srgbClr val="F8F8F8"/>
           </a:solidFill>
           <a:ln>
             <a:noFill/>
@@ -5973,14 +6099,14 @@
       </p:sp>
       <p:sp>
         <p:nvSpPr>
-          <p:cNvPr id="5" name="TextBox 4"/>
+          <p:cNvPr id="4" name="TextBox 3"/>
           <p:cNvSpPr txBox="1"/>
           <p:nvPr/>
         </p:nvSpPr>
         <p:spPr>
           <a:xfrm>
-            <a:off x="700000" y="950000"/>
-            <a:ext cx="11000000" cy="350000"/>
+            <a:off x="700000" y="220000"/>
+            <a:ext cx="11200000" cy="550000"/>
           </a:xfrm>
           <a:prstGeom prst="rect">
             <a:avLst/>
@@ -5995,35 +6121,35 @@
           <a:p>
             <a:pPr algn="l"/>
             <a:r>
-              <a:rPr sz="1200" b="0">
-                <a:solidFill>
-                  <a:srgbClr val="666666"/>
-                </a:solidFill>
-                <a:latin typeface="Open Sans"/>
-                <a:ea typeface="Open Sans"/>
-                <a:cs typeface="Open Sans"/>
+              <a:rPr sz="2000" b="1">
+                <a:solidFill>
+                  <a:srgbClr val="333333"/>
+                </a:solidFill>
+                <a:latin typeface="Calibri"/>
+                <a:ea typeface="Calibri"/>
+                <a:cs typeface="Calibri"/>
               </a:rPr>
-              <a:t>Оказание первой помощи при наружных кровотечениях</a:t>
-            </a:r>
-          </a:p>
-        </p:txBody>
-      </p:sp>
-      <p:sp>
-        <p:nvSpPr>
-          <p:cNvPr id="6" name="Rectangle 5"/>
+              <a:t>ПОНЯТИЕ «КРОВОТЕЧЕНИЕ»</a:t>
+            </a:r>
+          </a:p>
+        </p:txBody>
+      </p:sp>
+      <p:sp>
+        <p:nvSpPr>
+          <p:cNvPr id="5" name="Rectangle 4"/>
           <p:cNvSpPr/>
           <p:nvPr/>
         </p:nvSpPr>
         <p:spPr>
           <a:xfrm>
-            <a:off x="0" y="2800000"/>
-            <a:ext cx="420000" cy="420000"/>
-          </a:xfrm>
-          <a:prstGeom prst="rect">
-            <a:avLst/>
-          </a:prstGeom>
-          <a:solidFill>
-            <a:srgbClr val="555555"/>
+            <a:off x="700000" y="820000"/>
+            <a:ext cx="8500000" cy="28000"/>
+          </a:xfrm>
+          <a:prstGeom prst="rect">
+            <a:avLst/>
+          </a:prstGeom>
+          <a:solidFill>
+            <a:srgbClr val="606060"/>
           </a:solidFill>
           <a:ln>
             <a:noFill/>
@@ -6053,14 +6179,94 @@
       </p:sp>
       <p:sp>
         <p:nvSpPr>
-          <p:cNvPr id="7" name="TextBox 6"/>
+          <p:cNvPr id="6" name="TextBox 5"/>
           <p:cNvSpPr txBox="1"/>
           <p:nvPr/>
         </p:nvSpPr>
         <p:spPr>
           <a:xfrm>
-            <a:off x="0" y="2800000"/>
-            <a:ext cx="420000" cy="420000"/>
+            <a:off x="700000" y="880000"/>
+            <a:ext cx="11000000" cy="320000"/>
+          </a:xfrm>
+          <a:prstGeom prst="rect">
+            <a:avLst/>
+          </a:prstGeom>
+          <a:noFill/>
+        </p:spPr>
+        <p:txBody>
+          <a:bodyPr wrap="square" anchor="t">
+            <a:spAutoFit/>
+          </a:bodyPr>
+          <a:lstStyle/>
+          <a:p>
+            <a:pPr algn="l"/>
+            <a:r>
+              <a:rPr sz="1100" b="0">
+                <a:solidFill>
+                  <a:srgbClr val="777777"/>
+                </a:solidFill>
+                <a:latin typeface="Calibri"/>
+                <a:ea typeface="Calibri"/>
+                <a:cs typeface="Calibri"/>
+              </a:rPr>
+              <a:t>Оказание первой помощи при наружных кровотечениях</a:t>
+            </a:r>
+          </a:p>
+        </p:txBody>
+      </p:sp>
+      <p:sp>
+        <p:nvSpPr>
+          <p:cNvPr id="7" name="Rectangle 6"/>
+          <p:cNvSpPr/>
+          <p:nvPr/>
+        </p:nvSpPr>
+        <p:spPr>
+          <a:xfrm>
+            <a:off x="0" y="2700000"/>
+            <a:ext cx="400000" cy="400000"/>
+          </a:xfrm>
+          <a:prstGeom prst="rect">
+            <a:avLst/>
+          </a:prstGeom>
+          <a:solidFill>
+            <a:srgbClr val="606060"/>
+          </a:solidFill>
+          <a:ln>
+            <a:noFill/>
+          </a:ln>
+        </p:spPr>
+        <p:style>
+          <a:lnRef idx="1">
+            <a:schemeClr val="accent1"/>
+          </a:lnRef>
+          <a:fillRef idx="3">
+            <a:schemeClr val="accent1"/>
+          </a:fillRef>
+          <a:effectRef idx="2">
+            <a:schemeClr val="accent1"/>
+          </a:effectRef>
+          <a:fontRef idx="minor">
+            <a:schemeClr val="lt1"/>
+          </a:fontRef>
+        </p:style>
+        <p:txBody>
+          <a:bodyPr rtlCol="0" anchor="ctr"/>
+          <a:lstStyle/>
+          <a:p>
+            <a:pPr algn="ctr"/>
+          </a:p>
+        </p:txBody>
+      </p:sp>
+      <p:sp>
+        <p:nvSpPr>
+          <p:cNvPr id="8" name="TextBox 7"/>
+          <p:cNvSpPr txBox="1"/>
+          <p:nvPr/>
+        </p:nvSpPr>
+        <p:spPr>
+          <a:xfrm>
+            <a:off x="0" y="2700000"/>
+            <a:ext cx="400000" cy="400000"/>
           </a:xfrm>
           <a:prstGeom prst="rect">
             <a:avLst/>
@@ -6075,22 +6281,65 @@
           <a:p>
             <a:pPr algn="ctr"/>
             <a:r>
-              <a:rPr sz="1400" b="1">
+              <a:rPr sz="1300" b="1">
                 <a:solidFill>
                   <a:srgbClr val="FFFFFF"/>
                 </a:solidFill>
-                <a:latin typeface="Open Sans"/>
-                <a:ea typeface="Open Sans"/>
-                <a:cs typeface="Open Sans"/>
+                <a:latin typeface="Calibri"/>
+                <a:ea typeface="Calibri"/>
+                <a:cs typeface="Calibri"/>
               </a:rPr>
               <a:t>3</a:t>
             </a:r>
           </a:p>
         </p:txBody>
       </p:sp>
+      <p:sp>
+        <p:nvSpPr>
+          <p:cNvPr id="9" name="Rectangle 8"/>
+          <p:cNvSpPr/>
+          <p:nvPr/>
+        </p:nvSpPr>
+        <p:spPr>
+          <a:xfrm>
+            <a:off x="0" y="1300000"/>
+            <a:ext cx="4200000" cy="5550000"/>
+          </a:xfrm>
+          <a:prstGeom prst="rect">
+            <a:avLst/>
+          </a:prstGeom>
+          <a:solidFill>
+            <a:srgbClr val="F0F0F0"/>
+          </a:solidFill>
+          <a:ln>
+            <a:noFill/>
+          </a:ln>
+        </p:spPr>
+        <p:style>
+          <a:lnRef idx="1">
+            <a:schemeClr val="accent1"/>
+          </a:lnRef>
+          <a:fillRef idx="3">
+            <a:schemeClr val="accent1"/>
+          </a:fillRef>
+          <a:effectRef idx="2">
+            <a:schemeClr val="accent1"/>
+          </a:effectRef>
+          <a:fontRef idx="minor">
+            <a:schemeClr val="lt1"/>
+          </a:fontRef>
+        </p:style>
+        <p:txBody>
+          <a:bodyPr rtlCol="0" anchor="ctr"/>
+          <a:lstStyle/>
+          <a:p>
+            <a:pPr algn="ctr"/>
+          </a:p>
+        </p:txBody>
+      </p:sp>
       <p:pic>
         <p:nvPicPr>
-          <p:cNvPr id="8" name="Picture 7" descr="def_man.png"/>
+          <p:cNvPr id="10" name="Picture 9" descr="suot_mascot.png"/>
           <p:cNvPicPr>
             <a:picLocks noChangeAspect="1"/>
           </p:cNvPicPr>
@@ -6104,8 +6353,8 @@
         </p:blipFill>
         <p:spPr>
           <a:xfrm>
-            <a:off x="852000" y="1500000"/>
-            <a:ext cx="2496000" cy="5200000"/>
+            <a:off x="400000" y="1900000"/>
+            <a:ext cx="2800000" cy="4200000"/>
           </a:xfrm>
           <a:prstGeom prst="rect">
             <a:avLst/>
@@ -6114,23 +6363,25 @@
       </p:pic>
       <p:sp>
         <p:nvSpPr>
-          <p:cNvPr id="9" name="Rounded Rectangle 8"/>
+          <p:cNvPr id="11" name="Rounded Rectangle 10"/>
           <p:cNvSpPr/>
           <p:nvPr/>
         </p:nvSpPr>
         <p:spPr>
           <a:xfrm>
-            <a:off x="3400000" y="1700000"/>
-            <a:ext cx="4200000" cy="2600000"/>
+            <a:off x="3000000" y="1800000"/>
+            <a:ext cx="4000000" cy="2400000"/>
           </a:xfrm>
           <a:prstGeom prst="roundRect">
             <a:avLst/>
           </a:prstGeom>
           <a:solidFill>
-            <a:srgbClr val="F5F0E1"/>
-          </a:solidFill>
-          <a:ln>
-            <a:noFill/>
+            <a:srgbClr val="8DDBCD"/>
+          </a:solidFill>
+          <a:ln w="15875">
+            <a:solidFill>
+              <a:srgbClr val="1AA090"/>
+            </a:solidFill>
           </a:ln>
         </p:spPr>
         <p:style>
@@ -6157,14 +6408,51 @@
       </p:sp>
       <p:sp>
         <p:nvSpPr>
-          <p:cNvPr id="10" name="TextBox 9"/>
+          <p:cNvPr id="12" name="TextBox 11"/>
           <p:cNvSpPr txBox="1"/>
           <p:nvPr/>
         </p:nvSpPr>
         <p:spPr>
           <a:xfrm>
-            <a:off x="3650000" y="1900000"/>
-            <a:ext cx="3700000" cy="2200000"/>
+            <a:off x="3200000" y="1980000"/>
+            <a:ext cx="3600000" cy="2040000"/>
+          </a:xfrm>
+          <a:prstGeom prst="rect">
+            <a:avLst/>
+          </a:prstGeom>
+          <a:noFill/>
+        </p:spPr>
+        <p:txBody>
+          <a:bodyPr wrap="square" anchor="ctr">
+            <a:spAutoFit/>
+          </a:bodyPr>
+          <a:lstStyle/>
+          <a:p>
+            <a:pPr algn="l"/>
+            <a:r>
+              <a:rPr sz="1200" b="0">
+                <a:solidFill>
+                  <a:srgbClr val="0D6B60"/>
+                </a:solidFill>
+                <a:latin typeface="Calibri"/>
+                <a:ea typeface="Calibri"/>
+                <a:cs typeface="Calibri"/>
+              </a:rPr>
+              <a:t>Под кровотечением понимают ситуацию, когда кровь покидает сосудистое русло, что приводит к кровопотере — безвозвратной утрате части крови.</a:t>
+            </a:r>
+          </a:p>
+        </p:txBody>
+      </p:sp>
+      <p:sp>
+        <p:nvSpPr>
+          <p:cNvPr id="13" name="TextBox 12"/>
+          <p:cNvSpPr txBox="1"/>
+          <p:nvPr/>
+        </p:nvSpPr>
+        <p:spPr>
+          <a:xfrm>
+            <a:off x="7400000" y="1600000"/>
+            <a:ext cx="5000000" cy="450000"/>
           </a:xfrm>
           <a:prstGeom prst="rect">
             <a:avLst/>
@@ -6179,88 +6467,29 @@
           <a:p>
             <a:pPr algn="l"/>
             <a:r>
-              <a:rPr sz="1400" b="0">
-                <a:solidFill>
-                  <a:srgbClr val="333333"/>
-                </a:solidFill>
-                <a:latin typeface="Open Sans"/>
-                <a:ea typeface="Open Sans"/>
-                <a:cs typeface="Open Sans"/>
+              <a:rPr sz="1500" b="1">
+                <a:solidFill>
+                  <a:srgbClr val="1AA090"/>
+                </a:solidFill>
+                <a:latin typeface="Calibri"/>
+                <a:ea typeface="Calibri"/>
+                <a:cs typeface="Calibri"/>
               </a:rPr>
-              <a:t>Под </a:t>
-            </a:r>
-            <a:r>
-              <a:rPr sz="1400" b="1">
-                <a:solidFill>
-                  <a:srgbClr val="333333"/>
-                </a:solidFill>
-                <a:latin typeface="Open Sans"/>
-                <a:ea typeface="Open Sans"/>
-                <a:cs typeface="Open Sans"/>
-              </a:rPr>
-              <a:t>кровотечением понимают</a:t>
-            </a:r>
-            <a:r>
-              <a:rPr sz="1400" b="0">
-                <a:solidFill>
-                  <a:srgbClr val="333333"/>
-                </a:solidFill>
-                <a:latin typeface="Open Sans"/>
-                <a:ea typeface="Open Sans"/>
-                <a:cs typeface="Open Sans"/>
-              </a:rPr>
-              <a:t> ситуацию, когда кровь по разным причинам (чаще всего в результате травмы) покидает сосудистое русло, что приводит к кровопотере — безвозвратной утрате части крови.</a:t>
-            </a:r>
-          </a:p>
-        </p:txBody>
-      </p:sp>
-      <p:sp>
-        <p:nvSpPr>
-          <p:cNvPr id="11" name="TextBox 10"/>
+              <a:t>Признаки острой кровопотери:</a:t>
+            </a:r>
+          </a:p>
+        </p:txBody>
+      </p:sp>
+      <p:sp>
+        <p:nvSpPr>
+          <p:cNvPr id="14" name="TextBox 13"/>
           <p:cNvSpPr txBox="1"/>
           <p:nvPr/>
         </p:nvSpPr>
         <p:spPr>
           <a:xfrm>
-            <a:off x="7900000" y="1600000"/>
-            <a:ext cx="4800000" cy="450000"/>
-          </a:xfrm>
-          <a:prstGeom prst="rect">
-            <a:avLst/>
-          </a:prstGeom>
-          <a:noFill/>
-        </p:spPr>
-        <p:txBody>
-          <a:bodyPr wrap="square" anchor="t">
-            <a:spAutoFit/>
-          </a:bodyPr>
-          <a:lstStyle/>
-          <a:p>
-            <a:pPr algn="l"/>
-            <a:r>
-              <a:rPr sz="1600" b="1">
-                <a:solidFill>
-                  <a:srgbClr val="333333"/>
-                </a:solidFill>
-                <a:latin typeface="Open Sans"/>
-                <a:ea typeface="Open Sans"/>
-                <a:cs typeface="Open Sans"/>
-              </a:rPr>
-              <a:t>Основные признаки острой кровопотери:</a:t>
-            </a:r>
-          </a:p>
-        </p:txBody>
-      </p:sp>
-      <p:sp>
-        <p:nvSpPr>
-          <p:cNvPr id="12" name="TextBox 11"/>
-          <p:cNvSpPr txBox="1"/>
-          <p:nvPr/>
-        </p:nvSpPr>
-        <p:spPr>
-          <a:xfrm>
-            <a:off x="7900000" y="2150000"/>
-            <a:ext cx="4800000" cy="4500000"/>
+            <a:off x="7400000" y="2150000"/>
+            <a:ext cx="5000000" cy="4200000"/>
           </a:xfrm>
           <a:prstGeom prst="rect">
             <a:avLst/>
@@ -6275,17 +6504,17 @@
           <a:p>
             <a:pPr algn="l">
               <a:spcAft>
-                <a:spcPts val="800"/>
+                <a:spcPts val="700"/>
               </a:spcAft>
             </a:pPr>
             <a:r>
-              <a:rPr sz="1400" b="0">
+              <a:rPr sz="1300" b="0">
                 <a:solidFill>
                   <a:srgbClr val="333333"/>
                 </a:solidFill>
-                <a:latin typeface="Open Sans"/>
-                <a:ea typeface="Open Sans"/>
-                <a:cs typeface="Open Sans"/>
+                <a:latin typeface="Calibri"/>
+                <a:ea typeface="Calibri"/>
+                <a:cs typeface="Calibri"/>
               </a:rPr>
               <a:t>☐  резкая общая слабость;</a:t>
             </a:r>
@@ -6293,17 +6522,17 @@
           <a:p>
             <a:pPr algn="l">
               <a:spcAft>
-                <a:spcPts val="800"/>
+                <a:spcPts val="700"/>
               </a:spcAft>
             </a:pPr>
             <a:r>
-              <a:rPr sz="1400" b="0">
+              <a:rPr sz="1300" b="0">
                 <a:solidFill>
                   <a:srgbClr val="333333"/>
                 </a:solidFill>
-                <a:latin typeface="Open Sans"/>
-                <a:ea typeface="Open Sans"/>
-                <a:cs typeface="Open Sans"/>
+                <a:latin typeface="Calibri"/>
+                <a:ea typeface="Calibri"/>
+                <a:cs typeface="Calibri"/>
               </a:rPr>
               <a:t>☐  чувство жажды;</a:t>
             </a:r>
@@ -6311,17 +6540,17 @@
           <a:p>
             <a:pPr algn="l">
               <a:spcAft>
-                <a:spcPts val="800"/>
+                <a:spcPts val="700"/>
               </a:spcAft>
             </a:pPr>
             <a:r>
-              <a:rPr sz="1400" b="0">
+              <a:rPr sz="1300" b="0">
                 <a:solidFill>
                   <a:srgbClr val="333333"/>
                 </a:solidFill>
-                <a:latin typeface="Open Sans"/>
-                <a:ea typeface="Open Sans"/>
-                <a:cs typeface="Open Sans"/>
+                <a:latin typeface="Calibri"/>
+                <a:ea typeface="Calibri"/>
+                <a:cs typeface="Calibri"/>
               </a:rPr>
               <a:t>☐  головокружение;</a:t>
             </a:r>
@@ -6329,17 +6558,17 @@
           <a:p>
             <a:pPr algn="l">
               <a:spcAft>
-                <a:spcPts val="800"/>
+                <a:spcPts val="700"/>
               </a:spcAft>
             </a:pPr>
             <a:r>
-              <a:rPr sz="1400" b="0">
+              <a:rPr sz="1300" b="0">
                 <a:solidFill>
                   <a:srgbClr val="333333"/>
                 </a:solidFill>
-                <a:latin typeface="Open Sans"/>
-                <a:ea typeface="Open Sans"/>
-                <a:cs typeface="Open Sans"/>
+                <a:latin typeface="Calibri"/>
+                <a:ea typeface="Calibri"/>
+                <a:cs typeface="Calibri"/>
               </a:rPr>
               <a:t>☐  мелькание «мушек» перед глазами;</a:t>
             </a:r>
@@ -6347,17 +6576,17 @@
           <a:p>
             <a:pPr algn="l">
               <a:spcAft>
-                <a:spcPts val="800"/>
+                <a:spcPts val="700"/>
               </a:spcAft>
             </a:pPr>
             <a:r>
-              <a:rPr sz="1400" b="0">
+              <a:rPr sz="1300" b="0">
                 <a:solidFill>
                   <a:srgbClr val="333333"/>
                 </a:solidFill>
-                <a:latin typeface="Open Sans"/>
-                <a:ea typeface="Open Sans"/>
-                <a:cs typeface="Open Sans"/>
+                <a:latin typeface="Calibri"/>
+                <a:ea typeface="Calibri"/>
+                <a:cs typeface="Calibri"/>
               </a:rPr>
               <a:t>☐  обморок (чаще при попытке встать);</a:t>
             </a:r>
@@ -6365,17 +6594,17 @@
           <a:p>
             <a:pPr algn="l">
               <a:spcAft>
-                <a:spcPts val="800"/>
+                <a:spcPts val="700"/>
               </a:spcAft>
             </a:pPr>
             <a:r>
-              <a:rPr sz="1400" b="0">
+              <a:rPr sz="1300" b="0">
                 <a:solidFill>
                   <a:srgbClr val="333333"/>
                 </a:solidFill>
-                <a:latin typeface="Open Sans"/>
-                <a:ea typeface="Open Sans"/>
-                <a:cs typeface="Open Sans"/>
+                <a:latin typeface="Calibri"/>
+                <a:ea typeface="Calibri"/>
+                <a:cs typeface="Calibri"/>
               </a:rPr>
               <a:t>☐  бледная, влажная и холодная кожа;</a:t>
             </a:r>
@@ -6383,17 +6612,17 @@
           <a:p>
             <a:pPr algn="l">
               <a:spcAft>
-                <a:spcPts val="800"/>
+                <a:spcPts val="700"/>
               </a:spcAft>
             </a:pPr>
             <a:r>
-              <a:rPr sz="1400" b="0">
+              <a:rPr sz="1300" b="0">
                 <a:solidFill>
                   <a:srgbClr val="333333"/>
                 </a:solidFill>
-                <a:latin typeface="Open Sans"/>
-                <a:ea typeface="Open Sans"/>
-                <a:cs typeface="Open Sans"/>
+                <a:latin typeface="Calibri"/>
+                <a:ea typeface="Calibri"/>
+                <a:cs typeface="Calibri"/>
               </a:rPr>
               <a:t>☐  учащённое сердцебиение;</a:t>
             </a:r>
@@ -6401,17 +6630,17 @@
           <a:p>
             <a:pPr algn="l">
               <a:spcAft>
-                <a:spcPts val="800"/>
+                <a:spcPts val="700"/>
               </a:spcAft>
             </a:pPr>
             <a:r>
-              <a:rPr sz="1400" b="0">
+              <a:rPr sz="1300" b="0">
                 <a:solidFill>
                   <a:srgbClr val="333333"/>
                 </a:solidFill>
-                <a:latin typeface="Open Sans"/>
-                <a:ea typeface="Open Sans"/>
-                <a:cs typeface="Open Sans"/>
+                <a:latin typeface="Calibri"/>
+                <a:ea typeface="Calibri"/>
+                <a:cs typeface="Calibri"/>
               </a:rPr>
               <a:t>☐  частое дыхание.</a:t>
             </a:r>
@@ -6481,57 +6710,20 @@
       </p:sp>
       <p:sp>
         <p:nvSpPr>
-          <p:cNvPr id="3" name="TextBox 2"/>
-          <p:cNvSpPr txBox="1"/>
-          <p:nvPr/>
-        </p:nvSpPr>
-        <p:spPr>
-          <a:xfrm>
-            <a:off x="700000" y="280000"/>
-            <a:ext cx="11000000" cy="550000"/>
-          </a:xfrm>
-          <a:prstGeom prst="rect">
-            <a:avLst/>
-          </a:prstGeom>
-          <a:noFill/>
-        </p:spPr>
-        <p:txBody>
-          <a:bodyPr wrap="square" anchor="t">
-            <a:spAutoFit/>
-          </a:bodyPr>
-          <a:lstStyle/>
-          <a:p>
-            <a:pPr algn="l"/>
-            <a:r>
-              <a:rPr sz="2600" b="1">
-                <a:solidFill>
-                  <a:srgbClr val="333333"/>
-                </a:solidFill>
-                <a:latin typeface="Open Sans"/>
-                <a:ea typeface="Open Sans"/>
-                <a:cs typeface="Open Sans"/>
-              </a:rPr>
-              <a:t>ОСТРАЯ МАССИВНАЯ КРОВОПОТЕРЯ</a:t>
-            </a:r>
-          </a:p>
-        </p:txBody>
-      </p:sp>
-      <p:sp>
-        <p:nvSpPr>
-          <p:cNvPr id="4" name="Rectangle 3"/>
+          <p:cNvPr id="3" name="Rectangle 2"/>
           <p:cNvSpPr/>
           <p:nvPr/>
         </p:nvSpPr>
         <p:spPr>
           <a:xfrm>
-            <a:off x="700000" y="880000"/>
-            <a:ext cx="9000000" cy="25000"/>
-          </a:xfrm>
-          <a:prstGeom prst="rect">
-            <a:avLst/>
-          </a:prstGeom>
-          <a:solidFill>
-            <a:srgbClr val="555555"/>
+            <a:off x="0" y="0"/>
+            <a:ext cx="12191695" cy="1300000"/>
+          </a:xfrm>
+          <a:prstGeom prst="rect">
+            <a:avLst/>
+          </a:prstGeom>
+          <a:solidFill>
+            <a:srgbClr val="F8F8F8"/>
           </a:solidFill>
           <a:ln>
             <a:noFill/>
@@ -6561,14 +6753,14 @@
       </p:sp>
       <p:sp>
         <p:nvSpPr>
-          <p:cNvPr id="5" name="TextBox 4"/>
+          <p:cNvPr id="4" name="TextBox 3"/>
           <p:cNvSpPr txBox="1"/>
           <p:nvPr/>
         </p:nvSpPr>
         <p:spPr>
           <a:xfrm>
-            <a:off x="700000" y="950000"/>
-            <a:ext cx="11000000" cy="350000"/>
+            <a:off x="700000" y="220000"/>
+            <a:ext cx="11200000" cy="550000"/>
           </a:xfrm>
           <a:prstGeom prst="rect">
             <a:avLst/>
@@ -6583,35 +6775,35 @@
           <a:p>
             <a:pPr algn="l"/>
             <a:r>
-              <a:rPr sz="1200" b="0">
-                <a:solidFill>
-                  <a:srgbClr val="666666"/>
-                </a:solidFill>
-                <a:latin typeface="Open Sans"/>
-                <a:ea typeface="Open Sans"/>
-                <a:cs typeface="Open Sans"/>
+              <a:rPr sz="2000" b="1">
+                <a:solidFill>
+                  <a:srgbClr val="333333"/>
+                </a:solidFill>
+                <a:latin typeface="Calibri"/>
+                <a:ea typeface="Calibri"/>
+                <a:cs typeface="Calibri"/>
               </a:rPr>
-              <a:t>Оказание первой помощи при наружных кровотечениях</a:t>
-            </a:r>
-          </a:p>
-        </p:txBody>
-      </p:sp>
-      <p:sp>
-        <p:nvSpPr>
-          <p:cNvPr id="6" name="Rectangle 5"/>
+              <a:t>ОСТРАЯ МАССИВНАЯ КРОВОПОТЕРЯ</a:t>
+            </a:r>
+          </a:p>
+        </p:txBody>
+      </p:sp>
+      <p:sp>
+        <p:nvSpPr>
+          <p:cNvPr id="5" name="Rectangle 4"/>
           <p:cNvSpPr/>
           <p:nvPr/>
         </p:nvSpPr>
         <p:spPr>
           <a:xfrm>
-            <a:off x="0" y="2800000"/>
-            <a:ext cx="420000" cy="420000"/>
-          </a:xfrm>
-          <a:prstGeom prst="rect">
-            <a:avLst/>
-          </a:prstGeom>
-          <a:solidFill>
-            <a:srgbClr val="555555"/>
+            <a:off x="700000" y="820000"/>
+            <a:ext cx="8500000" cy="28000"/>
+          </a:xfrm>
+          <a:prstGeom prst="rect">
+            <a:avLst/>
+          </a:prstGeom>
+          <a:solidFill>
+            <a:srgbClr val="606060"/>
           </a:solidFill>
           <a:ln>
             <a:noFill/>
@@ -6641,14 +6833,14 @@
       </p:sp>
       <p:sp>
         <p:nvSpPr>
-          <p:cNvPr id="7" name="TextBox 6"/>
+          <p:cNvPr id="6" name="TextBox 5"/>
           <p:cNvSpPr txBox="1"/>
           <p:nvPr/>
         </p:nvSpPr>
         <p:spPr>
           <a:xfrm>
-            <a:off x="0" y="2800000"/>
-            <a:ext cx="420000" cy="420000"/>
+            <a:off x="700000" y="880000"/>
+            <a:ext cx="11000000" cy="320000"/>
           </a:xfrm>
           <a:prstGeom prst="rect">
             <a:avLst/>
@@ -6656,42 +6848,42 @@
           <a:noFill/>
         </p:spPr>
         <p:txBody>
-          <a:bodyPr wrap="square" anchor="ctr">
+          <a:bodyPr wrap="square" anchor="t">
             <a:spAutoFit/>
           </a:bodyPr>
           <a:lstStyle/>
           <a:p>
-            <a:pPr algn="ctr"/>
-            <a:r>
-              <a:rPr sz="1400" b="1">
-                <a:solidFill>
-                  <a:srgbClr val="FFFFFF"/>
-                </a:solidFill>
-                <a:latin typeface="Open Sans"/>
-                <a:ea typeface="Open Sans"/>
-                <a:cs typeface="Open Sans"/>
+            <a:pPr algn="l"/>
+            <a:r>
+              <a:rPr sz="1100" b="0">
+                <a:solidFill>
+                  <a:srgbClr val="777777"/>
+                </a:solidFill>
+                <a:latin typeface="Calibri"/>
+                <a:ea typeface="Calibri"/>
+                <a:cs typeface="Calibri"/>
               </a:rPr>
-              <a:t>4</a:t>
-            </a:r>
-          </a:p>
-        </p:txBody>
-      </p:sp>
-      <p:sp>
-        <p:nvSpPr>
-          <p:cNvPr id="8" name="Rounded Rectangle 7"/>
+              <a:t>Оказание первой помощи при наружных кровотечениях</a:t>
+            </a:r>
+          </a:p>
+        </p:txBody>
+      </p:sp>
+      <p:sp>
+        <p:nvSpPr>
+          <p:cNvPr id="7" name="Rectangle 6"/>
           <p:cNvSpPr/>
           <p:nvPr/>
         </p:nvSpPr>
         <p:spPr>
           <a:xfrm>
-            <a:off x="700000" y="1600000"/>
-            <a:ext cx="11000000" cy="1600000"/>
-          </a:xfrm>
-          <a:prstGeom prst="roundRect">
-            <a:avLst/>
-          </a:prstGeom>
-          <a:solidFill>
-            <a:srgbClr val="F5F0E1"/>
+            <a:off x="0" y="2700000"/>
+            <a:ext cx="400000" cy="400000"/>
+          </a:xfrm>
+          <a:prstGeom prst="rect">
+            <a:avLst/>
+          </a:prstGeom>
+          <a:solidFill>
+            <a:srgbClr val="606060"/>
           </a:solidFill>
           <a:ln>
             <a:noFill/>
@@ -6721,14 +6913,14 @@
       </p:sp>
       <p:sp>
         <p:nvSpPr>
-          <p:cNvPr id="9" name="TextBox 8"/>
+          <p:cNvPr id="8" name="TextBox 7"/>
           <p:cNvSpPr txBox="1"/>
           <p:nvPr/>
         </p:nvSpPr>
         <p:spPr>
           <a:xfrm>
-            <a:off x="950000" y="1800000"/>
-            <a:ext cx="10500000" cy="1200000"/>
+            <a:off x="0" y="2700000"/>
+            <a:ext cx="400000" cy="400000"/>
           </a:xfrm>
           <a:prstGeom prst="rect">
             <a:avLst/>
@@ -6741,18 +6933,63 @@
           </a:bodyPr>
           <a:lstStyle/>
           <a:p>
-            <a:pPr algn="l"/>
-            <a:r>
-              <a:rPr sz="1800" b="1">
-                <a:solidFill>
-                  <a:srgbClr val="333333"/>
-                </a:solidFill>
-                <a:latin typeface="Open Sans"/>
-                <a:ea typeface="Open Sans"/>
-                <a:cs typeface="Open Sans"/>
+            <a:pPr algn="ctr"/>
+            <a:r>
+              <a:rPr sz="1300" b="1">
+                <a:solidFill>
+                  <a:srgbClr val="FFFFFF"/>
+                </a:solidFill>
+                <a:latin typeface="Calibri"/>
+                <a:ea typeface="Calibri"/>
+                <a:cs typeface="Calibri"/>
               </a:rPr>
-              <a:t>Наиболее опасным является интенсивное кровотечение, приводящее к быстрой потере большого количества крови, — острая массивная кровопотеря.</a:t>
-            </a:r>
+              <a:t>4</a:t>
+            </a:r>
+          </a:p>
+        </p:txBody>
+      </p:sp>
+      <p:sp>
+        <p:nvSpPr>
+          <p:cNvPr id="9" name="Rounded Rectangle 8"/>
+          <p:cNvSpPr/>
+          <p:nvPr/>
+        </p:nvSpPr>
+        <p:spPr>
+          <a:xfrm>
+            <a:off x="700000" y="1550000"/>
+            <a:ext cx="11000000" cy="1400000"/>
+          </a:xfrm>
+          <a:prstGeom prst="roundRect">
+            <a:avLst/>
+          </a:prstGeom>
+          <a:solidFill>
+            <a:srgbClr val="8DDBCD"/>
+          </a:solidFill>
+          <a:ln w="15875">
+            <a:solidFill>
+              <a:srgbClr val="1AA090"/>
+            </a:solidFill>
+          </a:ln>
+        </p:spPr>
+        <p:style>
+          <a:lnRef idx="1">
+            <a:schemeClr val="accent1"/>
+          </a:lnRef>
+          <a:fillRef idx="3">
+            <a:schemeClr val="accent1"/>
+          </a:fillRef>
+          <a:effectRef idx="2">
+            <a:schemeClr val="accent1"/>
+          </a:effectRef>
+          <a:fontRef idx="minor">
+            <a:schemeClr val="lt1"/>
+          </a:fontRef>
+        </p:style>
+        <p:txBody>
+          <a:bodyPr rtlCol="0" anchor="ctr"/>
+          <a:lstStyle/>
+          <a:p>
+            <a:pPr algn="ctr"/>
           </a:p>
         </p:txBody>
       </p:sp>
@@ -6764,7 +7001,44 @@
         </p:nvSpPr>
         <p:spPr>
           <a:xfrm>
-            <a:off x="700000" y="3600000"/>
+            <a:off x="900000" y="1730000"/>
+            <a:ext cx="10600000" cy="1040000"/>
+          </a:xfrm>
+          <a:prstGeom prst="rect">
+            <a:avLst/>
+          </a:prstGeom>
+          <a:noFill/>
+        </p:spPr>
+        <p:txBody>
+          <a:bodyPr wrap="square" anchor="ctr">
+            <a:spAutoFit/>
+          </a:bodyPr>
+          <a:lstStyle/>
+          <a:p>
+            <a:pPr algn="l"/>
+            <a:r>
+              <a:rPr sz="1500" b="0">
+                <a:solidFill>
+                  <a:srgbClr val="0D6B60"/>
+                </a:solidFill>
+                <a:latin typeface="Calibri"/>
+                <a:ea typeface="Calibri"/>
+                <a:cs typeface="Calibri"/>
+              </a:rPr>
+              <a:t>Наиболее опасно интенсивное кровотечение, приводящее к быстрой потере большого количества крови, — острая массивная кровопотеря.</a:t>
+            </a:r>
+          </a:p>
+        </p:txBody>
+      </p:sp>
+      <p:sp>
+        <p:nvSpPr>
+          <p:cNvPr id="11" name="TextBox 10"/>
+          <p:cNvSpPr txBox="1"/>
+          <p:nvPr/>
+        </p:nvSpPr>
+        <p:spPr>
+          <a:xfrm>
+            <a:off x="700000" y="3300000"/>
             <a:ext cx="11000000" cy="3000000"/>
           </a:xfrm>
           <a:prstGeom prst="rect">
@@ -6780,55 +7054,55 @@
           <a:p>
             <a:pPr algn="l">
               <a:spcAft>
-                <a:spcPts val="800"/>
+                <a:spcPts val="700"/>
               </a:spcAft>
             </a:pPr>
             <a:r>
-              <a:rPr sz="1600" b="0">
+              <a:rPr sz="1500" b="0">
                 <a:solidFill>
                   <a:srgbClr val="333333"/>
                 </a:solidFill>
-                <a:latin typeface="Open Sans"/>
-                <a:ea typeface="Open Sans"/>
-                <a:cs typeface="Open Sans"/>
+                <a:latin typeface="Calibri"/>
+                <a:ea typeface="Calibri"/>
+                <a:cs typeface="Calibri"/>
               </a:rPr>
-              <a:t>•  При повреждении крупных сосудов без остановки кровотечения гибель может наступить в течение нескольких минут.</a:t>
+              <a:t>•  При повреждении крупных сосудов без остановки гибель может наступить в течение нескольких минут.</a:t>
             </a:r>
           </a:p>
           <a:p>
             <a:pPr algn="l">
               <a:spcAft>
-                <a:spcPts val="800"/>
+                <a:spcPts val="700"/>
               </a:spcAft>
             </a:pPr>
             <a:r>
-              <a:rPr sz="1600" b="0">
+              <a:rPr sz="1500" b="0">
                 <a:solidFill>
                   <a:srgbClr val="333333"/>
                 </a:solidFill>
-                <a:latin typeface="Open Sans"/>
-                <a:ea typeface="Open Sans"/>
-                <a:cs typeface="Open Sans"/>
+                <a:latin typeface="Calibri"/>
+                <a:ea typeface="Calibri"/>
+                <a:cs typeface="Calibri"/>
               </a:rPr>
-              <a:t>•  Признаки кровопотери возможны и при уже остановленном кровотечении, и при отсутствии видимой крови (внутреннее кровотечение).</a:t>
+              <a:t>•  Признаки кровопотери возможны и при остановленном кровотечении, и при отсутствии видимой крови.</a:t>
             </a:r>
           </a:p>
           <a:p>
             <a:pPr algn="l">
               <a:spcAft>
-                <a:spcPts val="800"/>
+                <a:spcPts val="700"/>
               </a:spcAft>
             </a:pPr>
             <a:r>
-              <a:rPr sz="1600" b="0">
+              <a:rPr sz="1500" b="0">
                 <a:solidFill>
                   <a:srgbClr val="333333"/>
                 </a:solidFill>
-                <a:latin typeface="Open Sans"/>
-                <a:ea typeface="Open Sans"/>
-                <a:cs typeface="Open Sans"/>
+                <a:latin typeface="Calibri"/>
+                <a:ea typeface="Calibri"/>
+                <a:cs typeface="Calibri"/>
               </a:rPr>
-              <a:t>•  Кровотечения слабой и средней интенсивности тоже нужно останавливать — чтобы не допустить поздних осложнений.</a:t>
+              <a:t>•  Кровотечения слабой и средней интенсивности тоже нужно останавливать.</a:t>
             </a:r>
           </a:p>
         </p:txBody>
@@ -6896,57 +7170,20 @@
       </p:sp>
       <p:sp>
         <p:nvSpPr>
-          <p:cNvPr id="3" name="TextBox 2"/>
-          <p:cNvSpPr txBox="1"/>
-          <p:nvPr/>
-        </p:nvSpPr>
-        <p:spPr>
-          <a:xfrm>
-            <a:off x="700000" y="280000"/>
-            <a:ext cx="11000000" cy="550000"/>
-          </a:xfrm>
-          <a:prstGeom prst="rect">
-            <a:avLst/>
-          </a:prstGeom>
-          <a:noFill/>
-        </p:spPr>
-        <p:txBody>
-          <a:bodyPr wrap="square" anchor="t">
-            <a:spAutoFit/>
-          </a:bodyPr>
-          <a:lstStyle/>
-          <a:p>
-            <a:pPr algn="l"/>
-            <a:r>
-              <a:rPr sz="2600" b="1">
-                <a:solidFill>
-                  <a:srgbClr val="333333"/>
-                </a:solidFill>
-                <a:latin typeface="Open Sans"/>
-                <a:ea typeface="Open Sans"/>
-                <a:cs typeface="Open Sans"/>
-              </a:rPr>
-              <a:t>ВИДЫ НАРУЖНОГО КРОВОТЕЧЕНИЯ</a:t>
-            </a:r>
-          </a:p>
-        </p:txBody>
-      </p:sp>
-      <p:sp>
-        <p:nvSpPr>
-          <p:cNvPr id="4" name="Rectangle 3"/>
+          <p:cNvPr id="3" name="Rectangle 2"/>
           <p:cNvSpPr/>
           <p:nvPr/>
         </p:nvSpPr>
         <p:spPr>
           <a:xfrm>
-            <a:off x="700000" y="880000"/>
-            <a:ext cx="9000000" cy="25000"/>
-          </a:xfrm>
-          <a:prstGeom prst="rect">
-            <a:avLst/>
-          </a:prstGeom>
-          <a:solidFill>
-            <a:srgbClr val="555555"/>
+            <a:off x="0" y="0"/>
+            <a:ext cx="12191695" cy="1300000"/>
+          </a:xfrm>
+          <a:prstGeom prst="rect">
+            <a:avLst/>
+          </a:prstGeom>
+          <a:solidFill>
+            <a:srgbClr val="F8F8F8"/>
           </a:solidFill>
           <a:ln>
             <a:noFill/>
@@ -6976,14 +7213,14 @@
       </p:sp>
       <p:sp>
         <p:nvSpPr>
-          <p:cNvPr id="5" name="TextBox 4"/>
+          <p:cNvPr id="4" name="TextBox 3"/>
           <p:cNvSpPr txBox="1"/>
           <p:nvPr/>
         </p:nvSpPr>
         <p:spPr>
           <a:xfrm>
-            <a:off x="700000" y="950000"/>
-            <a:ext cx="11000000" cy="350000"/>
+            <a:off x="700000" y="220000"/>
+            <a:ext cx="11200000" cy="550000"/>
           </a:xfrm>
           <a:prstGeom prst="rect">
             <a:avLst/>
@@ -6998,35 +7235,35 @@
           <a:p>
             <a:pPr algn="l"/>
             <a:r>
-              <a:rPr sz="1200" b="0">
-                <a:solidFill>
-                  <a:srgbClr val="666666"/>
-                </a:solidFill>
-                <a:latin typeface="Open Sans"/>
-                <a:ea typeface="Open Sans"/>
-                <a:cs typeface="Open Sans"/>
+              <a:rPr sz="2000" b="1">
+                <a:solidFill>
+                  <a:srgbClr val="333333"/>
+                </a:solidFill>
+                <a:latin typeface="Calibri"/>
+                <a:ea typeface="Calibri"/>
+                <a:cs typeface="Calibri"/>
               </a:rPr>
-              <a:t>Оказание первой помощи при наружных кровотечениях</a:t>
-            </a:r>
-          </a:p>
-        </p:txBody>
-      </p:sp>
-      <p:sp>
-        <p:nvSpPr>
-          <p:cNvPr id="6" name="Rectangle 5"/>
+              <a:t>ВИДЫ НАРУЖНОГО КРОВОТЕЧЕНИЯ</a:t>
+            </a:r>
+          </a:p>
+        </p:txBody>
+      </p:sp>
+      <p:sp>
+        <p:nvSpPr>
+          <p:cNvPr id="5" name="Rectangle 4"/>
           <p:cNvSpPr/>
           <p:nvPr/>
         </p:nvSpPr>
         <p:spPr>
           <a:xfrm>
-            <a:off x="0" y="2800000"/>
-            <a:ext cx="420000" cy="420000"/>
-          </a:xfrm>
-          <a:prstGeom prst="rect">
-            <a:avLst/>
-          </a:prstGeom>
-          <a:solidFill>
-            <a:srgbClr val="555555"/>
+            <a:off x="700000" y="820000"/>
+            <a:ext cx="8500000" cy="28000"/>
+          </a:xfrm>
+          <a:prstGeom prst="rect">
+            <a:avLst/>
+          </a:prstGeom>
+          <a:solidFill>
+            <a:srgbClr val="606060"/>
           </a:solidFill>
           <a:ln>
             <a:noFill/>
@@ -7056,14 +7293,94 @@
       </p:sp>
       <p:sp>
         <p:nvSpPr>
-          <p:cNvPr id="7" name="TextBox 6"/>
+          <p:cNvPr id="6" name="TextBox 5"/>
           <p:cNvSpPr txBox="1"/>
           <p:nvPr/>
         </p:nvSpPr>
         <p:spPr>
           <a:xfrm>
-            <a:off x="0" y="2800000"/>
-            <a:ext cx="420000" cy="420000"/>
+            <a:off x="700000" y="880000"/>
+            <a:ext cx="11000000" cy="320000"/>
+          </a:xfrm>
+          <a:prstGeom prst="rect">
+            <a:avLst/>
+          </a:prstGeom>
+          <a:noFill/>
+        </p:spPr>
+        <p:txBody>
+          <a:bodyPr wrap="square" anchor="t">
+            <a:spAutoFit/>
+          </a:bodyPr>
+          <a:lstStyle/>
+          <a:p>
+            <a:pPr algn="l"/>
+            <a:r>
+              <a:rPr sz="1100" b="0">
+                <a:solidFill>
+                  <a:srgbClr val="777777"/>
+                </a:solidFill>
+                <a:latin typeface="Calibri"/>
+                <a:ea typeface="Calibri"/>
+                <a:cs typeface="Calibri"/>
+              </a:rPr>
+              <a:t>Оказание первой помощи при наружных кровотечениях</a:t>
+            </a:r>
+          </a:p>
+        </p:txBody>
+      </p:sp>
+      <p:sp>
+        <p:nvSpPr>
+          <p:cNvPr id="7" name="Rectangle 6"/>
+          <p:cNvSpPr/>
+          <p:nvPr/>
+        </p:nvSpPr>
+        <p:spPr>
+          <a:xfrm>
+            <a:off x="0" y="2700000"/>
+            <a:ext cx="400000" cy="400000"/>
+          </a:xfrm>
+          <a:prstGeom prst="rect">
+            <a:avLst/>
+          </a:prstGeom>
+          <a:solidFill>
+            <a:srgbClr val="606060"/>
+          </a:solidFill>
+          <a:ln>
+            <a:noFill/>
+          </a:ln>
+        </p:spPr>
+        <p:style>
+          <a:lnRef idx="1">
+            <a:schemeClr val="accent1"/>
+          </a:lnRef>
+          <a:fillRef idx="3">
+            <a:schemeClr val="accent1"/>
+          </a:fillRef>
+          <a:effectRef idx="2">
+            <a:schemeClr val="accent1"/>
+          </a:effectRef>
+          <a:fontRef idx="minor">
+            <a:schemeClr val="lt1"/>
+          </a:fontRef>
+        </p:style>
+        <p:txBody>
+          <a:bodyPr rtlCol="0" anchor="ctr"/>
+          <a:lstStyle/>
+          <a:p>
+            <a:pPr algn="ctr"/>
+          </a:p>
+        </p:txBody>
+      </p:sp>
+      <p:sp>
+        <p:nvSpPr>
+          <p:cNvPr id="8" name="TextBox 7"/>
+          <p:cNvSpPr txBox="1"/>
+          <p:nvPr/>
+        </p:nvSpPr>
+        <p:spPr>
+          <a:xfrm>
+            <a:off x="0" y="2700000"/>
+            <a:ext cx="400000" cy="400000"/>
           </a:xfrm>
           <a:prstGeom prst="rect">
             <a:avLst/>
@@ -7078,13 +7395,13 @@
           <a:p>
             <a:pPr algn="ctr"/>
             <a:r>
-              <a:rPr sz="1400" b="1">
+              <a:rPr sz="1300" b="1">
                 <a:solidFill>
                   <a:srgbClr val="FFFFFF"/>
                 </a:solidFill>
-                <a:latin typeface="Open Sans"/>
-                <a:ea typeface="Open Sans"/>
-                <a:cs typeface="Open Sans"/>
+                <a:latin typeface="Calibri"/>
+                <a:ea typeface="Calibri"/>
+                <a:cs typeface="Calibri"/>
               </a:rPr>
               <a:t>5</a:t>
             </a:r>
@@ -7093,14 +7410,102 @@
       </p:sp>
       <p:sp>
         <p:nvSpPr>
-          <p:cNvPr id="8" name="TextBox 7"/>
+          <p:cNvPr id="9" name="Rounded Rectangle 8"/>
+          <p:cNvSpPr/>
+          <p:nvPr/>
+        </p:nvSpPr>
+        <p:spPr>
+          <a:xfrm>
+            <a:off x="700000" y="1500000"/>
+            <a:ext cx="3600000" cy="5000000"/>
+          </a:xfrm>
+          <a:prstGeom prst="roundRect">
+            <a:avLst/>
+          </a:prstGeom>
+          <a:solidFill>
+            <a:srgbClr val="FFFFFF"/>
+          </a:solidFill>
+          <a:ln w="15875">
+            <a:solidFill>
+              <a:srgbClr val="8DDBCD"/>
+            </a:solidFill>
+          </a:ln>
+        </p:spPr>
+        <p:style>
+          <a:lnRef idx="1">
+            <a:schemeClr val="accent1"/>
+          </a:lnRef>
+          <a:fillRef idx="3">
+            <a:schemeClr val="accent1"/>
+          </a:fillRef>
+          <a:effectRef idx="2">
+            <a:schemeClr val="accent1"/>
+          </a:effectRef>
+          <a:fontRef idx="minor">
+            <a:schemeClr val="lt1"/>
+          </a:fontRef>
+        </p:style>
+        <p:txBody>
+          <a:bodyPr rtlCol="0" anchor="ctr"/>
+          <a:lstStyle/>
+          <a:p>
+            <a:pPr algn="ctr"/>
+          </a:p>
+        </p:txBody>
+      </p:sp>
+      <p:sp>
+        <p:nvSpPr>
+          <p:cNvPr id="10" name="Oval 9"/>
+          <p:cNvSpPr/>
+          <p:nvPr/>
+        </p:nvSpPr>
+        <p:spPr>
+          <a:xfrm>
+            <a:off x="2100000" y="1650000"/>
+            <a:ext cx="800000" cy="400000"/>
+          </a:xfrm>
+          <a:prstGeom prst="ellipse">
+            <a:avLst/>
+          </a:prstGeom>
+          <a:solidFill>
+            <a:srgbClr val="8DDBCD"/>
+          </a:solidFill>
+          <a:ln>
+            <a:noFill/>
+          </a:ln>
+        </p:spPr>
+        <p:style>
+          <a:lnRef idx="1">
+            <a:schemeClr val="accent1"/>
+          </a:lnRef>
+          <a:fillRef idx="3">
+            <a:schemeClr val="accent1"/>
+          </a:fillRef>
+          <a:effectRef idx="2">
+            <a:schemeClr val="accent1"/>
+          </a:effectRef>
+          <a:fontRef idx="minor">
+            <a:schemeClr val="lt1"/>
+          </a:fontRef>
+        </p:style>
+        <p:txBody>
+          <a:bodyPr rtlCol="0" anchor="ctr"/>
+          <a:lstStyle/>
+          <a:p>
+            <a:pPr algn="ctr"/>
+          </a:p>
+        </p:txBody>
+      </p:sp>
+      <p:sp>
+        <p:nvSpPr>
+          <p:cNvPr id="11" name="TextBox 10"/>
           <p:cNvSpPr txBox="1"/>
           <p:nvPr/>
         </p:nvSpPr>
         <p:spPr>
           <a:xfrm>
-            <a:off x="700000" y="1450000"/>
-            <a:ext cx="11000000" cy="500000"/>
+            <a:off x="800000" y="2150000"/>
+            <a:ext cx="3400000" cy="450000"/>
           </a:xfrm>
           <a:prstGeom prst="rect">
             <a:avLst/>
@@ -7113,52 +7518,15 @@
           </a:bodyPr>
           <a:lstStyle/>
           <a:p>
-            <a:pPr algn="l"/>
-            <a:r>
-              <a:rPr sz="1500" b="0">
-                <a:solidFill>
-                  <a:srgbClr val="666666"/>
-                </a:solidFill>
-                <a:latin typeface="Open Sans"/>
-                <a:ea typeface="Open Sans"/>
-                <a:cs typeface="Open Sans"/>
-              </a:rPr>
-              <a:t>Наружное кровотечение: кровь изливается наружу при повреждении кожи и слизистых.</a:t>
-            </a:r>
-          </a:p>
-        </p:txBody>
-      </p:sp>
-      <p:sp>
-        <p:nvSpPr>
-          <p:cNvPr id="9" name="TextBox 8"/>
-          <p:cNvSpPr txBox="1"/>
-          <p:nvPr/>
-        </p:nvSpPr>
-        <p:spPr>
-          <a:xfrm>
-            <a:off x="700000" y="2050000"/>
-            <a:ext cx="3600000" cy="450000"/>
-          </a:xfrm>
-          <a:prstGeom prst="rect">
-            <a:avLst/>
-          </a:prstGeom>
-          <a:noFill/>
-        </p:spPr>
-        <p:txBody>
-          <a:bodyPr wrap="square" anchor="t">
-            <a:spAutoFit/>
-          </a:bodyPr>
-          <a:lstStyle/>
-          <a:p>
-            <a:pPr algn="ctr"/>
-            <a:r>
-              <a:rPr sz="1600" b="1">
-                <a:solidFill>
-                  <a:srgbClr val="333333"/>
-                </a:solidFill>
-                <a:latin typeface="Open Sans"/>
-                <a:ea typeface="Open Sans"/>
-                <a:cs typeface="Open Sans"/>
+            <a:pPr algn="ctr"/>
+            <a:r>
+              <a:rPr sz="1400" b="1">
+                <a:solidFill>
+                  <a:srgbClr val="0D6B60"/>
+                </a:solidFill>
+                <a:latin typeface="Calibri"/>
+                <a:ea typeface="Calibri"/>
+                <a:cs typeface="Calibri"/>
               </a:rPr>
               <a:t>Артериальное</a:t>
             </a:r>
@@ -7167,7 +7535,7 @@
       </p:sp>
       <p:pic>
         <p:nvPicPr>
-          <p:cNvPr id="10" name="Picture 9" descr="bleed_arterial.png"/>
+          <p:cNvPr id="12" name="Picture 11" descr="bleed_arterial.png"/>
           <p:cNvPicPr>
             <a:picLocks noChangeAspect="1"/>
           </p:cNvPicPr>
@@ -7181,8 +7549,8 @@
         </p:blipFill>
         <p:spPr>
           <a:xfrm>
-            <a:off x="1398361" y="2550000"/>
-            <a:ext cx="2203278" cy="2800000"/>
+            <a:off x="1555738" y="2700000"/>
+            <a:ext cx="1888524" cy="2400000"/>
           </a:xfrm>
           <a:prstGeom prst="rect">
             <a:avLst/>
@@ -7191,14 +7559,14 @@
       </p:pic>
       <p:sp>
         <p:nvSpPr>
-          <p:cNvPr id="11" name="TextBox 10"/>
+          <p:cNvPr id="13" name="TextBox 12"/>
           <p:cNvSpPr txBox="1"/>
           <p:nvPr/>
         </p:nvSpPr>
         <p:spPr>
           <a:xfrm>
-            <a:off x="700000" y="5500000"/>
-            <a:ext cx="3600000" cy="1300000"/>
+            <a:off x="850000" y="5300000"/>
+            <a:ext cx="3300000" cy="1000000"/>
           </a:xfrm>
           <a:prstGeom prst="rect">
             <a:avLst/>
@@ -7213,29 +7581,117 @@
           <a:p>
             <a:pPr algn="ctr"/>
             <a:r>
-              <a:rPr sz="1200" b="0">
+              <a:rPr sz="1100" b="0">
                 <a:solidFill>
                   <a:srgbClr val="333333"/>
                 </a:solidFill>
-                <a:latin typeface="Open Sans"/>
-                <a:ea typeface="Open Sans"/>
-                <a:cs typeface="Open Sans"/>
+                <a:latin typeface="Calibri"/>
+                <a:ea typeface="Calibri"/>
+                <a:cs typeface="Calibri"/>
               </a:rPr>
-              <a:t>Пульсирующая алая струя; быстро растекающаяся лужа; одежда быстро пропитывается кровью. Наиболее опасно.</a:t>
-            </a:r>
-          </a:p>
-        </p:txBody>
-      </p:sp>
-      <p:sp>
-        <p:nvSpPr>
-          <p:cNvPr id="12" name="TextBox 11"/>
+              <a:t>Пульсирующая алая струя; быстро растекающаяся лужа; одежда быстро мокнет.</a:t>
+            </a:r>
+          </a:p>
+        </p:txBody>
+      </p:sp>
+      <p:sp>
+        <p:nvSpPr>
+          <p:cNvPr id="14" name="Rounded Rectangle 13"/>
+          <p:cNvSpPr/>
+          <p:nvPr/>
+        </p:nvSpPr>
+        <p:spPr>
+          <a:xfrm>
+            <a:off x="4550000" y="1500000"/>
+            <a:ext cx="3600000" cy="5000000"/>
+          </a:xfrm>
+          <a:prstGeom prst="roundRect">
+            <a:avLst/>
+          </a:prstGeom>
+          <a:solidFill>
+            <a:srgbClr val="FFFFFF"/>
+          </a:solidFill>
+          <a:ln w="15875">
+            <a:solidFill>
+              <a:srgbClr val="8DDBCD"/>
+            </a:solidFill>
+          </a:ln>
+        </p:spPr>
+        <p:style>
+          <a:lnRef idx="1">
+            <a:schemeClr val="accent1"/>
+          </a:lnRef>
+          <a:fillRef idx="3">
+            <a:schemeClr val="accent1"/>
+          </a:fillRef>
+          <a:effectRef idx="2">
+            <a:schemeClr val="accent1"/>
+          </a:effectRef>
+          <a:fontRef idx="minor">
+            <a:schemeClr val="lt1"/>
+          </a:fontRef>
+        </p:style>
+        <p:txBody>
+          <a:bodyPr rtlCol="0" anchor="ctr"/>
+          <a:lstStyle/>
+          <a:p>
+            <a:pPr algn="ctr"/>
+          </a:p>
+        </p:txBody>
+      </p:sp>
+      <p:sp>
+        <p:nvSpPr>
+          <p:cNvPr id="15" name="Oval 14"/>
+          <p:cNvSpPr/>
+          <p:nvPr/>
+        </p:nvSpPr>
+        <p:spPr>
+          <a:xfrm>
+            <a:off x="5950000" y="1650000"/>
+            <a:ext cx="800000" cy="400000"/>
+          </a:xfrm>
+          <a:prstGeom prst="ellipse">
+            <a:avLst/>
+          </a:prstGeom>
+          <a:solidFill>
+            <a:srgbClr val="8DDBCD"/>
+          </a:solidFill>
+          <a:ln>
+            <a:noFill/>
+          </a:ln>
+        </p:spPr>
+        <p:style>
+          <a:lnRef idx="1">
+            <a:schemeClr val="accent1"/>
+          </a:lnRef>
+          <a:fillRef idx="3">
+            <a:schemeClr val="accent1"/>
+          </a:fillRef>
+          <a:effectRef idx="2">
+            <a:schemeClr val="accent1"/>
+          </a:effectRef>
+          <a:fontRef idx="minor">
+            <a:schemeClr val="lt1"/>
+          </a:fontRef>
+        </p:style>
+        <p:txBody>
+          <a:bodyPr rtlCol="0" anchor="ctr"/>
+          <a:lstStyle/>
+          <a:p>
+            <a:pPr algn="ctr"/>
+          </a:p>
+        </p:txBody>
+      </p:sp>
+      <p:sp>
+        <p:nvSpPr>
+          <p:cNvPr id="16" name="TextBox 15"/>
           <p:cNvSpPr txBox="1"/>
           <p:nvPr/>
         </p:nvSpPr>
         <p:spPr>
           <a:xfrm>
-            <a:off x="4600000" y="2050000"/>
-            <a:ext cx="3600000" cy="450000"/>
+            <a:off x="4650000" y="2150000"/>
+            <a:ext cx="3400000" cy="450000"/>
           </a:xfrm>
           <a:prstGeom prst="rect">
             <a:avLst/>
@@ -7250,13 +7706,13 @@
           <a:p>
             <a:pPr algn="ctr"/>
             <a:r>
-              <a:rPr sz="1600" b="1">
-                <a:solidFill>
-                  <a:srgbClr val="333333"/>
-                </a:solidFill>
-                <a:latin typeface="Open Sans"/>
-                <a:ea typeface="Open Sans"/>
-                <a:cs typeface="Open Sans"/>
+              <a:rPr sz="1400" b="1">
+                <a:solidFill>
+                  <a:srgbClr val="0D6B60"/>
+                </a:solidFill>
+                <a:latin typeface="Calibri"/>
+                <a:ea typeface="Calibri"/>
+                <a:cs typeface="Calibri"/>
               </a:rPr>
               <a:t>Венозное</a:t>
             </a:r>
@@ -7265,7 +7721,7 @@
       </p:sp>
       <p:pic>
         <p:nvPicPr>
-          <p:cNvPr id="13" name="Picture 12" descr="bleed_venous.png"/>
+          <p:cNvPr id="17" name="Picture 16" descr="bleed_venous.png"/>
           <p:cNvPicPr>
             <a:picLocks noChangeAspect="1"/>
           </p:cNvPicPr>
@@ -7279,8 +7735,8 @@
         </p:blipFill>
         <p:spPr>
           <a:xfrm>
-            <a:off x="5298361" y="2550000"/>
-            <a:ext cx="2203278" cy="2800000"/>
+            <a:off x="5405738" y="2700000"/>
+            <a:ext cx="1888524" cy="2400000"/>
           </a:xfrm>
           <a:prstGeom prst="rect">
             <a:avLst/>
@@ -7289,14 +7745,14 @@
       </p:pic>
       <p:sp>
         <p:nvSpPr>
-          <p:cNvPr id="14" name="TextBox 13"/>
+          <p:cNvPr id="18" name="TextBox 17"/>
           <p:cNvSpPr txBox="1"/>
           <p:nvPr/>
         </p:nvSpPr>
         <p:spPr>
           <a:xfrm>
-            <a:off x="4600000" y="5500000"/>
-            <a:ext cx="3600000" cy="1300000"/>
+            <a:off x="4700000" y="5300000"/>
+            <a:ext cx="3300000" cy="1000000"/>
           </a:xfrm>
           <a:prstGeom prst="rect">
             <a:avLst/>
@@ -7311,29 +7767,117 @@
           <a:p>
             <a:pPr algn="ctr"/>
             <a:r>
-              <a:rPr sz="1200" b="0">
+              <a:rPr sz="1100" b="0">
                 <a:solidFill>
                   <a:srgbClr val="333333"/>
                 </a:solidFill>
-                <a:latin typeface="Open Sans"/>
-                <a:ea typeface="Open Sans"/>
-                <a:cs typeface="Open Sans"/>
+                <a:latin typeface="Calibri"/>
+                <a:ea typeface="Calibri"/>
+                <a:cs typeface="Calibri"/>
               </a:rPr>
-              <a:t>Кровь тёмно-вишнёвая, вытекает «ручьём». Скорость кровопотери меньше, но остановка обязательна.</a:t>
-            </a:r>
-          </a:p>
-        </p:txBody>
-      </p:sp>
-      <p:sp>
-        <p:nvSpPr>
-          <p:cNvPr id="15" name="TextBox 14"/>
+              <a:t>Кровь тёмно-вишнёвая, вытекает «ручьём». Остановка обязательна.</a:t>
+            </a:r>
+          </a:p>
+        </p:txBody>
+      </p:sp>
+      <p:sp>
+        <p:nvSpPr>
+          <p:cNvPr id="19" name="Rounded Rectangle 18"/>
+          <p:cNvSpPr/>
+          <p:nvPr/>
+        </p:nvSpPr>
+        <p:spPr>
+          <a:xfrm>
+            <a:off x="8400000" y="1500000"/>
+            <a:ext cx="3600000" cy="5000000"/>
+          </a:xfrm>
+          <a:prstGeom prst="roundRect">
+            <a:avLst/>
+          </a:prstGeom>
+          <a:solidFill>
+            <a:srgbClr val="FFFFFF"/>
+          </a:solidFill>
+          <a:ln w="15875">
+            <a:solidFill>
+              <a:srgbClr val="8DDBCD"/>
+            </a:solidFill>
+          </a:ln>
+        </p:spPr>
+        <p:style>
+          <a:lnRef idx="1">
+            <a:schemeClr val="accent1"/>
+          </a:lnRef>
+          <a:fillRef idx="3">
+            <a:schemeClr val="accent1"/>
+          </a:fillRef>
+          <a:effectRef idx="2">
+            <a:schemeClr val="accent1"/>
+          </a:effectRef>
+          <a:fontRef idx="minor">
+            <a:schemeClr val="lt1"/>
+          </a:fontRef>
+        </p:style>
+        <p:txBody>
+          <a:bodyPr rtlCol="0" anchor="ctr"/>
+          <a:lstStyle/>
+          <a:p>
+            <a:pPr algn="ctr"/>
+          </a:p>
+        </p:txBody>
+      </p:sp>
+      <p:sp>
+        <p:nvSpPr>
+          <p:cNvPr id="20" name="Oval 19"/>
+          <p:cNvSpPr/>
+          <p:nvPr/>
+        </p:nvSpPr>
+        <p:spPr>
+          <a:xfrm>
+            <a:off x="9800000" y="1650000"/>
+            <a:ext cx="800000" cy="400000"/>
+          </a:xfrm>
+          <a:prstGeom prst="ellipse">
+            <a:avLst/>
+          </a:prstGeom>
+          <a:solidFill>
+            <a:srgbClr val="8DDBCD"/>
+          </a:solidFill>
+          <a:ln>
+            <a:noFill/>
+          </a:ln>
+        </p:spPr>
+        <p:style>
+          <a:lnRef idx="1">
+            <a:schemeClr val="accent1"/>
+          </a:lnRef>
+          <a:fillRef idx="3">
+            <a:schemeClr val="accent1"/>
+          </a:fillRef>
+          <a:effectRef idx="2">
+            <a:schemeClr val="accent1"/>
+          </a:effectRef>
+          <a:fontRef idx="minor">
+            <a:schemeClr val="lt1"/>
+          </a:fontRef>
+        </p:style>
+        <p:txBody>
+          <a:bodyPr rtlCol="0" anchor="ctr"/>
+          <a:lstStyle/>
+          <a:p>
+            <a:pPr algn="ctr"/>
+          </a:p>
+        </p:txBody>
+      </p:sp>
+      <p:sp>
+        <p:nvSpPr>
+          <p:cNvPr id="21" name="TextBox 20"/>
           <p:cNvSpPr txBox="1"/>
           <p:nvPr/>
         </p:nvSpPr>
         <p:spPr>
           <a:xfrm>
-            <a:off x="8500000" y="2050000"/>
-            <a:ext cx="3600000" cy="450000"/>
+            <a:off x="8500000" y="2150000"/>
+            <a:ext cx="3400000" cy="450000"/>
           </a:xfrm>
           <a:prstGeom prst="rect">
             <a:avLst/>
@@ -7348,13 +7892,13 @@
           <a:p>
             <a:pPr algn="ctr"/>
             <a:r>
-              <a:rPr sz="1600" b="1">
-                <a:solidFill>
-                  <a:srgbClr val="333333"/>
-                </a:solidFill>
-                <a:latin typeface="Open Sans"/>
-                <a:ea typeface="Open Sans"/>
-                <a:cs typeface="Open Sans"/>
+              <a:rPr sz="1400" b="1">
+                <a:solidFill>
+                  <a:srgbClr val="0D6B60"/>
+                </a:solidFill>
+                <a:latin typeface="Calibri"/>
+                <a:ea typeface="Calibri"/>
+                <a:cs typeface="Calibri"/>
               </a:rPr>
               <a:t>Капиллярное</a:t>
             </a:r>
@@ -7363,7 +7907,7 @@
       </p:sp>
       <p:pic>
         <p:nvPicPr>
-          <p:cNvPr id="16" name="Picture 15" descr="bleed_capillary.png"/>
+          <p:cNvPr id="22" name="Picture 21" descr="bleed_capillary.png"/>
           <p:cNvPicPr>
             <a:picLocks noChangeAspect="1"/>
           </p:cNvPicPr>
@@ -7377,8 +7921,8 @@
         </p:blipFill>
         <p:spPr>
           <a:xfrm>
-            <a:off x="9106557" y="2550000"/>
-            <a:ext cx="2386885" cy="2800000"/>
+            <a:off x="9177049" y="2700000"/>
+            <a:ext cx="2045901" cy="2400000"/>
           </a:xfrm>
           <a:prstGeom prst="rect">
             <a:avLst/>
@@ -7387,14 +7931,14 @@
       </p:pic>
       <p:sp>
         <p:nvSpPr>
-          <p:cNvPr id="17" name="TextBox 16"/>
+          <p:cNvPr id="23" name="TextBox 22"/>
           <p:cNvSpPr txBox="1"/>
           <p:nvPr/>
         </p:nvSpPr>
         <p:spPr>
           <a:xfrm>
-            <a:off x="8500000" y="5500000"/>
-            <a:ext cx="3600000" cy="1300000"/>
+            <a:off x="8550000" y="5300000"/>
+            <a:ext cx="3300000" cy="1000000"/>
           </a:xfrm>
           <a:prstGeom prst="rect">
             <a:avLst/>
@@ -7409,15 +7953,15 @@
           <a:p>
             <a:pPr algn="ctr"/>
             <a:r>
-              <a:rPr sz="1200" b="0">
+              <a:rPr sz="1100" b="0">
                 <a:solidFill>
                   <a:srgbClr val="333333"/>
                 </a:solidFill>
-                <a:latin typeface="Open Sans"/>
-                <a:ea typeface="Open Sans"/>
-                <a:cs typeface="Open Sans"/>
+                <a:latin typeface="Calibri"/>
+                <a:ea typeface="Calibri"/>
+                <a:cs typeface="Calibri"/>
               </a:rPr>
-              <a:t>Ссадины, порезы, царапины. Как правило, непосредственной угрозы жизни не представляет.</a:t>
+              <a:t>Ссадины, порезы, царапины. Обычно без угрозы жизни.</a:t>
             </a:r>
           </a:p>
         </p:txBody>
@@ -7485,57 +8029,20 @@
       </p:sp>
       <p:sp>
         <p:nvSpPr>
-          <p:cNvPr id="3" name="TextBox 2"/>
-          <p:cNvSpPr txBox="1"/>
-          <p:nvPr/>
-        </p:nvSpPr>
-        <p:spPr>
-          <a:xfrm>
-            <a:off x="700000" y="280000"/>
-            <a:ext cx="11000000" cy="550000"/>
-          </a:xfrm>
-          <a:prstGeom prst="rect">
-            <a:avLst/>
-          </a:prstGeom>
-          <a:noFill/>
-        </p:spPr>
-        <p:txBody>
-          <a:bodyPr wrap="square" anchor="t">
-            <a:spAutoFit/>
-          </a:bodyPr>
-          <a:lstStyle/>
-          <a:p>
-            <a:pPr algn="l"/>
-            <a:r>
-              <a:rPr sz="2600" b="1">
-                <a:solidFill>
-                  <a:srgbClr val="333333"/>
-                </a:solidFill>
-                <a:latin typeface="Open Sans"/>
-                <a:ea typeface="Open Sans"/>
-                <a:cs typeface="Open Sans"/>
-              </a:rPr>
-              <a:t>ОРИЕНТИР — ИНТЕНСИВНОСТЬ КРОВОТЕЧЕНИЯ</a:t>
-            </a:r>
-          </a:p>
-        </p:txBody>
-      </p:sp>
-      <p:sp>
-        <p:nvSpPr>
-          <p:cNvPr id="4" name="Rectangle 3"/>
+          <p:cNvPr id="3" name="Rectangle 2"/>
           <p:cNvSpPr/>
           <p:nvPr/>
         </p:nvSpPr>
         <p:spPr>
           <a:xfrm>
-            <a:off x="700000" y="880000"/>
-            <a:ext cx="9000000" cy="25000"/>
-          </a:xfrm>
-          <a:prstGeom prst="rect">
-            <a:avLst/>
-          </a:prstGeom>
-          <a:solidFill>
-            <a:srgbClr val="555555"/>
+            <a:off x="0" y="0"/>
+            <a:ext cx="12191695" cy="1300000"/>
+          </a:xfrm>
+          <a:prstGeom prst="rect">
+            <a:avLst/>
+          </a:prstGeom>
+          <a:solidFill>
+            <a:srgbClr val="F8F8F8"/>
           </a:solidFill>
           <a:ln>
             <a:noFill/>
@@ -7565,14 +8072,14 @@
       </p:sp>
       <p:sp>
         <p:nvSpPr>
-          <p:cNvPr id="5" name="TextBox 4"/>
+          <p:cNvPr id="4" name="TextBox 3"/>
           <p:cNvSpPr txBox="1"/>
           <p:nvPr/>
         </p:nvSpPr>
         <p:spPr>
           <a:xfrm>
-            <a:off x="700000" y="950000"/>
-            <a:ext cx="11000000" cy="350000"/>
+            <a:off x="700000" y="220000"/>
+            <a:ext cx="11200000" cy="550000"/>
           </a:xfrm>
           <a:prstGeom prst="rect">
             <a:avLst/>
@@ -7587,35 +8094,35 @@
           <a:p>
             <a:pPr algn="l"/>
             <a:r>
-              <a:rPr sz="1200" b="0">
-                <a:solidFill>
-                  <a:srgbClr val="666666"/>
-                </a:solidFill>
-                <a:latin typeface="Open Sans"/>
-                <a:ea typeface="Open Sans"/>
-                <a:cs typeface="Open Sans"/>
+              <a:rPr sz="2000" b="1">
+                <a:solidFill>
+                  <a:srgbClr val="333333"/>
+                </a:solidFill>
+                <a:latin typeface="Calibri"/>
+                <a:ea typeface="Calibri"/>
+                <a:cs typeface="Calibri"/>
               </a:rPr>
-              <a:t>Оказание первой помощи при наружных кровотечениях</a:t>
-            </a:r>
-          </a:p>
-        </p:txBody>
-      </p:sp>
-      <p:sp>
-        <p:nvSpPr>
-          <p:cNvPr id="6" name="Rectangle 5"/>
+              <a:t>ОРИЕНТИР — ИНТЕНСИВНОСТЬ</a:t>
+            </a:r>
+          </a:p>
+        </p:txBody>
+      </p:sp>
+      <p:sp>
+        <p:nvSpPr>
+          <p:cNvPr id="5" name="Rectangle 4"/>
           <p:cNvSpPr/>
           <p:nvPr/>
         </p:nvSpPr>
         <p:spPr>
           <a:xfrm>
-            <a:off x="0" y="2800000"/>
-            <a:ext cx="420000" cy="420000"/>
-          </a:xfrm>
-          <a:prstGeom prst="rect">
-            <a:avLst/>
-          </a:prstGeom>
-          <a:solidFill>
-            <a:srgbClr val="555555"/>
+            <a:off x="700000" y="820000"/>
+            <a:ext cx="8500000" cy="28000"/>
+          </a:xfrm>
+          <a:prstGeom prst="rect">
+            <a:avLst/>
+          </a:prstGeom>
+          <a:solidFill>
+            <a:srgbClr val="606060"/>
           </a:solidFill>
           <a:ln>
             <a:noFill/>
@@ -7645,14 +8152,14 @@
       </p:sp>
       <p:sp>
         <p:nvSpPr>
-          <p:cNvPr id="7" name="TextBox 6"/>
+          <p:cNvPr id="6" name="TextBox 5"/>
           <p:cNvSpPr txBox="1"/>
           <p:nvPr/>
         </p:nvSpPr>
         <p:spPr>
           <a:xfrm>
-            <a:off x="0" y="2800000"/>
-            <a:ext cx="420000" cy="420000"/>
+            <a:off x="700000" y="880000"/>
+            <a:ext cx="11000000" cy="320000"/>
           </a:xfrm>
           <a:prstGeom prst="rect">
             <a:avLst/>
@@ -7660,119 +8167,42 @@
           <a:noFill/>
         </p:spPr>
         <p:txBody>
-          <a:bodyPr wrap="square" anchor="ctr">
+          <a:bodyPr wrap="square" anchor="t">
             <a:spAutoFit/>
           </a:bodyPr>
           <a:lstStyle/>
           <a:p>
-            <a:pPr algn="ctr"/>
-            <a:r>
-              <a:rPr sz="1400" b="1">
-                <a:solidFill>
-                  <a:srgbClr val="FFFFFF"/>
-                </a:solidFill>
-                <a:latin typeface="Open Sans"/>
-                <a:ea typeface="Open Sans"/>
-                <a:cs typeface="Open Sans"/>
+            <a:pPr algn="l"/>
+            <a:r>
+              <a:rPr sz="1100" b="0">
+                <a:solidFill>
+                  <a:srgbClr val="777777"/>
+                </a:solidFill>
+                <a:latin typeface="Calibri"/>
+                <a:ea typeface="Calibri"/>
+                <a:cs typeface="Calibri"/>
               </a:rPr>
-              <a:t>6</a:t>
-            </a:r>
-          </a:p>
-        </p:txBody>
-      </p:sp>
-      <p:sp>
-        <p:nvSpPr>
-          <p:cNvPr id="8" name="TextBox 7"/>
-          <p:cNvSpPr txBox="1"/>
-          <p:nvPr/>
-        </p:nvSpPr>
-        <p:spPr>
-          <a:xfrm>
-            <a:off x="700000" y="1600000"/>
-            <a:ext cx="11000000" cy="2500000"/>
-          </a:xfrm>
-          <a:prstGeom prst="rect">
-            <a:avLst/>
-          </a:prstGeom>
-          <a:noFill/>
-        </p:spPr>
-        <p:txBody>
-          <a:bodyPr wrap="square">
-            <a:spAutoFit/>
-          </a:bodyPr>
-          <a:lstStyle/>
-          <a:p>
-            <a:pPr algn="l">
-              <a:spcAft>
-                <a:spcPts val="800"/>
-              </a:spcAft>
-            </a:pPr>
-            <a:r>
-              <a:rPr sz="1700" b="0">
-                <a:solidFill>
-                  <a:srgbClr val="333333"/>
-                </a:solidFill>
-                <a:latin typeface="Open Sans"/>
-                <a:ea typeface="Open Sans"/>
-                <a:cs typeface="Open Sans"/>
-              </a:rPr>
-              <a:t>•  Смешанные кровотечения (артериальное + венозное + капиллярное) часто бывают при отрыве конечности и опасны из‑за артериального компонента.</a:t>
-            </a:r>
-          </a:p>
-          <a:p>
-            <a:pPr algn="l">
-              <a:spcAft>
-                <a:spcPts val="800"/>
-              </a:spcAft>
-            </a:pPr>
-            <a:r>
-              <a:rPr sz="1700" b="0">
-                <a:solidFill>
-                  <a:srgbClr val="333333"/>
-                </a:solidFill>
-                <a:latin typeface="Open Sans"/>
-                <a:ea typeface="Open Sans"/>
-                <a:cs typeface="Open Sans"/>
-              </a:rPr>
-              <a:t>•  При оказании первой помощи вид кровотечения определить сложно.</a:t>
-            </a:r>
-          </a:p>
-          <a:p>
-            <a:pPr algn="l">
-              <a:spcAft>
-                <a:spcPts val="800"/>
-              </a:spcAft>
-            </a:pPr>
-            <a:r>
-              <a:rPr sz="1700" b="0">
-                <a:solidFill>
-                  <a:srgbClr val="333333"/>
-                </a:solidFill>
-                <a:latin typeface="Open Sans"/>
-                <a:ea typeface="Open Sans"/>
-                <a:cs typeface="Open Sans"/>
-              </a:rPr>
-              <a:t>•  Ориентируйтесь на интенсивность и останавливайте кровотечение любым доступным способом или их комбинацией.</a:t>
-            </a:r>
-          </a:p>
-        </p:txBody>
-      </p:sp>
-      <p:sp>
-        <p:nvSpPr>
-          <p:cNvPr id="9" name="Rounded Rectangle 8"/>
+              <a:t>Оказание первой помощи при наружных кровотечениях</a:t>
+            </a:r>
+          </a:p>
+        </p:txBody>
+      </p:sp>
+      <p:sp>
+        <p:nvSpPr>
+          <p:cNvPr id="7" name="Rectangle 6"/>
           <p:cNvSpPr/>
           <p:nvPr/>
         </p:nvSpPr>
         <p:spPr>
           <a:xfrm>
-            <a:off x="700000" y="4800000"/>
-            <a:ext cx="11000000" cy="1400000"/>
-          </a:xfrm>
-          <a:prstGeom prst="roundRect">
-            <a:avLst/>
-          </a:prstGeom>
-          <a:solidFill>
-            <a:srgbClr val="F5F0E1"/>
+            <a:off x="0" y="2700000"/>
+            <a:ext cx="400000" cy="400000"/>
+          </a:xfrm>
+          <a:prstGeom prst="rect">
+            <a:avLst/>
+          </a:prstGeom>
+          <a:solidFill>
+            <a:srgbClr val="606060"/>
           </a:solidFill>
           <a:ln>
             <a:noFill/>
@@ -7802,20 +8232,134 @@
       </p:sp>
       <p:sp>
         <p:nvSpPr>
-          <p:cNvPr id="10" name="Rectangle 9"/>
+          <p:cNvPr id="8" name="TextBox 7"/>
+          <p:cNvSpPr txBox="1"/>
+          <p:nvPr/>
+        </p:nvSpPr>
+        <p:spPr>
+          <a:xfrm>
+            <a:off x="0" y="2700000"/>
+            <a:ext cx="400000" cy="400000"/>
+          </a:xfrm>
+          <a:prstGeom prst="rect">
+            <a:avLst/>
+          </a:prstGeom>
+          <a:noFill/>
+        </p:spPr>
+        <p:txBody>
+          <a:bodyPr wrap="square" anchor="ctr">
+            <a:spAutoFit/>
+          </a:bodyPr>
+          <a:lstStyle/>
+          <a:p>
+            <a:pPr algn="ctr"/>
+            <a:r>
+              <a:rPr sz="1300" b="1">
+                <a:solidFill>
+                  <a:srgbClr val="FFFFFF"/>
+                </a:solidFill>
+                <a:latin typeface="Calibri"/>
+                <a:ea typeface="Calibri"/>
+                <a:cs typeface="Calibri"/>
+              </a:rPr>
+              <a:t>6</a:t>
+            </a:r>
+          </a:p>
+        </p:txBody>
+      </p:sp>
+      <p:sp>
+        <p:nvSpPr>
+          <p:cNvPr id="9" name="TextBox 8"/>
+          <p:cNvSpPr txBox="1"/>
+          <p:nvPr/>
+        </p:nvSpPr>
+        <p:spPr>
+          <a:xfrm>
+            <a:off x="700000" y="1600000"/>
+            <a:ext cx="11000000" cy="2500000"/>
+          </a:xfrm>
+          <a:prstGeom prst="rect">
+            <a:avLst/>
+          </a:prstGeom>
+          <a:noFill/>
+        </p:spPr>
+        <p:txBody>
+          <a:bodyPr wrap="square">
+            <a:spAutoFit/>
+          </a:bodyPr>
+          <a:lstStyle/>
+          <a:p>
+            <a:pPr algn="l">
+              <a:spcAft>
+                <a:spcPts val="700"/>
+              </a:spcAft>
+            </a:pPr>
+            <a:r>
+              <a:rPr sz="1500" b="0">
+                <a:solidFill>
+                  <a:srgbClr val="333333"/>
+                </a:solidFill>
+                <a:latin typeface="Calibri"/>
+                <a:ea typeface="Calibri"/>
+                <a:cs typeface="Calibri"/>
+              </a:rPr>
+              <a:t>•  Смешанные кровотечения часто бывают при отрыве конечности и опасны из‑за артериального компонента.</a:t>
+            </a:r>
+          </a:p>
+          <a:p>
+            <a:pPr algn="l">
+              <a:spcAft>
+                <a:spcPts val="700"/>
+              </a:spcAft>
+            </a:pPr>
+            <a:r>
+              <a:rPr sz="1500" b="0">
+                <a:solidFill>
+                  <a:srgbClr val="333333"/>
+                </a:solidFill>
+                <a:latin typeface="Calibri"/>
+                <a:ea typeface="Calibri"/>
+                <a:cs typeface="Calibri"/>
+              </a:rPr>
+              <a:t>•  Вид кровотечения на месте определить сложно.</a:t>
+            </a:r>
+          </a:p>
+          <a:p>
+            <a:pPr algn="l">
+              <a:spcAft>
+                <a:spcPts val="700"/>
+              </a:spcAft>
+            </a:pPr>
+            <a:r>
+              <a:rPr sz="1500" b="0">
+                <a:solidFill>
+                  <a:srgbClr val="333333"/>
+                </a:solidFill>
+                <a:latin typeface="Calibri"/>
+                <a:ea typeface="Calibri"/>
+                <a:cs typeface="Calibri"/>
+              </a:rPr>
+              <a:t>•  Ориентируйтесь на интенсивность и останавливайте любым доступным способом.</a:t>
+            </a:r>
+          </a:p>
+        </p:txBody>
+      </p:sp>
+      <p:sp>
+        <p:nvSpPr>
+          <p:cNvPr id="10" name="Rounded Rectangle 9"/>
           <p:cNvSpPr/>
           <p:nvPr/>
         </p:nvSpPr>
         <p:spPr>
           <a:xfrm>
-            <a:off x="700000" y="4800000"/>
-            <a:ext cx="100000" cy="1400000"/>
-          </a:xfrm>
-          <a:prstGeom prst="rect">
-            <a:avLst/>
-          </a:prstGeom>
-          <a:solidFill>
-            <a:srgbClr val="ED1C24"/>
+            <a:off x="700000" y="4500000"/>
+            <a:ext cx="11000000" cy="1600000"/>
+          </a:xfrm>
+          <a:prstGeom prst="roundRect">
+            <a:avLst/>
+          </a:prstGeom>
+          <a:solidFill>
+            <a:srgbClr val="8DDBCD"/>
           </a:solidFill>
           <a:ln>
             <a:noFill/>
@@ -7851,8 +8395,8 @@
         </p:nvSpPr>
         <p:spPr>
           <a:xfrm>
-            <a:off x="1000000" y="5050000"/>
-            <a:ext cx="10400000" cy="900000"/>
+            <a:off x="1000000" y="4800000"/>
+            <a:ext cx="10400000" cy="1000000"/>
           </a:xfrm>
           <a:prstGeom prst="rect">
             <a:avLst/>
@@ -7867,13 +8411,13 @@
           <a:p>
             <a:pPr algn="l"/>
             <a:r>
-              <a:rPr sz="1800" b="1">
-                <a:solidFill>
-                  <a:srgbClr val="ED1C24"/>
-                </a:solidFill>
-                <a:latin typeface="Open Sans"/>
-                <a:ea typeface="Open Sans"/>
-                <a:cs typeface="Open Sans"/>
+              <a:rPr sz="1600" b="1">
+                <a:solidFill>
+                  <a:srgbClr val="0D6B60"/>
+                </a:solidFill>
+                <a:latin typeface="Calibri"/>
+                <a:ea typeface="Calibri"/>
+                <a:cs typeface="Calibri"/>
               </a:rPr>
               <a:t>Приоритет: угрожающее жизни кровотечение останавливают немедленно.</a:t>
             </a:r>
@@ -7943,57 +8487,20 @@
       </p:sp>
       <p:sp>
         <p:nvSpPr>
-          <p:cNvPr id="3" name="TextBox 2"/>
-          <p:cNvSpPr txBox="1"/>
-          <p:nvPr/>
-        </p:nvSpPr>
-        <p:spPr>
-          <a:xfrm>
-            <a:off x="700000" y="280000"/>
-            <a:ext cx="11000000" cy="550000"/>
-          </a:xfrm>
-          <a:prstGeom prst="rect">
-            <a:avLst/>
-          </a:prstGeom>
-          <a:noFill/>
-        </p:spPr>
-        <p:txBody>
-          <a:bodyPr wrap="square" anchor="t">
-            <a:spAutoFit/>
-          </a:bodyPr>
-          <a:lstStyle/>
-          <a:p>
-            <a:pPr algn="l"/>
-            <a:r>
-              <a:rPr sz="2600" b="1">
-                <a:solidFill>
-                  <a:srgbClr val="333333"/>
-                </a:solidFill>
-                <a:latin typeface="Open Sans"/>
-                <a:ea typeface="Open Sans"/>
-                <a:cs typeface="Open Sans"/>
-              </a:rPr>
-              <a:t>ЦЕЛЬ ОБЗОРНОГО ОСМОТРА</a:t>
-            </a:r>
-          </a:p>
-        </p:txBody>
-      </p:sp>
-      <p:sp>
-        <p:nvSpPr>
-          <p:cNvPr id="4" name="Rectangle 3"/>
+          <p:cNvPr id="3" name="Rectangle 2"/>
           <p:cNvSpPr/>
           <p:nvPr/>
         </p:nvSpPr>
         <p:spPr>
           <a:xfrm>
-            <a:off x="700000" y="880000"/>
-            <a:ext cx="9000000" cy="25000"/>
-          </a:xfrm>
-          <a:prstGeom prst="rect">
-            <a:avLst/>
-          </a:prstGeom>
-          <a:solidFill>
-            <a:srgbClr val="555555"/>
+            <a:off x="0" y="0"/>
+            <a:ext cx="12191695" cy="1300000"/>
+          </a:xfrm>
+          <a:prstGeom prst="rect">
+            <a:avLst/>
+          </a:prstGeom>
+          <a:solidFill>
+            <a:srgbClr val="F8F8F8"/>
           </a:solidFill>
           <a:ln>
             <a:noFill/>
@@ -8023,14 +8530,14 @@
       </p:sp>
       <p:sp>
         <p:nvSpPr>
-          <p:cNvPr id="5" name="TextBox 4"/>
+          <p:cNvPr id="4" name="TextBox 3"/>
           <p:cNvSpPr txBox="1"/>
           <p:nvPr/>
         </p:nvSpPr>
         <p:spPr>
           <a:xfrm>
-            <a:off x="700000" y="950000"/>
-            <a:ext cx="11000000" cy="350000"/>
+            <a:off x="700000" y="220000"/>
+            <a:ext cx="11200000" cy="550000"/>
           </a:xfrm>
           <a:prstGeom prst="rect">
             <a:avLst/>
@@ -8045,35 +8552,35 @@
           <a:p>
             <a:pPr algn="l"/>
             <a:r>
-              <a:rPr sz="1200" b="0">
-                <a:solidFill>
-                  <a:srgbClr val="666666"/>
-                </a:solidFill>
-                <a:latin typeface="Open Sans"/>
-                <a:ea typeface="Open Sans"/>
-                <a:cs typeface="Open Sans"/>
+              <a:rPr sz="2000" b="1">
+                <a:solidFill>
+                  <a:srgbClr val="333333"/>
+                </a:solidFill>
+                <a:latin typeface="Calibri"/>
+                <a:ea typeface="Calibri"/>
+                <a:cs typeface="Calibri"/>
               </a:rPr>
-              <a:t>Оказание первой помощи при наружных кровотечениях</a:t>
-            </a:r>
-          </a:p>
-        </p:txBody>
-      </p:sp>
-      <p:sp>
-        <p:nvSpPr>
-          <p:cNvPr id="6" name="Rectangle 5"/>
+              <a:t>ЦЕЛЬ ОБЗОРНОГО ОСМОТРА</a:t>
+            </a:r>
+          </a:p>
+        </p:txBody>
+      </p:sp>
+      <p:sp>
+        <p:nvSpPr>
+          <p:cNvPr id="5" name="Rectangle 4"/>
           <p:cNvSpPr/>
           <p:nvPr/>
         </p:nvSpPr>
         <p:spPr>
           <a:xfrm>
-            <a:off x="0" y="2800000"/>
-            <a:ext cx="420000" cy="420000"/>
-          </a:xfrm>
-          <a:prstGeom prst="rect">
-            <a:avLst/>
-          </a:prstGeom>
-          <a:solidFill>
-            <a:srgbClr val="555555"/>
+            <a:off x="700000" y="820000"/>
+            <a:ext cx="8500000" cy="28000"/>
+          </a:xfrm>
+          <a:prstGeom prst="rect">
+            <a:avLst/>
+          </a:prstGeom>
+          <a:solidFill>
+            <a:srgbClr val="606060"/>
           </a:solidFill>
           <a:ln>
             <a:noFill/>
@@ -8103,14 +8610,94 @@
       </p:sp>
       <p:sp>
         <p:nvSpPr>
-          <p:cNvPr id="7" name="TextBox 6"/>
+          <p:cNvPr id="6" name="TextBox 5"/>
           <p:cNvSpPr txBox="1"/>
           <p:nvPr/>
         </p:nvSpPr>
         <p:spPr>
           <a:xfrm>
-            <a:off x="0" y="2800000"/>
-            <a:ext cx="420000" cy="420000"/>
+            <a:off x="700000" y="880000"/>
+            <a:ext cx="11000000" cy="320000"/>
+          </a:xfrm>
+          <a:prstGeom prst="rect">
+            <a:avLst/>
+          </a:prstGeom>
+          <a:noFill/>
+        </p:spPr>
+        <p:txBody>
+          <a:bodyPr wrap="square" anchor="t">
+            <a:spAutoFit/>
+          </a:bodyPr>
+          <a:lstStyle/>
+          <a:p>
+            <a:pPr algn="l"/>
+            <a:r>
+              <a:rPr sz="1100" b="0">
+                <a:solidFill>
+                  <a:srgbClr val="777777"/>
+                </a:solidFill>
+                <a:latin typeface="Calibri"/>
+                <a:ea typeface="Calibri"/>
+                <a:cs typeface="Calibri"/>
+              </a:rPr>
+              <a:t>Оказание первой помощи при наружных кровотечениях</a:t>
+            </a:r>
+          </a:p>
+        </p:txBody>
+      </p:sp>
+      <p:sp>
+        <p:nvSpPr>
+          <p:cNvPr id="7" name="Rectangle 6"/>
+          <p:cNvSpPr/>
+          <p:nvPr/>
+        </p:nvSpPr>
+        <p:spPr>
+          <a:xfrm>
+            <a:off x="0" y="2700000"/>
+            <a:ext cx="400000" cy="400000"/>
+          </a:xfrm>
+          <a:prstGeom prst="rect">
+            <a:avLst/>
+          </a:prstGeom>
+          <a:solidFill>
+            <a:srgbClr val="606060"/>
+          </a:solidFill>
+          <a:ln>
+            <a:noFill/>
+          </a:ln>
+        </p:spPr>
+        <p:style>
+          <a:lnRef idx="1">
+            <a:schemeClr val="accent1"/>
+          </a:lnRef>
+          <a:fillRef idx="3">
+            <a:schemeClr val="accent1"/>
+          </a:fillRef>
+          <a:effectRef idx="2">
+            <a:schemeClr val="accent1"/>
+          </a:effectRef>
+          <a:fontRef idx="minor">
+            <a:schemeClr val="lt1"/>
+          </a:fontRef>
+        </p:style>
+        <p:txBody>
+          <a:bodyPr rtlCol="0" anchor="ctr"/>
+          <a:lstStyle/>
+          <a:p>
+            <a:pPr algn="ctr"/>
+          </a:p>
+        </p:txBody>
+      </p:sp>
+      <p:sp>
+        <p:nvSpPr>
+          <p:cNvPr id="8" name="TextBox 7"/>
+          <p:cNvSpPr txBox="1"/>
+          <p:nvPr/>
+        </p:nvSpPr>
+        <p:spPr>
+          <a:xfrm>
+            <a:off x="0" y="2700000"/>
+            <a:ext cx="400000" cy="400000"/>
           </a:xfrm>
           <a:prstGeom prst="rect">
             <a:avLst/>
@@ -8125,13 +8712,13 @@
           <a:p>
             <a:pPr algn="ctr"/>
             <a:r>
-              <a:rPr sz="1400" b="1">
+              <a:rPr sz="1300" b="1">
                 <a:solidFill>
                   <a:srgbClr val="FFFFFF"/>
                 </a:solidFill>
-                <a:latin typeface="Open Sans"/>
-                <a:ea typeface="Open Sans"/>
-                <a:cs typeface="Open Sans"/>
+                <a:latin typeface="Calibri"/>
+                <a:ea typeface="Calibri"/>
+                <a:cs typeface="Calibri"/>
               </a:rPr>
               <a:t>7</a:t>
             </a:r>
@@ -8140,14 +8727,14 @@
       </p:sp>
       <p:sp>
         <p:nvSpPr>
-          <p:cNvPr id="8" name="TextBox 7"/>
+          <p:cNvPr id="9" name="TextBox 8"/>
           <p:cNvSpPr txBox="1"/>
           <p:nvPr/>
         </p:nvSpPr>
         <p:spPr>
           <a:xfrm>
-            <a:off x="700000" y="1600000"/>
-            <a:ext cx="11000000" cy="1200000"/>
+            <a:off x="700000" y="1550000"/>
+            <a:ext cx="11000000" cy="1000000"/>
           </a:xfrm>
           <a:prstGeom prst="rect">
             <a:avLst/>
@@ -8162,29 +8749,29 @@
           <a:p>
             <a:pPr algn="l"/>
             <a:r>
-              <a:rPr sz="1800" b="0">
+              <a:rPr sz="1500" b="0">
                 <a:solidFill>
                   <a:srgbClr val="333333"/>
                 </a:solidFill>
-                <a:latin typeface="Open Sans"/>
-                <a:ea typeface="Open Sans"/>
-                <a:cs typeface="Open Sans"/>
+                <a:latin typeface="Calibri"/>
+                <a:ea typeface="Calibri"/>
+                <a:cs typeface="Calibri"/>
               </a:rPr>
-              <a:t>Обзорный осмотр пострадавшего (пострадавших) проводится прежде всего для определения наличия и расположения ранений с интенсивным наружным кровотечением, требующим немедленной остановки.</a:t>
-            </a:r>
-          </a:p>
-        </p:txBody>
-      </p:sp>
-      <p:sp>
-        <p:nvSpPr>
-          <p:cNvPr id="9" name="TextBox 8"/>
+              <a:t>Обзорный осмотр пострадавшего (пострадавших) — чтобы найти ранения с интенсивным наружным кровотечением, требующим немедленной остановки.</a:t>
+            </a:r>
+          </a:p>
+        </p:txBody>
+      </p:sp>
+      <p:sp>
+        <p:nvSpPr>
+          <p:cNvPr id="10" name="TextBox 9"/>
           <p:cNvSpPr txBox="1"/>
           <p:nvPr/>
         </p:nvSpPr>
         <p:spPr>
           <a:xfrm>
-            <a:off x="700000" y="3100000"/>
-            <a:ext cx="11000000" cy="450000"/>
+            <a:off x="700000" y="2800000"/>
+            <a:ext cx="11000000" cy="400000"/>
           </a:xfrm>
           <a:prstGeom prst="rect">
             <a:avLst/>
@@ -8199,13 +8786,13 @@
           <a:p>
             <a:pPr algn="l"/>
             <a:r>
-              <a:rPr sz="1600" b="1">
-                <a:solidFill>
-                  <a:srgbClr val="333333"/>
-                </a:solidFill>
-                <a:latin typeface="Open Sans"/>
-                <a:ea typeface="Open Sans"/>
-                <a:cs typeface="Open Sans"/>
+              <a:rPr sz="1500" b="1">
+                <a:solidFill>
+                  <a:srgbClr val="1AA090"/>
+                </a:solidFill>
+                <a:latin typeface="Calibri"/>
+                <a:ea typeface="Calibri"/>
+                <a:cs typeface="Calibri"/>
               </a:rPr>
               <a:t>Признаки интенсивного наружного кровотечения:</a:t>
             </a:r>
@@ -8214,14 +8801,57 @@
       </p:sp>
       <p:sp>
         <p:nvSpPr>
-          <p:cNvPr id="10" name="TextBox 9"/>
+          <p:cNvPr id="11" name="Rounded Rectangle 10"/>
+          <p:cNvSpPr/>
+          <p:nvPr/>
+        </p:nvSpPr>
+        <p:spPr>
+          <a:xfrm>
+            <a:off x="700000" y="3500000"/>
+            <a:ext cx="3600000" cy="2200000"/>
+          </a:xfrm>
+          <a:prstGeom prst="roundRect">
+            <a:avLst/>
+          </a:prstGeom>
+          <a:solidFill>
+            <a:srgbClr val="8DDBCD"/>
+          </a:solidFill>
+          <a:ln>
+            <a:noFill/>
+          </a:ln>
+        </p:spPr>
+        <p:style>
+          <a:lnRef idx="1">
+            <a:schemeClr val="accent1"/>
+          </a:lnRef>
+          <a:fillRef idx="3">
+            <a:schemeClr val="accent1"/>
+          </a:fillRef>
+          <a:effectRef idx="2">
+            <a:schemeClr val="accent1"/>
+          </a:effectRef>
+          <a:fontRef idx="minor">
+            <a:schemeClr val="lt1"/>
+          </a:fontRef>
+        </p:style>
+        <p:txBody>
+          <a:bodyPr rtlCol="0" anchor="ctr"/>
+          <a:lstStyle/>
+          <a:p>
+            <a:pPr algn="ctr"/>
+          </a:p>
+        </p:txBody>
+      </p:sp>
+      <p:sp>
+        <p:nvSpPr>
+          <p:cNvPr id="12" name="TextBox 11"/>
           <p:cNvSpPr txBox="1"/>
           <p:nvPr/>
         </p:nvSpPr>
         <p:spPr>
           <a:xfrm>
-            <a:off x="700000" y="3650000"/>
-            <a:ext cx="11000000" cy="2500000"/>
+            <a:off x="900000" y="3900000"/>
+            <a:ext cx="3200000" cy="1400000"/>
           </a:xfrm>
           <a:prstGeom prst="rect">
             <a:avLst/>
@@ -8229,62 +8859,182 @@
           <a:noFill/>
         </p:spPr>
         <p:txBody>
-          <a:bodyPr wrap="square">
+          <a:bodyPr wrap="square" anchor="ctr">
             <a:spAutoFit/>
           </a:bodyPr>
           <a:lstStyle/>
           <a:p>
-            <a:pPr algn="l">
-              <a:spcAft>
-                <a:spcPts val="800"/>
-              </a:spcAft>
-            </a:pPr>
-            <a:r>
-              <a:rPr sz="1700" b="0">
-                <a:solidFill>
-                  <a:srgbClr val="333333"/>
-                </a:solidFill>
-                <a:latin typeface="Open Sans"/>
-                <a:ea typeface="Open Sans"/>
-                <a:cs typeface="Open Sans"/>
+            <a:pPr algn="ctr"/>
+            <a:r>
+              <a:rPr sz="1400" b="1">
+                <a:solidFill>
+                  <a:srgbClr val="0D6B60"/>
+                </a:solidFill>
+                <a:latin typeface="Calibri"/>
+                <a:ea typeface="Calibri"/>
+                <a:cs typeface="Calibri"/>
               </a:rPr>
-              <a:t>☐  одежда, пропитанная кровью;</a:t>
-            </a:r>
-          </a:p>
-          <a:p>
-            <a:pPr algn="l">
-              <a:spcAft>
-                <a:spcPts val="800"/>
-              </a:spcAft>
-            </a:pPr>
-            <a:r>
-              <a:rPr sz="1700" b="0">
-                <a:solidFill>
-                  <a:srgbClr val="333333"/>
-                </a:solidFill>
-                <a:latin typeface="Open Sans"/>
-                <a:ea typeface="Open Sans"/>
-                <a:cs typeface="Open Sans"/>
+              <a:t>одежда, пропитанная кровью;</a:t>
+            </a:r>
+          </a:p>
+        </p:txBody>
+      </p:sp>
+      <p:sp>
+        <p:nvSpPr>
+          <p:cNvPr id="13" name="Rounded Rectangle 12"/>
+          <p:cNvSpPr/>
+          <p:nvPr/>
+        </p:nvSpPr>
+        <p:spPr>
+          <a:xfrm>
+            <a:off x="4500000" y="3500000"/>
+            <a:ext cx="3600000" cy="2200000"/>
+          </a:xfrm>
+          <a:prstGeom prst="roundRect">
+            <a:avLst/>
+          </a:prstGeom>
+          <a:solidFill>
+            <a:srgbClr val="8DDBCD"/>
+          </a:solidFill>
+          <a:ln>
+            <a:noFill/>
+          </a:ln>
+        </p:spPr>
+        <p:style>
+          <a:lnRef idx="1">
+            <a:schemeClr val="accent1"/>
+          </a:lnRef>
+          <a:fillRef idx="3">
+            <a:schemeClr val="accent1"/>
+          </a:fillRef>
+          <a:effectRef idx="2">
+            <a:schemeClr val="accent1"/>
+          </a:effectRef>
+          <a:fontRef idx="minor">
+            <a:schemeClr val="lt1"/>
+          </a:fontRef>
+        </p:style>
+        <p:txBody>
+          <a:bodyPr rtlCol="0" anchor="ctr"/>
+          <a:lstStyle/>
+          <a:p>
+            <a:pPr algn="ctr"/>
+          </a:p>
+        </p:txBody>
+      </p:sp>
+      <p:sp>
+        <p:nvSpPr>
+          <p:cNvPr id="14" name="TextBox 13"/>
+          <p:cNvSpPr txBox="1"/>
+          <p:nvPr/>
+        </p:nvSpPr>
+        <p:spPr>
+          <a:xfrm>
+            <a:off x="4700000" y="3900000"/>
+            <a:ext cx="3200000" cy="1400000"/>
+          </a:xfrm>
+          <a:prstGeom prst="rect">
+            <a:avLst/>
+          </a:prstGeom>
+          <a:noFill/>
+        </p:spPr>
+        <p:txBody>
+          <a:bodyPr wrap="square" anchor="ctr">
+            <a:spAutoFit/>
+          </a:bodyPr>
+          <a:lstStyle/>
+          <a:p>
+            <a:pPr algn="ctr"/>
+            <a:r>
+              <a:rPr sz="1400" b="1">
+                <a:solidFill>
+                  <a:srgbClr val="0D6B60"/>
+                </a:solidFill>
+                <a:latin typeface="Calibri"/>
+                <a:ea typeface="Calibri"/>
+                <a:cs typeface="Calibri"/>
               </a:rPr>
-              <a:t>☐  скопление значительного количества крови на земле возле пострадавшего;</a:t>
-            </a:r>
-          </a:p>
-          <a:p>
-            <a:pPr algn="l">
-              <a:spcAft>
-                <a:spcPts val="800"/>
-              </a:spcAft>
-            </a:pPr>
-            <a:r>
-              <a:rPr sz="1700" b="0">
-                <a:solidFill>
-                  <a:srgbClr val="333333"/>
-                </a:solidFill>
-                <a:latin typeface="Open Sans"/>
-                <a:ea typeface="Open Sans"/>
-                <a:cs typeface="Open Sans"/>
+              <a:t>скопление крови на земле возле пострадавшего;</a:t>
+            </a:r>
+          </a:p>
+        </p:txBody>
+      </p:sp>
+      <p:sp>
+        <p:nvSpPr>
+          <p:cNvPr id="15" name="Rounded Rectangle 14"/>
+          <p:cNvSpPr/>
+          <p:nvPr/>
+        </p:nvSpPr>
+        <p:spPr>
+          <a:xfrm>
+            <a:off x="8300000" y="3500000"/>
+            <a:ext cx="3600000" cy="2200000"/>
+          </a:xfrm>
+          <a:prstGeom prst="roundRect">
+            <a:avLst/>
+          </a:prstGeom>
+          <a:solidFill>
+            <a:srgbClr val="8DDBCD"/>
+          </a:solidFill>
+          <a:ln>
+            <a:noFill/>
+          </a:ln>
+        </p:spPr>
+        <p:style>
+          <a:lnRef idx="1">
+            <a:schemeClr val="accent1"/>
+          </a:lnRef>
+          <a:fillRef idx="3">
+            <a:schemeClr val="accent1"/>
+          </a:fillRef>
+          <a:effectRef idx="2">
+            <a:schemeClr val="accent1"/>
+          </a:effectRef>
+          <a:fontRef idx="minor">
+            <a:schemeClr val="lt1"/>
+          </a:fontRef>
+        </p:style>
+        <p:txBody>
+          <a:bodyPr rtlCol="0" anchor="ctr"/>
+          <a:lstStyle/>
+          <a:p>
+            <a:pPr algn="ctr"/>
+          </a:p>
+        </p:txBody>
+      </p:sp>
+      <p:sp>
+        <p:nvSpPr>
+          <p:cNvPr id="16" name="TextBox 15"/>
+          <p:cNvSpPr txBox="1"/>
+          <p:nvPr/>
+        </p:nvSpPr>
+        <p:spPr>
+          <a:xfrm>
+            <a:off x="8500000" y="3900000"/>
+            <a:ext cx="3200000" cy="1400000"/>
+          </a:xfrm>
+          <a:prstGeom prst="rect">
+            <a:avLst/>
+          </a:prstGeom>
+          <a:noFill/>
+        </p:spPr>
+        <p:txBody>
+          <a:bodyPr wrap="square" anchor="ctr">
+            <a:spAutoFit/>
+          </a:bodyPr>
+          <a:lstStyle/>
+          <a:p>
+            <a:pPr algn="ctr"/>
+            <a:r>
+              <a:rPr sz="1400" b="1">
+                <a:solidFill>
+                  <a:srgbClr val="0D6B60"/>
+                </a:solidFill>
+                <a:latin typeface="Calibri"/>
+                <a:ea typeface="Calibri"/>
+                <a:cs typeface="Calibri"/>
               </a:rPr>
-              <a:t>☐  видимые раны с интенсивно вытекающей из них кровью.</a:t>
+              <a:t>видимые раны с интенсивно вытекающей кровью.</a:t>
             </a:r>
           </a:p>
         </p:txBody>
@@ -8352,57 +9102,20 @@
       </p:sp>
       <p:sp>
         <p:nvSpPr>
-          <p:cNvPr id="3" name="TextBox 2"/>
-          <p:cNvSpPr txBox="1"/>
-          <p:nvPr/>
-        </p:nvSpPr>
-        <p:spPr>
-          <a:xfrm>
-            <a:off x="700000" y="280000"/>
-            <a:ext cx="11000000" cy="550000"/>
-          </a:xfrm>
-          <a:prstGeom prst="rect">
-            <a:avLst/>
-          </a:prstGeom>
-          <a:noFill/>
-        </p:spPr>
-        <p:txBody>
-          <a:bodyPr wrap="square" anchor="t">
-            <a:spAutoFit/>
-          </a:bodyPr>
-          <a:lstStyle/>
-          <a:p>
-            <a:pPr algn="l"/>
-            <a:r>
-              <a:rPr sz="2600" b="1">
-                <a:solidFill>
-                  <a:srgbClr val="333333"/>
-                </a:solidFill>
-                <a:latin typeface="Open Sans"/>
-                <a:ea typeface="Open Sans"/>
-                <a:cs typeface="Open Sans"/>
-              </a:rPr>
-              <a:t>ОБЗОРНЫЙ ОСМОТР ПОСТРАДАВШЕГО</a:t>
-            </a:r>
-          </a:p>
-        </p:txBody>
-      </p:sp>
-      <p:sp>
-        <p:nvSpPr>
-          <p:cNvPr id="4" name="Rectangle 3"/>
+          <p:cNvPr id="3" name="Rectangle 2"/>
           <p:cNvSpPr/>
           <p:nvPr/>
         </p:nvSpPr>
         <p:spPr>
           <a:xfrm>
-            <a:off x="700000" y="880000"/>
-            <a:ext cx="9000000" cy="25000"/>
-          </a:xfrm>
-          <a:prstGeom prst="rect">
-            <a:avLst/>
-          </a:prstGeom>
-          <a:solidFill>
-            <a:srgbClr val="555555"/>
+            <a:off x="0" y="0"/>
+            <a:ext cx="12191695" cy="1300000"/>
+          </a:xfrm>
+          <a:prstGeom prst="rect">
+            <a:avLst/>
+          </a:prstGeom>
+          <a:solidFill>
+            <a:srgbClr val="F8F8F8"/>
           </a:solidFill>
           <a:ln>
             <a:noFill/>
@@ -8432,14 +9145,14 @@
       </p:sp>
       <p:sp>
         <p:nvSpPr>
-          <p:cNvPr id="5" name="TextBox 4"/>
+          <p:cNvPr id="4" name="TextBox 3"/>
           <p:cNvSpPr txBox="1"/>
           <p:nvPr/>
         </p:nvSpPr>
         <p:spPr>
           <a:xfrm>
-            <a:off x="700000" y="950000"/>
-            <a:ext cx="11000000" cy="350000"/>
+            <a:off x="700000" y="220000"/>
+            <a:ext cx="11200000" cy="550000"/>
           </a:xfrm>
           <a:prstGeom prst="rect">
             <a:avLst/>
@@ -8454,35 +9167,35 @@
           <a:p>
             <a:pPr algn="l"/>
             <a:r>
-              <a:rPr sz="1200" b="0">
-                <a:solidFill>
-                  <a:srgbClr val="666666"/>
-                </a:solidFill>
-                <a:latin typeface="Open Sans"/>
-                <a:ea typeface="Open Sans"/>
-                <a:cs typeface="Open Sans"/>
+              <a:rPr sz="2000" b="1">
+                <a:solidFill>
+                  <a:srgbClr val="333333"/>
+                </a:solidFill>
+                <a:latin typeface="Calibri"/>
+                <a:ea typeface="Calibri"/>
+                <a:cs typeface="Calibri"/>
               </a:rPr>
-              <a:t>Оказание первой помощи при наружных кровотечениях</a:t>
-            </a:r>
-          </a:p>
-        </p:txBody>
-      </p:sp>
-      <p:sp>
-        <p:nvSpPr>
-          <p:cNvPr id="6" name="Rectangle 5"/>
+              <a:t>ОБЗОРНЫЙ ОСМОТР ПОСТРАДАВШЕГО</a:t>
+            </a:r>
+          </a:p>
+        </p:txBody>
+      </p:sp>
+      <p:sp>
+        <p:nvSpPr>
+          <p:cNvPr id="5" name="Rectangle 4"/>
           <p:cNvSpPr/>
           <p:nvPr/>
         </p:nvSpPr>
         <p:spPr>
           <a:xfrm>
-            <a:off x="0" y="2800000"/>
-            <a:ext cx="420000" cy="420000"/>
-          </a:xfrm>
-          <a:prstGeom prst="rect">
-            <a:avLst/>
-          </a:prstGeom>
-          <a:solidFill>
-            <a:srgbClr val="555555"/>
+            <a:off x="700000" y="820000"/>
+            <a:ext cx="8500000" cy="28000"/>
+          </a:xfrm>
+          <a:prstGeom prst="rect">
+            <a:avLst/>
+          </a:prstGeom>
+          <a:solidFill>
+            <a:srgbClr val="606060"/>
           </a:solidFill>
           <a:ln>
             <a:noFill/>
@@ -8512,14 +9225,94 @@
       </p:sp>
       <p:sp>
         <p:nvSpPr>
-          <p:cNvPr id="7" name="TextBox 6"/>
+          <p:cNvPr id="6" name="TextBox 5"/>
           <p:cNvSpPr txBox="1"/>
           <p:nvPr/>
         </p:nvSpPr>
         <p:spPr>
           <a:xfrm>
-            <a:off x="0" y="2800000"/>
-            <a:ext cx="420000" cy="420000"/>
+            <a:off x="700000" y="880000"/>
+            <a:ext cx="11000000" cy="320000"/>
+          </a:xfrm>
+          <a:prstGeom prst="rect">
+            <a:avLst/>
+          </a:prstGeom>
+          <a:noFill/>
+        </p:spPr>
+        <p:txBody>
+          <a:bodyPr wrap="square" anchor="t">
+            <a:spAutoFit/>
+          </a:bodyPr>
+          <a:lstStyle/>
+          <a:p>
+            <a:pPr algn="l"/>
+            <a:r>
+              <a:rPr sz="1100" b="0">
+                <a:solidFill>
+                  <a:srgbClr val="777777"/>
+                </a:solidFill>
+                <a:latin typeface="Calibri"/>
+                <a:ea typeface="Calibri"/>
+                <a:cs typeface="Calibri"/>
+              </a:rPr>
+              <a:t>Оказание первой помощи при наружных кровотечениях</a:t>
+            </a:r>
+          </a:p>
+        </p:txBody>
+      </p:sp>
+      <p:sp>
+        <p:nvSpPr>
+          <p:cNvPr id="7" name="Rectangle 6"/>
+          <p:cNvSpPr/>
+          <p:nvPr/>
+        </p:nvSpPr>
+        <p:spPr>
+          <a:xfrm>
+            <a:off x="0" y="2700000"/>
+            <a:ext cx="400000" cy="400000"/>
+          </a:xfrm>
+          <a:prstGeom prst="rect">
+            <a:avLst/>
+          </a:prstGeom>
+          <a:solidFill>
+            <a:srgbClr val="606060"/>
+          </a:solidFill>
+          <a:ln>
+            <a:noFill/>
+          </a:ln>
+        </p:spPr>
+        <p:style>
+          <a:lnRef idx="1">
+            <a:schemeClr val="accent1"/>
+          </a:lnRef>
+          <a:fillRef idx="3">
+            <a:schemeClr val="accent1"/>
+          </a:fillRef>
+          <a:effectRef idx="2">
+            <a:schemeClr val="accent1"/>
+          </a:effectRef>
+          <a:fontRef idx="minor">
+            <a:schemeClr val="lt1"/>
+          </a:fontRef>
+        </p:style>
+        <p:txBody>
+          <a:bodyPr rtlCol="0" anchor="ctr"/>
+          <a:lstStyle/>
+          <a:p>
+            <a:pPr algn="ctr"/>
+          </a:p>
+        </p:txBody>
+      </p:sp>
+      <p:sp>
+        <p:nvSpPr>
+          <p:cNvPr id="8" name="TextBox 7"/>
+          <p:cNvSpPr txBox="1"/>
+          <p:nvPr/>
+        </p:nvSpPr>
+        <p:spPr>
+          <a:xfrm>
+            <a:off x="0" y="2700000"/>
+            <a:ext cx="400000" cy="400000"/>
           </a:xfrm>
           <a:prstGeom prst="rect">
             <a:avLst/>
@@ -8534,13 +9327,13 @@
           <a:p>
             <a:pPr algn="ctr"/>
             <a:r>
-              <a:rPr sz="1400" b="1">
+              <a:rPr sz="1300" b="1">
                 <a:solidFill>
                   <a:srgbClr val="FFFFFF"/>
                 </a:solidFill>
-                <a:latin typeface="Open Sans"/>
-                <a:ea typeface="Open Sans"/>
-                <a:cs typeface="Open Sans"/>
+                <a:latin typeface="Calibri"/>
+                <a:ea typeface="Calibri"/>
+                <a:cs typeface="Calibri"/>
               </a:rPr>
               <a:t>8</a:t>
             </a:r>
@@ -8549,7 +9342,7 @@
       </p:sp>
       <p:pic>
         <p:nvPicPr>
-          <p:cNvPr id="8" name="Picture 7" descr="overview_exam.png"/>
+          <p:cNvPr id="9" name="Picture 8" descr="overview_exam.png"/>
           <p:cNvPicPr>
             <a:picLocks noChangeAspect="1"/>
           </p:cNvPicPr>
@@ -8563,8 +9356,8 @@
         </p:blipFill>
         <p:spPr>
           <a:xfrm>
-            <a:off x="500000" y="1533333"/>
-            <a:ext cx="6000000" cy="5133333"/>
+            <a:off x="500000" y="1518889"/>
+            <a:ext cx="5800000" cy="4962222"/>
           </a:xfrm>
           <a:prstGeom prst="rect">
             <a:avLst/>
@@ -8573,14 +9366,96 @@
       </p:pic>
       <p:sp>
         <p:nvSpPr>
-          <p:cNvPr id="9" name="TextBox 8"/>
+          <p:cNvPr id="10" name="Rounded Rectangle 9"/>
+          <p:cNvSpPr/>
+          <p:nvPr/>
+        </p:nvSpPr>
+        <p:spPr>
+          <a:xfrm>
+            <a:off x="6600000" y="2200000"/>
+            <a:ext cx="5600000" cy="2200000"/>
+          </a:xfrm>
+          <a:prstGeom prst="roundRect">
+            <a:avLst/>
+          </a:prstGeom>
+          <a:solidFill>
+            <a:srgbClr val="8DDBCD"/>
+          </a:solidFill>
+          <a:ln w="15875">
+            <a:solidFill>
+              <a:srgbClr val="1AA090"/>
+            </a:solidFill>
+          </a:ln>
+        </p:spPr>
+        <p:style>
+          <a:lnRef idx="1">
+            <a:schemeClr val="accent1"/>
+          </a:lnRef>
+          <a:fillRef idx="3">
+            <a:schemeClr val="accent1"/>
+          </a:fillRef>
+          <a:effectRef idx="2">
+            <a:schemeClr val="accent1"/>
+          </a:effectRef>
+          <a:fontRef idx="minor">
+            <a:schemeClr val="lt1"/>
+          </a:fontRef>
+        </p:style>
+        <p:txBody>
+          <a:bodyPr rtlCol="0" anchor="ctr"/>
+          <a:lstStyle/>
+          <a:p>
+            <a:pPr algn="ctr"/>
+          </a:p>
+        </p:txBody>
+      </p:sp>
+      <p:sp>
+        <p:nvSpPr>
+          <p:cNvPr id="11" name="TextBox 10"/>
           <p:cNvSpPr txBox="1"/>
           <p:nvPr/>
         </p:nvSpPr>
         <p:spPr>
           <a:xfrm>
-            <a:off x="6800000" y="2400000"/>
-            <a:ext cx="5800000" cy="2200000"/>
+            <a:off x="6800000" y="2380000"/>
+            <a:ext cx="5200000" cy="1840000"/>
+          </a:xfrm>
+          <a:prstGeom prst="rect">
+            <a:avLst/>
+          </a:prstGeom>
+          <a:noFill/>
+        </p:spPr>
+        <p:txBody>
+          <a:bodyPr wrap="square" anchor="ctr">
+            <a:spAutoFit/>
+          </a:bodyPr>
+          <a:lstStyle/>
+          <a:p>
+            <a:pPr algn="l"/>
+            <a:r>
+              <a:rPr sz="1500" b="0">
+                <a:solidFill>
+                  <a:srgbClr val="0D6B60"/>
+                </a:solidFill>
+                <a:latin typeface="Calibri"/>
+                <a:ea typeface="Calibri"/>
+                <a:cs typeface="Calibri"/>
+              </a:rPr>
+              <a:t>Обзорный осмотр производится очень быстро, в течение нескольких секунд, с головы до ног.</a:t>
+            </a:r>
+          </a:p>
+        </p:txBody>
+      </p:sp>
+      <p:sp>
+        <p:nvSpPr>
+          <p:cNvPr id="12" name="TextBox 11"/>
+          <p:cNvSpPr txBox="1"/>
+          <p:nvPr/>
+        </p:nvSpPr>
+        <p:spPr>
+          <a:xfrm>
+            <a:off x="6600000" y="4800000"/>
+            <a:ext cx="5600000" cy="1400000"/>
           </a:xfrm>
           <a:prstGeom prst="rect">
             <a:avLst/>
@@ -8595,83 +9470,13 @@
           <a:p>
             <a:pPr algn="l"/>
             <a:r>
-              <a:rPr sz="2000" b="1">
-                <a:solidFill>
-                  <a:srgbClr val="333333"/>
-                </a:solidFill>
-                <a:latin typeface="Open Sans"/>
-                <a:ea typeface="Open Sans"/>
-                <a:cs typeface="Open Sans"/>
-              </a:rPr>
-              <a:t>Обзорный осмотр</a:t>
-            </a:r>
-            <a:r>
-              <a:rPr sz="2000" b="0">
-                <a:solidFill>
-                  <a:srgbClr val="333333"/>
-                </a:solidFill>
-                <a:latin typeface="Open Sans"/>
-                <a:ea typeface="Open Sans"/>
-                <a:cs typeface="Open Sans"/>
-              </a:rPr>
-              <a:t> производится очень быстро, в течение </a:t>
-            </a:r>
-            <a:r>
-              <a:rPr sz="2000" b="1">
-                <a:solidFill>
-                  <a:srgbClr val="333333"/>
-                </a:solidFill>
-                <a:latin typeface="Open Sans"/>
-                <a:ea typeface="Open Sans"/>
-                <a:cs typeface="Open Sans"/>
-              </a:rPr>
-              <a:t>нескольких секунд</a:t>
-            </a:r>
-            <a:r>
-              <a:rPr sz="2000" b="0">
-                <a:solidFill>
-                  <a:srgbClr val="333333"/>
-                </a:solidFill>
-                <a:latin typeface="Open Sans"/>
-                <a:ea typeface="Open Sans"/>
-                <a:cs typeface="Open Sans"/>
-              </a:rPr>
-              <a:t>, с головы до ног.</a:t>
-            </a:r>
-          </a:p>
-        </p:txBody>
-      </p:sp>
-      <p:sp>
-        <p:nvSpPr>
-          <p:cNvPr id="10" name="TextBox 9"/>
-          <p:cNvSpPr txBox="1"/>
-          <p:nvPr/>
-        </p:nvSpPr>
-        <p:spPr>
-          <a:xfrm>
-            <a:off x="6800000" y="4800000"/>
-            <a:ext cx="5800000" cy="1600000"/>
-          </a:xfrm>
-          <a:prstGeom prst="rect">
-            <a:avLst/>
-          </a:prstGeom>
-          <a:noFill/>
-        </p:spPr>
-        <p:txBody>
-          <a:bodyPr wrap="square" anchor="t">
-            <a:spAutoFit/>
-          </a:bodyPr>
-          <a:lstStyle/>
-          <a:p>
-            <a:pPr algn="l"/>
-            <a:r>
-              <a:rPr sz="1500" b="0">
-                <a:solidFill>
-                  <a:srgbClr val="666666"/>
-                </a:solidFill>
-                <a:latin typeface="Open Sans"/>
-                <a:ea typeface="Open Sans"/>
-                <a:cs typeface="Open Sans"/>
+              <a:rPr sz="1300" b="0">
+                <a:solidFill>
+                  <a:srgbClr val="777777"/>
+                </a:solidFill>
+                <a:latin typeface="Calibri"/>
+                <a:ea typeface="Calibri"/>
+                <a:cs typeface="Calibri"/>
               </a:rPr>
               <a:t>Сразу после обнаружения признаков угрожающего жизни кровотечения приступают к его остановке всеми доступными способами.</a:t>
             </a:r>
@@ -8741,57 +9546,20 @@
       </p:sp>
       <p:sp>
         <p:nvSpPr>
-          <p:cNvPr id="3" name="TextBox 2"/>
-          <p:cNvSpPr txBox="1"/>
-          <p:nvPr/>
-        </p:nvSpPr>
-        <p:spPr>
-          <a:xfrm>
-            <a:off x="700000" y="280000"/>
-            <a:ext cx="11000000" cy="550000"/>
-          </a:xfrm>
-          <a:prstGeom prst="rect">
-            <a:avLst/>
-          </a:prstGeom>
-          <a:noFill/>
-        </p:spPr>
-        <p:txBody>
-          <a:bodyPr wrap="square" anchor="t">
-            <a:spAutoFit/>
-          </a:bodyPr>
-          <a:lstStyle/>
-          <a:p>
-            <a:pPr algn="l"/>
-            <a:r>
-              <a:rPr sz="2600" b="1">
-                <a:solidFill>
-                  <a:srgbClr val="333333"/>
-                </a:solidFill>
-                <a:latin typeface="Open Sans"/>
-                <a:ea typeface="Open Sans"/>
-                <a:cs typeface="Open Sans"/>
-              </a:rPr>
-              <a:t>ДЕЙСТВИЯ ПРИ ОБНАРУЖЕНИИ КРОВОТЕЧЕНИЯ</a:t>
-            </a:r>
-          </a:p>
-        </p:txBody>
-      </p:sp>
-      <p:sp>
-        <p:nvSpPr>
-          <p:cNvPr id="4" name="Rectangle 3"/>
+          <p:cNvPr id="3" name="Rectangle 2"/>
           <p:cNvSpPr/>
           <p:nvPr/>
         </p:nvSpPr>
         <p:spPr>
           <a:xfrm>
-            <a:off x="700000" y="880000"/>
-            <a:ext cx="9000000" cy="25000"/>
-          </a:xfrm>
-          <a:prstGeom prst="rect">
-            <a:avLst/>
-          </a:prstGeom>
-          <a:solidFill>
-            <a:srgbClr val="555555"/>
+            <a:off x="0" y="0"/>
+            <a:ext cx="12191695" cy="1300000"/>
+          </a:xfrm>
+          <a:prstGeom prst="rect">
+            <a:avLst/>
+          </a:prstGeom>
+          <a:solidFill>
+            <a:srgbClr val="F8F8F8"/>
           </a:solidFill>
           <a:ln>
             <a:noFill/>
@@ -8821,14 +9589,14 @@
       </p:sp>
       <p:sp>
         <p:nvSpPr>
-          <p:cNvPr id="5" name="TextBox 4"/>
+          <p:cNvPr id="4" name="TextBox 3"/>
           <p:cNvSpPr txBox="1"/>
           <p:nvPr/>
         </p:nvSpPr>
         <p:spPr>
           <a:xfrm>
-            <a:off x="700000" y="950000"/>
-            <a:ext cx="11000000" cy="350000"/>
+            <a:off x="700000" y="220000"/>
+            <a:ext cx="11200000" cy="550000"/>
           </a:xfrm>
           <a:prstGeom prst="rect">
             <a:avLst/>
@@ -8843,35 +9611,35 @@
           <a:p>
             <a:pPr algn="l"/>
             <a:r>
-              <a:rPr sz="1200" b="0">
-                <a:solidFill>
-                  <a:srgbClr val="666666"/>
-                </a:solidFill>
-                <a:latin typeface="Open Sans"/>
-                <a:ea typeface="Open Sans"/>
-                <a:cs typeface="Open Sans"/>
+              <a:rPr sz="2000" b="1">
+                <a:solidFill>
+                  <a:srgbClr val="333333"/>
+                </a:solidFill>
+                <a:latin typeface="Calibri"/>
+                <a:ea typeface="Calibri"/>
+                <a:cs typeface="Calibri"/>
               </a:rPr>
-              <a:t>Оказание первой помощи при наружных кровотечениях</a:t>
-            </a:r>
-          </a:p>
-        </p:txBody>
-      </p:sp>
-      <p:sp>
-        <p:nvSpPr>
-          <p:cNvPr id="6" name="Rectangle 5"/>
+              <a:t>ДЕЙСТВИЯ ПРИ ОБНАРУЖЕНИИ КРОВОТЕЧЕНИЯ</a:t>
+            </a:r>
+          </a:p>
+        </p:txBody>
+      </p:sp>
+      <p:sp>
+        <p:nvSpPr>
+          <p:cNvPr id="5" name="Rectangle 4"/>
           <p:cNvSpPr/>
           <p:nvPr/>
         </p:nvSpPr>
         <p:spPr>
           <a:xfrm>
-            <a:off x="0" y="2800000"/>
-            <a:ext cx="420000" cy="420000"/>
-          </a:xfrm>
-          <a:prstGeom prst="rect">
-            <a:avLst/>
-          </a:prstGeom>
-          <a:solidFill>
-            <a:srgbClr val="555555"/>
+            <a:off x="700000" y="820000"/>
+            <a:ext cx="8500000" cy="28000"/>
+          </a:xfrm>
+          <a:prstGeom prst="rect">
+            <a:avLst/>
+          </a:prstGeom>
+          <a:solidFill>
+            <a:srgbClr val="606060"/>
           </a:solidFill>
           <a:ln>
             <a:noFill/>
@@ -8901,14 +9669,14 @@
       </p:sp>
       <p:sp>
         <p:nvSpPr>
-          <p:cNvPr id="7" name="TextBox 6"/>
+          <p:cNvPr id="6" name="TextBox 5"/>
           <p:cNvSpPr txBox="1"/>
           <p:nvPr/>
         </p:nvSpPr>
         <p:spPr>
           <a:xfrm>
-            <a:off x="0" y="2800000"/>
-            <a:ext cx="420000" cy="420000"/>
+            <a:off x="700000" y="880000"/>
+            <a:ext cx="11000000" cy="320000"/>
           </a:xfrm>
           <a:prstGeom prst="rect">
             <a:avLst/>
@@ -8916,42 +9684,42 @@
           <a:noFill/>
         </p:spPr>
         <p:txBody>
-          <a:bodyPr wrap="square" anchor="ctr">
+          <a:bodyPr wrap="square" anchor="t">
             <a:spAutoFit/>
           </a:bodyPr>
           <a:lstStyle/>
           <a:p>
-            <a:pPr algn="ctr"/>
-            <a:r>
-              <a:rPr sz="1400" b="1">
-                <a:solidFill>
-                  <a:srgbClr val="FFFFFF"/>
-                </a:solidFill>
-                <a:latin typeface="Open Sans"/>
-                <a:ea typeface="Open Sans"/>
-                <a:cs typeface="Open Sans"/>
+            <a:pPr algn="l"/>
+            <a:r>
+              <a:rPr sz="1100" b="0">
+                <a:solidFill>
+                  <a:srgbClr val="777777"/>
+                </a:solidFill>
+                <a:latin typeface="Calibri"/>
+                <a:ea typeface="Calibri"/>
+                <a:cs typeface="Calibri"/>
               </a:rPr>
-              <a:t>9</a:t>
-            </a:r>
-          </a:p>
-        </p:txBody>
-      </p:sp>
-      <p:sp>
-        <p:nvSpPr>
-          <p:cNvPr id="8" name="Oval 7"/>
+              <a:t>Оказание первой помощи при наружных кровотечениях</a:t>
+            </a:r>
+          </a:p>
+        </p:txBody>
+      </p:sp>
+      <p:sp>
+        <p:nvSpPr>
+          <p:cNvPr id="7" name="Rectangle 6"/>
           <p:cNvSpPr/>
           <p:nvPr/>
         </p:nvSpPr>
         <p:spPr>
           <a:xfrm>
-            <a:off x="700000" y="1550000"/>
-            <a:ext cx="500000" cy="500000"/>
-          </a:xfrm>
-          <a:prstGeom prst="ellipse">
-            <a:avLst/>
-          </a:prstGeom>
-          <a:solidFill>
-            <a:srgbClr val="ED1C24"/>
+            <a:off x="0" y="2700000"/>
+            <a:ext cx="400000" cy="400000"/>
+          </a:xfrm>
+          <a:prstGeom prst="rect">
+            <a:avLst/>
+          </a:prstGeom>
+          <a:solidFill>
+            <a:srgbClr val="606060"/>
           </a:solidFill>
           <a:ln>
             <a:noFill/>
@@ -8981,14 +9749,14 @@
       </p:sp>
       <p:sp>
         <p:nvSpPr>
-          <p:cNvPr id="9" name="TextBox 8"/>
+          <p:cNvPr id="8" name="TextBox 7"/>
           <p:cNvSpPr txBox="1"/>
           <p:nvPr/>
         </p:nvSpPr>
         <p:spPr>
           <a:xfrm>
-            <a:off x="700000" y="1550000"/>
-            <a:ext cx="500000" cy="500000"/>
+            <a:off x="0" y="2700000"/>
+            <a:ext cx="400000" cy="400000"/>
           </a:xfrm>
           <a:prstGeom prst="rect">
             <a:avLst/>
@@ -9003,75 +9771,40 @@
           <a:p>
             <a:pPr algn="ctr"/>
             <a:r>
-              <a:rPr sz="1600" b="1">
+              <a:rPr sz="1300" b="1">
                 <a:solidFill>
                   <a:srgbClr val="FFFFFF"/>
                 </a:solidFill>
-                <a:latin typeface="Open Sans"/>
-                <a:ea typeface="Open Sans"/>
-                <a:cs typeface="Open Sans"/>
+                <a:latin typeface="Calibri"/>
+                <a:ea typeface="Calibri"/>
+                <a:cs typeface="Calibri"/>
               </a:rPr>
-              <a:t>1</a:t>
-            </a:r>
-          </a:p>
-        </p:txBody>
-      </p:sp>
-      <p:sp>
-        <p:nvSpPr>
-          <p:cNvPr id="10" name="TextBox 9"/>
-          <p:cNvSpPr txBox="1"/>
-          <p:nvPr/>
-        </p:nvSpPr>
-        <p:spPr>
-          <a:xfrm>
-            <a:off x="1400000" y="1550000"/>
-            <a:ext cx="10000000" cy="500000"/>
-          </a:xfrm>
-          <a:prstGeom prst="rect">
-            <a:avLst/>
-          </a:prstGeom>
-          <a:noFill/>
-        </p:spPr>
-        <p:txBody>
-          <a:bodyPr wrap="square" anchor="ctr">
-            <a:spAutoFit/>
-          </a:bodyPr>
-          <a:lstStyle/>
-          <a:p>
-            <a:pPr algn="l"/>
-            <a:r>
-              <a:rPr sz="1600" b="0">
-                <a:solidFill>
-                  <a:srgbClr val="333333"/>
-                </a:solidFill>
-                <a:latin typeface="Open Sans"/>
-                <a:ea typeface="Open Sans"/>
-                <a:cs typeface="Open Sans"/>
-              </a:rPr>
-              <a:t>Оценить обстановку и безопасность.</a:t>
-            </a:r>
-          </a:p>
-        </p:txBody>
-      </p:sp>
-      <p:sp>
-        <p:nvSpPr>
-          <p:cNvPr id="11" name="Oval 10"/>
+              <a:t>9</a:t>
+            </a:r>
+          </a:p>
+        </p:txBody>
+      </p:sp>
+      <p:sp>
+        <p:nvSpPr>
+          <p:cNvPr id="9" name="Oval 8"/>
           <p:cNvSpPr/>
           <p:nvPr/>
         </p:nvSpPr>
         <p:spPr>
           <a:xfrm>
-            <a:off x="700000" y="2300000"/>
-            <a:ext cx="500000" cy="500000"/>
+            <a:off x="700000" y="1500000"/>
+            <a:ext cx="480000" cy="480000"/>
           </a:xfrm>
           <a:prstGeom prst="ellipse">
             <a:avLst/>
           </a:prstGeom>
           <a:solidFill>
-            <a:srgbClr val="ED1C24"/>
-          </a:solidFill>
-          <a:ln>
-            <a:noFill/>
+            <a:srgbClr val="8DDBCD"/>
+          </a:solidFill>
+          <a:ln w="12700">
+            <a:solidFill>
+              <a:srgbClr val="1AA090"/>
+            </a:solidFill>
           </a:ln>
         </p:spPr>
         <p:style>
@@ -9098,14 +9831,14 @@
       </p:sp>
       <p:sp>
         <p:nvSpPr>
-          <p:cNvPr id="12" name="TextBox 11"/>
+          <p:cNvPr id="10" name="TextBox 9"/>
           <p:cNvSpPr txBox="1"/>
           <p:nvPr/>
         </p:nvSpPr>
         <p:spPr>
           <a:xfrm>
-            <a:off x="700000" y="2300000"/>
-            <a:ext cx="500000" cy="500000"/>
+            <a:off x="700000" y="1500000"/>
+            <a:ext cx="480000" cy="480000"/>
           </a:xfrm>
           <a:prstGeom prst="rect">
             <a:avLst/>
@@ -9120,72 +9853,35 @@
           <a:p>
             <a:pPr algn="ctr"/>
             <a:r>
-              <a:rPr sz="1600" b="1">
-                <a:solidFill>
-                  <a:srgbClr val="FFFFFF"/>
-                </a:solidFill>
-                <a:latin typeface="Open Sans"/>
-                <a:ea typeface="Open Sans"/>
-                <a:cs typeface="Open Sans"/>
+              <a:rPr sz="1400" b="1">
+                <a:solidFill>
+                  <a:srgbClr val="0D6B60"/>
+                </a:solidFill>
+                <a:latin typeface="Calibri"/>
+                <a:ea typeface="Calibri"/>
+                <a:cs typeface="Calibri"/>
               </a:rPr>
-              <a:t>2</a:t>
-            </a:r>
-          </a:p>
-        </p:txBody>
-      </p:sp>
-      <p:sp>
-        <p:nvSpPr>
-          <p:cNvPr id="13" name="TextBox 12"/>
-          <p:cNvSpPr txBox="1"/>
-          <p:nvPr/>
-        </p:nvSpPr>
-        <p:spPr>
-          <a:xfrm>
-            <a:off x="1400000" y="2300000"/>
-            <a:ext cx="10000000" cy="500000"/>
-          </a:xfrm>
-          <a:prstGeom prst="rect">
-            <a:avLst/>
-          </a:prstGeom>
-          <a:noFill/>
-        </p:spPr>
-        <p:txBody>
-          <a:bodyPr wrap="square" anchor="ctr">
-            <a:spAutoFit/>
-          </a:bodyPr>
-          <a:lstStyle/>
-          <a:p>
-            <a:pPr algn="l"/>
-            <a:r>
-              <a:rPr sz="1600" b="0">
-                <a:solidFill>
-                  <a:srgbClr val="333333"/>
-                </a:solidFill>
-                <a:latin typeface="Open Sans"/>
-                <a:ea typeface="Open Sans"/>
-                <a:cs typeface="Open Sans"/>
-              </a:rPr>
-              <a:t>Провести обзорный осмотр — найти интенсивное наружное кровотечение.</a:t>
-            </a:r>
-          </a:p>
-        </p:txBody>
-      </p:sp>
-      <p:sp>
-        <p:nvSpPr>
-          <p:cNvPr id="14" name="Oval 13"/>
+              <a:t>1</a:t>
+            </a:r>
+          </a:p>
+        </p:txBody>
+      </p:sp>
+      <p:sp>
+        <p:nvSpPr>
+          <p:cNvPr id="11" name="Rounded Rectangle 10"/>
           <p:cNvSpPr/>
           <p:nvPr/>
         </p:nvSpPr>
         <p:spPr>
           <a:xfrm>
-            <a:off x="700000" y="3050000"/>
-            <a:ext cx="500000" cy="500000"/>
-          </a:xfrm>
-          <a:prstGeom prst="ellipse">
-            <a:avLst/>
-          </a:prstGeom>
-          <a:solidFill>
-            <a:srgbClr val="ED1C24"/>
+            <a:off x="1350000" y="1500000"/>
+            <a:ext cx="10000000" cy="480000"/>
+          </a:xfrm>
+          <a:prstGeom prst="roundRect">
+            <a:avLst/>
+          </a:prstGeom>
+          <a:solidFill>
+            <a:srgbClr val="F0F0F0"/>
           </a:solidFill>
           <a:ln>
             <a:noFill/>
@@ -9215,14 +9911,14 @@
       </p:sp>
       <p:sp>
         <p:nvSpPr>
-          <p:cNvPr id="15" name="TextBox 14"/>
+          <p:cNvPr id="12" name="TextBox 11"/>
           <p:cNvSpPr txBox="1"/>
           <p:nvPr/>
         </p:nvSpPr>
         <p:spPr>
           <a:xfrm>
-            <a:off x="700000" y="3050000"/>
-            <a:ext cx="500000" cy="500000"/>
+            <a:off x="1550000" y="1500000"/>
+            <a:ext cx="9600000" cy="480000"/>
           </a:xfrm>
           <a:prstGeom prst="rect">
             <a:avLst/>
@@ -9235,77 +9931,42 @@
           </a:bodyPr>
           <a:lstStyle/>
           <a:p>
-            <a:pPr algn="ctr"/>
-            <a:r>
-              <a:rPr sz="1600" b="1">
-                <a:solidFill>
-                  <a:srgbClr val="FFFFFF"/>
-                </a:solidFill>
-                <a:latin typeface="Open Sans"/>
-                <a:ea typeface="Open Sans"/>
-                <a:cs typeface="Open Sans"/>
+            <a:pPr algn="l"/>
+            <a:r>
+              <a:rPr sz="1400" b="0">
+                <a:solidFill>
+                  <a:srgbClr val="333333"/>
+                </a:solidFill>
+                <a:latin typeface="Calibri"/>
+                <a:ea typeface="Calibri"/>
+                <a:cs typeface="Calibri"/>
               </a:rPr>
-              <a:t>3</a:t>
-            </a:r>
-          </a:p>
-        </p:txBody>
-      </p:sp>
-      <p:sp>
-        <p:nvSpPr>
-          <p:cNvPr id="16" name="TextBox 15"/>
-          <p:cNvSpPr txBox="1"/>
-          <p:nvPr/>
-        </p:nvSpPr>
-        <p:spPr>
-          <a:xfrm>
-            <a:off x="1400000" y="3050000"/>
-            <a:ext cx="10000000" cy="500000"/>
-          </a:xfrm>
-          <a:prstGeom prst="rect">
-            <a:avLst/>
-          </a:prstGeom>
-          <a:noFill/>
-        </p:spPr>
-        <p:txBody>
-          <a:bodyPr wrap="square" anchor="ctr">
-            <a:spAutoFit/>
-          </a:bodyPr>
-          <a:lstStyle/>
-          <a:p>
-            <a:pPr algn="l"/>
-            <a:r>
-              <a:rPr sz="1600" b="0">
-                <a:solidFill>
-                  <a:srgbClr val="333333"/>
-                </a:solidFill>
-                <a:latin typeface="Open Sans"/>
-                <a:ea typeface="Open Sans"/>
-                <a:cs typeface="Open Sans"/>
-              </a:rPr>
-              <a:t>Немедленно начать временную остановку кровотечения.</a:t>
-            </a:r>
-          </a:p>
-        </p:txBody>
-      </p:sp>
-      <p:sp>
-        <p:nvSpPr>
-          <p:cNvPr id="17" name="Oval 16"/>
+              <a:t>Оценить обстановку и безопасность.</a:t>
+            </a:r>
+          </a:p>
+        </p:txBody>
+      </p:sp>
+      <p:sp>
+        <p:nvSpPr>
+          <p:cNvPr id="13" name="Oval 12"/>
           <p:cNvSpPr/>
           <p:nvPr/>
         </p:nvSpPr>
         <p:spPr>
           <a:xfrm>
-            <a:off x="700000" y="3800000"/>
-            <a:ext cx="500000" cy="500000"/>
+            <a:off x="700000" y="2220000"/>
+            <a:ext cx="480000" cy="480000"/>
           </a:xfrm>
           <a:prstGeom prst="ellipse">
             <a:avLst/>
           </a:prstGeom>
           <a:solidFill>
-            <a:srgbClr val="555555"/>
-          </a:solidFill>
-          <a:ln>
-            <a:noFill/>
+            <a:srgbClr val="8DDBCD"/>
+          </a:solidFill>
+          <a:ln w="12700">
+            <a:solidFill>
+              <a:srgbClr val="1AA090"/>
+            </a:solidFill>
           </a:ln>
         </p:spPr>
         <p:style>
@@ -9332,14 +9993,14 @@
       </p:sp>
       <p:sp>
         <p:nvSpPr>
-          <p:cNvPr id="18" name="TextBox 17"/>
+          <p:cNvPr id="14" name="TextBox 13"/>
           <p:cNvSpPr txBox="1"/>
           <p:nvPr/>
         </p:nvSpPr>
         <p:spPr>
           <a:xfrm>
-            <a:off x="700000" y="3800000"/>
-            <a:ext cx="500000" cy="500000"/>
+            <a:off x="700000" y="2220000"/>
+            <a:ext cx="480000" cy="480000"/>
           </a:xfrm>
           <a:prstGeom prst="rect">
             <a:avLst/>
@@ -9354,72 +10015,35 @@
           <a:p>
             <a:pPr algn="ctr"/>
             <a:r>
-              <a:rPr sz="1600" b="1">
-                <a:solidFill>
-                  <a:srgbClr val="FFFFFF"/>
-                </a:solidFill>
-                <a:latin typeface="Open Sans"/>
-                <a:ea typeface="Open Sans"/>
-                <a:cs typeface="Open Sans"/>
+              <a:rPr sz="1400" b="1">
+                <a:solidFill>
+                  <a:srgbClr val="0D6B60"/>
+                </a:solidFill>
+                <a:latin typeface="Calibri"/>
+                <a:ea typeface="Calibri"/>
+                <a:cs typeface="Calibri"/>
               </a:rPr>
-              <a:t>4</a:t>
-            </a:r>
-          </a:p>
-        </p:txBody>
-      </p:sp>
-      <p:sp>
-        <p:nvSpPr>
-          <p:cNvPr id="19" name="TextBox 18"/>
-          <p:cNvSpPr txBox="1"/>
-          <p:nvPr/>
-        </p:nvSpPr>
-        <p:spPr>
-          <a:xfrm>
-            <a:off x="1400000" y="3800000"/>
-            <a:ext cx="10000000" cy="500000"/>
-          </a:xfrm>
-          <a:prstGeom prst="rect">
-            <a:avLst/>
-          </a:prstGeom>
-          <a:noFill/>
-        </p:spPr>
-        <p:txBody>
-          <a:bodyPr wrap="square" anchor="ctr">
-            <a:spAutoFit/>
-          </a:bodyPr>
-          <a:lstStyle/>
-          <a:p>
-            <a:pPr algn="l"/>
-            <a:r>
-              <a:rPr sz="1600" b="0">
-                <a:solidFill>
-                  <a:srgbClr val="333333"/>
-                </a:solidFill>
-                <a:latin typeface="Open Sans"/>
-                <a:ea typeface="Open Sans"/>
-                <a:cs typeface="Open Sans"/>
-              </a:rPr>
-              <a:t>Прямое давление на рану → давящая повязка → жгут (по показаниям).</a:t>
-            </a:r>
-          </a:p>
-        </p:txBody>
-      </p:sp>
-      <p:sp>
-        <p:nvSpPr>
-          <p:cNvPr id="20" name="Oval 19"/>
+              <a:t>2</a:t>
+            </a:r>
+          </a:p>
+        </p:txBody>
+      </p:sp>
+      <p:sp>
+        <p:nvSpPr>
+          <p:cNvPr id="15" name="Rounded Rectangle 14"/>
           <p:cNvSpPr/>
           <p:nvPr/>
         </p:nvSpPr>
         <p:spPr>
           <a:xfrm>
-            <a:off x="700000" y="4550000"/>
-            <a:ext cx="500000" cy="500000"/>
-          </a:xfrm>
-          <a:prstGeom prst="ellipse">
-            <a:avLst/>
-          </a:prstGeom>
-          <a:solidFill>
-            <a:srgbClr val="555555"/>
+            <a:off x="1350000" y="2220000"/>
+            <a:ext cx="10000000" cy="480000"/>
+          </a:xfrm>
+          <a:prstGeom prst="roundRect">
+            <a:avLst/>
+          </a:prstGeom>
+          <a:solidFill>
+            <a:srgbClr val="F0F0F0"/>
           </a:solidFill>
           <a:ln>
             <a:noFill/>
@@ -9449,14 +10073,14 @@
       </p:sp>
       <p:sp>
         <p:nvSpPr>
-          <p:cNvPr id="21" name="TextBox 20"/>
+          <p:cNvPr id="16" name="TextBox 15"/>
           <p:cNvSpPr txBox="1"/>
           <p:nvPr/>
         </p:nvSpPr>
         <p:spPr>
           <a:xfrm>
-            <a:off x="700000" y="4550000"/>
-            <a:ext cx="500000" cy="500000"/>
+            <a:off x="1550000" y="2220000"/>
+            <a:ext cx="9600000" cy="480000"/>
           </a:xfrm>
           <a:prstGeom prst="rect">
             <a:avLst/>
@@ -9469,77 +10093,42 @@
           </a:bodyPr>
           <a:lstStyle/>
           <a:p>
-            <a:pPr algn="ctr"/>
-            <a:r>
-              <a:rPr sz="1600" b="1">
-                <a:solidFill>
-                  <a:srgbClr val="FFFFFF"/>
-                </a:solidFill>
-                <a:latin typeface="Open Sans"/>
-                <a:ea typeface="Open Sans"/>
-                <a:cs typeface="Open Sans"/>
+            <a:pPr algn="l"/>
+            <a:r>
+              <a:rPr sz="1400" b="0">
+                <a:solidFill>
+                  <a:srgbClr val="333333"/>
+                </a:solidFill>
+                <a:latin typeface="Calibri"/>
+                <a:ea typeface="Calibri"/>
+                <a:cs typeface="Calibri"/>
               </a:rPr>
-              <a:t>5</a:t>
-            </a:r>
-          </a:p>
-        </p:txBody>
-      </p:sp>
-      <p:sp>
-        <p:nvSpPr>
-          <p:cNvPr id="22" name="TextBox 21"/>
-          <p:cNvSpPr txBox="1"/>
-          <p:nvPr/>
-        </p:nvSpPr>
-        <p:spPr>
-          <a:xfrm>
-            <a:off x="1400000" y="4550000"/>
-            <a:ext cx="10000000" cy="500000"/>
-          </a:xfrm>
-          <a:prstGeom prst="rect">
-            <a:avLst/>
-          </a:prstGeom>
-          <a:noFill/>
-        </p:spPr>
-        <p:txBody>
-          <a:bodyPr wrap="square" anchor="ctr">
-            <a:spAutoFit/>
-          </a:bodyPr>
-          <a:lstStyle/>
-          <a:p>
-            <a:pPr algn="l"/>
-            <a:r>
-              <a:rPr sz="1600" b="0">
-                <a:solidFill>
-                  <a:srgbClr val="333333"/>
-                </a:solidFill>
-                <a:latin typeface="Open Sans"/>
-                <a:ea typeface="Open Sans"/>
-                <a:cs typeface="Open Sans"/>
-              </a:rPr>
-              <a:t>Вызвать скорую медицинскую помощь (если ещё не вызвана).</a:t>
-            </a:r>
-          </a:p>
-        </p:txBody>
-      </p:sp>
-      <p:sp>
-        <p:nvSpPr>
-          <p:cNvPr id="23" name="Oval 22"/>
+              <a:t>Провести обзорный осмотр — найти интенсивное кровотечение.</a:t>
+            </a:r>
+          </a:p>
+        </p:txBody>
+      </p:sp>
+      <p:sp>
+        <p:nvSpPr>
+          <p:cNvPr id="17" name="Oval 16"/>
           <p:cNvSpPr/>
           <p:nvPr/>
         </p:nvSpPr>
         <p:spPr>
           <a:xfrm>
-            <a:off x="700000" y="5300000"/>
-            <a:ext cx="500000" cy="500000"/>
+            <a:off x="700000" y="2940000"/>
+            <a:ext cx="480000" cy="480000"/>
           </a:xfrm>
           <a:prstGeom prst="ellipse">
             <a:avLst/>
           </a:prstGeom>
           <a:solidFill>
-            <a:srgbClr val="555555"/>
-          </a:solidFill>
-          <a:ln>
-            <a:noFill/>
+            <a:srgbClr val="8DDBCD"/>
+          </a:solidFill>
+          <a:ln w="12700">
+            <a:solidFill>
+              <a:srgbClr val="1AA090"/>
+            </a:solidFill>
           </a:ln>
         </p:spPr>
         <p:style>
@@ -9566,14 +10155,14 @@
       </p:sp>
       <p:sp>
         <p:nvSpPr>
-          <p:cNvPr id="24" name="TextBox 23"/>
+          <p:cNvPr id="18" name="TextBox 17"/>
           <p:cNvSpPr txBox="1"/>
           <p:nvPr/>
         </p:nvSpPr>
         <p:spPr>
           <a:xfrm>
-            <a:off x="700000" y="5300000"/>
-            <a:ext cx="500000" cy="500000"/>
+            <a:off x="700000" y="2940000"/>
+            <a:ext cx="480000" cy="480000"/>
           </a:xfrm>
           <a:prstGeom prst="rect">
             <a:avLst/>
@@ -9588,29 +10177,72 @@
           <a:p>
             <a:pPr algn="ctr"/>
             <a:r>
-              <a:rPr sz="1600" b="1">
-                <a:solidFill>
-                  <a:srgbClr val="FFFFFF"/>
-                </a:solidFill>
-                <a:latin typeface="Open Sans"/>
-                <a:ea typeface="Open Sans"/>
-                <a:cs typeface="Open Sans"/>
+              <a:rPr sz="1400" b="1">
+                <a:solidFill>
+                  <a:srgbClr val="0D6B60"/>
+                </a:solidFill>
+                <a:latin typeface="Calibri"/>
+                <a:ea typeface="Calibri"/>
+                <a:cs typeface="Calibri"/>
               </a:rPr>
-              <a:t>6</a:t>
-            </a:r>
-          </a:p>
-        </p:txBody>
-      </p:sp>
-      <p:sp>
-        <p:nvSpPr>
-          <p:cNvPr id="25" name="TextBox 24"/>
+              <a:t>3</a:t>
+            </a:r>
+          </a:p>
+        </p:txBody>
+      </p:sp>
+      <p:sp>
+        <p:nvSpPr>
+          <p:cNvPr id="19" name="Rounded Rectangle 18"/>
+          <p:cNvSpPr/>
+          <p:nvPr/>
+        </p:nvSpPr>
+        <p:spPr>
+          <a:xfrm>
+            <a:off x="1350000" y="2940000"/>
+            <a:ext cx="10000000" cy="480000"/>
+          </a:xfrm>
+          <a:prstGeom prst="roundRect">
+            <a:avLst/>
+          </a:prstGeom>
+          <a:solidFill>
+            <a:srgbClr val="F0F0F0"/>
+          </a:solidFill>
+          <a:ln>
+            <a:noFill/>
+          </a:ln>
+        </p:spPr>
+        <p:style>
+          <a:lnRef idx="1">
+            <a:schemeClr val="accent1"/>
+          </a:lnRef>
+          <a:fillRef idx="3">
+            <a:schemeClr val="accent1"/>
+          </a:fillRef>
+          <a:effectRef idx="2">
+            <a:schemeClr val="accent1"/>
+          </a:effectRef>
+          <a:fontRef idx="minor">
+            <a:schemeClr val="lt1"/>
+          </a:fontRef>
+        </p:style>
+        <p:txBody>
+          <a:bodyPr rtlCol="0" anchor="ctr"/>
+          <a:lstStyle/>
+          <a:p>
+            <a:pPr algn="ctr"/>
+          </a:p>
+        </p:txBody>
+      </p:sp>
+      <p:sp>
+        <p:nvSpPr>
+          <p:cNvPr id="20" name="TextBox 19"/>
           <p:cNvSpPr txBox="1"/>
           <p:nvPr/>
         </p:nvSpPr>
         <p:spPr>
           <a:xfrm>
-            <a:off x="1400000" y="5300000"/>
-            <a:ext cx="10000000" cy="500000"/>
+            <a:off x="1550000" y="2940000"/>
+            <a:ext cx="9600000" cy="480000"/>
           </a:xfrm>
           <a:prstGeom prst="rect">
             <a:avLst/>
@@ -9625,15 +10257,501 @@
           <a:p>
             <a:pPr algn="l"/>
             <a:r>
-              <a:rPr sz="1600" b="0">
+              <a:rPr sz="1400" b="0">
                 <a:solidFill>
                   <a:srgbClr val="333333"/>
                 </a:solidFill>
-                <a:latin typeface="Open Sans"/>
-                <a:ea typeface="Open Sans"/>
-                <a:cs typeface="Open Sans"/>
+                <a:latin typeface="Calibri"/>
+                <a:ea typeface="Calibri"/>
+                <a:cs typeface="Calibri"/>
               </a:rPr>
-              <a:t>Контролировать состояние пострадавшего до прибытия СМП.</a:t>
+              <a:t>Немедленно начать временную остановку кровотечения.</a:t>
+            </a:r>
+          </a:p>
+        </p:txBody>
+      </p:sp>
+      <p:sp>
+        <p:nvSpPr>
+          <p:cNvPr id="21" name="Oval 20"/>
+          <p:cNvSpPr/>
+          <p:nvPr/>
+        </p:nvSpPr>
+        <p:spPr>
+          <a:xfrm>
+            <a:off x="700000" y="3660000"/>
+            <a:ext cx="480000" cy="480000"/>
+          </a:xfrm>
+          <a:prstGeom prst="ellipse">
+            <a:avLst/>
+          </a:prstGeom>
+          <a:solidFill>
+            <a:srgbClr val="8DDBCD"/>
+          </a:solidFill>
+          <a:ln w="12700">
+            <a:solidFill>
+              <a:srgbClr val="1AA090"/>
+            </a:solidFill>
+          </a:ln>
+        </p:spPr>
+        <p:style>
+          <a:lnRef idx="1">
+            <a:schemeClr val="accent1"/>
+          </a:lnRef>
+          <a:fillRef idx="3">
+            <a:schemeClr val="accent1"/>
+          </a:fillRef>
+          <a:effectRef idx="2">
+            <a:schemeClr val="accent1"/>
+          </a:effectRef>
+          <a:fontRef idx="minor">
+            <a:schemeClr val="lt1"/>
+          </a:fontRef>
+        </p:style>
+        <p:txBody>
+          <a:bodyPr rtlCol="0" anchor="ctr"/>
+          <a:lstStyle/>
+          <a:p>
+            <a:pPr algn="ctr"/>
+          </a:p>
+        </p:txBody>
+      </p:sp>
+      <p:sp>
+        <p:nvSpPr>
+          <p:cNvPr id="22" name="TextBox 21"/>
+          <p:cNvSpPr txBox="1"/>
+          <p:nvPr/>
+        </p:nvSpPr>
+        <p:spPr>
+          <a:xfrm>
+            <a:off x="700000" y="3660000"/>
+            <a:ext cx="480000" cy="480000"/>
+          </a:xfrm>
+          <a:prstGeom prst="rect">
+            <a:avLst/>
+          </a:prstGeom>
+          <a:noFill/>
+        </p:spPr>
+        <p:txBody>
+          <a:bodyPr wrap="square" anchor="ctr">
+            <a:spAutoFit/>
+          </a:bodyPr>
+          <a:lstStyle/>
+          <a:p>
+            <a:pPr algn="ctr"/>
+            <a:r>
+              <a:rPr sz="1400" b="1">
+                <a:solidFill>
+                  <a:srgbClr val="0D6B60"/>
+                </a:solidFill>
+                <a:latin typeface="Calibri"/>
+                <a:ea typeface="Calibri"/>
+                <a:cs typeface="Calibri"/>
+              </a:rPr>
+              <a:t>4</a:t>
+            </a:r>
+          </a:p>
+        </p:txBody>
+      </p:sp>
+      <p:sp>
+        <p:nvSpPr>
+          <p:cNvPr id="23" name="Rounded Rectangle 22"/>
+          <p:cNvSpPr/>
+          <p:nvPr/>
+        </p:nvSpPr>
+        <p:spPr>
+          <a:xfrm>
+            <a:off x="1350000" y="3660000"/>
+            <a:ext cx="10000000" cy="480000"/>
+          </a:xfrm>
+          <a:prstGeom prst="roundRect">
+            <a:avLst/>
+          </a:prstGeom>
+          <a:solidFill>
+            <a:srgbClr val="F0F0F0"/>
+          </a:solidFill>
+          <a:ln>
+            <a:noFill/>
+          </a:ln>
+        </p:spPr>
+        <p:style>
+          <a:lnRef idx="1">
+            <a:schemeClr val="accent1"/>
+          </a:lnRef>
+          <a:fillRef idx="3">
+            <a:schemeClr val="accent1"/>
+          </a:fillRef>
+          <a:effectRef idx="2">
+            <a:schemeClr val="accent1"/>
+          </a:effectRef>
+          <a:fontRef idx="minor">
+            <a:schemeClr val="lt1"/>
+          </a:fontRef>
+        </p:style>
+        <p:txBody>
+          <a:bodyPr rtlCol="0" anchor="ctr"/>
+          <a:lstStyle/>
+          <a:p>
+            <a:pPr algn="ctr"/>
+          </a:p>
+        </p:txBody>
+      </p:sp>
+      <p:sp>
+        <p:nvSpPr>
+          <p:cNvPr id="24" name="TextBox 23"/>
+          <p:cNvSpPr txBox="1"/>
+          <p:nvPr/>
+        </p:nvSpPr>
+        <p:spPr>
+          <a:xfrm>
+            <a:off x="1550000" y="3660000"/>
+            <a:ext cx="9600000" cy="480000"/>
+          </a:xfrm>
+          <a:prstGeom prst="rect">
+            <a:avLst/>
+          </a:prstGeom>
+          <a:noFill/>
+        </p:spPr>
+        <p:txBody>
+          <a:bodyPr wrap="square" anchor="ctr">
+            <a:spAutoFit/>
+          </a:bodyPr>
+          <a:lstStyle/>
+          <a:p>
+            <a:pPr algn="l"/>
+            <a:r>
+              <a:rPr sz="1400" b="0">
+                <a:solidFill>
+                  <a:srgbClr val="333333"/>
+                </a:solidFill>
+                <a:latin typeface="Calibri"/>
+                <a:ea typeface="Calibri"/>
+                <a:cs typeface="Calibri"/>
+              </a:rPr>
+              <a:t>Давление на рану → давящая повязка → жгут (по показаниям).</a:t>
+            </a:r>
+          </a:p>
+        </p:txBody>
+      </p:sp>
+      <p:sp>
+        <p:nvSpPr>
+          <p:cNvPr id="25" name="Oval 24"/>
+          <p:cNvSpPr/>
+          <p:nvPr/>
+        </p:nvSpPr>
+        <p:spPr>
+          <a:xfrm>
+            <a:off x="700000" y="4380000"/>
+            <a:ext cx="480000" cy="480000"/>
+          </a:xfrm>
+          <a:prstGeom prst="ellipse">
+            <a:avLst/>
+          </a:prstGeom>
+          <a:solidFill>
+            <a:srgbClr val="8DDBCD"/>
+          </a:solidFill>
+          <a:ln w="12700">
+            <a:solidFill>
+              <a:srgbClr val="1AA090"/>
+            </a:solidFill>
+          </a:ln>
+        </p:spPr>
+        <p:style>
+          <a:lnRef idx="1">
+            <a:schemeClr val="accent1"/>
+          </a:lnRef>
+          <a:fillRef idx="3">
+            <a:schemeClr val="accent1"/>
+          </a:fillRef>
+          <a:effectRef idx="2">
+            <a:schemeClr val="accent1"/>
+          </a:effectRef>
+          <a:fontRef idx="minor">
+            <a:schemeClr val="lt1"/>
+          </a:fontRef>
+        </p:style>
+        <p:txBody>
+          <a:bodyPr rtlCol="0" anchor="ctr"/>
+          <a:lstStyle/>
+          <a:p>
+            <a:pPr algn="ctr"/>
+          </a:p>
+        </p:txBody>
+      </p:sp>
+      <p:sp>
+        <p:nvSpPr>
+          <p:cNvPr id="26" name="TextBox 25"/>
+          <p:cNvSpPr txBox="1"/>
+          <p:nvPr/>
+        </p:nvSpPr>
+        <p:spPr>
+          <a:xfrm>
+            <a:off x="700000" y="4380000"/>
+            <a:ext cx="480000" cy="480000"/>
+          </a:xfrm>
+          <a:prstGeom prst="rect">
+            <a:avLst/>
+          </a:prstGeom>
+          <a:noFill/>
+        </p:spPr>
+        <p:txBody>
+          <a:bodyPr wrap="square" anchor="ctr">
+            <a:spAutoFit/>
+          </a:bodyPr>
+          <a:lstStyle/>
+          <a:p>
+            <a:pPr algn="ctr"/>
+            <a:r>
+              <a:rPr sz="1400" b="1">
+                <a:solidFill>
+                  <a:srgbClr val="0D6B60"/>
+                </a:solidFill>
+                <a:latin typeface="Calibri"/>
+                <a:ea typeface="Calibri"/>
+                <a:cs typeface="Calibri"/>
+              </a:rPr>
+              <a:t>5</a:t>
+            </a:r>
+          </a:p>
+        </p:txBody>
+      </p:sp>
+      <p:sp>
+        <p:nvSpPr>
+          <p:cNvPr id="27" name="Rounded Rectangle 26"/>
+          <p:cNvSpPr/>
+          <p:nvPr/>
+        </p:nvSpPr>
+        <p:spPr>
+          <a:xfrm>
+            <a:off x="1350000" y="4380000"/>
+            <a:ext cx="10000000" cy="480000"/>
+          </a:xfrm>
+          <a:prstGeom prst="roundRect">
+            <a:avLst/>
+          </a:prstGeom>
+          <a:solidFill>
+            <a:srgbClr val="F0F0F0"/>
+          </a:solidFill>
+          <a:ln>
+            <a:noFill/>
+          </a:ln>
+        </p:spPr>
+        <p:style>
+          <a:lnRef idx="1">
+            <a:schemeClr val="accent1"/>
+          </a:lnRef>
+          <a:fillRef idx="3">
+            <a:schemeClr val="accent1"/>
+          </a:fillRef>
+          <a:effectRef idx="2">
+            <a:schemeClr val="accent1"/>
+          </a:effectRef>
+          <a:fontRef idx="minor">
+            <a:schemeClr val="lt1"/>
+          </a:fontRef>
+        </p:style>
+        <p:txBody>
+          <a:bodyPr rtlCol="0" anchor="ctr"/>
+          <a:lstStyle/>
+          <a:p>
+            <a:pPr algn="ctr"/>
+          </a:p>
+        </p:txBody>
+      </p:sp>
+      <p:sp>
+        <p:nvSpPr>
+          <p:cNvPr id="28" name="TextBox 27"/>
+          <p:cNvSpPr txBox="1"/>
+          <p:nvPr/>
+        </p:nvSpPr>
+        <p:spPr>
+          <a:xfrm>
+            <a:off x="1550000" y="4380000"/>
+            <a:ext cx="9600000" cy="480000"/>
+          </a:xfrm>
+          <a:prstGeom prst="rect">
+            <a:avLst/>
+          </a:prstGeom>
+          <a:noFill/>
+        </p:spPr>
+        <p:txBody>
+          <a:bodyPr wrap="square" anchor="ctr">
+            <a:spAutoFit/>
+          </a:bodyPr>
+          <a:lstStyle/>
+          <a:p>
+            <a:pPr algn="l"/>
+            <a:r>
+              <a:rPr sz="1400" b="0">
+                <a:solidFill>
+                  <a:srgbClr val="333333"/>
+                </a:solidFill>
+                <a:latin typeface="Calibri"/>
+                <a:ea typeface="Calibri"/>
+                <a:cs typeface="Calibri"/>
+              </a:rPr>
+              <a:t>Вызвать скорую медицинскую помощь.</a:t>
+            </a:r>
+          </a:p>
+        </p:txBody>
+      </p:sp>
+      <p:sp>
+        <p:nvSpPr>
+          <p:cNvPr id="29" name="Oval 28"/>
+          <p:cNvSpPr/>
+          <p:nvPr/>
+        </p:nvSpPr>
+        <p:spPr>
+          <a:xfrm>
+            <a:off x="700000" y="5100000"/>
+            <a:ext cx="480000" cy="480000"/>
+          </a:xfrm>
+          <a:prstGeom prst="ellipse">
+            <a:avLst/>
+          </a:prstGeom>
+          <a:solidFill>
+            <a:srgbClr val="8DDBCD"/>
+          </a:solidFill>
+          <a:ln w="12700">
+            <a:solidFill>
+              <a:srgbClr val="1AA090"/>
+            </a:solidFill>
+          </a:ln>
+        </p:spPr>
+        <p:style>
+          <a:lnRef idx="1">
+            <a:schemeClr val="accent1"/>
+          </a:lnRef>
+          <a:fillRef idx="3">
+            <a:schemeClr val="accent1"/>
+          </a:fillRef>
+          <a:effectRef idx="2">
+            <a:schemeClr val="accent1"/>
+          </a:effectRef>
+          <a:fontRef idx="minor">
+            <a:schemeClr val="lt1"/>
+          </a:fontRef>
+        </p:style>
+        <p:txBody>
+          <a:bodyPr rtlCol="0" anchor="ctr"/>
+          <a:lstStyle/>
+          <a:p>
+            <a:pPr algn="ctr"/>
+          </a:p>
+        </p:txBody>
+      </p:sp>
+      <p:sp>
+        <p:nvSpPr>
+          <p:cNvPr id="30" name="TextBox 29"/>
+          <p:cNvSpPr txBox="1"/>
+          <p:nvPr/>
+        </p:nvSpPr>
+        <p:spPr>
+          <a:xfrm>
+            <a:off x="700000" y="5100000"/>
+            <a:ext cx="480000" cy="480000"/>
+          </a:xfrm>
+          <a:prstGeom prst="rect">
+            <a:avLst/>
+          </a:prstGeom>
+          <a:noFill/>
+        </p:spPr>
+        <p:txBody>
+          <a:bodyPr wrap="square" anchor="ctr">
+            <a:spAutoFit/>
+          </a:bodyPr>
+          <a:lstStyle/>
+          <a:p>
+            <a:pPr algn="ctr"/>
+            <a:r>
+              <a:rPr sz="1400" b="1">
+                <a:solidFill>
+                  <a:srgbClr val="0D6B60"/>
+                </a:solidFill>
+                <a:latin typeface="Calibri"/>
+                <a:ea typeface="Calibri"/>
+                <a:cs typeface="Calibri"/>
+              </a:rPr>
+              <a:t>6</a:t>
+            </a:r>
+          </a:p>
+        </p:txBody>
+      </p:sp>
+      <p:sp>
+        <p:nvSpPr>
+          <p:cNvPr id="31" name="Rounded Rectangle 30"/>
+          <p:cNvSpPr/>
+          <p:nvPr/>
+        </p:nvSpPr>
+        <p:spPr>
+          <a:xfrm>
+            <a:off x="1350000" y="5100000"/>
+            <a:ext cx="10000000" cy="480000"/>
+          </a:xfrm>
+          <a:prstGeom prst="roundRect">
+            <a:avLst/>
+          </a:prstGeom>
+          <a:solidFill>
+            <a:srgbClr val="F0F0F0"/>
+          </a:solidFill>
+          <a:ln>
+            <a:noFill/>
+          </a:ln>
+        </p:spPr>
+        <p:style>
+          <a:lnRef idx="1">
+            <a:schemeClr val="accent1"/>
+          </a:lnRef>
+          <a:fillRef idx="3">
+            <a:schemeClr val="accent1"/>
+          </a:fillRef>
+          <a:effectRef idx="2">
+            <a:schemeClr val="accent1"/>
+          </a:effectRef>
+          <a:fontRef idx="minor">
+            <a:schemeClr val="lt1"/>
+          </a:fontRef>
+        </p:style>
+        <p:txBody>
+          <a:bodyPr rtlCol="0" anchor="ctr"/>
+          <a:lstStyle/>
+          <a:p>
+            <a:pPr algn="ctr"/>
+          </a:p>
+        </p:txBody>
+      </p:sp>
+      <p:sp>
+        <p:nvSpPr>
+          <p:cNvPr id="32" name="TextBox 31"/>
+          <p:cNvSpPr txBox="1"/>
+          <p:nvPr/>
+        </p:nvSpPr>
+        <p:spPr>
+          <a:xfrm>
+            <a:off x="1550000" y="5100000"/>
+            <a:ext cx="9600000" cy="480000"/>
+          </a:xfrm>
+          <a:prstGeom prst="rect">
+            <a:avLst/>
+          </a:prstGeom>
+          <a:noFill/>
+        </p:spPr>
+        <p:txBody>
+          <a:bodyPr wrap="square" anchor="ctr">
+            <a:spAutoFit/>
+          </a:bodyPr>
+          <a:lstStyle/>
+          <a:p>
+            <a:pPr algn="l"/>
+            <a:r>
+              <a:rPr sz="1400" b="0">
+                <a:solidFill>
+                  <a:srgbClr val="333333"/>
+                </a:solidFill>
+                <a:latin typeface="Calibri"/>
+                <a:ea typeface="Calibri"/>
+                <a:cs typeface="Calibri"/>
+              </a:rPr>
+              <a:t>Контролировать состояние до прибытия СМП.</a:t>
             </a:r>
           </a:p>
         </p:txBody>

--- a/presentations/Кровотечение_Обзорный_осмотр_пострадавшего.pptx
+++ b/presentations/Кровотечение_Обзорный_осмотр_пострадавшего.pptx
@@ -15,8 +15,6 @@
     <p:sldId id="263" r:id="rId14"/>
     <p:sldId id="264" r:id="rId15"/>
     <p:sldId id="265" r:id="rId16"/>
-    <p:sldId id="266" r:id="rId17"/>
-    <p:sldId id="267" r:id="rId18"/>
   </p:sldIdLst>
   <p:sldSz cx="12191695" cy="6858000" type="screen4x3"/>
   <p:notesSz cx="6858000" cy="9144000"/>
@@ -3099,20 +3097,12 @@
         <p:nvPr/>
       </p:nvGrpSpPr>
       <p:grpSpPr/>
-      <p:pic>
-        <p:nvPicPr>
-          <p:cNvPr id="2" name="Picture 1" descr="suot_title_bg.png"/>
-          <p:cNvPicPr>
-            <a:picLocks noChangeAspect="1"/>
-          </p:cNvPicPr>
-          <p:nvPr/>
-        </p:nvPicPr>
-        <p:blipFill>
-          <a:blip r:embed="rId2"/>
-          <a:stretch>
-            <a:fillRect/>
-          </a:stretch>
-        </p:blipFill>
+      <p:sp>
+        <p:nvSpPr>
+          <p:cNvPr id="2" name="Rectangle 1"/>
+          <p:cNvSpPr/>
+          <p:nvPr/>
+        </p:nvSpPr>
         <p:spPr>
           <a:xfrm>
             <a:off x="0" y="0"/>
@@ -3121,26 +3111,8 @@
           <a:prstGeom prst="rect">
             <a:avLst/>
           </a:prstGeom>
-        </p:spPr>
-      </p:pic>
-      <p:sp>
-        <p:nvSpPr>
-          <p:cNvPr id="3" name="Rectangle 2"/>
-          <p:cNvSpPr/>
-          <p:nvPr/>
-        </p:nvSpPr>
-        <p:spPr>
-          <a:xfrm>
-            <a:off x="0" y="2600000"/>
-            <a:ext cx="12191695" cy="2000000"/>
-          </a:xfrm>
-          <a:prstGeom prst="rect">
-            <a:avLst/>
-          </a:prstGeom>
           <a:solidFill>
-            <a:srgbClr val="415762">
-              <a:alpha val="85000"/>
-            </a:srgbClr>
+            <a:srgbClr val="F8F8F8"/>
           </a:solidFill>
           <a:ln>
             <a:noFill/>
@@ -3170,14 +3142,100 @@
       </p:sp>
       <p:sp>
         <p:nvSpPr>
-          <p:cNvPr id="4" name="TextBox 3"/>
+          <p:cNvPr id="3" name="Rectangle 2"/>
+          <p:cNvSpPr/>
+          <p:nvPr/>
+        </p:nvSpPr>
+        <p:spPr>
+          <a:xfrm>
+            <a:off x="8800000" y="0"/>
+            <a:ext cx="3400000" cy="6858000"/>
+          </a:xfrm>
+          <a:prstGeom prst="rect">
+            <a:avLst/>
+          </a:prstGeom>
+          <a:solidFill>
+            <a:srgbClr val="DDDDDD"/>
+          </a:solidFill>
+          <a:ln>
+            <a:noFill/>
+          </a:ln>
+        </p:spPr>
+        <p:style>
+          <a:lnRef idx="1">
+            <a:schemeClr val="accent1"/>
+          </a:lnRef>
+          <a:fillRef idx="3">
+            <a:schemeClr val="accent1"/>
+          </a:fillRef>
+          <a:effectRef idx="2">
+            <a:schemeClr val="accent1"/>
+          </a:effectRef>
+          <a:fontRef idx="minor">
+            <a:schemeClr val="lt1"/>
+          </a:fontRef>
+        </p:style>
+        <p:txBody>
+          <a:bodyPr rtlCol="0" anchor="ctr"/>
+          <a:lstStyle/>
+          <a:p>
+            <a:pPr algn="ctr"/>
+          </a:p>
+        </p:txBody>
+      </p:sp>
+      <p:sp>
+        <p:nvSpPr>
+          <p:cNvPr id="4" name="Rectangle 3"/>
+          <p:cNvSpPr/>
+          <p:nvPr/>
+        </p:nvSpPr>
+        <p:spPr>
+          <a:xfrm>
+            <a:off x="0" y="2800000"/>
+            <a:ext cx="2800000" cy="1800000"/>
+          </a:xfrm>
+          <a:prstGeom prst="rect">
+            <a:avLst/>
+          </a:prstGeom>
+          <a:solidFill>
+            <a:srgbClr val="DDDDDD"/>
+          </a:solidFill>
+          <a:ln>
+            <a:noFill/>
+          </a:ln>
+        </p:spPr>
+        <p:style>
+          <a:lnRef idx="1">
+            <a:schemeClr val="accent1"/>
+          </a:lnRef>
+          <a:fillRef idx="3">
+            <a:schemeClr val="accent1"/>
+          </a:fillRef>
+          <a:effectRef idx="2">
+            <a:schemeClr val="accent1"/>
+          </a:effectRef>
+          <a:fontRef idx="minor">
+            <a:schemeClr val="lt1"/>
+          </a:fontRef>
+        </p:style>
+        <p:txBody>
+          <a:bodyPr rtlCol="0" anchor="ctr"/>
+          <a:lstStyle/>
+          <a:p>
+            <a:pPr algn="ctr"/>
+          </a:p>
+        </p:txBody>
+      </p:sp>
+      <p:sp>
+        <p:nvSpPr>
+          <p:cNvPr id="5" name="TextBox 4"/>
           <p:cNvSpPr txBox="1"/>
           <p:nvPr/>
         </p:nvSpPr>
         <p:spPr>
           <a:xfrm>
-            <a:off x="800000" y="2900000"/>
-            <a:ext cx="10500000" cy="1400000"/>
+            <a:off x="700000" y="3000000"/>
+            <a:ext cx="7800000" cy="1500000"/>
           </a:xfrm>
           <a:prstGeom prst="rect">
             <a:avLst/>
@@ -3185,24 +3243,104 @@
           <a:noFill/>
         </p:spPr>
         <p:txBody>
-          <a:bodyPr wrap="square" anchor="ctr">
+          <a:bodyPr wrap="square" anchor="t">
             <a:spAutoFit/>
           </a:bodyPr>
           <a:lstStyle/>
           <a:p>
-            <a:pPr algn="ctr"/>
-            <a:r>
-              <a:rPr sz="2800" b="1">
-                <a:solidFill>
-                  <a:srgbClr val="FFFFFF"/>
-                </a:solidFill>
-                <a:latin typeface="Calibri"/>
-                <a:ea typeface="Calibri"/>
-                <a:cs typeface="Calibri"/>
+            <a:pPr algn="l"/>
+            <a:r>
+              <a:rPr sz="2600" b="1">
+                <a:solidFill>
+                  <a:srgbClr val="333333"/>
+                </a:solidFill>
+                <a:latin typeface="Open Sans"/>
+                <a:ea typeface="Open Sans"/>
+                <a:cs typeface="Open Sans"/>
               </a:rPr>
               <a:t>КРОВОТЕЧЕНИЕ.
 ОБЗОРНЫЙ ОСМОТР ПОСТРАДАВШЕГО
 (ПОСТРАДАВШИХ)</a:t>
+            </a:r>
+          </a:p>
+        </p:txBody>
+      </p:sp>
+      <p:sp>
+        <p:nvSpPr>
+          <p:cNvPr id="6" name="Rectangle 5"/>
+          <p:cNvSpPr/>
+          <p:nvPr/>
+        </p:nvSpPr>
+        <p:spPr>
+          <a:xfrm>
+            <a:off x="700000" y="4700000"/>
+            <a:ext cx="5200000" cy="30000"/>
+          </a:xfrm>
+          <a:prstGeom prst="rect">
+            <a:avLst/>
+          </a:prstGeom>
+          <a:solidFill>
+            <a:srgbClr val="333333"/>
+          </a:solidFill>
+          <a:ln>
+            <a:noFill/>
+          </a:ln>
+        </p:spPr>
+        <p:style>
+          <a:lnRef idx="1">
+            <a:schemeClr val="accent1"/>
+          </a:lnRef>
+          <a:fillRef idx="3">
+            <a:schemeClr val="accent1"/>
+          </a:fillRef>
+          <a:effectRef idx="2">
+            <a:schemeClr val="accent1"/>
+          </a:effectRef>
+          <a:fontRef idx="minor">
+            <a:schemeClr val="lt1"/>
+          </a:fontRef>
+        </p:style>
+        <p:txBody>
+          <a:bodyPr rtlCol="0" anchor="ctr"/>
+          <a:lstStyle/>
+          <a:p>
+            <a:pPr algn="ctr"/>
+          </a:p>
+        </p:txBody>
+      </p:sp>
+      <p:sp>
+        <p:nvSpPr>
+          <p:cNvPr id="7" name="TextBox 6"/>
+          <p:cNvSpPr txBox="1"/>
+          <p:nvPr/>
+        </p:nvSpPr>
+        <p:spPr>
+          <a:xfrm>
+            <a:off x="700000" y="4900000"/>
+            <a:ext cx="7500000" cy="450000"/>
+          </a:xfrm>
+          <a:prstGeom prst="rect">
+            <a:avLst/>
+          </a:prstGeom>
+          <a:noFill/>
+        </p:spPr>
+        <p:txBody>
+          <a:bodyPr wrap="square" anchor="t">
+            <a:spAutoFit/>
+          </a:bodyPr>
+          <a:lstStyle/>
+          <a:p>
+            <a:pPr algn="l"/>
+            <a:r>
+              <a:rPr sz="1300" b="0">
+                <a:solidFill>
+                  <a:srgbClr val="666666"/>
+                </a:solidFill>
+                <a:latin typeface="Open Sans"/>
+                <a:ea typeface="Open Sans"/>
+                <a:cs typeface="Open Sans"/>
+              </a:rPr>
+              <a:t>Тема 2 · Оказание первой помощи при наружных кровотечениях</a:t>
             </a:r>
           </a:p>
         </p:txBody>
@@ -3234,13 +3372,13 @@
         <p:spPr>
           <a:xfrm>
             <a:off x="0" y="0"/>
-            <a:ext cx="12191695" cy="6858000"/>
+            <a:ext cx="3400000" cy="6858000"/>
           </a:xfrm>
           <a:prstGeom prst="rect">
             <a:avLst/>
           </a:prstGeom>
           <a:solidFill>
-            <a:srgbClr val="FFFFFF"/>
+            <a:srgbClr val="DDDDDD"/>
           </a:solidFill>
           <a:ln>
             <a:noFill/>
@@ -3276,8 +3414,8 @@
         </p:nvSpPr>
         <p:spPr>
           <a:xfrm>
-            <a:off x="0" y="0"/>
-            <a:ext cx="12191695" cy="1300000"/>
+            <a:off x="3400000" y="0"/>
+            <a:ext cx="8800000" cy="6858000"/>
           </a:xfrm>
           <a:prstGeom prst="rect">
             <a:avLst/>
@@ -3319,8 +3457,8 @@
         </p:nvSpPr>
         <p:spPr>
           <a:xfrm>
-            <a:off x="700000" y="220000"/>
-            <a:ext cx="11200000" cy="550000"/>
+            <a:off x="4000000" y="3000000"/>
+            <a:ext cx="7500000" cy="1000000"/>
           </a:xfrm>
           <a:prstGeom prst="rect">
             <a:avLst/>
@@ -3328,22 +3466,22 @@
           <a:noFill/>
         </p:spPr>
         <p:txBody>
-          <a:bodyPr wrap="square" anchor="t">
+          <a:bodyPr wrap="square" anchor="ctr">
             <a:spAutoFit/>
           </a:bodyPr>
           <a:lstStyle/>
           <a:p>
             <a:pPr algn="l"/>
             <a:r>
-              <a:rPr sz="2000" b="1">
+              <a:rPr sz="3000" b="1">
                 <a:solidFill>
                   <a:srgbClr val="333333"/>
                 </a:solidFill>
-                <a:latin typeface="Calibri"/>
-                <a:ea typeface="Calibri"/>
-                <a:cs typeface="Calibri"/>
+                <a:latin typeface="Open Sans"/>
+                <a:ea typeface="Open Sans"/>
+                <a:cs typeface="Open Sans"/>
               </a:rPr>
-              <a:t>ОБЗОРНЫЙ И ПОДРОБНЫЙ ОСМОТР</a:t>
+              <a:t>БЛАГОДАРИМ ЗА ВНИМАНИЕ</a:t>
             </a:r>
           </a:p>
         </p:txBody>
@@ -3356,14 +3494,14 @@
         </p:nvSpPr>
         <p:spPr>
           <a:xfrm>
-            <a:off x="700000" y="820000"/>
-            <a:ext cx="8500000" cy="28000"/>
+            <a:off x="4000000" y="4100000"/>
+            <a:ext cx="4500000" cy="30000"/>
           </a:xfrm>
           <a:prstGeom prst="rect">
             <a:avLst/>
           </a:prstGeom>
           <a:solidFill>
-            <a:srgbClr val="606060"/>
+            <a:srgbClr val="333333"/>
           </a:solidFill>
           <a:ln>
             <a:noFill/>
@@ -3388,1497 +3526,6 @@
           <a:lstStyle/>
           <a:p>
             <a:pPr algn="ctr"/>
-          </a:p>
-        </p:txBody>
-      </p:sp>
-      <p:sp>
-        <p:nvSpPr>
-          <p:cNvPr id="6" name="TextBox 5"/>
-          <p:cNvSpPr txBox="1"/>
-          <p:nvPr/>
-        </p:nvSpPr>
-        <p:spPr>
-          <a:xfrm>
-            <a:off x="700000" y="880000"/>
-            <a:ext cx="11000000" cy="320000"/>
-          </a:xfrm>
-          <a:prstGeom prst="rect">
-            <a:avLst/>
-          </a:prstGeom>
-          <a:noFill/>
-        </p:spPr>
-        <p:txBody>
-          <a:bodyPr wrap="square" anchor="t">
-            <a:spAutoFit/>
-          </a:bodyPr>
-          <a:lstStyle/>
-          <a:p>
-            <a:pPr algn="l"/>
-            <a:r>
-              <a:rPr sz="1100" b="0">
-                <a:solidFill>
-                  <a:srgbClr val="777777"/>
-                </a:solidFill>
-                <a:latin typeface="Calibri"/>
-                <a:ea typeface="Calibri"/>
-                <a:cs typeface="Calibri"/>
-              </a:rPr>
-              <a:t>Оказание первой помощи при наружных кровотечениях</a:t>
-            </a:r>
-          </a:p>
-        </p:txBody>
-      </p:sp>
-      <p:sp>
-        <p:nvSpPr>
-          <p:cNvPr id="7" name="Rectangle 6"/>
-          <p:cNvSpPr/>
-          <p:nvPr/>
-        </p:nvSpPr>
-        <p:spPr>
-          <a:xfrm>
-            <a:off x="0" y="2700000"/>
-            <a:ext cx="400000" cy="400000"/>
-          </a:xfrm>
-          <a:prstGeom prst="rect">
-            <a:avLst/>
-          </a:prstGeom>
-          <a:solidFill>
-            <a:srgbClr val="606060"/>
-          </a:solidFill>
-          <a:ln>
-            <a:noFill/>
-          </a:ln>
-        </p:spPr>
-        <p:style>
-          <a:lnRef idx="1">
-            <a:schemeClr val="accent1"/>
-          </a:lnRef>
-          <a:fillRef idx="3">
-            <a:schemeClr val="accent1"/>
-          </a:fillRef>
-          <a:effectRef idx="2">
-            <a:schemeClr val="accent1"/>
-          </a:effectRef>
-          <a:fontRef idx="minor">
-            <a:schemeClr val="lt1"/>
-          </a:fontRef>
-        </p:style>
-        <p:txBody>
-          <a:bodyPr rtlCol="0" anchor="ctr"/>
-          <a:lstStyle/>
-          <a:p>
-            <a:pPr algn="ctr"/>
-          </a:p>
-        </p:txBody>
-      </p:sp>
-      <p:sp>
-        <p:nvSpPr>
-          <p:cNvPr id="8" name="TextBox 7"/>
-          <p:cNvSpPr txBox="1"/>
-          <p:nvPr/>
-        </p:nvSpPr>
-        <p:spPr>
-          <a:xfrm>
-            <a:off x="0" y="2700000"/>
-            <a:ext cx="400000" cy="400000"/>
-          </a:xfrm>
-          <a:prstGeom prst="rect">
-            <a:avLst/>
-          </a:prstGeom>
-          <a:noFill/>
-        </p:spPr>
-        <p:txBody>
-          <a:bodyPr wrap="square" anchor="ctr">
-            <a:spAutoFit/>
-          </a:bodyPr>
-          <a:lstStyle/>
-          <a:p>
-            <a:pPr algn="ctr"/>
-            <a:r>
-              <a:rPr sz="1300" b="1">
-                <a:solidFill>
-                  <a:srgbClr val="FFFFFF"/>
-                </a:solidFill>
-                <a:latin typeface="Calibri"/>
-                <a:ea typeface="Calibri"/>
-                <a:cs typeface="Calibri"/>
-              </a:rPr>
-              <a:t>10</a:t>
-            </a:r>
-          </a:p>
-        </p:txBody>
-      </p:sp>
-      <p:sp>
-        <p:nvSpPr>
-          <p:cNvPr id="9" name="Rounded Rectangle 8"/>
-          <p:cNvSpPr/>
-          <p:nvPr/>
-        </p:nvSpPr>
-        <p:spPr>
-          <a:xfrm>
-            <a:off x="700000" y="1550000"/>
-            <a:ext cx="5400000" cy="4800000"/>
-          </a:xfrm>
-          <a:prstGeom prst="roundRect">
-            <a:avLst/>
-          </a:prstGeom>
-          <a:solidFill>
-            <a:srgbClr val="FFFFFF"/>
-          </a:solidFill>
-          <a:ln w="15875">
-            <a:solidFill>
-              <a:srgbClr val="8DDBCD"/>
-            </a:solidFill>
-          </a:ln>
-        </p:spPr>
-        <p:style>
-          <a:lnRef idx="1">
-            <a:schemeClr val="accent1"/>
-          </a:lnRef>
-          <a:fillRef idx="3">
-            <a:schemeClr val="accent1"/>
-          </a:fillRef>
-          <a:effectRef idx="2">
-            <a:schemeClr val="accent1"/>
-          </a:effectRef>
-          <a:fontRef idx="minor">
-            <a:schemeClr val="lt1"/>
-          </a:fontRef>
-        </p:style>
-        <p:txBody>
-          <a:bodyPr rtlCol="0" anchor="ctr"/>
-          <a:lstStyle/>
-          <a:p>
-            <a:pPr algn="ctr"/>
-          </a:p>
-        </p:txBody>
-      </p:sp>
-      <p:sp>
-        <p:nvSpPr>
-          <p:cNvPr id="10" name="Rectangle 9"/>
-          <p:cNvSpPr/>
-          <p:nvPr/>
-        </p:nvSpPr>
-        <p:spPr>
-          <a:xfrm>
-            <a:off x="700000" y="1550000"/>
-            <a:ext cx="5400000" cy="700000"/>
-          </a:xfrm>
-          <a:prstGeom prst="rect">
-            <a:avLst/>
-          </a:prstGeom>
-          <a:solidFill>
-            <a:srgbClr val="8DDBCD"/>
-          </a:solidFill>
-          <a:ln>
-            <a:noFill/>
-          </a:ln>
-        </p:spPr>
-        <p:style>
-          <a:lnRef idx="1">
-            <a:schemeClr val="accent1"/>
-          </a:lnRef>
-          <a:fillRef idx="3">
-            <a:schemeClr val="accent1"/>
-          </a:fillRef>
-          <a:effectRef idx="2">
-            <a:schemeClr val="accent1"/>
-          </a:effectRef>
-          <a:fontRef idx="minor">
-            <a:schemeClr val="lt1"/>
-          </a:fontRef>
-        </p:style>
-        <p:txBody>
-          <a:bodyPr rtlCol="0" anchor="ctr"/>
-          <a:lstStyle/>
-          <a:p>
-            <a:pPr algn="ctr"/>
-          </a:p>
-        </p:txBody>
-      </p:sp>
-      <p:sp>
-        <p:nvSpPr>
-          <p:cNvPr id="11" name="TextBox 10"/>
-          <p:cNvSpPr txBox="1"/>
-          <p:nvPr/>
-        </p:nvSpPr>
-        <p:spPr>
-          <a:xfrm>
-            <a:off x="900000" y="1650000"/>
-            <a:ext cx="5000000" cy="500000"/>
-          </a:xfrm>
-          <a:prstGeom prst="rect">
-            <a:avLst/>
-          </a:prstGeom>
-          <a:noFill/>
-        </p:spPr>
-        <p:txBody>
-          <a:bodyPr wrap="square" anchor="t">
-            <a:spAutoFit/>
-          </a:bodyPr>
-          <a:lstStyle/>
-          <a:p>
-            <a:pPr algn="ctr"/>
-            <a:r>
-              <a:rPr sz="1600" b="1">
-                <a:solidFill>
-                  <a:srgbClr val="0D6B60"/>
-                </a:solidFill>
-                <a:latin typeface="Calibri"/>
-                <a:ea typeface="Calibri"/>
-                <a:cs typeface="Calibri"/>
-              </a:rPr>
-              <a:t>Обзорный осмотр</a:t>
-            </a:r>
-          </a:p>
-        </p:txBody>
-      </p:sp>
-      <p:sp>
-        <p:nvSpPr>
-          <p:cNvPr id="12" name="TextBox 11"/>
-          <p:cNvSpPr txBox="1"/>
-          <p:nvPr/>
-        </p:nvSpPr>
-        <p:spPr>
-          <a:xfrm>
-            <a:off x="950000" y="2500000"/>
-            <a:ext cx="4900000" cy="3500000"/>
-          </a:xfrm>
-          <a:prstGeom prst="rect">
-            <a:avLst/>
-          </a:prstGeom>
-          <a:noFill/>
-        </p:spPr>
-        <p:txBody>
-          <a:bodyPr wrap="square">
-            <a:spAutoFit/>
-          </a:bodyPr>
-          <a:lstStyle/>
-          <a:p>
-            <a:pPr algn="l">
-              <a:spcAft>
-                <a:spcPts val="700"/>
-              </a:spcAft>
-            </a:pPr>
-            <a:r>
-              <a:rPr sz="1400" b="0">
-                <a:solidFill>
-                  <a:srgbClr val="333333"/>
-                </a:solidFill>
-                <a:latin typeface="Calibri"/>
-                <a:ea typeface="Calibri"/>
-                <a:cs typeface="Calibri"/>
-              </a:rPr>
-              <a:t>•  Цель: найти наружное кровотечение</a:t>
-            </a:r>
-          </a:p>
-          <a:p>
-            <a:pPr algn="l">
-              <a:spcAft>
-                <a:spcPts val="700"/>
-              </a:spcAft>
-            </a:pPr>
-            <a:r>
-              <a:rPr sz="1400" b="0">
-                <a:solidFill>
-                  <a:srgbClr val="333333"/>
-                </a:solidFill>
-                <a:latin typeface="Calibri"/>
-                <a:ea typeface="Calibri"/>
-                <a:cs typeface="Calibri"/>
-              </a:rPr>
-              <a:t>•  Время: несколько секунд</a:t>
-            </a:r>
-          </a:p>
-          <a:p>
-            <a:pPr algn="l">
-              <a:spcAft>
-                <a:spcPts val="700"/>
-              </a:spcAft>
-            </a:pPr>
-            <a:r>
-              <a:rPr sz="1400" b="0">
-                <a:solidFill>
-                  <a:srgbClr val="333333"/>
-                </a:solidFill>
-                <a:latin typeface="Calibri"/>
-                <a:ea typeface="Calibri"/>
-                <a:cs typeface="Calibri"/>
-              </a:rPr>
-              <a:t>•  Объём: быстро с головы до ног</a:t>
-            </a:r>
-          </a:p>
-          <a:p>
-            <a:pPr algn="l">
-              <a:spcAft>
-                <a:spcPts val="700"/>
-              </a:spcAft>
-            </a:pPr>
-            <a:r>
-              <a:rPr sz="1400" b="0">
-                <a:solidFill>
-                  <a:srgbClr val="333333"/>
-                </a:solidFill>
-                <a:latin typeface="Calibri"/>
-                <a:ea typeface="Calibri"/>
-                <a:cs typeface="Calibri"/>
-              </a:rPr>
-              <a:t>•  Когда: сразу после оценки обстановки</a:t>
-            </a:r>
-          </a:p>
-        </p:txBody>
-      </p:sp>
-      <p:sp>
-        <p:nvSpPr>
-          <p:cNvPr id="13" name="Rounded Rectangle 12"/>
-          <p:cNvSpPr/>
-          <p:nvPr/>
-        </p:nvSpPr>
-        <p:spPr>
-          <a:xfrm>
-            <a:off x="6500000" y="1550000"/>
-            <a:ext cx="5400000" cy="4800000"/>
-          </a:xfrm>
-          <a:prstGeom prst="roundRect">
-            <a:avLst/>
-          </a:prstGeom>
-          <a:solidFill>
-            <a:srgbClr val="FFFFFF"/>
-          </a:solidFill>
-          <a:ln w="15875">
-            <a:solidFill>
-              <a:srgbClr val="999999"/>
-            </a:solidFill>
-          </a:ln>
-        </p:spPr>
-        <p:style>
-          <a:lnRef idx="1">
-            <a:schemeClr val="accent1"/>
-          </a:lnRef>
-          <a:fillRef idx="3">
-            <a:schemeClr val="accent1"/>
-          </a:fillRef>
-          <a:effectRef idx="2">
-            <a:schemeClr val="accent1"/>
-          </a:effectRef>
-          <a:fontRef idx="minor">
-            <a:schemeClr val="lt1"/>
-          </a:fontRef>
-        </p:style>
-        <p:txBody>
-          <a:bodyPr rtlCol="0" anchor="ctr"/>
-          <a:lstStyle/>
-          <a:p>
-            <a:pPr algn="ctr"/>
-          </a:p>
-        </p:txBody>
-      </p:sp>
-      <p:sp>
-        <p:nvSpPr>
-          <p:cNvPr id="14" name="Rectangle 13"/>
-          <p:cNvSpPr/>
-          <p:nvPr/>
-        </p:nvSpPr>
-        <p:spPr>
-          <a:xfrm>
-            <a:off x="6500000" y="1550000"/>
-            <a:ext cx="5400000" cy="700000"/>
-          </a:xfrm>
-          <a:prstGeom prst="rect">
-            <a:avLst/>
-          </a:prstGeom>
-          <a:solidFill>
-            <a:srgbClr val="F0F0F0"/>
-          </a:solidFill>
-          <a:ln>
-            <a:noFill/>
-          </a:ln>
-        </p:spPr>
-        <p:style>
-          <a:lnRef idx="1">
-            <a:schemeClr val="accent1"/>
-          </a:lnRef>
-          <a:fillRef idx="3">
-            <a:schemeClr val="accent1"/>
-          </a:fillRef>
-          <a:effectRef idx="2">
-            <a:schemeClr val="accent1"/>
-          </a:effectRef>
-          <a:fontRef idx="minor">
-            <a:schemeClr val="lt1"/>
-          </a:fontRef>
-        </p:style>
-        <p:txBody>
-          <a:bodyPr rtlCol="0" anchor="ctr"/>
-          <a:lstStyle/>
-          <a:p>
-            <a:pPr algn="ctr"/>
-          </a:p>
-        </p:txBody>
-      </p:sp>
-      <p:sp>
-        <p:nvSpPr>
-          <p:cNvPr id="15" name="TextBox 14"/>
-          <p:cNvSpPr txBox="1"/>
-          <p:nvPr/>
-        </p:nvSpPr>
-        <p:spPr>
-          <a:xfrm>
-            <a:off x="6700000" y="1650000"/>
-            <a:ext cx="5000000" cy="500000"/>
-          </a:xfrm>
-          <a:prstGeom prst="rect">
-            <a:avLst/>
-          </a:prstGeom>
-          <a:noFill/>
-        </p:spPr>
-        <p:txBody>
-          <a:bodyPr wrap="square" anchor="t">
-            <a:spAutoFit/>
-          </a:bodyPr>
-          <a:lstStyle/>
-          <a:p>
-            <a:pPr algn="ctr"/>
-            <a:r>
-              <a:rPr sz="1600" b="1">
-                <a:solidFill>
-                  <a:srgbClr val="333333"/>
-                </a:solidFill>
-                <a:latin typeface="Calibri"/>
-                <a:ea typeface="Calibri"/>
-                <a:cs typeface="Calibri"/>
-              </a:rPr>
-              <a:t>Подробный осмотр</a:t>
-            </a:r>
-          </a:p>
-        </p:txBody>
-      </p:sp>
-      <p:sp>
-        <p:nvSpPr>
-          <p:cNvPr id="16" name="TextBox 15"/>
-          <p:cNvSpPr txBox="1"/>
-          <p:nvPr/>
-        </p:nvSpPr>
-        <p:spPr>
-          <a:xfrm>
-            <a:off x="6750000" y="2500000"/>
-            <a:ext cx="4900000" cy="3500000"/>
-          </a:xfrm>
-          <a:prstGeom prst="rect">
-            <a:avLst/>
-          </a:prstGeom>
-          <a:noFill/>
-        </p:spPr>
-        <p:txBody>
-          <a:bodyPr wrap="square">
-            <a:spAutoFit/>
-          </a:bodyPr>
-          <a:lstStyle/>
-          <a:p>
-            <a:pPr algn="l">
-              <a:spcAft>
-                <a:spcPts val="700"/>
-              </a:spcAft>
-            </a:pPr>
-            <a:r>
-              <a:rPr sz="1400" b="0">
-                <a:solidFill>
-                  <a:srgbClr val="333333"/>
-                </a:solidFill>
-                <a:latin typeface="Calibri"/>
-                <a:ea typeface="Calibri"/>
-                <a:cs typeface="Calibri"/>
-              </a:rPr>
-              <a:t>•  Цель: выявить травмы и другие угрозы</a:t>
-            </a:r>
-          </a:p>
-          <a:p>
-            <a:pPr algn="l">
-              <a:spcAft>
-                <a:spcPts val="700"/>
-              </a:spcAft>
-            </a:pPr>
-            <a:r>
-              <a:rPr sz="1400" b="0">
-                <a:solidFill>
-                  <a:srgbClr val="333333"/>
-                </a:solidFill>
-                <a:latin typeface="Calibri"/>
-                <a:ea typeface="Calibri"/>
-                <a:cs typeface="Calibri"/>
-              </a:rPr>
-              <a:t>•  Время: несколько минут</a:t>
-            </a:r>
-          </a:p>
-          <a:p>
-            <a:pPr algn="l">
-              <a:spcAft>
-                <a:spcPts val="700"/>
-              </a:spcAft>
-            </a:pPr>
-            <a:r>
-              <a:rPr sz="1400" b="0">
-                <a:solidFill>
-                  <a:srgbClr val="333333"/>
-                </a:solidFill>
-                <a:latin typeface="Calibri"/>
-                <a:ea typeface="Calibri"/>
-                <a:cs typeface="Calibri"/>
-              </a:rPr>
-              <a:t>•  Объём: голова → шея → грудь → … → руки</a:t>
-            </a:r>
-          </a:p>
-          <a:p>
-            <a:pPr algn="l">
-              <a:spcAft>
-                <a:spcPts val="700"/>
-              </a:spcAft>
-            </a:pPr>
-            <a:r>
-              <a:rPr sz="1400" b="0">
-                <a:solidFill>
-                  <a:srgbClr val="333333"/>
-                </a:solidFill>
-                <a:latin typeface="Calibri"/>
-                <a:ea typeface="Calibri"/>
-                <a:cs typeface="Calibri"/>
-              </a:rPr>
-              <a:t>•  Когда: после остановки кровотечения</a:t>
-            </a:r>
-          </a:p>
-        </p:txBody>
-      </p:sp>
-    </p:spTree>
-  </p:cSld>
-  <p:clrMapOvr>
-    <a:masterClrMapping/>
-  </p:clrMapOvr>
-</p:sld>
-</file>
-
-<file path=ppt/slides/slide11.xml><?xml version="1.0" encoding="utf-8"?>
-<p:sld xmlns:a="http://schemas.openxmlformats.org/drawingml/2006/main" xmlns:p="http://schemas.openxmlformats.org/presentationml/2006/main" xmlns:r="http://schemas.openxmlformats.org/officeDocument/2006/relationships">
-  <p:cSld>
-    <p:spTree>
-      <p:nvGrpSpPr>
-        <p:cNvPr id="1" name=""/>
-        <p:cNvGrpSpPr/>
-        <p:nvPr/>
-      </p:nvGrpSpPr>
-      <p:grpSpPr/>
-      <p:sp>
-        <p:nvSpPr>
-          <p:cNvPr id="2" name="Rectangle 1"/>
-          <p:cNvSpPr/>
-          <p:nvPr/>
-        </p:nvSpPr>
-        <p:spPr>
-          <a:xfrm>
-            <a:off x="0" y="0"/>
-            <a:ext cx="12191695" cy="6858000"/>
-          </a:xfrm>
-          <a:prstGeom prst="rect">
-            <a:avLst/>
-          </a:prstGeom>
-          <a:solidFill>
-            <a:srgbClr val="FFFFFF"/>
-          </a:solidFill>
-          <a:ln>
-            <a:noFill/>
-          </a:ln>
-        </p:spPr>
-        <p:style>
-          <a:lnRef idx="1">
-            <a:schemeClr val="accent1"/>
-          </a:lnRef>
-          <a:fillRef idx="3">
-            <a:schemeClr val="accent1"/>
-          </a:fillRef>
-          <a:effectRef idx="2">
-            <a:schemeClr val="accent1"/>
-          </a:effectRef>
-          <a:fontRef idx="minor">
-            <a:schemeClr val="lt1"/>
-          </a:fontRef>
-        </p:style>
-        <p:txBody>
-          <a:bodyPr rtlCol="0" anchor="ctr"/>
-          <a:lstStyle/>
-          <a:p>
-            <a:pPr algn="ctr"/>
-          </a:p>
-        </p:txBody>
-      </p:sp>
-      <p:sp>
-        <p:nvSpPr>
-          <p:cNvPr id="3" name="Rectangle 2"/>
-          <p:cNvSpPr/>
-          <p:nvPr/>
-        </p:nvSpPr>
-        <p:spPr>
-          <a:xfrm>
-            <a:off x="0" y="0"/>
-            <a:ext cx="12191695" cy="1300000"/>
-          </a:xfrm>
-          <a:prstGeom prst="rect">
-            <a:avLst/>
-          </a:prstGeom>
-          <a:solidFill>
-            <a:srgbClr val="F8F8F8"/>
-          </a:solidFill>
-          <a:ln>
-            <a:noFill/>
-          </a:ln>
-        </p:spPr>
-        <p:style>
-          <a:lnRef idx="1">
-            <a:schemeClr val="accent1"/>
-          </a:lnRef>
-          <a:fillRef idx="3">
-            <a:schemeClr val="accent1"/>
-          </a:fillRef>
-          <a:effectRef idx="2">
-            <a:schemeClr val="accent1"/>
-          </a:effectRef>
-          <a:fontRef idx="minor">
-            <a:schemeClr val="lt1"/>
-          </a:fontRef>
-        </p:style>
-        <p:txBody>
-          <a:bodyPr rtlCol="0" anchor="ctr"/>
-          <a:lstStyle/>
-          <a:p>
-            <a:pPr algn="ctr"/>
-          </a:p>
-        </p:txBody>
-      </p:sp>
-      <p:sp>
-        <p:nvSpPr>
-          <p:cNvPr id="4" name="TextBox 3"/>
-          <p:cNvSpPr txBox="1"/>
-          <p:nvPr/>
-        </p:nvSpPr>
-        <p:spPr>
-          <a:xfrm>
-            <a:off x="700000" y="220000"/>
-            <a:ext cx="11200000" cy="550000"/>
-          </a:xfrm>
-          <a:prstGeom prst="rect">
-            <a:avLst/>
-          </a:prstGeom>
-          <a:noFill/>
-        </p:spPr>
-        <p:txBody>
-          <a:bodyPr wrap="square" anchor="t">
-            <a:spAutoFit/>
-          </a:bodyPr>
-          <a:lstStyle/>
-          <a:p>
-            <a:pPr algn="l"/>
-            <a:r>
-              <a:rPr sz="2000" b="1">
-                <a:solidFill>
-                  <a:srgbClr val="333333"/>
-                </a:solidFill>
-                <a:latin typeface="Calibri"/>
-                <a:ea typeface="Calibri"/>
-                <a:cs typeface="Calibri"/>
-              </a:rPr>
-              <a:t>ГЛАВНОЕ ЗАПОМНИТЬ</a:t>
-            </a:r>
-          </a:p>
-        </p:txBody>
-      </p:sp>
-      <p:sp>
-        <p:nvSpPr>
-          <p:cNvPr id="5" name="Rectangle 4"/>
-          <p:cNvSpPr/>
-          <p:nvPr/>
-        </p:nvSpPr>
-        <p:spPr>
-          <a:xfrm>
-            <a:off x="700000" y="820000"/>
-            <a:ext cx="8500000" cy="28000"/>
-          </a:xfrm>
-          <a:prstGeom prst="rect">
-            <a:avLst/>
-          </a:prstGeom>
-          <a:solidFill>
-            <a:srgbClr val="606060"/>
-          </a:solidFill>
-          <a:ln>
-            <a:noFill/>
-          </a:ln>
-        </p:spPr>
-        <p:style>
-          <a:lnRef idx="1">
-            <a:schemeClr val="accent1"/>
-          </a:lnRef>
-          <a:fillRef idx="3">
-            <a:schemeClr val="accent1"/>
-          </a:fillRef>
-          <a:effectRef idx="2">
-            <a:schemeClr val="accent1"/>
-          </a:effectRef>
-          <a:fontRef idx="minor">
-            <a:schemeClr val="lt1"/>
-          </a:fontRef>
-        </p:style>
-        <p:txBody>
-          <a:bodyPr rtlCol="0" anchor="ctr"/>
-          <a:lstStyle/>
-          <a:p>
-            <a:pPr algn="ctr"/>
-          </a:p>
-        </p:txBody>
-      </p:sp>
-      <p:sp>
-        <p:nvSpPr>
-          <p:cNvPr id="6" name="TextBox 5"/>
-          <p:cNvSpPr txBox="1"/>
-          <p:nvPr/>
-        </p:nvSpPr>
-        <p:spPr>
-          <a:xfrm>
-            <a:off x="700000" y="880000"/>
-            <a:ext cx="11000000" cy="320000"/>
-          </a:xfrm>
-          <a:prstGeom prst="rect">
-            <a:avLst/>
-          </a:prstGeom>
-          <a:noFill/>
-        </p:spPr>
-        <p:txBody>
-          <a:bodyPr wrap="square" anchor="t">
-            <a:spAutoFit/>
-          </a:bodyPr>
-          <a:lstStyle/>
-          <a:p>
-            <a:pPr algn="l"/>
-            <a:r>
-              <a:rPr sz="1100" b="0">
-                <a:solidFill>
-                  <a:srgbClr val="777777"/>
-                </a:solidFill>
-                <a:latin typeface="Calibri"/>
-                <a:ea typeface="Calibri"/>
-                <a:cs typeface="Calibri"/>
-              </a:rPr>
-              <a:t>Оказание первой помощи при наружных кровотечениях</a:t>
-            </a:r>
-          </a:p>
-        </p:txBody>
-      </p:sp>
-      <p:sp>
-        <p:nvSpPr>
-          <p:cNvPr id="7" name="Rectangle 6"/>
-          <p:cNvSpPr/>
-          <p:nvPr/>
-        </p:nvSpPr>
-        <p:spPr>
-          <a:xfrm>
-            <a:off x="0" y="2700000"/>
-            <a:ext cx="400000" cy="400000"/>
-          </a:xfrm>
-          <a:prstGeom prst="rect">
-            <a:avLst/>
-          </a:prstGeom>
-          <a:solidFill>
-            <a:srgbClr val="606060"/>
-          </a:solidFill>
-          <a:ln>
-            <a:noFill/>
-          </a:ln>
-        </p:spPr>
-        <p:style>
-          <a:lnRef idx="1">
-            <a:schemeClr val="accent1"/>
-          </a:lnRef>
-          <a:fillRef idx="3">
-            <a:schemeClr val="accent1"/>
-          </a:fillRef>
-          <a:effectRef idx="2">
-            <a:schemeClr val="accent1"/>
-          </a:effectRef>
-          <a:fontRef idx="minor">
-            <a:schemeClr val="lt1"/>
-          </a:fontRef>
-        </p:style>
-        <p:txBody>
-          <a:bodyPr rtlCol="0" anchor="ctr"/>
-          <a:lstStyle/>
-          <a:p>
-            <a:pPr algn="ctr"/>
-          </a:p>
-        </p:txBody>
-      </p:sp>
-      <p:sp>
-        <p:nvSpPr>
-          <p:cNvPr id="8" name="TextBox 7"/>
-          <p:cNvSpPr txBox="1"/>
-          <p:nvPr/>
-        </p:nvSpPr>
-        <p:spPr>
-          <a:xfrm>
-            <a:off x="0" y="2700000"/>
-            <a:ext cx="400000" cy="400000"/>
-          </a:xfrm>
-          <a:prstGeom prst="rect">
-            <a:avLst/>
-          </a:prstGeom>
-          <a:noFill/>
-        </p:spPr>
-        <p:txBody>
-          <a:bodyPr wrap="square" anchor="ctr">
-            <a:spAutoFit/>
-          </a:bodyPr>
-          <a:lstStyle/>
-          <a:p>
-            <a:pPr algn="ctr"/>
-            <a:r>
-              <a:rPr sz="1300" b="1">
-                <a:solidFill>
-                  <a:srgbClr val="FFFFFF"/>
-                </a:solidFill>
-                <a:latin typeface="Calibri"/>
-                <a:ea typeface="Calibri"/>
-                <a:cs typeface="Calibri"/>
-              </a:rPr>
-              <a:t>11</a:t>
-            </a:r>
-          </a:p>
-        </p:txBody>
-      </p:sp>
-      <p:sp>
-        <p:nvSpPr>
-          <p:cNvPr id="9" name="Rounded Rectangle 8"/>
-          <p:cNvSpPr/>
-          <p:nvPr/>
-        </p:nvSpPr>
-        <p:spPr>
-          <a:xfrm>
-            <a:off x="700000" y="1550000"/>
-            <a:ext cx="11000000" cy="1000000"/>
-          </a:xfrm>
-          <a:prstGeom prst="roundRect">
-            <a:avLst/>
-          </a:prstGeom>
-          <a:solidFill>
-            <a:srgbClr val="F0F0F0"/>
-          </a:solidFill>
-          <a:ln>
-            <a:noFill/>
-          </a:ln>
-        </p:spPr>
-        <p:style>
-          <a:lnRef idx="1">
-            <a:schemeClr val="accent1"/>
-          </a:lnRef>
-          <a:fillRef idx="3">
-            <a:schemeClr val="accent1"/>
-          </a:fillRef>
-          <a:effectRef idx="2">
-            <a:schemeClr val="accent1"/>
-          </a:effectRef>
-          <a:fontRef idx="minor">
-            <a:schemeClr val="lt1"/>
-          </a:fontRef>
-        </p:style>
-        <p:txBody>
-          <a:bodyPr rtlCol="0" anchor="ctr"/>
-          <a:lstStyle/>
-          <a:p>
-            <a:pPr algn="ctr"/>
-          </a:p>
-        </p:txBody>
-      </p:sp>
-      <p:sp>
-        <p:nvSpPr>
-          <p:cNvPr id="10" name="Oval 9"/>
-          <p:cNvSpPr/>
-          <p:nvPr/>
-        </p:nvSpPr>
-        <p:spPr>
-          <a:xfrm>
-            <a:off x="900000" y="1800000"/>
-            <a:ext cx="500000" cy="500000"/>
-          </a:xfrm>
-          <a:prstGeom prst="ellipse">
-            <a:avLst/>
-          </a:prstGeom>
-          <a:solidFill>
-            <a:srgbClr val="8DDBCD"/>
-          </a:solidFill>
-          <a:ln>
-            <a:noFill/>
-          </a:ln>
-        </p:spPr>
-        <p:style>
-          <a:lnRef idx="1">
-            <a:schemeClr val="accent1"/>
-          </a:lnRef>
-          <a:fillRef idx="3">
-            <a:schemeClr val="accent1"/>
-          </a:fillRef>
-          <a:effectRef idx="2">
-            <a:schemeClr val="accent1"/>
-          </a:effectRef>
-          <a:fontRef idx="minor">
-            <a:schemeClr val="lt1"/>
-          </a:fontRef>
-        </p:style>
-        <p:txBody>
-          <a:bodyPr rtlCol="0" anchor="ctr"/>
-          <a:lstStyle/>
-          <a:p>
-            <a:pPr algn="ctr"/>
-          </a:p>
-        </p:txBody>
-      </p:sp>
-      <p:sp>
-        <p:nvSpPr>
-          <p:cNvPr id="11" name="TextBox 10"/>
-          <p:cNvSpPr txBox="1"/>
-          <p:nvPr/>
-        </p:nvSpPr>
-        <p:spPr>
-          <a:xfrm>
-            <a:off x="1600000" y="1750000"/>
-            <a:ext cx="9800000" cy="600000"/>
-          </a:xfrm>
-          <a:prstGeom prst="rect">
-            <a:avLst/>
-          </a:prstGeom>
-          <a:noFill/>
-        </p:spPr>
-        <p:txBody>
-          <a:bodyPr wrap="square" anchor="ctr">
-            <a:spAutoFit/>
-          </a:bodyPr>
-          <a:lstStyle/>
-          <a:p>
-            <a:pPr algn="l"/>
-            <a:r>
-              <a:rPr sz="1400" b="0">
-                <a:solidFill>
-                  <a:srgbClr val="333333"/>
-                </a:solidFill>
-                <a:latin typeface="Calibri"/>
-                <a:ea typeface="Calibri"/>
-                <a:cs typeface="Calibri"/>
-              </a:rPr>
-              <a:t>Кровотечение — выход крови из сосудов с риском кровопотери.</a:t>
-            </a:r>
-          </a:p>
-        </p:txBody>
-      </p:sp>
-      <p:sp>
-        <p:nvSpPr>
-          <p:cNvPr id="12" name="Rounded Rectangle 11"/>
-          <p:cNvSpPr/>
-          <p:nvPr/>
-        </p:nvSpPr>
-        <p:spPr>
-          <a:xfrm>
-            <a:off x="700000" y="2700000"/>
-            <a:ext cx="11000000" cy="1000000"/>
-          </a:xfrm>
-          <a:prstGeom prst="roundRect">
-            <a:avLst/>
-          </a:prstGeom>
-          <a:solidFill>
-            <a:srgbClr val="F0F0F0"/>
-          </a:solidFill>
-          <a:ln>
-            <a:noFill/>
-          </a:ln>
-        </p:spPr>
-        <p:style>
-          <a:lnRef idx="1">
-            <a:schemeClr val="accent1"/>
-          </a:lnRef>
-          <a:fillRef idx="3">
-            <a:schemeClr val="accent1"/>
-          </a:fillRef>
-          <a:effectRef idx="2">
-            <a:schemeClr val="accent1"/>
-          </a:effectRef>
-          <a:fontRef idx="minor">
-            <a:schemeClr val="lt1"/>
-          </a:fontRef>
-        </p:style>
-        <p:txBody>
-          <a:bodyPr rtlCol="0" anchor="ctr"/>
-          <a:lstStyle/>
-          <a:p>
-            <a:pPr algn="ctr"/>
-          </a:p>
-        </p:txBody>
-      </p:sp>
-      <p:sp>
-        <p:nvSpPr>
-          <p:cNvPr id="13" name="Oval 12"/>
-          <p:cNvSpPr/>
-          <p:nvPr/>
-        </p:nvSpPr>
-        <p:spPr>
-          <a:xfrm>
-            <a:off x="900000" y="2950000"/>
-            <a:ext cx="500000" cy="500000"/>
-          </a:xfrm>
-          <a:prstGeom prst="ellipse">
-            <a:avLst/>
-          </a:prstGeom>
-          <a:solidFill>
-            <a:srgbClr val="8DDBCD"/>
-          </a:solidFill>
-          <a:ln>
-            <a:noFill/>
-          </a:ln>
-        </p:spPr>
-        <p:style>
-          <a:lnRef idx="1">
-            <a:schemeClr val="accent1"/>
-          </a:lnRef>
-          <a:fillRef idx="3">
-            <a:schemeClr val="accent1"/>
-          </a:fillRef>
-          <a:effectRef idx="2">
-            <a:schemeClr val="accent1"/>
-          </a:effectRef>
-          <a:fontRef idx="minor">
-            <a:schemeClr val="lt1"/>
-          </a:fontRef>
-        </p:style>
-        <p:txBody>
-          <a:bodyPr rtlCol="0" anchor="ctr"/>
-          <a:lstStyle/>
-          <a:p>
-            <a:pPr algn="ctr"/>
-          </a:p>
-        </p:txBody>
-      </p:sp>
-      <p:sp>
-        <p:nvSpPr>
-          <p:cNvPr id="14" name="TextBox 13"/>
-          <p:cNvSpPr txBox="1"/>
-          <p:nvPr/>
-        </p:nvSpPr>
-        <p:spPr>
-          <a:xfrm>
-            <a:off x="1600000" y="2900000"/>
-            <a:ext cx="9800000" cy="600000"/>
-          </a:xfrm>
-          <a:prstGeom prst="rect">
-            <a:avLst/>
-          </a:prstGeom>
-          <a:noFill/>
-        </p:spPr>
-        <p:txBody>
-          <a:bodyPr wrap="square" anchor="ctr">
-            <a:spAutoFit/>
-          </a:bodyPr>
-          <a:lstStyle/>
-          <a:p>
-            <a:pPr algn="l"/>
-            <a:r>
-              <a:rPr sz="1400" b="0">
-                <a:solidFill>
-                  <a:srgbClr val="333333"/>
-                </a:solidFill>
-                <a:latin typeface="Calibri"/>
-                <a:ea typeface="Calibri"/>
-                <a:cs typeface="Calibri"/>
-              </a:rPr>
-              <a:t>Обзорный осмотр — быстрый поиск интенсивного наружного кровотечения.</a:t>
-            </a:r>
-          </a:p>
-        </p:txBody>
-      </p:sp>
-      <p:sp>
-        <p:nvSpPr>
-          <p:cNvPr id="15" name="Rounded Rectangle 14"/>
-          <p:cNvSpPr/>
-          <p:nvPr/>
-        </p:nvSpPr>
-        <p:spPr>
-          <a:xfrm>
-            <a:off x="700000" y="3850000"/>
-            <a:ext cx="11000000" cy="1000000"/>
-          </a:xfrm>
-          <a:prstGeom prst="roundRect">
-            <a:avLst/>
-          </a:prstGeom>
-          <a:solidFill>
-            <a:srgbClr val="F0F0F0"/>
-          </a:solidFill>
-          <a:ln>
-            <a:noFill/>
-          </a:ln>
-        </p:spPr>
-        <p:style>
-          <a:lnRef idx="1">
-            <a:schemeClr val="accent1"/>
-          </a:lnRef>
-          <a:fillRef idx="3">
-            <a:schemeClr val="accent1"/>
-          </a:fillRef>
-          <a:effectRef idx="2">
-            <a:schemeClr val="accent1"/>
-          </a:effectRef>
-          <a:fontRef idx="minor">
-            <a:schemeClr val="lt1"/>
-          </a:fontRef>
-        </p:style>
-        <p:txBody>
-          <a:bodyPr rtlCol="0" anchor="ctr"/>
-          <a:lstStyle/>
-          <a:p>
-            <a:pPr algn="ctr"/>
-          </a:p>
-        </p:txBody>
-      </p:sp>
-      <p:sp>
-        <p:nvSpPr>
-          <p:cNvPr id="16" name="Oval 15"/>
-          <p:cNvSpPr/>
-          <p:nvPr/>
-        </p:nvSpPr>
-        <p:spPr>
-          <a:xfrm>
-            <a:off x="900000" y="4100000"/>
-            <a:ext cx="500000" cy="500000"/>
-          </a:xfrm>
-          <a:prstGeom prst="ellipse">
-            <a:avLst/>
-          </a:prstGeom>
-          <a:solidFill>
-            <a:srgbClr val="8DDBCD"/>
-          </a:solidFill>
-          <a:ln>
-            <a:noFill/>
-          </a:ln>
-        </p:spPr>
-        <p:style>
-          <a:lnRef idx="1">
-            <a:schemeClr val="accent1"/>
-          </a:lnRef>
-          <a:fillRef idx="3">
-            <a:schemeClr val="accent1"/>
-          </a:fillRef>
-          <a:effectRef idx="2">
-            <a:schemeClr val="accent1"/>
-          </a:effectRef>
-          <a:fontRef idx="minor">
-            <a:schemeClr val="lt1"/>
-          </a:fontRef>
-        </p:style>
-        <p:txBody>
-          <a:bodyPr rtlCol="0" anchor="ctr"/>
-          <a:lstStyle/>
-          <a:p>
-            <a:pPr algn="ctr"/>
-          </a:p>
-        </p:txBody>
-      </p:sp>
-      <p:sp>
-        <p:nvSpPr>
-          <p:cNvPr id="17" name="TextBox 16"/>
-          <p:cNvSpPr txBox="1"/>
-          <p:nvPr/>
-        </p:nvSpPr>
-        <p:spPr>
-          <a:xfrm>
-            <a:off x="1600000" y="4050000"/>
-            <a:ext cx="9800000" cy="600000"/>
-          </a:xfrm>
-          <a:prstGeom prst="rect">
-            <a:avLst/>
-          </a:prstGeom>
-          <a:noFill/>
-        </p:spPr>
-        <p:txBody>
-          <a:bodyPr wrap="square" anchor="ctr">
-            <a:spAutoFit/>
-          </a:bodyPr>
-          <a:lstStyle/>
-          <a:p>
-            <a:pPr algn="l"/>
-            <a:r>
-              <a:rPr sz="1400" b="0">
-                <a:solidFill>
-                  <a:srgbClr val="333333"/>
-                </a:solidFill>
-                <a:latin typeface="Calibri"/>
-                <a:ea typeface="Calibri"/>
-                <a:cs typeface="Calibri"/>
-              </a:rPr>
-              <a:t>Осмотр — за несколько секунд, с головы до ног.</a:t>
-            </a:r>
-          </a:p>
-        </p:txBody>
-      </p:sp>
-      <p:sp>
-        <p:nvSpPr>
-          <p:cNvPr id="18" name="Rounded Rectangle 17"/>
-          <p:cNvSpPr/>
-          <p:nvPr/>
-        </p:nvSpPr>
-        <p:spPr>
-          <a:xfrm>
-            <a:off x="700000" y="5000000"/>
-            <a:ext cx="11000000" cy="1000000"/>
-          </a:xfrm>
-          <a:prstGeom prst="roundRect">
-            <a:avLst/>
-          </a:prstGeom>
-          <a:solidFill>
-            <a:srgbClr val="F0F0F0"/>
-          </a:solidFill>
-          <a:ln>
-            <a:noFill/>
-          </a:ln>
-        </p:spPr>
-        <p:style>
-          <a:lnRef idx="1">
-            <a:schemeClr val="accent1"/>
-          </a:lnRef>
-          <a:fillRef idx="3">
-            <a:schemeClr val="accent1"/>
-          </a:fillRef>
-          <a:effectRef idx="2">
-            <a:schemeClr val="accent1"/>
-          </a:effectRef>
-          <a:fontRef idx="minor">
-            <a:schemeClr val="lt1"/>
-          </a:fontRef>
-        </p:style>
-        <p:txBody>
-          <a:bodyPr rtlCol="0" anchor="ctr"/>
-          <a:lstStyle/>
-          <a:p>
-            <a:pPr algn="ctr"/>
-          </a:p>
-        </p:txBody>
-      </p:sp>
-      <p:sp>
-        <p:nvSpPr>
-          <p:cNvPr id="19" name="Oval 18"/>
-          <p:cNvSpPr/>
-          <p:nvPr/>
-        </p:nvSpPr>
-        <p:spPr>
-          <a:xfrm>
-            <a:off x="900000" y="5250000"/>
-            <a:ext cx="500000" cy="500000"/>
-          </a:xfrm>
-          <a:prstGeom prst="ellipse">
-            <a:avLst/>
-          </a:prstGeom>
-          <a:solidFill>
-            <a:srgbClr val="8DDBCD"/>
-          </a:solidFill>
-          <a:ln>
-            <a:noFill/>
-          </a:ln>
-        </p:spPr>
-        <p:style>
-          <a:lnRef idx="1">
-            <a:schemeClr val="accent1"/>
-          </a:lnRef>
-          <a:fillRef idx="3">
-            <a:schemeClr val="accent1"/>
-          </a:fillRef>
-          <a:effectRef idx="2">
-            <a:schemeClr val="accent1"/>
-          </a:effectRef>
-          <a:fontRef idx="minor">
-            <a:schemeClr val="lt1"/>
-          </a:fontRef>
-        </p:style>
-        <p:txBody>
-          <a:bodyPr rtlCol="0" anchor="ctr"/>
-          <a:lstStyle/>
-          <a:p>
-            <a:pPr algn="ctr"/>
-          </a:p>
-        </p:txBody>
-      </p:sp>
-      <p:sp>
-        <p:nvSpPr>
-          <p:cNvPr id="20" name="TextBox 19"/>
-          <p:cNvSpPr txBox="1"/>
-          <p:nvPr/>
-        </p:nvSpPr>
-        <p:spPr>
-          <a:xfrm>
-            <a:off x="1600000" y="5200000"/>
-            <a:ext cx="9800000" cy="600000"/>
-          </a:xfrm>
-          <a:prstGeom prst="rect">
-            <a:avLst/>
-          </a:prstGeom>
-          <a:noFill/>
-        </p:spPr>
-        <p:txBody>
-          <a:bodyPr wrap="square" anchor="ctr">
-            <a:spAutoFit/>
-          </a:bodyPr>
-          <a:lstStyle/>
-          <a:p>
-            <a:pPr algn="l"/>
-            <a:r>
-              <a:rPr sz="1400" b="0">
-                <a:solidFill>
-                  <a:srgbClr val="333333"/>
-                </a:solidFill>
-                <a:latin typeface="Calibri"/>
-                <a:ea typeface="Calibri"/>
-                <a:cs typeface="Calibri"/>
-              </a:rPr>
-              <a:t>Сначала останавливаем угрожающее жизни кровотечение, затем — подробный осмотр.</a:t>
-            </a:r>
-          </a:p>
-        </p:txBody>
-      </p:sp>
-    </p:spTree>
-  </p:cSld>
-  <p:clrMapOvr>
-    <a:masterClrMapping/>
-  </p:clrMapOvr>
-</p:sld>
-</file>
-
-<file path=ppt/slides/slide12.xml><?xml version="1.0" encoding="utf-8"?>
-<p:sld xmlns:a="http://schemas.openxmlformats.org/drawingml/2006/main" xmlns:p="http://schemas.openxmlformats.org/presentationml/2006/main" xmlns:r="http://schemas.openxmlformats.org/officeDocument/2006/relationships">
-  <p:cSld>
-    <p:spTree>
-      <p:nvGrpSpPr>
-        <p:cNvPr id="1" name=""/>
-        <p:cNvGrpSpPr/>
-        <p:nvPr/>
-      </p:nvGrpSpPr>
-      <p:grpSpPr/>
-      <p:sp>
-        <p:nvSpPr>
-          <p:cNvPr id="2" name="Rectangle 1"/>
-          <p:cNvSpPr/>
-          <p:nvPr/>
-        </p:nvSpPr>
-        <p:spPr>
-          <a:xfrm>
-            <a:off x="0" y="0"/>
-            <a:ext cx="3600000" cy="6858000"/>
-          </a:xfrm>
-          <a:prstGeom prst="rect">
-            <a:avLst/>
-          </a:prstGeom>
-          <a:solidFill>
-            <a:srgbClr val="8A8A8A"/>
-          </a:solidFill>
-          <a:ln>
-            <a:noFill/>
-          </a:ln>
-        </p:spPr>
-        <p:style>
-          <a:lnRef idx="1">
-            <a:schemeClr val="accent1"/>
-          </a:lnRef>
-          <a:fillRef idx="3">
-            <a:schemeClr val="accent1"/>
-          </a:fillRef>
-          <a:effectRef idx="2">
-            <a:schemeClr val="accent1"/>
-          </a:effectRef>
-          <a:fontRef idx="minor">
-            <a:schemeClr val="lt1"/>
-          </a:fontRef>
-        </p:style>
-        <p:txBody>
-          <a:bodyPr rtlCol="0" anchor="ctr"/>
-          <a:lstStyle/>
-          <a:p>
-            <a:pPr algn="ctr"/>
-          </a:p>
-        </p:txBody>
-      </p:sp>
-      <p:sp>
-        <p:nvSpPr>
-          <p:cNvPr id="3" name="Rectangle 2"/>
-          <p:cNvSpPr/>
-          <p:nvPr/>
-        </p:nvSpPr>
-        <p:spPr>
-          <a:xfrm>
-            <a:off x="3600000" y="0"/>
-            <a:ext cx="8600000" cy="6858000"/>
-          </a:xfrm>
-          <a:prstGeom prst="rect">
-            <a:avLst/>
-          </a:prstGeom>
-          <a:solidFill>
-            <a:srgbClr val="F8F8F8"/>
-          </a:solidFill>
-          <a:ln>
-            <a:noFill/>
-          </a:ln>
-        </p:spPr>
-        <p:style>
-          <a:lnRef idx="1">
-            <a:schemeClr val="accent1"/>
-          </a:lnRef>
-          <a:fillRef idx="3">
-            <a:schemeClr val="accent1"/>
-          </a:fillRef>
-          <a:effectRef idx="2">
-            <a:schemeClr val="accent1"/>
-          </a:effectRef>
-          <a:fontRef idx="minor">
-            <a:schemeClr val="lt1"/>
-          </a:fontRef>
-        </p:style>
-        <p:txBody>
-          <a:bodyPr rtlCol="0" anchor="ctr"/>
-          <a:lstStyle/>
-          <a:p>
-            <a:pPr algn="ctr"/>
-          </a:p>
-        </p:txBody>
-      </p:sp>
-      <p:sp>
-        <p:nvSpPr>
-          <p:cNvPr id="4" name="TextBox 3"/>
-          <p:cNvSpPr txBox="1"/>
-          <p:nvPr/>
-        </p:nvSpPr>
-        <p:spPr>
-          <a:xfrm>
-            <a:off x="4200000" y="3000000"/>
-            <a:ext cx="7200000" cy="1000000"/>
-          </a:xfrm>
-          <a:prstGeom prst="rect">
-            <a:avLst/>
-          </a:prstGeom>
-          <a:noFill/>
-        </p:spPr>
-        <p:txBody>
-          <a:bodyPr wrap="square" anchor="ctr">
-            <a:spAutoFit/>
-          </a:bodyPr>
-          <a:lstStyle/>
-          <a:p>
-            <a:pPr algn="l"/>
-            <a:r>
-              <a:rPr sz="3000" b="1">
-                <a:solidFill>
-                  <a:srgbClr val="333333"/>
-                </a:solidFill>
-                <a:latin typeface="Calibri"/>
-                <a:ea typeface="Calibri"/>
-                <a:cs typeface="Calibri"/>
-              </a:rPr>
-              <a:t>БЛАГОДАРИМ ЗА ВНИМАНИЕ</a:t>
-            </a:r>
           </a:p>
         </p:txBody>
       </p:sp>
@@ -4945,20 +3592,57 @@
       </p:sp>
       <p:sp>
         <p:nvSpPr>
-          <p:cNvPr id="3" name="Rectangle 2"/>
+          <p:cNvPr id="3" name="TextBox 2"/>
+          <p:cNvSpPr txBox="1"/>
+          <p:nvPr/>
+        </p:nvSpPr>
+        <p:spPr>
+          <a:xfrm>
+            <a:off x="700000" y="250000"/>
+            <a:ext cx="11200000" cy="550000"/>
+          </a:xfrm>
+          <a:prstGeom prst="rect">
+            <a:avLst/>
+          </a:prstGeom>
+          <a:noFill/>
+        </p:spPr>
+        <p:txBody>
+          <a:bodyPr wrap="square" anchor="t">
+            <a:spAutoFit/>
+          </a:bodyPr>
+          <a:lstStyle/>
+          <a:p>
+            <a:pPr algn="l"/>
+            <a:r>
+              <a:rPr sz="2200" b="1">
+                <a:solidFill>
+                  <a:srgbClr val="333333"/>
+                </a:solidFill>
+                <a:latin typeface="Open Sans"/>
+                <a:ea typeface="Open Sans"/>
+                <a:cs typeface="Open Sans"/>
+              </a:rPr>
+              <a:t>СОДЕРЖАНИЕ</a:t>
+            </a:r>
+          </a:p>
+        </p:txBody>
+      </p:sp>
+      <p:sp>
+        <p:nvSpPr>
+          <p:cNvPr id="4" name="Rectangle 3"/>
           <p:cNvSpPr/>
           <p:nvPr/>
         </p:nvSpPr>
         <p:spPr>
           <a:xfrm>
-            <a:off x="0" y="0"/>
-            <a:ext cx="12191695" cy="1300000"/>
+            <a:off x="700000" y="850000"/>
+            <a:ext cx="9000000" cy="28000"/>
           </a:xfrm>
           <a:prstGeom prst="rect">
             <a:avLst/>
           </a:prstGeom>
           <a:solidFill>
-            <a:srgbClr val="F8F8F8"/>
+            <a:srgbClr val="555555"/>
           </a:solidFill>
           <a:ln>
             <a:noFill/>
@@ -4988,14 +3672,14 @@
       </p:sp>
       <p:sp>
         <p:nvSpPr>
-          <p:cNvPr id="4" name="TextBox 3"/>
+          <p:cNvPr id="5" name="TextBox 4"/>
           <p:cNvSpPr txBox="1"/>
           <p:nvPr/>
         </p:nvSpPr>
         <p:spPr>
           <a:xfrm>
-            <a:off x="700000" y="220000"/>
-            <a:ext cx="11200000" cy="550000"/>
+            <a:off x="700000" y="920000"/>
+            <a:ext cx="11000000" cy="350000"/>
           </a:xfrm>
           <a:prstGeom prst="rect">
             <a:avLst/>
@@ -5010,35 +3694,35 @@
           <a:p>
             <a:pPr algn="l"/>
             <a:r>
-              <a:rPr sz="2000" b="1">
-                <a:solidFill>
-                  <a:srgbClr val="333333"/>
-                </a:solidFill>
-                <a:latin typeface="Calibri"/>
-                <a:ea typeface="Calibri"/>
-                <a:cs typeface="Calibri"/>
+              <a:rPr sz="1200" b="0">
+                <a:solidFill>
+                  <a:srgbClr val="666666"/>
+                </a:solidFill>
+                <a:latin typeface="Open Sans"/>
+                <a:ea typeface="Open Sans"/>
+                <a:cs typeface="Open Sans"/>
               </a:rPr>
-              <a:t>СОДЕРЖАНИЕ</a:t>
-            </a:r>
-          </a:p>
-        </p:txBody>
-      </p:sp>
-      <p:sp>
-        <p:nvSpPr>
-          <p:cNvPr id="5" name="Rectangle 4"/>
+              <a:t>Оказание первой помощи при наружных кровотечениях</a:t>
+            </a:r>
+          </a:p>
+        </p:txBody>
+      </p:sp>
+      <p:sp>
+        <p:nvSpPr>
+          <p:cNvPr id="6" name="Rectangle 5"/>
           <p:cNvSpPr/>
           <p:nvPr/>
         </p:nvSpPr>
         <p:spPr>
           <a:xfrm>
-            <a:off x="700000" y="820000"/>
-            <a:ext cx="8500000" cy="28000"/>
+            <a:off x="0" y="2800000"/>
+            <a:ext cx="420000" cy="420000"/>
           </a:xfrm>
           <a:prstGeom prst="rect">
             <a:avLst/>
           </a:prstGeom>
           <a:solidFill>
-            <a:srgbClr val="606060"/>
+            <a:srgbClr val="555555"/>
           </a:solidFill>
           <a:ln>
             <a:noFill/>
@@ -5068,14 +3752,14 @@
       </p:sp>
       <p:sp>
         <p:nvSpPr>
-          <p:cNvPr id="6" name="TextBox 5"/>
+          <p:cNvPr id="7" name="TextBox 6"/>
           <p:cNvSpPr txBox="1"/>
           <p:nvPr/>
         </p:nvSpPr>
         <p:spPr>
           <a:xfrm>
-            <a:off x="700000" y="880000"/>
-            <a:ext cx="11000000" cy="320000"/>
+            <a:off x="0" y="2800000"/>
+            <a:ext cx="420000" cy="420000"/>
           </a:xfrm>
           <a:prstGeom prst="rect">
             <a:avLst/>
@@ -5083,42 +3767,42 @@
           <a:noFill/>
         </p:spPr>
         <p:txBody>
-          <a:bodyPr wrap="square" anchor="t">
+          <a:bodyPr wrap="square" anchor="ctr">
             <a:spAutoFit/>
           </a:bodyPr>
           <a:lstStyle/>
           <a:p>
-            <a:pPr algn="l"/>
-            <a:r>
-              <a:rPr sz="1100" b="0">
-                <a:solidFill>
-                  <a:srgbClr val="777777"/>
-                </a:solidFill>
-                <a:latin typeface="Calibri"/>
-                <a:ea typeface="Calibri"/>
-                <a:cs typeface="Calibri"/>
+            <a:pPr algn="ctr"/>
+            <a:r>
+              <a:rPr sz="1400" b="1">
+                <a:solidFill>
+                  <a:srgbClr val="FFFFFF"/>
+                </a:solidFill>
+                <a:latin typeface="Open Sans"/>
+                <a:ea typeface="Open Sans"/>
+                <a:cs typeface="Open Sans"/>
               </a:rPr>
-              <a:t>Оказание первой помощи при наружных кровотечениях</a:t>
-            </a:r>
-          </a:p>
-        </p:txBody>
-      </p:sp>
-      <p:sp>
-        <p:nvSpPr>
-          <p:cNvPr id="7" name="Rectangle 6"/>
+              <a:t>2</a:t>
+            </a:r>
+          </a:p>
+        </p:txBody>
+      </p:sp>
+      <p:sp>
+        <p:nvSpPr>
+          <p:cNvPr id="8" name="Oval 7"/>
           <p:cNvSpPr/>
           <p:nvPr/>
         </p:nvSpPr>
         <p:spPr>
           <a:xfrm>
-            <a:off x="0" y="2700000"/>
-            <a:ext cx="400000" cy="400000"/>
-          </a:xfrm>
-          <a:prstGeom prst="rect">
+            <a:off x="700000" y="1550000"/>
+            <a:ext cx="520000" cy="520000"/>
+          </a:xfrm>
+          <a:prstGeom prst="ellipse">
             <a:avLst/>
           </a:prstGeom>
           <a:solidFill>
-            <a:srgbClr val="606060"/>
+            <a:srgbClr val="555555"/>
           </a:solidFill>
           <a:ln>
             <a:noFill/>
@@ -5148,14 +3832,14 @@
       </p:sp>
       <p:sp>
         <p:nvSpPr>
-          <p:cNvPr id="8" name="TextBox 7"/>
+          <p:cNvPr id="9" name="TextBox 8"/>
           <p:cNvSpPr txBox="1"/>
           <p:nvPr/>
         </p:nvSpPr>
         <p:spPr>
           <a:xfrm>
-            <a:off x="0" y="2700000"/>
-            <a:ext cx="400000" cy="400000"/>
+            <a:off x="700000" y="1550000"/>
+            <a:ext cx="520000" cy="520000"/>
           </a:xfrm>
           <a:prstGeom prst="rect">
             <a:avLst/>
@@ -5170,39 +3854,39 @@
           <a:p>
             <a:pPr algn="ctr"/>
             <a:r>
-              <a:rPr sz="1300" b="1">
+              <a:rPr sz="1500" b="1">
                 <a:solidFill>
                   <a:srgbClr val="FFFFFF"/>
                 </a:solidFill>
-                <a:latin typeface="Calibri"/>
-                <a:ea typeface="Calibri"/>
-                <a:cs typeface="Calibri"/>
+                <a:latin typeface="Open Sans"/>
+                <a:ea typeface="Open Sans"/>
+                <a:cs typeface="Open Sans"/>
               </a:rPr>
-              <a:t>2</a:t>
-            </a:r>
-          </a:p>
-        </p:txBody>
-      </p:sp>
-      <p:sp>
-        <p:nvSpPr>
-          <p:cNvPr id="9" name="Oval 8"/>
+              <a:t>1</a:t>
+            </a:r>
+          </a:p>
+        </p:txBody>
+      </p:sp>
+      <p:sp>
+        <p:nvSpPr>
+          <p:cNvPr id="10" name="Rectangle 9"/>
           <p:cNvSpPr/>
           <p:nvPr/>
         </p:nvSpPr>
         <p:spPr>
           <a:xfrm>
-            <a:off x="700000" y="1550000"/>
-            <a:ext cx="520000" cy="520000"/>
-          </a:xfrm>
-          <a:prstGeom prst="ellipse">
+            <a:off x="1400000" y="1550000"/>
+            <a:ext cx="10000000" cy="520000"/>
+          </a:xfrm>
+          <a:prstGeom prst="rect">
             <a:avLst/>
           </a:prstGeom>
           <a:solidFill>
-            <a:srgbClr val="8DDBCD"/>
+            <a:srgbClr val="FFFFFF"/>
           </a:solidFill>
           <a:ln w="12700">
             <a:solidFill>
-              <a:srgbClr val="1AA090"/>
+              <a:srgbClr val="999999"/>
             </a:solidFill>
           </a:ln>
         </p:spPr>
@@ -5230,14 +3914,14 @@
       </p:sp>
       <p:sp>
         <p:nvSpPr>
-          <p:cNvPr id="10" name="TextBox 9"/>
+          <p:cNvPr id="11" name="TextBox 10"/>
           <p:cNvSpPr txBox="1"/>
           <p:nvPr/>
         </p:nvSpPr>
         <p:spPr>
           <a:xfrm>
-            <a:off x="700000" y="1550000"/>
-            <a:ext cx="520000" cy="520000"/>
+            <a:off x="1600000" y="1550000"/>
+            <a:ext cx="9600000" cy="520000"/>
           </a:xfrm>
           <a:prstGeom prst="rect">
             <a:avLst/>
@@ -5250,37 +3934,37 @@
           </a:bodyPr>
           <a:lstStyle/>
           <a:p>
-            <a:pPr algn="ctr"/>
-            <a:r>
-              <a:rPr sz="1500" b="1">
-                <a:solidFill>
-                  <a:srgbClr val="0D6B60"/>
-                </a:solidFill>
-                <a:latin typeface="Calibri"/>
-                <a:ea typeface="Calibri"/>
-                <a:cs typeface="Calibri"/>
+            <a:pPr algn="l"/>
+            <a:r>
+              <a:rPr sz="1500" b="0">
+                <a:solidFill>
+                  <a:srgbClr val="333333"/>
+                </a:solidFill>
+                <a:latin typeface="Open Sans"/>
+                <a:ea typeface="Open Sans"/>
+                <a:cs typeface="Open Sans"/>
               </a:rPr>
-              <a:t>1</a:t>
-            </a:r>
-          </a:p>
-        </p:txBody>
-      </p:sp>
-      <p:sp>
-        <p:nvSpPr>
-          <p:cNvPr id="11" name="Rounded Rectangle 10"/>
+              <a:t>Кровотечение в алгоритме первой помощи</a:t>
+            </a:r>
+          </a:p>
+        </p:txBody>
+      </p:sp>
+      <p:sp>
+        <p:nvSpPr>
+          <p:cNvPr id="12" name="Oval 11"/>
           <p:cNvSpPr/>
           <p:nvPr/>
         </p:nvSpPr>
         <p:spPr>
           <a:xfrm>
-            <a:off x="1400000" y="1550000"/>
-            <a:ext cx="10000000" cy="520000"/>
-          </a:xfrm>
-          <a:prstGeom prst="roundRect">
+            <a:off x="700000" y="2400000"/>
+            <a:ext cx="520000" cy="520000"/>
+          </a:xfrm>
+          <a:prstGeom prst="ellipse">
             <a:avLst/>
           </a:prstGeom>
           <a:solidFill>
-            <a:srgbClr val="F0F0F0"/>
+            <a:srgbClr val="555555"/>
           </a:solidFill>
           <a:ln>
             <a:noFill/>
@@ -5310,14 +3994,14 @@
       </p:sp>
       <p:sp>
         <p:nvSpPr>
-          <p:cNvPr id="12" name="TextBox 11"/>
+          <p:cNvPr id="13" name="TextBox 12"/>
           <p:cNvSpPr txBox="1"/>
           <p:nvPr/>
         </p:nvSpPr>
         <p:spPr>
           <a:xfrm>
-            <a:off x="1650000" y="1550000"/>
-            <a:ext cx="9500000" cy="520000"/>
+            <a:off x="700000" y="2400000"/>
+            <a:ext cx="520000" cy="520000"/>
           </a:xfrm>
           <a:prstGeom prst="rect">
             <a:avLst/>
@@ -5330,41 +4014,41 @@
           </a:bodyPr>
           <a:lstStyle/>
           <a:p>
-            <a:pPr algn="l"/>
-            <a:r>
-              <a:rPr sz="1500" b="0">
-                <a:solidFill>
-                  <a:srgbClr val="333333"/>
-                </a:solidFill>
-                <a:latin typeface="Calibri"/>
-                <a:ea typeface="Calibri"/>
-                <a:cs typeface="Calibri"/>
+            <a:pPr algn="ctr"/>
+            <a:r>
+              <a:rPr sz="1500" b="1">
+                <a:solidFill>
+                  <a:srgbClr val="FFFFFF"/>
+                </a:solidFill>
+                <a:latin typeface="Open Sans"/>
+                <a:ea typeface="Open Sans"/>
+                <a:cs typeface="Open Sans"/>
               </a:rPr>
-              <a:t>Понятие «кровотечение» и признаки кровопотери</a:t>
-            </a:r>
-          </a:p>
-        </p:txBody>
-      </p:sp>
-      <p:sp>
-        <p:nvSpPr>
-          <p:cNvPr id="13" name="Oval 12"/>
+              <a:t>2</a:t>
+            </a:r>
+          </a:p>
+        </p:txBody>
+      </p:sp>
+      <p:sp>
+        <p:nvSpPr>
+          <p:cNvPr id="14" name="Rectangle 13"/>
           <p:cNvSpPr/>
           <p:nvPr/>
         </p:nvSpPr>
         <p:spPr>
           <a:xfrm>
-            <a:off x="700000" y="2400000"/>
-            <a:ext cx="520000" cy="520000"/>
-          </a:xfrm>
-          <a:prstGeom prst="ellipse">
+            <a:off x="1400000" y="2400000"/>
+            <a:ext cx="10000000" cy="520000"/>
+          </a:xfrm>
+          <a:prstGeom prst="rect">
             <a:avLst/>
           </a:prstGeom>
           <a:solidFill>
-            <a:srgbClr val="8DDBCD"/>
+            <a:srgbClr val="FFFFFF"/>
           </a:solidFill>
           <a:ln w="12700">
             <a:solidFill>
-              <a:srgbClr val="1AA090"/>
+              <a:srgbClr val="999999"/>
             </a:solidFill>
           </a:ln>
         </p:spPr>
@@ -5392,14 +4076,14 @@
       </p:sp>
       <p:sp>
         <p:nvSpPr>
-          <p:cNvPr id="14" name="TextBox 13"/>
+          <p:cNvPr id="15" name="TextBox 14"/>
           <p:cNvSpPr txBox="1"/>
           <p:nvPr/>
         </p:nvSpPr>
         <p:spPr>
           <a:xfrm>
-            <a:off x="700000" y="2400000"/>
-            <a:ext cx="520000" cy="520000"/>
+            <a:off x="1600000" y="2400000"/>
+            <a:ext cx="9600000" cy="520000"/>
           </a:xfrm>
           <a:prstGeom prst="rect">
             <a:avLst/>
@@ -5412,37 +4096,37 @@
           </a:bodyPr>
           <a:lstStyle/>
           <a:p>
-            <a:pPr algn="ctr"/>
-            <a:r>
-              <a:rPr sz="1500" b="1">
-                <a:solidFill>
-                  <a:srgbClr val="0D6B60"/>
-                </a:solidFill>
-                <a:latin typeface="Calibri"/>
-                <a:ea typeface="Calibri"/>
-                <a:cs typeface="Calibri"/>
+            <a:pPr algn="l"/>
+            <a:r>
+              <a:rPr sz="1500" b="0">
+                <a:solidFill>
+                  <a:srgbClr val="333333"/>
+                </a:solidFill>
+                <a:latin typeface="Open Sans"/>
+                <a:ea typeface="Open Sans"/>
+                <a:cs typeface="Open Sans"/>
               </a:rPr>
-              <a:t>2</a:t>
-            </a:r>
-          </a:p>
-        </p:txBody>
-      </p:sp>
-      <p:sp>
-        <p:nvSpPr>
-          <p:cNvPr id="15" name="Rounded Rectangle 14"/>
+              <a:t>Цель обзорного осмотра и сигналы к действию</a:t>
+            </a:r>
+          </a:p>
+        </p:txBody>
+      </p:sp>
+      <p:sp>
+        <p:nvSpPr>
+          <p:cNvPr id="16" name="Oval 15"/>
           <p:cNvSpPr/>
           <p:nvPr/>
         </p:nvSpPr>
         <p:spPr>
           <a:xfrm>
-            <a:off x="1400000" y="2400000"/>
-            <a:ext cx="10000000" cy="520000"/>
-          </a:xfrm>
-          <a:prstGeom prst="roundRect">
+            <a:off x="700000" y="3250000"/>
+            <a:ext cx="520000" cy="520000"/>
+          </a:xfrm>
+          <a:prstGeom prst="ellipse">
             <a:avLst/>
           </a:prstGeom>
           <a:solidFill>
-            <a:srgbClr val="F0F0F0"/>
+            <a:srgbClr val="555555"/>
           </a:solidFill>
           <a:ln>
             <a:noFill/>
@@ -5472,14 +4156,14 @@
       </p:sp>
       <p:sp>
         <p:nvSpPr>
-          <p:cNvPr id="16" name="TextBox 15"/>
+          <p:cNvPr id="17" name="TextBox 16"/>
           <p:cNvSpPr txBox="1"/>
           <p:nvPr/>
         </p:nvSpPr>
         <p:spPr>
           <a:xfrm>
-            <a:off x="1650000" y="2400000"/>
-            <a:ext cx="9500000" cy="520000"/>
+            <a:off x="700000" y="3250000"/>
+            <a:ext cx="520000" cy="520000"/>
           </a:xfrm>
           <a:prstGeom prst="rect">
             <a:avLst/>
@@ -5492,41 +4176,41 @@
           </a:bodyPr>
           <a:lstStyle/>
           <a:p>
-            <a:pPr algn="l"/>
-            <a:r>
-              <a:rPr sz="1500" b="0">
-                <a:solidFill>
-                  <a:srgbClr val="333333"/>
-                </a:solidFill>
-                <a:latin typeface="Calibri"/>
-                <a:ea typeface="Calibri"/>
-                <a:cs typeface="Calibri"/>
+            <a:pPr algn="ctr"/>
+            <a:r>
+              <a:rPr sz="1500" b="1">
+                <a:solidFill>
+                  <a:srgbClr val="FFFFFF"/>
+                </a:solidFill>
+                <a:latin typeface="Open Sans"/>
+                <a:ea typeface="Open Sans"/>
+                <a:cs typeface="Open Sans"/>
               </a:rPr>
-              <a:t>Виды наружного кровотечения</a:t>
-            </a:r>
-          </a:p>
-        </p:txBody>
-      </p:sp>
-      <p:sp>
-        <p:nvSpPr>
-          <p:cNvPr id="17" name="Oval 16"/>
+              <a:t>3</a:t>
+            </a:r>
+          </a:p>
+        </p:txBody>
+      </p:sp>
+      <p:sp>
+        <p:nvSpPr>
+          <p:cNvPr id="18" name="Rectangle 17"/>
           <p:cNvSpPr/>
           <p:nvPr/>
         </p:nvSpPr>
         <p:spPr>
           <a:xfrm>
-            <a:off x="700000" y="3250000"/>
-            <a:ext cx="520000" cy="520000"/>
-          </a:xfrm>
-          <a:prstGeom prst="ellipse">
+            <a:off x="1400000" y="3250000"/>
+            <a:ext cx="10000000" cy="520000"/>
+          </a:xfrm>
+          <a:prstGeom prst="rect">
             <a:avLst/>
           </a:prstGeom>
           <a:solidFill>
-            <a:srgbClr val="8DDBCD"/>
+            <a:srgbClr val="FFFFFF"/>
           </a:solidFill>
           <a:ln w="12700">
             <a:solidFill>
-              <a:srgbClr val="1AA090"/>
+              <a:srgbClr val="999999"/>
             </a:solidFill>
           </a:ln>
         </p:spPr>
@@ -5554,14 +4238,14 @@
       </p:sp>
       <p:sp>
         <p:nvSpPr>
-          <p:cNvPr id="18" name="TextBox 17"/>
+          <p:cNvPr id="19" name="TextBox 18"/>
           <p:cNvSpPr txBox="1"/>
           <p:nvPr/>
         </p:nvSpPr>
         <p:spPr>
           <a:xfrm>
-            <a:off x="700000" y="3250000"/>
-            <a:ext cx="520000" cy="520000"/>
+            <a:off x="1600000" y="3250000"/>
+            <a:ext cx="9600000" cy="520000"/>
           </a:xfrm>
           <a:prstGeom prst="rect">
             <a:avLst/>
@@ -5574,37 +4258,37 @@
           </a:bodyPr>
           <a:lstStyle/>
           <a:p>
-            <a:pPr algn="ctr"/>
-            <a:r>
-              <a:rPr sz="1500" b="1">
-                <a:solidFill>
-                  <a:srgbClr val="0D6B60"/>
-                </a:solidFill>
-                <a:latin typeface="Calibri"/>
-                <a:ea typeface="Calibri"/>
-                <a:cs typeface="Calibri"/>
+            <a:pPr algn="l"/>
+            <a:r>
+              <a:rPr sz="1500" b="0">
+                <a:solidFill>
+                  <a:srgbClr val="333333"/>
+                </a:solidFill>
+                <a:latin typeface="Open Sans"/>
+                <a:ea typeface="Open Sans"/>
+                <a:cs typeface="Open Sans"/>
               </a:rPr>
-              <a:t>3</a:t>
-            </a:r>
-          </a:p>
-        </p:txBody>
-      </p:sp>
-      <p:sp>
-        <p:nvSpPr>
-          <p:cNvPr id="19" name="Rounded Rectangle 18"/>
+              <a:t>Как проводится обзорный осмотр</a:t>
+            </a:r>
+          </a:p>
+        </p:txBody>
+      </p:sp>
+      <p:sp>
+        <p:nvSpPr>
+          <p:cNvPr id="20" name="Oval 19"/>
           <p:cNvSpPr/>
           <p:nvPr/>
         </p:nvSpPr>
         <p:spPr>
           <a:xfrm>
-            <a:off x="1400000" y="3250000"/>
-            <a:ext cx="10000000" cy="520000"/>
-          </a:xfrm>
-          <a:prstGeom prst="roundRect">
+            <a:off x="700000" y="4100000"/>
+            <a:ext cx="520000" cy="520000"/>
+          </a:xfrm>
+          <a:prstGeom prst="ellipse">
             <a:avLst/>
           </a:prstGeom>
           <a:solidFill>
-            <a:srgbClr val="F0F0F0"/>
+            <a:srgbClr val="555555"/>
           </a:solidFill>
           <a:ln>
             <a:noFill/>
@@ -5634,14 +4318,14 @@
       </p:sp>
       <p:sp>
         <p:nvSpPr>
-          <p:cNvPr id="20" name="TextBox 19"/>
+          <p:cNvPr id="21" name="TextBox 20"/>
           <p:cNvSpPr txBox="1"/>
           <p:nvPr/>
         </p:nvSpPr>
         <p:spPr>
           <a:xfrm>
-            <a:off x="1650000" y="3250000"/>
-            <a:ext cx="9500000" cy="520000"/>
+            <a:off x="700000" y="4100000"/>
+            <a:ext cx="520000" cy="520000"/>
           </a:xfrm>
           <a:prstGeom prst="rect">
             <a:avLst/>
@@ -5654,41 +4338,41 @@
           </a:bodyPr>
           <a:lstStyle/>
           <a:p>
-            <a:pPr algn="l"/>
-            <a:r>
-              <a:rPr sz="1500" b="0">
-                <a:solidFill>
-                  <a:srgbClr val="333333"/>
-                </a:solidFill>
-                <a:latin typeface="Calibri"/>
-                <a:ea typeface="Calibri"/>
-                <a:cs typeface="Calibri"/>
+            <a:pPr algn="ctr"/>
+            <a:r>
+              <a:rPr sz="1500" b="1">
+                <a:solidFill>
+                  <a:srgbClr val="FFFFFF"/>
+                </a:solidFill>
+                <a:latin typeface="Open Sans"/>
+                <a:ea typeface="Open Sans"/>
+                <a:cs typeface="Open Sans"/>
               </a:rPr>
-              <a:t>Цель и признаки для обзорного осмотра</a:t>
-            </a:r>
-          </a:p>
-        </p:txBody>
-      </p:sp>
-      <p:sp>
-        <p:nvSpPr>
-          <p:cNvPr id="21" name="Oval 20"/>
+              <a:t>4</a:t>
+            </a:r>
+          </a:p>
+        </p:txBody>
+      </p:sp>
+      <p:sp>
+        <p:nvSpPr>
+          <p:cNvPr id="22" name="Rectangle 21"/>
           <p:cNvSpPr/>
           <p:nvPr/>
         </p:nvSpPr>
         <p:spPr>
           <a:xfrm>
-            <a:off x="700000" y="4100000"/>
-            <a:ext cx="520000" cy="520000"/>
-          </a:xfrm>
-          <a:prstGeom prst="ellipse">
+            <a:off x="1400000" y="4100000"/>
+            <a:ext cx="10000000" cy="520000"/>
+          </a:xfrm>
+          <a:prstGeom prst="rect">
             <a:avLst/>
           </a:prstGeom>
           <a:solidFill>
-            <a:srgbClr val="8DDBCD"/>
+            <a:srgbClr val="FFFFFF"/>
           </a:solidFill>
           <a:ln w="12700">
             <a:solidFill>
-              <a:srgbClr val="1AA090"/>
+              <a:srgbClr val="999999"/>
             </a:solidFill>
           </a:ln>
         </p:spPr>
@@ -5716,14 +4400,14 @@
       </p:sp>
       <p:sp>
         <p:nvSpPr>
-          <p:cNvPr id="22" name="TextBox 21"/>
+          <p:cNvPr id="23" name="TextBox 22"/>
           <p:cNvSpPr txBox="1"/>
           <p:nvPr/>
         </p:nvSpPr>
         <p:spPr>
           <a:xfrm>
-            <a:off x="700000" y="4100000"/>
-            <a:ext cx="520000" cy="520000"/>
+            <a:off x="1600000" y="4100000"/>
+            <a:ext cx="9600000" cy="520000"/>
           </a:xfrm>
           <a:prstGeom prst="rect">
             <a:avLst/>
@@ -5736,37 +4420,37 @@
           </a:bodyPr>
           <a:lstStyle/>
           <a:p>
-            <a:pPr algn="ctr"/>
-            <a:r>
-              <a:rPr sz="1500" b="1">
-                <a:solidFill>
-                  <a:srgbClr val="0D6B60"/>
-                </a:solidFill>
-                <a:latin typeface="Calibri"/>
-                <a:ea typeface="Calibri"/>
-                <a:cs typeface="Calibri"/>
+            <a:pPr algn="l"/>
+            <a:r>
+              <a:rPr sz="1500" b="0">
+                <a:solidFill>
+                  <a:srgbClr val="333333"/>
+                </a:solidFill>
+                <a:latin typeface="Open Sans"/>
+                <a:ea typeface="Open Sans"/>
+                <a:cs typeface="Open Sans"/>
               </a:rPr>
-              <a:t>4</a:t>
-            </a:r>
-          </a:p>
-        </p:txBody>
-      </p:sp>
-      <p:sp>
-        <p:nvSpPr>
-          <p:cNvPr id="23" name="Rounded Rectangle 22"/>
+              <a:t>Несколько пострадавших и порядок действий</a:t>
+            </a:r>
+          </a:p>
+        </p:txBody>
+      </p:sp>
+      <p:sp>
+        <p:nvSpPr>
+          <p:cNvPr id="24" name="Oval 23"/>
           <p:cNvSpPr/>
           <p:nvPr/>
         </p:nvSpPr>
         <p:spPr>
           <a:xfrm>
-            <a:off x="1400000" y="4100000"/>
-            <a:ext cx="10000000" cy="520000"/>
-          </a:xfrm>
-          <a:prstGeom prst="roundRect">
+            <a:off x="700000" y="4950000"/>
+            <a:ext cx="520000" cy="520000"/>
+          </a:xfrm>
+          <a:prstGeom prst="ellipse">
             <a:avLst/>
           </a:prstGeom>
           <a:solidFill>
-            <a:srgbClr val="F0F0F0"/>
+            <a:srgbClr val="555555"/>
           </a:solidFill>
           <a:ln>
             <a:noFill/>
@@ -5796,14 +4480,14 @@
       </p:sp>
       <p:sp>
         <p:nvSpPr>
-          <p:cNvPr id="24" name="TextBox 23"/>
+          <p:cNvPr id="25" name="TextBox 24"/>
           <p:cNvSpPr txBox="1"/>
           <p:nvPr/>
         </p:nvSpPr>
         <p:spPr>
           <a:xfrm>
-            <a:off x="1650000" y="4100000"/>
-            <a:ext cx="9500000" cy="520000"/>
+            <a:off x="700000" y="4950000"/>
+            <a:ext cx="520000" cy="520000"/>
           </a:xfrm>
           <a:prstGeom prst="rect">
             <a:avLst/>
@@ -5816,41 +4500,41 @@
           </a:bodyPr>
           <a:lstStyle/>
           <a:p>
-            <a:pPr algn="l"/>
-            <a:r>
-              <a:rPr sz="1500" b="0">
-                <a:solidFill>
-                  <a:srgbClr val="333333"/>
-                </a:solidFill>
-                <a:latin typeface="Calibri"/>
-                <a:ea typeface="Calibri"/>
-                <a:cs typeface="Calibri"/>
+            <a:pPr algn="ctr"/>
+            <a:r>
+              <a:rPr sz="1500" b="1">
+                <a:solidFill>
+                  <a:srgbClr val="FFFFFF"/>
+                </a:solidFill>
+                <a:latin typeface="Open Sans"/>
+                <a:ea typeface="Open Sans"/>
+                <a:cs typeface="Open Sans"/>
               </a:rPr>
-              <a:t>Как проводится обзорный осмотр</a:t>
-            </a:r>
-          </a:p>
-        </p:txBody>
-      </p:sp>
-      <p:sp>
-        <p:nvSpPr>
-          <p:cNvPr id="25" name="Oval 24"/>
+              <a:t>5</a:t>
+            </a:r>
+          </a:p>
+        </p:txBody>
+      </p:sp>
+      <p:sp>
+        <p:nvSpPr>
+          <p:cNvPr id="26" name="Rectangle 25"/>
           <p:cNvSpPr/>
           <p:nvPr/>
         </p:nvSpPr>
         <p:spPr>
           <a:xfrm>
-            <a:off x="700000" y="4950000"/>
-            <a:ext cx="520000" cy="520000"/>
-          </a:xfrm>
-          <a:prstGeom prst="ellipse">
+            <a:off x="1400000" y="4950000"/>
+            <a:ext cx="10000000" cy="520000"/>
+          </a:xfrm>
+          <a:prstGeom prst="rect">
             <a:avLst/>
           </a:prstGeom>
           <a:solidFill>
-            <a:srgbClr val="8DDBCD"/>
+            <a:srgbClr val="FFFFFF"/>
           </a:solidFill>
           <a:ln w="12700">
             <a:solidFill>
-              <a:srgbClr val="1AA090"/>
+              <a:srgbClr val="999999"/>
             </a:solidFill>
           </a:ln>
         </p:spPr>
@@ -5878,14 +4562,14 @@
       </p:sp>
       <p:sp>
         <p:nvSpPr>
-          <p:cNvPr id="26" name="TextBox 25"/>
+          <p:cNvPr id="27" name="TextBox 26"/>
           <p:cNvSpPr txBox="1"/>
           <p:nvPr/>
         </p:nvSpPr>
         <p:spPr>
           <a:xfrm>
-            <a:off x="700000" y="4950000"/>
-            <a:ext cx="520000" cy="520000"/>
+            <a:off x="1600000" y="4950000"/>
+            <a:ext cx="9600000" cy="520000"/>
           </a:xfrm>
           <a:prstGeom prst="rect">
             <a:avLst/>
@@ -5898,97 +4582,17 @@
           </a:bodyPr>
           <a:lstStyle/>
           <a:p>
-            <a:pPr algn="ctr"/>
-            <a:r>
-              <a:rPr sz="1500" b="1">
-                <a:solidFill>
-                  <a:srgbClr val="0D6B60"/>
-                </a:solidFill>
-                <a:latin typeface="Calibri"/>
-                <a:ea typeface="Calibri"/>
-                <a:cs typeface="Calibri"/>
+            <a:pPr algn="l"/>
+            <a:r>
+              <a:rPr sz="1500" b="0">
+                <a:solidFill>
+                  <a:srgbClr val="333333"/>
+                </a:solidFill>
+                <a:latin typeface="Open Sans"/>
+                <a:ea typeface="Open Sans"/>
+                <a:cs typeface="Open Sans"/>
               </a:rPr>
-              <a:t>5</a:t>
-            </a:r>
-          </a:p>
-        </p:txBody>
-      </p:sp>
-      <p:sp>
-        <p:nvSpPr>
-          <p:cNvPr id="27" name="Rounded Rectangle 26"/>
-          <p:cNvSpPr/>
-          <p:nvPr/>
-        </p:nvSpPr>
-        <p:spPr>
-          <a:xfrm>
-            <a:off x="1400000" y="4950000"/>
-            <a:ext cx="10000000" cy="520000"/>
-          </a:xfrm>
-          <a:prstGeom prst="roundRect">
-            <a:avLst/>
-          </a:prstGeom>
-          <a:solidFill>
-            <a:srgbClr val="F0F0F0"/>
-          </a:solidFill>
-          <a:ln>
-            <a:noFill/>
-          </a:ln>
-        </p:spPr>
-        <p:style>
-          <a:lnRef idx="1">
-            <a:schemeClr val="accent1"/>
-          </a:lnRef>
-          <a:fillRef idx="3">
-            <a:schemeClr val="accent1"/>
-          </a:fillRef>
-          <a:effectRef idx="2">
-            <a:schemeClr val="accent1"/>
-          </a:effectRef>
-          <a:fontRef idx="minor">
-            <a:schemeClr val="lt1"/>
-          </a:fontRef>
-        </p:style>
-        <p:txBody>
-          <a:bodyPr rtlCol="0" anchor="ctr"/>
-          <a:lstStyle/>
-          <a:p>
-            <a:pPr algn="ctr"/>
-          </a:p>
-        </p:txBody>
-      </p:sp>
-      <p:sp>
-        <p:nvSpPr>
-          <p:cNvPr id="28" name="TextBox 27"/>
-          <p:cNvSpPr txBox="1"/>
-          <p:nvPr/>
-        </p:nvSpPr>
-        <p:spPr>
-          <a:xfrm>
-            <a:off x="1650000" y="4950000"/>
-            <a:ext cx="9500000" cy="520000"/>
-          </a:xfrm>
-          <a:prstGeom prst="rect">
-            <a:avLst/>
-          </a:prstGeom>
-          <a:noFill/>
-        </p:spPr>
-        <p:txBody>
-          <a:bodyPr wrap="square" anchor="ctr">
-            <a:spAutoFit/>
-          </a:bodyPr>
-          <a:lstStyle/>
-          <a:p>
-            <a:pPr algn="l"/>
-            <a:r>
-              <a:rPr sz="1500" b="0">
-                <a:solidFill>
-                  <a:srgbClr val="333333"/>
-                </a:solidFill>
-                <a:latin typeface="Calibri"/>
-                <a:ea typeface="Calibri"/>
-                <a:cs typeface="Calibri"/>
-              </a:rPr>
-              <a:t>Действия при обнаружении кровотечения</a:t>
+              <a:t>Обзорный и подробный осмотр</a:t>
             </a:r>
           </a:p>
         </p:txBody>
@@ -6056,20 +4660,57 @@
       </p:sp>
       <p:sp>
         <p:nvSpPr>
-          <p:cNvPr id="3" name="Rectangle 2"/>
+          <p:cNvPr id="3" name="TextBox 2"/>
+          <p:cNvSpPr txBox="1"/>
+          <p:nvPr/>
+        </p:nvSpPr>
+        <p:spPr>
+          <a:xfrm>
+            <a:off x="700000" y="250000"/>
+            <a:ext cx="11200000" cy="550000"/>
+          </a:xfrm>
+          <a:prstGeom prst="rect">
+            <a:avLst/>
+          </a:prstGeom>
+          <a:noFill/>
+        </p:spPr>
+        <p:txBody>
+          <a:bodyPr wrap="square" anchor="t">
+            <a:spAutoFit/>
+          </a:bodyPr>
+          <a:lstStyle/>
+          <a:p>
+            <a:pPr algn="l"/>
+            <a:r>
+              <a:rPr sz="2200" b="1">
+                <a:solidFill>
+                  <a:srgbClr val="333333"/>
+                </a:solidFill>
+                <a:latin typeface="Open Sans"/>
+                <a:ea typeface="Open Sans"/>
+                <a:cs typeface="Open Sans"/>
+              </a:rPr>
+              <a:t>КРОВОТЕЧЕНИЕ В АЛГОРИТМЕ ПЕРВОЙ ПОМОЩИ</a:t>
+            </a:r>
+          </a:p>
+        </p:txBody>
+      </p:sp>
+      <p:sp>
+        <p:nvSpPr>
+          <p:cNvPr id="4" name="Rectangle 3"/>
           <p:cNvSpPr/>
           <p:nvPr/>
         </p:nvSpPr>
         <p:spPr>
           <a:xfrm>
-            <a:off x="0" y="0"/>
-            <a:ext cx="12191695" cy="1300000"/>
+            <a:off x="700000" y="850000"/>
+            <a:ext cx="9000000" cy="28000"/>
           </a:xfrm>
           <a:prstGeom prst="rect">
             <a:avLst/>
           </a:prstGeom>
           <a:solidFill>
-            <a:srgbClr val="F8F8F8"/>
+            <a:srgbClr val="555555"/>
           </a:solidFill>
           <a:ln>
             <a:noFill/>
@@ -6099,14 +4740,14 @@
       </p:sp>
       <p:sp>
         <p:nvSpPr>
-          <p:cNvPr id="4" name="TextBox 3"/>
+          <p:cNvPr id="5" name="TextBox 4"/>
           <p:cNvSpPr txBox="1"/>
           <p:nvPr/>
         </p:nvSpPr>
         <p:spPr>
           <a:xfrm>
-            <a:off x="700000" y="220000"/>
-            <a:ext cx="11200000" cy="550000"/>
+            <a:off x="700000" y="920000"/>
+            <a:ext cx="11000000" cy="350000"/>
           </a:xfrm>
           <a:prstGeom prst="rect">
             <a:avLst/>
@@ -6121,35 +4762,35 @@
           <a:p>
             <a:pPr algn="l"/>
             <a:r>
-              <a:rPr sz="2000" b="1">
-                <a:solidFill>
-                  <a:srgbClr val="333333"/>
-                </a:solidFill>
-                <a:latin typeface="Calibri"/>
-                <a:ea typeface="Calibri"/>
-                <a:cs typeface="Calibri"/>
+              <a:rPr sz="1200" b="0">
+                <a:solidFill>
+                  <a:srgbClr val="666666"/>
+                </a:solidFill>
+                <a:latin typeface="Open Sans"/>
+                <a:ea typeface="Open Sans"/>
+                <a:cs typeface="Open Sans"/>
               </a:rPr>
-              <a:t>ПОНЯТИЕ «КРОВОТЕЧЕНИЕ»</a:t>
-            </a:r>
-          </a:p>
-        </p:txBody>
-      </p:sp>
-      <p:sp>
-        <p:nvSpPr>
-          <p:cNvPr id="5" name="Rectangle 4"/>
+              <a:t>Оказание первой помощи при наружных кровотечениях</a:t>
+            </a:r>
+          </a:p>
+        </p:txBody>
+      </p:sp>
+      <p:sp>
+        <p:nvSpPr>
+          <p:cNvPr id="6" name="Rectangle 5"/>
           <p:cNvSpPr/>
           <p:nvPr/>
         </p:nvSpPr>
         <p:spPr>
           <a:xfrm>
-            <a:off x="700000" y="820000"/>
-            <a:ext cx="8500000" cy="28000"/>
+            <a:off x="0" y="2800000"/>
+            <a:ext cx="420000" cy="420000"/>
           </a:xfrm>
           <a:prstGeom prst="rect">
             <a:avLst/>
           </a:prstGeom>
           <a:solidFill>
-            <a:srgbClr val="606060"/>
+            <a:srgbClr val="555555"/>
           </a:solidFill>
           <a:ln>
             <a:noFill/>
@@ -6179,14 +4820,51 @@
       </p:sp>
       <p:sp>
         <p:nvSpPr>
-          <p:cNvPr id="6" name="TextBox 5"/>
+          <p:cNvPr id="7" name="TextBox 6"/>
           <p:cNvSpPr txBox="1"/>
           <p:nvPr/>
         </p:nvSpPr>
         <p:spPr>
           <a:xfrm>
-            <a:off x="700000" y="880000"/>
-            <a:ext cx="11000000" cy="320000"/>
+            <a:off x="0" y="2800000"/>
+            <a:ext cx="420000" cy="420000"/>
+          </a:xfrm>
+          <a:prstGeom prst="rect">
+            <a:avLst/>
+          </a:prstGeom>
+          <a:noFill/>
+        </p:spPr>
+        <p:txBody>
+          <a:bodyPr wrap="square" anchor="ctr">
+            <a:spAutoFit/>
+          </a:bodyPr>
+          <a:lstStyle/>
+          <a:p>
+            <a:pPr algn="ctr"/>
+            <a:r>
+              <a:rPr sz="1400" b="1">
+                <a:solidFill>
+                  <a:srgbClr val="FFFFFF"/>
+                </a:solidFill>
+                <a:latin typeface="Open Sans"/>
+                <a:ea typeface="Open Sans"/>
+                <a:cs typeface="Open Sans"/>
+              </a:rPr>
+              <a:t>3</a:t>
+            </a:r>
+          </a:p>
+        </p:txBody>
+      </p:sp>
+      <p:sp>
+        <p:nvSpPr>
+          <p:cNvPr id="8" name="TextBox 7"/>
+          <p:cNvSpPr txBox="1"/>
+          <p:nvPr/>
+        </p:nvSpPr>
+        <p:spPr>
+          <a:xfrm>
+            <a:off x="700000" y="1550000"/>
+            <a:ext cx="11000000" cy="900000"/>
           </a:xfrm>
           <a:prstGeom prst="rect">
             <a:avLst/>
@@ -6201,38 +4879,40 @@
           <a:p>
             <a:pPr algn="l"/>
             <a:r>
-              <a:rPr sz="1100" b="0">
-                <a:solidFill>
-                  <a:srgbClr val="777777"/>
-                </a:solidFill>
-                <a:latin typeface="Calibri"/>
-                <a:ea typeface="Calibri"/>
-                <a:cs typeface="Calibri"/>
+              <a:rPr sz="1500" b="0">
+                <a:solidFill>
+                  <a:srgbClr val="333333"/>
+                </a:solidFill>
+                <a:latin typeface="Open Sans"/>
+                <a:ea typeface="Open Sans"/>
+                <a:cs typeface="Open Sans"/>
               </a:rPr>
-              <a:t>Оказание первой помощи при наружных кровотечениях</a:t>
-            </a:r>
-          </a:p>
-        </p:txBody>
-      </p:sp>
-      <p:sp>
-        <p:nvSpPr>
-          <p:cNvPr id="7" name="Rectangle 6"/>
+              <a:t>После оценки обстановки и безопасности участник оказания первой помощи сначала ищет угрожающее жизни наружное кровотечение — и только потом переходит к подробному осмотру и другим мероприятиям.</a:t>
+            </a:r>
+          </a:p>
+        </p:txBody>
+      </p:sp>
+      <p:sp>
+        <p:nvSpPr>
+          <p:cNvPr id="9" name="Rounded Rectangle 8"/>
           <p:cNvSpPr/>
           <p:nvPr/>
         </p:nvSpPr>
         <p:spPr>
           <a:xfrm>
-            <a:off x="0" y="2700000"/>
-            <a:ext cx="400000" cy="400000"/>
-          </a:xfrm>
-          <a:prstGeom prst="rect">
+            <a:off x="700000" y="2800000"/>
+            <a:ext cx="2700000" cy="3200000"/>
+          </a:xfrm>
+          <a:prstGeom prst="roundRect">
             <a:avLst/>
           </a:prstGeom>
           <a:solidFill>
-            <a:srgbClr val="606060"/>
+            <a:srgbClr val="FFFFFF"/>
           </a:solidFill>
-          <a:ln>
-            <a:noFill/>
+          <a:ln w="12700">
+            <a:solidFill>
+              <a:srgbClr val="999999"/>
+            </a:solidFill>
           </a:ln>
         </p:spPr>
         <p:style>
@@ -6259,57 +4939,20 @@
       </p:sp>
       <p:sp>
         <p:nvSpPr>
-          <p:cNvPr id="8" name="TextBox 7"/>
-          <p:cNvSpPr txBox="1"/>
-          <p:nvPr/>
-        </p:nvSpPr>
-        <p:spPr>
-          <a:xfrm>
-            <a:off x="0" y="2700000"/>
-            <a:ext cx="400000" cy="400000"/>
-          </a:xfrm>
-          <a:prstGeom prst="rect">
-            <a:avLst/>
-          </a:prstGeom>
-          <a:noFill/>
-        </p:spPr>
-        <p:txBody>
-          <a:bodyPr wrap="square" anchor="ctr">
-            <a:spAutoFit/>
-          </a:bodyPr>
-          <a:lstStyle/>
-          <a:p>
-            <a:pPr algn="ctr"/>
-            <a:r>
-              <a:rPr sz="1300" b="1">
-                <a:solidFill>
-                  <a:srgbClr val="FFFFFF"/>
-                </a:solidFill>
-                <a:latin typeface="Calibri"/>
-                <a:ea typeface="Calibri"/>
-                <a:cs typeface="Calibri"/>
-              </a:rPr>
-              <a:t>3</a:t>
-            </a:r>
-          </a:p>
-        </p:txBody>
-      </p:sp>
-      <p:sp>
-        <p:nvSpPr>
-          <p:cNvPr id="9" name="Rectangle 8"/>
+          <p:cNvPr id="10" name="Oval 9"/>
           <p:cNvSpPr/>
           <p:nvPr/>
         </p:nvSpPr>
         <p:spPr>
           <a:xfrm>
-            <a:off x="0" y="1300000"/>
-            <a:ext cx="4200000" cy="5550000"/>
-          </a:xfrm>
-          <a:prstGeom prst="rect">
+            <a:off x="1650000" y="3000000"/>
+            <a:ext cx="800000" cy="800000"/>
+          </a:xfrm>
+          <a:prstGeom prst="ellipse">
             <a:avLst/>
           </a:prstGeom>
           <a:solidFill>
-            <a:srgbClr val="F0F0F0"/>
+            <a:srgbClr val="555555"/>
           </a:solidFill>
           <a:ln>
             <a:noFill/>
@@ -6337,50 +4980,137 @@
           </a:p>
         </p:txBody>
       </p:sp>
-      <p:pic>
-        <p:nvPicPr>
-          <p:cNvPr id="10" name="Picture 9" descr="suot_mascot.png"/>
-          <p:cNvPicPr>
-            <a:picLocks noChangeAspect="1"/>
-          </p:cNvPicPr>
-          <p:nvPr/>
-        </p:nvPicPr>
-        <p:blipFill>
-          <a:blip r:embed="rId2"/>
-          <a:stretch>
-            <a:fillRect/>
-          </a:stretch>
-        </p:blipFill>
-        <p:spPr>
-          <a:xfrm>
-            <a:off x="400000" y="1900000"/>
-            <a:ext cx="2800000" cy="4200000"/>
-          </a:xfrm>
-          <a:prstGeom prst="rect">
-            <a:avLst/>
-          </a:prstGeom>
-        </p:spPr>
-      </p:pic>
-      <p:sp>
-        <p:nvSpPr>
-          <p:cNvPr id="11" name="Rounded Rectangle 10"/>
+      <p:sp>
+        <p:nvSpPr>
+          <p:cNvPr id="11" name="TextBox 10"/>
+          <p:cNvSpPr txBox="1"/>
+          <p:nvPr/>
+        </p:nvSpPr>
+        <p:spPr>
+          <a:xfrm>
+            <a:off x="1650000" y="3000000"/>
+            <a:ext cx="800000" cy="800000"/>
+          </a:xfrm>
+          <a:prstGeom prst="rect">
+            <a:avLst/>
+          </a:prstGeom>
+          <a:noFill/>
+        </p:spPr>
+        <p:txBody>
+          <a:bodyPr wrap="square" anchor="ctr">
+            <a:spAutoFit/>
+          </a:bodyPr>
+          <a:lstStyle/>
+          <a:p>
+            <a:pPr algn="ctr"/>
+            <a:r>
+              <a:rPr sz="1800" b="1">
+                <a:solidFill>
+                  <a:srgbClr val="FFFFFF"/>
+                </a:solidFill>
+                <a:latin typeface="Open Sans"/>
+                <a:ea typeface="Open Sans"/>
+                <a:cs typeface="Open Sans"/>
+              </a:rPr>
+              <a:t>1</a:t>
+            </a:r>
+          </a:p>
+        </p:txBody>
+      </p:sp>
+      <p:sp>
+        <p:nvSpPr>
+          <p:cNvPr id="12" name="TextBox 11"/>
+          <p:cNvSpPr txBox="1"/>
+          <p:nvPr/>
+        </p:nvSpPr>
+        <p:spPr>
+          <a:xfrm>
+            <a:off x="850000" y="4000000"/>
+            <a:ext cx="2400000" cy="600000"/>
+          </a:xfrm>
+          <a:prstGeom prst="rect">
+            <a:avLst/>
+          </a:prstGeom>
+          <a:noFill/>
+        </p:spPr>
+        <p:txBody>
+          <a:bodyPr wrap="square" anchor="t">
+            <a:spAutoFit/>
+          </a:bodyPr>
+          <a:lstStyle/>
+          <a:p>
+            <a:pPr algn="ctr"/>
+            <a:r>
+              <a:rPr sz="1400" b="1">
+                <a:solidFill>
+                  <a:srgbClr val="333333"/>
+                </a:solidFill>
+                <a:latin typeface="Open Sans"/>
+                <a:ea typeface="Open Sans"/>
+                <a:cs typeface="Open Sans"/>
+              </a:rPr>
+              <a:t>Безопасность</a:t>
+            </a:r>
+          </a:p>
+        </p:txBody>
+      </p:sp>
+      <p:sp>
+        <p:nvSpPr>
+          <p:cNvPr id="13" name="TextBox 12"/>
+          <p:cNvSpPr txBox="1"/>
+          <p:nvPr/>
+        </p:nvSpPr>
+        <p:spPr>
+          <a:xfrm>
+            <a:off x="850000" y="4700000"/>
+            <a:ext cx="2400000" cy="1000000"/>
+          </a:xfrm>
+          <a:prstGeom prst="rect">
+            <a:avLst/>
+          </a:prstGeom>
+          <a:noFill/>
+        </p:spPr>
+        <p:txBody>
+          <a:bodyPr wrap="square" anchor="t">
+            <a:spAutoFit/>
+          </a:bodyPr>
+          <a:lstStyle/>
+          <a:p>
+            <a:pPr algn="ctr"/>
+            <a:r>
+              <a:rPr sz="1200" b="0">
+                <a:solidFill>
+                  <a:srgbClr val="666666"/>
+                </a:solidFill>
+                <a:latin typeface="Open Sans"/>
+                <a:ea typeface="Open Sans"/>
+                <a:cs typeface="Open Sans"/>
+              </a:rPr>
+              <a:t>Оценить обстановку, защитить себя</a:t>
+            </a:r>
+          </a:p>
+        </p:txBody>
+      </p:sp>
+      <p:sp>
+        <p:nvSpPr>
+          <p:cNvPr id="14" name="Rounded Rectangle 13"/>
           <p:cNvSpPr/>
           <p:nvPr/>
         </p:nvSpPr>
         <p:spPr>
           <a:xfrm>
-            <a:off x="3000000" y="1800000"/>
-            <a:ext cx="4000000" cy="2400000"/>
+            <a:off x="3600000" y="2800000"/>
+            <a:ext cx="2700000" cy="3200000"/>
           </a:xfrm>
           <a:prstGeom prst="roundRect">
             <a:avLst/>
           </a:prstGeom>
           <a:solidFill>
-            <a:srgbClr val="8DDBCD"/>
+            <a:srgbClr val="FFFFFF"/>
           </a:solidFill>
-          <a:ln w="15875">
+          <a:ln w="12700">
             <a:solidFill>
-              <a:srgbClr val="1AA090"/>
+              <a:srgbClr val="999999"/>
             </a:solidFill>
           </a:ln>
         </p:spPr>
@@ -6408,14 +5138,57 @@
       </p:sp>
       <p:sp>
         <p:nvSpPr>
-          <p:cNvPr id="12" name="TextBox 11"/>
+          <p:cNvPr id="15" name="Oval 14"/>
+          <p:cNvSpPr/>
+          <p:nvPr/>
+        </p:nvSpPr>
+        <p:spPr>
+          <a:xfrm>
+            <a:off x="4550000" y="3000000"/>
+            <a:ext cx="800000" cy="800000"/>
+          </a:xfrm>
+          <a:prstGeom prst="ellipse">
+            <a:avLst/>
+          </a:prstGeom>
+          <a:solidFill>
+            <a:srgbClr val="555555"/>
+          </a:solidFill>
+          <a:ln>
+            <a:noFill/>
+          </a:ln>
+        </p:spPr>
+        <p:style>
+          <a:lnRef idx="1">
+            <a:schemeClr val="accent1"/>
+          </a:lnRef>
+          <a:fillRef idx="3">
+            <a:schemeClr val="accent1"/>
+          </a:fillRef>
+          <a:effectRef idx="2">
+            <a:schemeClr val="accent1"/>
+          </a:effectRef>
+          <a:fontRef idx="minor">
+            <a:schemeClr val="lt1"/>
+          </a:fontRef>
+        </p:style>
+        <p:txBody>
+          <a:bodyPr rtlCol="0" anchor="ctr"/>
+          <a:lstStyle/>
+          <a:p>
+            <a:pPr algn="ctr"/>
+          </a:p>
+        </p:txBody>
+      </p:sp>
+      <p:sp>
+        <p:nvSpPr>
+          <p:cNvPr id="16" name="TextBox 15"/>
           <p:cNvSpPr txBox="1"/>
           <p:nvPr/>
         </p:nvSpPr>
         <p:spPr>
           <a:xfrm>
-            <a:off x="3200000" y="1980000"/>
-            <a:ext cx="3600000" cy="2040000"/>
+            <a:off x="4550000" y="3000000"/>
+            <a:ext cx="800000" cy="800000"/>
           </a:xfrm>
           <a:prstGeom prst="rect">
             <a:avLst/>
@@ -6428,31 +5201,31 @@
           </a:bodyPr>
           <a:lstStyle/>
           <a:p>
-            <a:pPr algn="l"/>
-            <a:r>
-              <a:rPr sz="1200" b="0">
-                <a:solidFill>
-                  <a:srgbClr val="0D6B60"/>
-                </a:solidFill>
-                <a:latin typeface="Calibri"/>
-                <a:ea typeface="Calibri"/>
-                <a:cs typeface="Calibri"/>
+            <a:pPr algn="ctr"/>
+            <a:r>
+              <a:rPr sz="1800" b="1">
+                <a:solidFill>
+                  <a:srgbClr val="FFFFFF"/>
+                </a:solidFill>
+                <a:latin typeface="Open Sans"/>
+                <a:ea typeface="Open Sans"/>
+                <a:cs typeface="Open Sans"/>
               </a:rPr>
-              <a:t>Под кровотечением понимают ситуацию, когда кровь покидает сосудистое русло, что приводит к кровопотере — безвозвратной утрате части крови.</a:t>
-            </a:r>
-          </a:p>
-        </p:txBody>
-      </p:sp>
-      <p:sp>
-        <p:nvSpPr>
-          <p:cNvPr id="13" name="TextBox 12"/>
+              <a:t>2</a:t>
+            </a:r>
+          </a:p>
+        </p:txBody>
+      </p:sp>
+      <p:sp>
+        <p:nvSpPr>
+          <p:cNvPr id="17" name="TextBox 16"/>
           <p:cNvSpPr txBox="1"/>
           <p:nvPr/>
         </p:nvSpPr>
         <p:spPr>
           <a:xfrm>
-            <a:off x="7400000" y="1600000"/>
-            <a:ext cx="5000000" cy="450000"/>
+            <a:off x="3750000" y="4000000"/>
+            <a:ext cx="2400000" cy="600000"/>
           </a:xfrm>
           <a:prstGeom prst="rect">
             <a:avLst/>
@@ -6465,31 +5238,31 @@
           </a:bodyPr>
           <a:lstStyle/>
           <a:p>
-            <a:pPr algn="l"/>
-            <a:r>
-              <a:rPr sz="1500" b="1">
-                <a:solidFill>
-                  <a:srgbClr val="1AA090"/>
-                </a:solidFill>
-                <a:latin typeface="Calibri"/>
-                <a:ea typeface="Calibri"/>
-                <a:cs typeface="Calibri"/>
+            <a:pPr algn="ctr"/>
+            <a:r>
+              <a:rPr sz="1400" b="1">
+                <a:solidFill>
+                  <a:srgbClr val="333333"/>
+                </a:solidFill>
+                <a:latin typeface="Open Sans"/>
+                <a:ea typeface="Open Sans"/>
+                <a:cs typeface="Open Sans"/>
               </a:rPr>
-              <a:t>Признаки острой кровопотери:</a:t>
-            </a:r>
-          </a:p>
-        </p:txBody>
-      </p:sp>
-      <p:sp>
-        <p:nvSpPr>
-          <p:cNvPr id="14" name="TextBox 13"/>
+              <a:t>Обзорный осмотр</a:t>
+            </a:r>
+          </a:p>
+        </p:txBody>
+      </p:sp>
+      <p:sp>
+        <p:nvSpPr>
+          <p:cNvPr id="18" name="TextBox 17"/>
           <p:cNvSpPr txBox="1"/>
           <p:nvPr/>
         </p:nvSpPr>
         <p:spPr>
           <a:xfrm>
-            <a:off x="7400000" y="2150000"/>
-            <a:ext cx="5000000" cy="4200000"/>
+            <a:off x="3750000" y="4700000"/>
+            <a:ext cx="2400000" cy="1000000"/>
           </a:xfrm>
           <a:prstGeom prst="rect">
             <a:avLst/>
@@ -6497,152 +5270,420 @@
           <a:noFill/>
         </p:spPr>
         <p:txBody>
-          <a:bodyPr wrap="square">
+          <a:bodyPr wrap="square" anchor="t">
             <a:spAutoFit/>
           </a:bodyPr>
           <a:lstStyle/>
           <a:p>
-            <a:pPr algn="l">
-              <a:spcAft>
-                <a:spcPts val="700"/>
-              </a:spcAft>
-            </a:pPr>
-            <a:r>
-              <a:rPr sz="1300" b="0">
+            <a:pPr algn="ctr"/>
+            <a:r>
+              <a:rPr sz="1200" b="0">
+                <a:solidFill>
+                  <a:srgbClr val="666666"/>
+                </a:solidFill>
+                <a:latin typeface="Open Sans"/>
+                <a:ea typeface="Open Sans"/>
+                <a:cs typeface="Open Sans"/>
+              </a:rPr>
+              <a:t>Быстро найти интенсивное кровотечение</a:t>
+            </a:r>
+          </a:p>
+        </p:txBody>
+      </p:sp>
+      <p:sp>
+        <p:nvSpPr>
+          <p:cNvPr id="19" name="Rounded Rectangle 18"/>
+          <p:cNvSpPr/>
+          <p:nvPr/>
+        </p:nvSpPr>
+        <p:spPr>
+          <a:xfrm>
+            <a:off x="6500000" y="2800000"/>
+            <a:ext cx="2700000" cy="3200000"/>
+          </a:xfrm>
+          <a:prstGeom prst="roundRect">
+            <a:avLst/>
+          </a:prstGeom>
+          <a:solidFill>
+            <a:srgbClr val="FFFFFF"/>
+          </a:solidFill>
+          <a:ln w="12700">
+            <a:solidFill>
+              <a:srgbClr val="999999"/>
+            </a:solidFill>
+          </a:ln>
+        </p:spPr>
+        <p:style>
+          <a:lnRef idx="1">
+            <a:schemeClr val="accent1"/>
+          </a:lnRef>
+          <a:fillRef idx="3">
+            <a:schemeClr val="accent1"/>
+          </a:fillRef>
+          <a:effectRef idx="2">
+            <a:schemeClr val="accent1"/>
+          </a:effectRef>
+          <a:fontRef idx="minor">
+            <a:schemeClr val="lt1"/>
+          </a:fontRef>
+        </p:style>
+        <p:txBody>
+          <a:bodyPr rtlCol="0" anchor="ctr"/>
+          <a:lstStyle/>
+          <a:p>
+            <a:pPr algn="ctr"/>
+          </a:p>
+        </p:txBody>
+      </p:sp>
+      <p:sp>
+        <p:nvSpPr>
+          <p:cNvPr id="20" name="Oval 19"/>
+          <p:cNvSpPr/>
+          <p:nvPr/>
+        </p:nvSpPr>
+        <p:spPr>
+          <a:xfrm>
+            <a:off x="7450000" y="3000000"/>
+            <a:ext cx="800000" cy="800000"/>
+          </a:xfrm>
+          <a:prstGeom prst="ellipse">
+            <a:avLst/>
+          </a:prstGeom>
+          <a:solidFill>
+            <a:srgbClr val="555555"/>
+          </a:solidFill>
+          <a:ln>
+            <a:noFill/>
+          </a:ln>
+        </p:spPr>
+        <p:style>
+          <a:lnRef idx="1">
+            <a:schemeClr val="accent1"/>
+          </a:lnRef>
+          <a:fillRef idx="3">
+            <a:schemeClr val="accent1"/>
+          </a:fillRef>
+          <a:effectRef idx="2">
+            <a:schemeClr val="accent1"/>
+          </a:effectRef>
+          <a:fontRef idx="minor">
+            <a:schemeClr val="lt1"/>
+          </a:fontRef>
+        </p:style>
+        <p:txBody>
+          <a:bodyPr rtlCol="0" anchor="ctr"/>
+          <a:lstStyle/>
+          <a:p>
+            <a:pPr algn="ctr"/>
+          </a:p>
+        </p:txBody>
+      </p:sp>
+      <p:sp>
+        <p:nvSpPr>
+          <p:cNvPr id="21" name="TextBox 20"/>
+          <p:cNvSpPr txBox="1"/>
+          <p:nvPr/>
+        </p:nvSpPr>
+        <p:spPr>
+          <a:xfrm>
+            <a:off x="7450000" y="3000000"/>
+            <a:ext cx="800000" cy="800000"/>
+          </a:xfrm>
+          <a:prstGeom prst="rect">
+            <a:avLst/>
+          </a:prstGeom>
+          <a:noFill/>
+        </p:spPr>
+        <p:txBody>
+          <a:bodyPr wrap="square" anchor="ctr">
+            <a:spAutoFit/>
+          </a:bodyPr>
+          <a:lstStyle/>
+          <a:p>
+            <a:pPr algn="ctr"/>
+            <a:r>
+              <a:rPr sz="1800" b="1">
+                <a:solidFill>
+                  <a:srgbClr val="FFFFFF"/>
+                </a:solidFill>
+                <a:latin typeface="Open Sans"/>
+                <a:ea typeface="Open Sans"/>
+                <a:cs typeface="Open Sans"/>
+              </a:rPr>
+              <a:t>3</a:t>
+            </a:r>
+          </a:p>
+        </p:txBody>
+      </p:sp>
+      <p:sp>
+        <p:nvSpPr>
+          <p:cNvPr id="22" name="TextBox 21"/>
+          <p:cNvSpPr txBox="1"/>
+          <p:nvPr/>
+        </p:nvSpPr>
+        <p:spPr>
+          <a:xfrm>
+            <a:off x="6650000" y="4000000"/>
+            <a:ext cx="2400000" cy="600000"/>
+          </a:xfrm>
+          <a:prstGeom prst="rect">
+            <a:avLst/>
+          </a:prstGeom>
+          <a:noFill/>
+        </p:spPr>
+        <p:txBody>
+          <a:bodyPr wrap="square" anchor="t">
+            <a:spAutoFit/>
+          </a:bodyPr>
+          <a:lstStyle/>
+          <a:p>
+            <a:pPr algn="ctr"/>
+            <a:r>
+              <a:rPr sz="1400" b="1">
                 <a:solidFill>
                   <a:srgbClr val="333333"/>
                 </a:solidFill>
-                <a:latin typeface="Calibri"/>
-                <a:ea typeface="Calibri"/>
-                <a:cs typeface="Calibri"/>
+                <a:latin typeface="Open Sans"/>
+                <a:ea typeface="Open Sans"/>
+                <a:cs typeface="Open Sans"/>
               </a:rPr>
-              <a:t>☐  резкая общая слабость;</a:t>
-            </a:r>
-          </a:p>
-          <a:p>
-            <a:pPr algn="l">
-              <a:spcAft>
-                <a:spcPts val="700"/>
-              </a:spcAft>
-            </a:pPr>
-            <a:r>
-              <a:rPr sz="1300" b="0">
+              <a:t>Остановка крови</a:t>
+            </a:r>
+          </a:p>
+        </p:txBody>
+      </p:sp>
+      <p:sp>
+        <p:nvSpPr>
+          <p:cNvPr id="23" name="TextBox 22"/>
+          <p:cNvSpPr txBox="1"/>
+          <p:nvPr/>
+        </p:nvSpPr>
+        <p:spPr>
+          <a:xfrm>
+            <a:off x="6650000" y="4700000"/>
+            <a:ext cx="2400000" cy="1000000"/>
+          </a:xfrm>
+          <a:prstGeom prst="rect">
+            <a:avLst/>
+          </a:prstGeom>
+          <a:noFill/>
+        </p:spPr>
+        <p:txBody>
+          <a:bodyPr wrap="square" anchor="t">
+            <a:spAutoFit/>
+          </a:bodyPr>
+          <a:lstStyle/>
+          <a:p>
+            <a:pPr algn="ctr"/>
+            <a:r>
+              <a:rPr sz="1200" b="0">
+                <a:solidFill>
+                  <a:srgbClr val="666666"/>
+                </a:solidFill>
+                <a:latin typeface="Open Sans"/>
+                <a:ea typeface="Open Sans"/>
+                <a:cs typeface="Open Sans"/>
+              </a:rPr>
+              <a:t>Начать временную остановку сразу</a:t>
+            </a:r>
+          </a:p>
+        </p:txBody>
+      </p:sp>
+      <p:sp>
+        <p:nvSpPr>
+          <p:cNvPr id="24" name="Rounded Rectangle 23"/>
+          <p:cNvSpPr/>
+          <p:nvPr/>
+        </p:nvSpPr>
+        <p:spPr>
+          <a:xfrm>
+            <a:off x="9400000" y="2800000"/>
+            <a:ext cx="2700000" cy="3200000"/>
+          </a:xfrm>
+          <a:prstGeom prst="roundRect">
+            <a:avLst/>
+          </a:prstGeom>
+          <a:solidFill>
+            <a:srgbClr val="FFFFFF"/>
+          </a:solidFill>
+          <a:ln w="12700">
+            <a:solidFill>
+              <a:srgbClr val="999999"/>
+            </a:solidFill>
+          </a:ln>
+        </p:spPr>
+        <p:style>
+          <a:lnRef idx="1">
+            <a:schemeClr val="accent1"/>
+          </a:lnRef>
+          <a:fillRef idx="3">
+            <a:schemeClr val="accent1"/>
+          </a:fillRef>
+          <a:effectRef idx="2">
+            <a:schemeClr val="accent1"/>
+          </a:effectRef>
+          <a:fontRef idx="minor">
+            <a:schemeClr val="lt1"/>
+          </a:fontRef>
+        </p:style>
+        <p:txBody>
+          <a:bodyPr rtlCol="0" anchor="ctr"/>
+          <a:lstStyle/>
+          <a:p>
+            <a:pPr algn="ctr"/>
+          </a:p>
+        </p:txBody>
+      </p:sp>
+      <p:sp>
+        <p:nvSpPr>
+          <p:cNvPr id="25" name="Oval 24"/>
+          <p:cNvSpPr/>
+          <p:nvPr/>
+        </p:nvSpPr>
+        <p:spPr>
+          <a:xfrm>
+            <a:off x="10350000" y="3000000"/>
+            <a:ext cx="800000" cy="800000"/>
+          </a:xfrm>
+          <a:prstGeom prst="ellipse">
+            <a:avLst/>
+          </a:prstGeom>
+          <a:solidFill>
+            <a:srgbClr val="555555"/>
+          </a:solidFill>
+          <a:ln>
+            <a:noFill/>
+          </a:ln>
+        </p:spPr>
+        <p:style>
+          <a:lnRef idx="1">
+            <a:schemeClr val="accent1"/>
+          </a:lnRef>
+          <a:fillRef idx="3">
+            <a:schemeClr val="accent1"/>
+          </a:fillRef>
+          <a:effectRef idx="2">
+            <a:schemeClr val="accent1"/>
+          </a:effectRef>
+          <a:fontRef idx="minor">
+            <a:schemeClr val="lt1"/>
+          </a:fontRef>
+        </p:style>
+        <p:txBody>
+          <a:bodyPr rtlCol="0" anchor="ctr"/>
+          <a:lstStyle/>
+          <a:p>
+            <a:pPr algn="ctr"/>
+          </a:p>
+        </p:txBody>
+      </p:sp>
+      <p:sp>
+        <p:nvSpPr>
+          <p:cNvPr id="26" name="TextBox 25"/>
+          <p:cNvSpPr txBox="1"/>
+          <p:nvPr/>
+        </p:nvSpPr>
+        <p:spPr>
+          <a:xfrm>
+            <a:off x="10350000" y="3000000"/>
+            <a:ext cx="800000" cy="800000"/>
+          </a:xfrm>
+          <a:prstGeom prst="rect">
+            <a:avLst/>
+          </a:prstGeom>
+          <a:noFill/>
+        </p:spPr>
+        <p:txBody>
+          <a:bodyPr wrap="square" anchor="ctr">
+            <a:spAutoFit/>
+          </a:bodyPr>
+          <a:lstStyle/>
+          <a:p>
+            <a:pPr algn="ctr"/>
+            <a:r>
+              <a:rPr sz="1800" b="1">
+                <a:solidFill>
+                  <a:srgbClr val="FFFFFF"/>
+                </a:solidFill>
+                <a:latin typeface="Open Sans"/>
+                <a:ea typeface="Open Sans"/>
+                <a:cs typeface="Open Sans"/>
+              </a:rPr>
+              <a:t>4</a:t>
+            </a:r>
+          </a:p>
+        </p:txBody>
+      </p:sp>
+      <p:sp>
+        <p:nvSpPr>
+          <p:cNvPr id="27" name="TextBox 26"/>
+          <p:cNvSpPr txBox="1"/>
+          <p:nvPr/>
+        </p:nvSpPr>
+        <p:spPr>
+          <a:xfrm>
+            <a:off x="9550000" y="4000000"/>
+            <a:ext cx="2400000" cy="600000"/>
+          </a:xfrm>
+          <a:prstGeom prst="rect">
+            <a:avLst/>
+          </a:prstGeom>
+          <a:noFill/>
+        </p:spPr>
+        <p:txBody>
+          <a:bodyPr wrap="square" anchor="t">
+            <a:spAutoFit/>
+          </a:bodyPr>
+          <a:lstStyle/>
+          <a:p>
+            <a:pPr algn="ctr"/>
+            <a:r>
+              <a:rPr sz="1400" b="1">
                 <a:solidFill>
                   <a:srgbClr val="333333"/>
                 </a:solidFill>
-                <a:latin typeface="Calibri"/>
-                <a:ea typeface="Calibri"/>
-                <a:cs typeface="Calibri"/>
+                <a:latin typeface="Open Sans"/>
+                <a:ea typeface="Open Sans"/>
+                <a:cs typeface="Open Sans"/>
               </a:rPr>
-              <a:t>☐  чувство жажды;</a:t>
-            </a:r>
-          </a:p>
-          <a:p>
-            <a:pPr algn="l">
-              <a:spcAft>
-                <a:spcPts val="700"/>
-              </a:spcAft>
-            </a:pPr>
-            <a:r>
-              <a:rPr sz="1300" b="0">
-                <a:solidFill>
-                  <a:srgbClr val="333333"/>
-                </a:solidFill>
-                <a:latin typeface="Calibri"/>
-                <a:ea typeface="Calibri"/>
-                <a:cs typeface="Calibri"/>
+              <a:t>Далее по алгоритму</a:t>
+            </a:r>
+          </a:p>
+        </p:txBody>
+      </p:sp>
+      <p:sp>
+        <p:nvSpPr>
+          <p:cNvPr id="28" name="TextBox 27"/>
+          <p:cNvSpPr txBox="1"/>
+          <p:nvPr/>
+        </p:nvSpPr>
+        <p:spPr>
+          <a:xfrm>
+            <a:off x="9550000" y="4700000"/>
+            <a:ext cx="2400000" cy="1000000"/>
+          </a:xfrm>
+          <a:prstGeom prst="rect">
+            <a:avLst/>
+          </a:prstGeom>
+          <a:noFill/>
+        </p:spPr>
+        <p:txBody>
+          <a:bodyPr wrap="square" anchor="t">
+            <a:spAutoFit/>
+          </a:bodyPr>
+          <a:lstStyle/>
+          <a:p>
+            <a:pPr algn="ctr"/>
+            <a:r>
+              <a:rPr sz="1200" b="0">
+                <a:solidFill>
+                  <a:srgbClr val="666666"/>
+                </a:solidFill>
+                <a:latin typeface="Open Sans"/>
+                <a:ea typeface="Open Sans"/>
+                <a:cs typeface="Open Sans"/>
               </a:rPr>
-              <a:t>☐  головокружение;</a:t>
-            </a:r>
-          </a:p>
-          <a:p>
-            <a:pPr algn="l">
-              <a:spcAft>
-                <a:spcPts val="700"/>
-              </a:spcAft>
-            </a:pPr>
-            <a:r>
-              <a:rPr sz="1300" b="0">
-                <a:solidFill>
-                  <a:srgbClr val="333333"/>
-                </a:solidFill>
-                <a:latin typeface="Calibri"/>
-                <a:ea typeface="Calibri"/>
-                <a:cs typeface="Calibri"/>
-              </a:rPr>
-              <a:t>☐  мелькание «мушек» перед глазами;</a:t>
-            </a:r>
-          </a:p>
-          <a:p>
-            <a:pPr algn="l">
-              <a:spcAft>
-                <a:spcPts val="700"/>
-              </a:spcAft>
-            </a:pPr>
-            <a:r>
-              <a:rPr sz="1300" b="0">
-                <a:solidFill>
-                  <a:srgbClr val="333333"/>
-                </a:solidFill>
-                <a:latin typeface="Calibri"/>
-                <a:ea typeface="Calibri"/>
-                <a:cs typeface="Calibri"/>
-              </a:rPr>
-              <a:t>☐  обморок (чаще при попытке встать);</a:t>
-            </a:r>
-          </a:p>
-          <a:p>
-            <a:pPr algn="l">
-              <a:spcAft>
-                <a:spcPts val="700"/>
-              </a:spcAft>
-            </a:pPr>
-            <a:r>
-              <a:rPr sz="1300" b="0">
-                <a:solidFill>
-                  <a:srgbClr val="333333"/>
-                </a:solidFill>
-                <a:latin typeface="Calibri"/>
-                <a:ea typeface="Calibri"/>
-                <a:cs typeface="Calibri"/>
-              </a:rPr>
-              <a:t>☐  бледная, влажная и холодная кожа;</a:t>
-            </a:r>
-          </a:p>
-          <a:p>
-            <a:pPr algn="l">
-              <a:spcAft>
-                <a:spcPts val="700"/>
-              </a:spcAft>
-            </a:pPr>
-            <a:r>
-              <a:rPr sz="1300" b="0">
-                <a:solidFill>
-                  <a:srgbClr val="333333"/>
-                </a:solidFill>
-                <a:latin typeface="Calibri"/>
-                <a:ea typeface="Calibri"/>
-                <a:cs typeface="Calibri"/>
-              </a:rPr>
-              <a:t>☐  учащённое сердцебиение;</a:t>
-            </a:r>
-          </a:p>
-          <a:p>
-            <a:pPr algn="l">
-              <a:spcAft>
-                <a:spcPts val="700"/>
-              </a:spcAft>
-            </a:pPr>
-            <a:r>
-              <a:rPr sz="1300" b="0">
-                <a:solidFill>
-                  <a:srgbClr val="333333"/>
-                </a:solidFill>
-                <a:latin typeface="Calibri"/>
-                <a:ea typeface="Calibri"/>
-                <a:cs typeface="Calibri"/>
-              </a:rPr>
-              <a:t>☐  частое дыхание.</a:t>
+              <a:t>Признаки жизни, СМП, подробный осмотр</a:t>
             </a:r>
           </a:p>
         </p:txBody>
@@ -6710,20 +5751,57 @@
       </p:sp>
       <p:sp>
         <p:nvSpPr>
-          <p:cNvPr id="3" name="Rectangle 2"/>
+          <p:cNvPr id="3" name="TextBox 2"/>
+          <p:cNvSpPr txBox="1"/>
+          <p:nvPr/>
+        </p:nvSpPr>
+        <p:spPr>
+          <a:xfrm>
+            <a:off x="700000" y="250000"/>
+            <a:ext cx="11200000" cy="550000"/>
+          </a:xfrm>
+          <a:prstGeom prst="rect">
+            <a:avLst/>
+          </a:prstGeom>
+          <a:noFill/>
+        </p:spPr>
+        <p:txBody>
+          <a:bodyPr wrap="square" anchor="t">
+            <a:spAutoFit/>
+          </a:bodyPr>
+          <a:lstStyle/>
+          <a:p>
+            <a:pPr algn="l"/>
+            <a:r>
+              <a:rPr sz="2200" b="1">
+                <a:solidFill>
+                  <a:srgbClr val="333333"/>
+                </a:solidFill>
+                <a:latin typeface="Open Sans"/>
+                <a:ea typeface="Open Sans"/>
+                <a:cs typeface="Open Sans"/>
+              </a:rPr>
+              <a:t>ЦЕЛЬ ОБЗОРНОГО ОСМОТРА</a:t>
+            </a:r>
+          </a:p>
+        </p:txBody>
+      </p:sp>
+      <p:sp>
+        <p:nvSpPr>
+          <p:cNvPr id="4" name="Rectangle 3"/>
           <p:cNvSpPr/>
           <p:nvPr/>
         </p:nvSpPr>
         <p:spPr>
           <a:xfrm>
-            <a:off x="0" y="0"/>
-            <a:ext cx="12191695" cy="1300000"/>
+            <a:off x="700000" y="850000"/>
+            <a:ext cx="9000000" cy="28000"/>
           </a:xfrm>
           <a:prstGeom prst="rect">
             <a:avLst/>
           </a:prstGeom>
           <a:solidFill>
-            <a:srgbClr val="F8F8F8"/>
+            <a:srgbClr val="555555"/>
           </a:solidFill>
           <a:ln>
             <a:noFill/>
@@ -6753,14 +5831,14 @@
       </p:sp>
       <p:sp>
         <p:nvSpPr>
-          <p:cNvPr id="4" name="TextBox 3"/>
+          <p:cNvPr id="5" name="TextBox 4"/>
           <p:cNvSpPr txBox="1"/>
           <p:nvPr/>
         </p:nvSpPr>
         <p:spPr>
           <a:xfrm>
-            <a:off x="700000" y="220000"/>
-            <a:ext cx="11200000" cy="550000"/>
+            <a:off x="700000" y="920000"/>
+            <a:ext cx="11000000" cy="350000"/>
           </a:xfrm>
           <a:prstGeom prst="rect">
             <a:avLst/>
@@ -6775,35 +5853,35 @@
           <a:p>
             <a:pPr algn="l"/>
             <a:r>
-              <a:rPr sz="2000" b="1">
-                <a:solidFill>
-                  <a:srgbClr val="333333"/>
-                </a:solidFill>
-                <a:latin typeface="Calibri"/>
-                <a:ea typeface="Calibri"/>
-                <a:cs typeface="Calibri"/>
+              <a:rPr sz="1200" b="0">
+                <a:solidFill>
+                  <a:srgbClr val="666666"/>
+                </a:solidFill>
+                <a:latin typeface="Open Sans"/>
+                <a:ea typeface="Open Sans"/>
+                <a:cs typeface="Open Sans"/>
               </a:rPr>
-              <a:t>ОСТРАЯ МАССИВНАЯ КРОВОПОТЕРЯ</a:t>
-            </a:r>
-          </a:p>
-        </p:txBody>
-      </p:sp>
-      <p:sp>
-        <p:nvSpPr>
-          <p:cNvPr id="5" name="Rectangle 4"/>
+              <a:t>Оказание первой помощи при наружных кровотечениях</a:t>
+            </a:r>
+          </a:p>
+        </p:txBody>
+      </p:sp>
+      <p:sp>
+        <p:nvSpPr>
+          <p:cNvPr id="6" name="Rectangle 5"/>
           <p:cNvSpPr/>
           <p:nvPr/>
         </p:nvSpPr>
         <p:spPr>
           <a:xfrm>
-            <a:off x="700000" y="820000"/>
-            <a:ext cx="8500000" cy="28000"/>
+            <a:off x="0" y="2800000"/>
+            <a:ext cx="420000" cy="420000"/>
           </a:xfrm>
           <a:prstGeom prst="rect">
             <a:avLst/>
           </a:prstGeom>
           <a:solidFill>
-            <a:srgbClr val="606060"/>
+            <a:srgbClr val="555555"/>
           </a:solidFill>
           <a:ln>
             <a:noFill/>
@@ -6833,14 +5911,14 @@
       </p:sp>
       <p:sp>
         <p:nvSpPr>
-          <p:cNvPr id="6" name="TextBox 5"/>
+          <p:cNvPr id="7" name="TextBox 6"/>
           <p:cNvSpPr txBox="1"/>
           <p:nvPr/>
         </p:nvSpPr>
         <p:spPr>
           <a:xfrm>
-            <a:off x="700000" y="880000"/>
-            <a:ext cx="11000000" cy="320000"/>
+            <a:off x="0" y="2800000"/>
+            <a:ext cx="420000" cy="420000"/>
           </a:xfrm>
           <a:prstGeom prst="rect">
             <a:avLst/>
@@ -6848,42 +5926,42 @@
           <a:noFill/>
         </p:spPr>
         <p:txBody>
-          <a:bodyPr wrap="square" anchor="t">
+          <a:bodyPr wrap="square" anchor="ctr">
             <a:spAutoFit/>
           </a:bodyPr>
           <a:lstStyle/>
           <a:p>
-            <a:pPr algn="l"/>
-            <a:r>
-              <a:rPr sz="1100" b="0">
-                <a:solidFill>
-                  <a:srgbClr val="777777"/>
-                </a:solidFill>
-                <a:latin typeface="Calibri"/>
-                <a:ea typeface="Calibri"/>
-                <a:cs typeface="Calibri"/>
+            <a:pPr algn="ctr"/>
+            <a:r>
+              <a:rPr sz="1400" b="1">
+                <a:solidFill>
+                  <a:srgbClr val="FFFFFF"/>
+                </a:solidFill>
+                <a:latin typeface="Open Sans"/>
+                <a:ea typeface="Open Sans"/>
+                <a:cs typeface="Open Sans"/>
               </a:rPr>
-              <a:t>Оказание первой помощи при наружных кровотечениях</a:t>
-            </a:r>
-          </a:p>
-        </p:txBody>
-      </p:sp>
-      <p:sp>
-        <p:nvSpPr>
-          <p:cNvPr id="7" name="Rectangle 6"/>
+              <a:t>4</a:t>
+            </a:r>
+          </a:p>
+        </p:txBody>
+      </p:sp>
+      <p:sp>
+        <p:nvSpPr>
+          <p:cNvPr id="8" name="Rounded Rectangle 7"/>
           <p:cNvSpPr/>
           <p:nvPr/>
         </p:nvSpPr>
         <p:spPr>
           <a:xfrm>
-            <a:off x="0" y="2700000"/>
-            <a:ext cx="400000" cy="400000"/>
-          </a:xfrm>
-          <a:prstGeom prst="rect">
+            <a:off x="700000" y="1550000"/>
+            <a:ext cx="11000000" cy="1600000"/>
+          </a:xfrm>
+          <a:prstGeom prst="roundRect">
             <a:avLst/>
           </a:prstGeom>
           <a:solidFill>
-            <a:srgbClr val="606060"/>
+            <a:srgbClr val="F5F0E1"/>
           </a:solidFill>
           <a:ln>
             <a:noFill/>
@@ -6913,14 +5991,14 @@
       </p:sp>
       <p:sp>
         <p:nvSpPr>
-          <p:cNvPr id="8" name="TextBox 7"/>
+          <p:cNvPr id="9" name="TextBox 8"/>
           <p:cNvSpPr txBox="1"/>
           <p:nvPr/>
         </p:nvSpPr>
         <p:spPr>
           <a:xfrm>
-            <a:off x="0" y="2700000"/>
-            <a:ext cx="400000" cy="400000"/>
+            <a:off x="950000" y="1750000"/>
+            <a:ext cx="10500000" cy="1200000"/>
           </a:xfrm>
           <a:prstGeom prst="rect">
             <a:avLst/>
@@ -6933,41 +6011,78 @@
           </a:bodyPr>
           <a:lstStyle/>
           <a:p>
-            <a:pPr algn="ctr"/>
-            <a:r>
-              <a:rPr sz="1300" b="1">
-                <a:solidFill>
-                  <a:srgbClr val="FFFFFF"/>
-                </a:solidFill>
-                <a:latin typeface="Calibri"/>
-                <a:ea typeface="Calibri"/>
-                <a:cs typeface="Calibri"/>
+            <a:pPr algn="l"/>
+            <a:r>
+              <a:rPr sz="1500" b="0">
+                <a:solidFill>
+                  <a:srgbClr val="333333"/>
+                </a:solidFill>
+                <a:latin typeface="Open Sans"/>
+                <a:ea typeface="Open Sans"/>
+                <a:cs typeface="Open Sans"/>
               </a:rPr>
-              <a:t>4</a:t>
-            </a:r>
-          </a:p>
-        </p:txBody>
-      </p:sp>
-      <p:sp>
-        <p:nvSpPr>
-          <p:cNvPr id="9" name="Rounded Rectangle 8"/>
+              <a:t>Обзорный осмотр пострадавшего (пострадавших) нужен, чтобы определить наличие и расположение ранений с интенсивным наружным кровотечением, требующим немедленной остановки.</a:t>
+            </a:r>
+          </a:p>
+        </p:txBody>
+      </p:sp>
+      <p:sp>
+        <p:nvSpPr>
+          <p:cNvPr id="10" name="TextBox 9"/>
+          <p:cNvSpPr txBox="1"/>
+          <p:nvPr/>
+        </p:nvSpPr>
+        <p:spPr>
+          <a:xfrm>
+            <a:off x="700000" y="3500000"/>
+            <a:ext cx="11000000" cy="450000"/>
+          </a:xfrm>
+          <a:prstGeom prst="rect">
+            <a:avLst/>
+          </a:prstGeom>
+          <a:noFill/>
+        </p:spPr>
+        <p:txBody>
+          <a:bodyPr wrap="square" anchor="t">
+            <a:spAutoFit/>
+          </a:bodyPr>
+          <a:lstStyle/>
+          <a:p>
+            <a:pPr algn="l"/>
+            <a:r>
+              <a:rPr sz="1500" b="1">
+                <a:solidFill>
+                  <a:srgbClr val="333333"/>
+                </a:solidFill>
+                <a:latin typeface="Open Sans"/>
+                <a:ea typeface="Open Sans"/>
+                <a:cs typeface="Open Sans"/>
+              </a:rPr>
+              <a:t>Сигналы «остановить кровь сейчас»:</a:t>
+            </a:r>
+          </a:p>
+        </p:txBody>
+      </p:sp>
+      <p:sp>
+        <p:nvSpPr>
+          <p:cNvPr id="11" name="Rectangle 10"/>
           <p:cNvSpPr/>
           <p:nvPr/>
         </p:nvSpPr>
         <p:spPr>
           <a:xfrm>
-            <a:off x="700000" y="1550000"/>
-            <a:ext cx="11000000" cy="1400000"/>
-          </a:xfrm>
-          <a:prstGeom prst="roundRect">
+            <a:off x="700000" y="4200000"/>
+            <a:ext cx="3600000" cy="1800000"/>
+          </a:xfrm>
+          <a:prstGeom prst="rect">
             <a:avLst/>
           </a:prstGeom>
           <a:solidFill>
-            <a:srgbClr val="8DDBCD"/>
+            <a:srgbClr val="FFFFFF"/>
           </a:solidFill>
-          <a:ln w="15875">
+          <a:ln w="12700">
             <a:solidFill>
-              <a:srgbClr val="1AA090"/>
+              <a:srgbClr val="999999"/>
             </a:solidFill>
           </a:ln>
         </p:spPr>
@@ -6995,14 +6110,57 @@
       </p:sp>
       <p:sp>
         <p:nvSpPr>
-          <p:cNvPr id="10" name="TextBox 9"/>
+          <p:cNvPr id="12" name="Rectangle 11"/>
+          <p:cNvSpPr/>
+          <p:nvPr/>
+        </p:nvSpPr>
+        <p:spPr>
+          <a:xfrm>
+            <a:off x="700000" y="4200000"/>
+            <a:ext cx="90000" cy="1800000"/>
+          </a:xfrm>
+          <a:prstGeom prst="rect">
+            <a:avLst/>
+          </a:prstGeom>
+          <a:solidFill>
+            <a:srgbClr val="CC0000"/>
+          </a:solidFill>
+          <a:ln>
+            <a:noFill/>
+          </a:ln>
+        </p:spPr>
+        <p:style>
+          <a:lnRef idx="1">
+            <a:schemeClr val="accent1"/>
+          </a:lnRef>
+          <a:fillRef idx="3">
+            <a:schemeClr val="accent1"/>
+          </a:fillRef>
+          <a:effectRef idx="2">
+            <a:schemeClr val="accent1"/>
+          </a:effectRef>
+          <a:fontRef idx="minor">
+            <a:schemeClr val="lt1"/>
+          </a:fontRef>
+        </p:style>
+        <p:txBody>
+          <a:bodyPr rtlCol="0" anchor="ctr"/>
+          <a:lstStyle/>
+          <a:p>
+            <a:pPr algn="ctr"/>
+          </a:p>
+        </p:txBody>
+      </p:sp>
+      <p:sp>
+        <p:nvSpPr>
+          <p:cNvPr id="13" name="TextBox 12"/>
           <p:cNvSpPr txBox="1"/>
           <p:nvPr/>
         </p:nvSpPr>
         <p:spPr>
           <a:xfrm>
-            <a:off x="900000" y="1730000"/>
-            <a:ext cx="10600000" cy="1040000"/>
+            <a:off x="950000" y="4600000"/>
+            <a:ext cx="3200000" cy="1000000"/>
           </a:xfrm>
           <a:prstGeom prst="rect">
             <a:avLst/>
@@ -7017,29 +6175,117 @@
           <a:p>
             <a:pPr algn="l"/>
             <a:r>
-              <a:rPr sz="1500" b="0">
-                <a:solidFill>
-                  <a:srgbClr val="0D6B60"/>
-                </a:solidFill>
-                <a:latin typeface="Calibri"/>
-                <a:ea typeface="Calibri"/>
-                <a:cs typeface="Calibri"/>
+              <a:rPr sz="1400" b="0">
+                <a:solidFill>
+                  <a:srgbClr val="333333"/>
+                </a:solidFill>
+                <a:latin typeface="Open Sans"/>
+                <a:ea typeface="Open Sans"/>
+                <a:cs typeface="Open Sans"/>
               </a:rPr>
-              <a:t>Наиболее опасно интенсивное кровотечение, приводящее к быстрой потере большого количества крови, — острая массивная кровопотеря.</a:t>
-            </a:r>
-          </a:p>
-        </p:txBody>
-      </p:sp>
-      <p:sp>
-        <p:nvSpPr>
-          <p:cNvPr id="11" name="TextBox 10"/>
+              <a:t>одежда, пропитанная кровью;</a:t>
+            </a:r>
+          </a:p>
+        </p:txBody>
+      </p:sp>
+      <p:sp>
+        <p:nvSpPr>
+          <p:cNvPr id="14" name="Rectangle 13"/>
+          <p:cNvSpPr/>
+          <p:nvPr/>
+        </p:nvSpPr>
+        <p:spPr>
+          <a:xfrm>
+            <a:off x="4500000" y="4200000"/>
+            <a:ext cx="3600000" cy="1800000"/>
+          </a:xfrm>
+          <a:prstGeom prst="rect">
+            <a:avLst/>
+          </a:prstGeom>
+          <a:solidFill>
+            <a:srgbClr val="FFFFFF"/>
+          </a:solidFill>
+          <a:ln w="12700">
+            <a:solidFill>
+              <a:srgbClr val="999999"/>
+            </a:solidFill>
+          </a:ln>
+        </p:spPr>
+        <p:style>
+          <a:lnRef idx="1">
+            <a:schemeClr val="accent1"/>
+          </a:lnRef>
+          <a:fillRef idx="3">
+            <a:schemeClr val="accent1"/>
+          </a:fillRef>
+          <a:effectRef idx="2">
+            <a:schemeClr val="accent1"/>
+          </a:effectRef>
+          <a:fontRef idx="minor">
+            <a:schemeClr val="lt1"/>
+          </a:fontRef>
+        </p:style>
+        <p:txBody>
+          <a:bodyPr rtlCol="0" anchor="ctr"/>
+          <a:lstStyle/>
+          <a:p>
+            <a:pPr algn="ctr"/>
+          </a:p>
+        </p:txBody>
+      </p:sp>
+      <p:sp>
+        <p:nvSpPr>
+          <p:cNvPr id="15" name="Rectangle 14"/>
+          <p:cNvSpPr/>
+          <p:nvPr/>
+        </p:nvSpPr>
+        <p:spPr>
+          <a:xfrm>
+            <a:off x="4500000" y="4200000"/>
+            <a:ext cx="90000" cy="1800000"/>
+          </a:xfrm>
+          <a:prstGeom prst="rect">
+            <a:avLst/>
+          </a:prstGeom>
+          <a:solidFill>
+            <a:srgbClr val="CC0000"/>
+          </a:solidFill>
+          <a:ln>
+            <a:noFill/>
+          </a:ln>
+        </p:spPr>
+        <p:style>
+          <a:lnRef idx="1">
+            <a:schemeClr val="accent1"/>
+          </a:lnRef>
+          <a:fillRef idx="3">
+            <a:schemeClr val="accent1"/>
+          </a:fillRef>
+          <a:effectRef idx="2">
+            <a:schemeClr val="accent1"/>
+          </a:effectRef>
+          <a:fontRef idx="minor">
+            <a:schemeClr val="lt1"/>
+          </a:fontRef>
+        </p:style>
+        <p:txBody>
+          <a:bodyPr rtlCol="0" anchor="ctr"/>
+          <a:lstStyle/>
+          <a:p>
+            <a:pPr algn="ctr"/>
+          </a:p>
+        </p:txBody>
+      </p:sp>
+      <p:sp>
+        <p:nvSpPr>
+          <p:cNvPr id="16" name="TextBox 15"/>
           <p:cNvSpPr txBox="1"/>
           <p:nvPr/>
         </p:nvSpPr>
         <p:spPr>
           <a:xfrm>
-            <a:off x="700000" y="3300000"/>
-            <a:ext cx="11000000" cy="3000000"/>
+            <a:off x="4750000" y="4600000"/>
+            <a:ext cx="3200000" cy="1000000"/>
           </a:xfrm>
           <a:prstGeom prst="rect">
             <a:avLst/>
@@ -7047,62 +6293,147 @@
           <a:noFill/>
         </p:spPr>
         <p:txBody>
-          <a:bodyPr wrap="square">
+          <a:bodyPr wrap="square" anchor="ctr">
             <a:spAutoFit/>
           </a:bodyPr>
           <a:lstStyle/>
           <a:p>
-            <a:pPr algn="l">
-              <a:spcAft>
-                <a:spcPts val="700"/>
-              </a:spcAft>
-            </a:pPr>
-            <a:r>
-              <a:rPr sz="1500" b="0">
+            <a:pPr algn="l"/>
+            <a:r>
+              <a:rPr sz="1400" b="0">
                 <a:solidFill>
                   <a:srgbClr val="333333"/>
                 </a:solidFill>
-                <a:latin typeface="Calibri"/>
-                <a:ea typeface="Calibri"/>
-                <a:cs typeface="Calibri"/>
+                <a:latin typeface="Open Sans"/>
+                <a:ea typeface="Open Sans"/>
+                <a:cs typeface="Open Sans"/>
               </a:rPr>
-              <a:t>•  При повреждении крупных сосудов без остановки гибель может наступить в течение нескольких минут.</a:t>
-            </a:r>
-          </a:p>
-          <a:p>
-            <a:pPr algn="l">
-              <a:spcAft>
-                <a:spcPts val="700"/>
-              </a:spcAft>
-            </a:pPr>
-            <a:r>
-              <a:rPr sz="1500" b="0">
+              <a:t>лужа / скопление крови возле пострадавшего;</a:t>
+            </a:r>
+          </a:p>
+        </p:txBody>
+      </p:sp>
+      <p:sp>
+        <p:nvSpPr>
+          <p:cNvPr id="17" name="Rectangle 16"/>
+          <p:cNvSpPr/>
+          <p:nvPr/>
+        </p:nvSpPr>
+        <p:spPr>
+          <a:xfrm>
+            <a:off x="8300000" y="4200000"/>
+            <a:ext cx="3600000" cy="1800000"/>
+          </a:xfrm>
+          <a:prstGeom prst="rect">
+            <a:avLst/>
+          </a:prstGeom>
+          <a:solidFill>
+            <a:srgbClr val="FFFFFF"/>
+          </a:solidFill>
+          <a:ln w="12700">
+            <a:solidFill>
+              <a:srgbClr val="999999"/>
+            </a:solidFill>
+          </a:ln>
+        </p:spPr>
+        <p:style>
+          <a:lnRef idx="1">
+            <a:schemeClr val="accent1"/>
+          </a:lnRef>
+          <a:fillRef idx="3">
+            <a:schemeClr val="accent1"/>
+          </a:fillRef>
+          <a:effectRef idx="2">
+            <a:schemeClr val="accent1"/>
+          </a:effectRef>
+          <a:fontRef idx="minor">
+            <a:schemeClr val="lt1"/>
+          </a:fontRef>
+        </p:style>
+        <p:txBody>
+          <a:bodyPr rtlCol="0" anchor="ctr"/>
+          <a:lstStyle/>
+          <a:p>
+            <a:pPr algn="ctr"/>
+          </a:p>
+        </p:txBody>
+      </p:sp>
+      <p:sp>
+        <p:nvSpPr>
+          <p:cNvPr id="18" name="Rectangle 17"/>
+          <p:cNvSpPr/>
+          <p:nvPr/>
+        </p:nvSpPr>
+        <p:spPr>
+          <a:xfrm>
+            <a:off x="8300000" y="4200000"/>
+            <a:ext cx="90000" cy="1800000"/>
+          </a:xfrm>
+          <a:prstGeom prst="rect">
+            <a:avLst/>
+          </a:prstGeom>
+          <a:solidFill>
+            <a:srgbClr val="CC0000"/>
+          </a:solidFill>
+          <a:ln>
+            <a:noFill/>
+          </a:ln>
+        </p:spPr>
+        <p:style>
+          <a:lnRef idx="1">
+            <a:schemeClr val="accent1"/>
+          </a:lnRef>
+          <a:fillRef idx="3">
+            <a:schemeClr val="accent1"/>
+          </a:fillRef>
+          <a:effectRef idx="2">
+            <a:schemeClr val="accent1"/>
+          </a:effectRef>
+          <a:fontRef idx="minor">
+            <a:schemeClr val="lt1"/>
+          </a:fontRef>
+        </p:style>
+        <p:txBody>
+          <a:bodyPr rtlCol="0" anchor="ctr"/>
+          <a:lstStyle/>
+          <a:p>
+            <a:pPr algn="ctr"/>
+          </a:p>
+        </p:txBody>
+      </p:sp>
+      <p:sp>
+        <p:nvSpPr>
+          <p:cNvPr id="19" name="TextBox 18"/>
+          <p:cNvSpPr txBox="1"/>
+          <p:nvPr/>
+        </p:nvSpPr>
+        <p:spPr>
+          <a:xfrm>
+            <a:off x="8550000" y="4600000"/>
+            <a:ext cx="3200000" cy="1000000"/>
+          </a:xfrm>
+          <a:prstGeom prst="rect">
+            <a:avLst/>
+          </a:prstGeom>
+          <a:noFill/>
+        </p:spPr>
+        <p:txBody>
+          <a:bodyPr wrap="square" anchor="ctr">
+            <a:spAutoFit/>
+          </a:bodyPr>
+          <a:lstStyle/>
+          <a:p>
+            <a:pPr algn="l"/>
+            <a:r>
+              <a:rPr sz="1400" b="0">
                 <a:solidFill>
                   <a:srgbClr val="333333"/>
                 </a:solidFill>
-                <a:latin typeface="Calibri"/>
-                <a:ea typeface="Calibri"/>
-                <a:cs typeface="Calibri"/>
+                <a:latin typeface="Open Sans"/>
+                <a:ea typeface="Open Sans"/>
+                <a:cs typeface="Open Sans"/>
               </a:rPr>
-              <a:t>•  Признаки кровопотери возможны и при остановленном кровотечении, и при отсутствии видимой крови.</a:t>
-            </a:r>
-          </a:p>
-          <a:p>
-            <a:pPr algn="l">
-              <a:spcAft>
-                <a:spcPts val="700"/>
-              </a:spcAft>
-            </a:pPr>
-            <a:r>
-              <a:rPr sz="1500" b="0">
-                <a:solidFill>
-                  <a:srgbClr val="333333"/>
-                </a:solidFill>
-                <a:latin typeface="Calibri"/>
-                <a:ea typeface="Calibri"/>
-                <a:cs typeface="Calibri"/>
-              </a:rPr>
-              <a:t>•  Кровотечения слабой и средней интенсивности тоже нужно останавливать.</a:t>
+              <a:t>рана с интенсивно вытекающей кровью.</a:t>
             </a:r>
           </a:p>
         </p:txBody>
@@ -7170,20 +6501,57 @@
       </p:sp>
       <p:sp>
         <p:nvSpPr>
-          <p:cNvPr id="3" name="Rectangle 2"/>
+          <p:cNvPr id="3" name="TextBox 2"/>
+          <p:cNvSpPr txBox="1"/>
+          <p:nvPr/>
+        </p:nvSpPr>
+        <p:spPr>
+          <a:xfrm>
+            <a:off x="700000" y="250000"/>
+            <a:ext cx="11200000" cy="550000"/>
+          </a:xfrm>
+          <a:prstGeom prst="rect">
+            <a:avLst/>
+          </a:prstGeom>
+          <a:noFill/>
+        </p:spPr>
+        <p:txBody>
+          <a:bodyPr wrap="square" anchor="t">
+            <a:spAutoFit/>
+          </a:bodyPr>
+          <a:lstStyle/>
+          <a:p>
+            <a:pPr algn="l"/>
+            <a:r>
+              <a:rPr sz="2200" b="1">
+                <a:solidFill>
+                  <a:srgbClr val="333333"/>
+                </a:solidFill>
+                <a:latin typeface="Open Sans"/>
+                <a:ea typeface="Open Sans"/>
+                <a:cs typeface="Open Sans"/>
+              </a:rPr>
+              <a:t>КАК ПРОВОДИТСЯ ОБЗОРНЫЙ ОСМОТР</a:t>
+            </a:r>
+          </a:p>
+        </p:txBody>
+      </p:sp>
+      <p:sp>
+        <p:nvSpPr>
+          <p:cNvPr id="4" name="Rectangle 3"/>
           <p:cNvSpPr/>
           <p:nvPr/>
         </p:nvSpPr>
         <p:spPr>
           <a:xfrm>
-            <a:off x="0" y="0"/>
-            <a:ext cx="12191695" cy="1300000"/>
+            <a:off x="700000" y="850000"/>
+            <a:ext cx="9000000" cy="28000"/>
           </a:xfrm>
           <a:prstGeom prst="rect">
             <a:avLst/>
           </a:prstGeom>
           <a:solidFill>
-            <a:srgbClr val="F8F8F8"/>
+            <a:srgbClr val="555555"/>
           </a:solidFill>
           <a:ln>
             <a:noFill/>
@@ -7213,14 +6581,14 @@
       </p:sp>
       <p:sp>
         <p:nvSpPr>
-          <p:cNvPr id="4" name="TextBox 3"/>
+          <p:cNvPr id="5" name="TextBox 4"/>
           <p:cNvSpPr txBox="1"/>
           <p:nvPr/>
         </p:nvSpPr>
         <p:spPr>
           <a:xfrm>
-            <a:off x="700000" y="220000"/>
-            <a:ext cx="11200000" cy="550000"/>
+            <a:off x="700000" y="920000"/>
+            <a:ext cx="11000000" cy="350000"/>
           </a:xfrm>
           <a:prstGeom prst="rect">
             <a:avLst/>
@@ -7235,35 +6603,35 @@
           <a:p>
             <a:pPr algn="l"/>
             <a:r>
-              <a:rPr sz="2000" b="1">
-                <a:solidFill>
-                  <a:srgbClr val="333333"/>
-                </a:solidFill>
-                <a:latin typeface="Calibri"/>
-                <a:ea typeface="Calibri"/>
-                <a:cs typeface="Calibri"/>
+              <a:rPr sz="1200" b="0">
+                <a:solidFill>
+                  <a:srgbClr val="666666"/>
+                </a:solidFill>
+                <a:latin typeface="Open Sans"/>
+                <a:ea typeface="Open Sans"/>
+                <a:cs typeface="Open Sans"/>
               </a:rPr>
-              <a:t>ВИДЫ НАРУЖНОГО КРОВОТЕЧЕНИЯ</a:t>
-            </a:r>
-          </a:p>
-        </p:txBody>
-      </p:sp>
-      <p:sp>
-        <p:nvSpPr>
-          <p:cNvPr id="5" name="Rectangle 4"/>
+              <a:t>Оказание первой помощи при наружных кровотечениях</a:t>
+            </a:r>
+          </a:p>
+        </p:txBody>
+      </p:sp>
+      <p:sp>
+        <p:nvSpPr>
+          <p:cNvPr id="6" name="Rectangle 5"/>
           <p:cNvSpPr/>
           <p:nvPr/>
         </p:nvSpPr>
         <p:spPr>
           <a:xfrm>
-            <a:off x="700000" y="820000"/>
-            <a:ext cx="8500000" cy="28000"/>
+            <a:off x="0" y="2800000"/>
+            <a:ext cx="420000" cy="420000"/>
           </a:xfrm>
           <a:prstGeom prst="rect">
             <a:avLst/>
           </a:prstGeom>
           <a:solidFill>
-            <a:srgbClr val="606060"/>
+            <a:srgbClr val="555555"/>
           </a:solidFill>
           <a:ln>
             <a:noFill/>
@@ -7293,94 +6661,14 @@
       </p:sp>
       <p:sp>
         <p:nvSpPr>
-          <p:cNvPr id="6" name="TextBox 5"/>
+          <p:cNvPr id="7" name="TextBox 6"/>
           <p:cNvSpPr txBox="1"/>
           <p:nvPr/>
         </p:nvSpPr>
         <p:spPr>
           <a:xfrm>
-            <a:off x="700000" y="880000"/>
-            <a:ext cx="11000000" cy="320000"/>
-          </a:xfrm>
-          <a:prstGeom prst="rect">
-            <a:avLst/>
-          </a:prstGeom>
-          <a:noFill/>
-        </p:spPr>
-        <p:txBody>
-          <a:bodyPr wrap="square" anchor="t">
-            <a:spAutoFit/>
-          </a:bodyPr>
-          <a:lstStyle/>
-          <a:p>
-            <a:pPr algn="l"/>
-            <a:r>
-              <a:rPr sz="1100" b="0">
-                <a:solidFill>
-                  <a:srgbClr val="777777"/>
-                </a:solidFill>
-                <a:latin typeface="Calibri"/>
-                <a:ea typeface="Calibri"/>
-                <a:cs typeface="Calibri"/>
-              </a:rPr>
-              <a:t>Оказание первой помощи при наружных кровотечениях</a:t>
-            </a:r>
-          </a:p>
-        </p:txBody>
-      </p:sp>
-      <p:sp>
-        <p:nvSpPr>
-          <p:cNvPr id="7" name="Rectangle 6"/>
-          <p:cNvSpPr/>
-          <p:nvPr/>
-        </p:nvSpPr>
-        <p:spPr>
-          <a:xfrm>
-            <a:off x="0" y="2700000"/>
-            <a:ext cx="400000" cy="400000"/>
-          </a:xfrm>
-          <a:prstGeom prst="rect">
-            <a:avLst/>
-          </a:prstGeom>
-          <a:solidFill>
-            <a:srgbClr val="606060"/>
-          </a:solidFill>
-          <a:ln>
-            <a:noFill/>
-          </a:ln>
-        </p:spPr>
-        <p:style>
-          <a:lnRef idx="1">
-            <a:schemeClr val="accent1"/>
-          </a:lnRef>
-          <a:fillRef idx="3">
-            <a:schemeClr val="accent1"/>
-          </a:fillRef>
-          <a:effectRef idx="2">
-            <a:schemeClr val="accent1"/>
-          </a:effectRef>
-          <a:fontRef idx="minor">
-            <a:schemeClr val="lt1"/>
-          </a:fontRef>
-        </p:style>
-        <p:txBody>
-          <a:bodyPr rtlCol="0" anchor="ctr"/>
-          <a:lstStyle/>
-          <a:p>
-            <a:pPr algn="ctr"/>
-          </a:p>
-        </p:txBody>
-      </p:sp>
-      <p:sp>
-        <p:nvSpPr>
-          <p:cNvPr id="8" name="TextBox 7"/>
-          <p:cNvSpPr txBox="1"/>
-          <p:nvPr/>
-        </p:nvSpPr>
-        <p:spPr>
-          <a:xfrm>
-            <a:off x="0" y="2700000"/>
-            <a:ext cx="400000" cy="400000"/>
+            <a:off x="0" y="2800000"/>
+            <a:ext cx="420000" cy="420000"/>
           </a:xfrm>
           <a:prstGeom prst="rect">
             <a:avLst/>
@@ -7395,147 +6683,22 @@
           <a:p>
             <a:pPr algn="ctr"/>
             <a:r>
-              <a:rPr sz="1300" b="1">
+              <a:rPr sz="1400" b="1">
                 <a:solidFill>
                   <a:srgbClr val="FFFFFF"/>
                 </a:solidFill>
-                <a:latin typeface="Calibri"/>
-                <a:ea typeface="Calibri"/>
-                <a:cs typeface="Calibri"/>
+                <a:latin typeface="Open Sans"/>
+                <a:ea typeface="Open Sans"/>
+                <a:cs typeface="Open Sans"/>
               </a:rPr>
               <a:t>5</a:t>
             </a:r>
           </a:p>
         </p:txBody>
       </p:sp>
-      <p:sp>
-        <p:nvSpPr>
-          <p:cNvPr id="9" name="Rounded Rectangle 8"/>
-          <p:cNvSpPr/>
-          <p:nvPr/>
-        </p:nvSpPr>
-        <p:spPr>
-          <a:xfrm>
-            <a:off x="700000" y="1500000"/>
-            <a:ext cx="3600000" cy="5000000"/>
-          </a:xfrm>
-          <a:prstGeom prst="roundRect">
-            <a:avLst/>
-          </a:prstGeom>
-          <a:solidFill>
-            <a:srgbClr val="FFFFFF"/>
-          </a:solidFill>
-          <a:ln w="15875">
-            <a:solidFill>
-              <a:srgbClr val="8DDBCD"/>
-            </a:solidFill>
-          </a:ln>
-        </p:spPr>
-        <p:style>
-          <a:lnRef idx="1">
-            <a:schemeClr val="accent1"/>
-          </a:lnRef>
-          <a:fillRef idx="3">
-            <a:schemeClr val="accent1"/>
-          </a:fillRef>
-          <a:effectRef idx="2">
-            <a:schemeClr val="accent1"/>
-          </a:effectRef>
-          <a:fontRef idx="minor">
-            <a:schemeClr val="lt1"/>
-          </a:fontRef>
-        </p:style>
-        <p:txBody>
-          <a:bodyPr rtlCol="0" anchor="ctr"/>
-          <a:lstStyle/>
-          <a:p>
-            <a:pPr algn="ctr"/>
-          </a:p>
-        </p:txBody>
-      </p:sp>
-      <p:sp>
-        <p:nvSpPr>
-          <p:cNvPr id="10" name="Oval 9"/>
-          <p:cNvSpPr/>
-          <p:nvPr/>
-        </p:nvSpPr>
-        <p:spPr>
-          <a:xfrm>
-            <a:off x="2100000" y="1650000"/>
-            <a:ext cx="800000" cy="400000"/>
-          </a:xfrm>
-          <a:prstGeom prst="ellipse">
-            <a:avLst/>
-          </a:prstGeom>
-          <a:solidFill>
-            <a:srgbClr val="8DDBCD"/>
-          </a:solidFill>
-          <a:ln>
-            <a:noFill/>
-          </a:ln>
-        </p:spPr>
-        <p:style>
-          <a:lnRef idx="1">
-            <a:schemeClr val="accent1"/>
-          </a:lnRef>
-          <a:fillRef idx="3">
-            <a:schemeClr val="accent1"/>
-          </a:fillRef>
-          <a:effectRef idx="2">
-            <a:schemeClr val="accent1"/>
-          </a:effectRef>
-          <a:fontRef idx="minor">
-            <a:schemeClr val="lt1"/>
-          </a:fontRef>
-        </p:style>
-        <p:txBody>
-          <a:bodyPr rtlCol="0" anchor="ctr"/>
-          <a:lstStyle/>
-          <a:p>
-            <a:pPr algn="ctr"/>
-          </a:p>
-        </p:txBody>
-      </p:sp>
-      <p:sp>
-        <p:nvSpPr>
-          <p:cNvPr id="11" name="TextBox 10"/>
-          <p:cNvSpPr txBox="1"/>
-          <p:nvPr/>
-        </p:nvSpPr>
-        <p:spPr>
-          <a:xfrm>
-            <a:off x="800000" y="2150000"/>
-            <a:ext cx="3400000" cy="450000"/>
-          </a:xfrm>
-          <a:prstGeom prst="rect">
-            <a:avLst/>
-          </a:prstGeom>
-          <a:noFill/>
-        </p:spPr>
-        <p:txBody>
-          <a:bodyPr wrap="square" anchor="t">
-            <a:spAutoFit/>
-          </a:bodyPr>
-          <a:lstStyle/>
-          <a:p>
-            <a:pPr algn="ctr"/>
-            <a:r>
-              <a:rPr sz="1400" b="1">
-                <a:solidFill>
-                  <a:srgbClr val="0D6B60"/>
-                </a:solidFill>
-                <a:latin typeface="Calibri"/>
-                <a:ea typeface="Calibri"/>
-                <a:cs typeface="Calibri"/>
-              </a:rPr>
-              <a:t>Артериальное</a:t>
-            </a:r>
-          </a:p>
-        </p:txBody>
-      </p:sp>
       <p:pic>
         <p:nvPicPr>
-          <p:cNvPr id="12" name="Picture 11" descr="bleed_arterial.png"/>
+          <p:cNvPr id="8" name="Picture 7" descr="overview_exam.png"/>
           <p:cNvPicPr>
             <a:picLocks noChangeAspect="1"/>
           </p:cNvPicPr>
@@ -7549,8 +6712,8 @@
         </p:blipFill>
         <p:spPr>
           <a:xfrm>
-            <a:off x="1555738" y="2700000"/>
-            <a:ext cx="1888524" cy="2400000"/>
+            <a:off x="500000" y="1533333"/>
+            <a:ext cx="6000000" cy="5133333"/>
           </a:xfrm>
           <a:prstGeom prst="rect">
             <a:avLst/>
@@ -7559,14 +6722,14 @@
       </p:pic>
       <p:sp>
         <p:nvSpPr>
-          <p:cNvPr id="13" name="TextBox 12"/>
+          <p:cNvPr id="9" name="TextBox 8"/>
           <p:cNvSpPr txBox="1"/>
           <p:nvPr/>
         </p:nvSpPr>
         <p:spPr>
           <a:xfrm>
-            <a:off x="850000" y="5300000"/>
-            <a:ext cx="3300000" cy="1000000"/>
+            <a:off x="6800000" y="2200000"/>
+            <a:ext cx="5600000" cy="2000000"/>
           </a:xfrm>
           <a:prstGeom prst="rect">
             <a:avLst/>
@@ -7579,42 +6742,73 @@
           </a:bodyPr>
           <a:lstStyle/>
           <a:p>
-            <a:pPr algn="ctr"/>
-            <a:r>
-              <a:rPr sz="1100" b="0">
+            <a:pPr algn="l"/>
+            <a:r>
+              <a:rPr sz="1800" b="1">
                 <a:solidFill>
                   <a:srgbClr val="333333"/>
                 </a:solidFill>
-                <a:latin typeface="Calibri"/>
-                <a:ea typeface="Calibri"/>
-                <a:cs typeface="Calibri"/>
+                <a:latin typeface="Open Sans"/>
+                <a:ea typeface="Open Sans"/>
+                <a:cs typeface="Open Sans"/>
               </a:rPr>
-              <a:t>Пульсирующая алая струя; быстро растекающаяся лужа; одежда быстро мокнет.</a:t>
-            </a:r>
-          </a:p>
-        </p:txBody>
-      </p:sp>
-      <p:sp>
-        <p:nvSpPr>
-          <p:cNvPr id="14" name="Rounded Rectangle 13"/>
+              <a:t>Обзорный осмотр</a:t>
+            </a:r>
+            <a:r>
+              <a:rPr sz="1800" b="0">
+                <a:solidFill>
+                  <a:srgbClr val="333333"/>
+                </a:solidFill>
+                <a:latin typeface="Open Sans"/>
+                <a:ea typeface="Open Sans"/>
+                <a:cs typeface="Open Sans"/>
+              </a:rPr>
+              <a:t> производится очень быстро, в течение </a:t>
+            </a:r>
+            <a:r>
+              <a:rPr sz="1800" b="1">
+                <a:solidFill>
+                  <a:srgbClr val="333333"/>
+                </a:solidFill>
+                <a:latin typeface="Open Sans"/>
+                <a:ea typeface="Open Sans"/>
+                <a:cs typeface="Open Sans"/>
+              </a:rPr>
+              <a:t>нескольких секунд</a:t>
+            </a:r>
+            <a:r>
+              <a:rPr sz="1800" b="0">
+                <a:solidFill>
+                  <a:srgbClr val="333333"/>
+                </a:solidFill>
+                <a:latin typeface="Open Sans"/>
+                <a:ea typeface="Open Sans"/>
+                <a:cs typeface="Open Sans"/>
+              </a:rPr>
+              <a:t>, с головы до ног.</a:t>
+            </a:r>
+          </a:p>
+        </p:txBody>
+      </p:sp>
+      <p:sp>
+        <p:nvSpPr>
+          <p:cNvPr id="10" name="Rounded Rectangle 9"/>
           <p:cNvSpPr/>
           <p:nvPr/>
         </p:nvSpPr>
         <p:spPr>
           <a:xfrm>
-            <a:off x="4550000" y="1500000"/>
-            <a:ext cx="3600000" cy="5000000"/>
+            <a:off x="6800000" y="4600000"/>
+            <a:ext cx="5600000" cy="1800000"/>
           </a:xfrm>
           <a:prstGeom prst="roundRect">
             <a:avLst/>
           </a:prstGeom>
           <a:solidFill>
-            <a:srgbClr val="FFFFFF"/>
+            <a:srgbClr val="F5F0E1"/>
           </a:solidFill>
-          <a:ln w="15875">
-            <a:solidFill>
-              <a:srgbClr val="8DDBCD"/>
-            </a:solidFill>
+          <a:ln>
+            <a:noFill/>
           </a:ln>
         </p:spPr>
         <p:style>
@@ -7641,57 +6835,14 @@
       </p:sp>
       <p:sp>
         <p:nvSpPr>
-          <p:cNvPr id="15" name="Oval 14"/>
-          <p:cNvSpPr/>
-          <p:nvPr/>
-        </p:nvSpPr>
-        <p:spPr>
-          <a:xfrm>
-            <a:off x="5950000" y="1650000"/>
-            <a:ext cx="800000" cy="400000"/>
-          </a:xfrm>
-          <a:prstGeom prst="ellipse">
-            <a:avLst/>
-          </a:prstGeom>
-          <a:solidFill>
-            <a:srgbClr val="8DDBCD"/>
-          </a:solidFill>
-          <a:ln>
-            <a:noFill/>
-          </a:ln>
-        </p:spPr>
-        <p:style>
-          <a:lnRef idx="1">
-            <a:schemeClr val="accent1"/>
-          </a:lnRef>
-          <a:fillRef idx="3">
-            <a:schemeClr val="accent1"/>
-          </a:fillRef>
-          <a:effectRef idx="2">
-            <a:schemeClr val="accent1"/>
-          </a:effectRef>
-          <a:fontRef idx="minor">
-            <a:schemeClr val="lt1"/>
-          </a:fontRef>
-        </p:style>
-        <p:txBody>
-          <a:bodyPr rtlCol="0" anchor="ctr"/>
-          <a:lstStyle/>
-          <a:p>
-            <a:pPr algn="ctr"/>
-          </a:p>
-        </p:txBody>
-      </p:sp>
-      <p:sp>
-        <p:nvSpPr>
-          <p:cNvPr id="16" name="TextBox 15"/>
+          <p:cNvPr id="11" name="TextBox 10"/>
           <p:cNvSpPr txBox="1"/>
           <p:nvPr/>
         </p:nvSpPr>
         <p:spPr>
           <a:xfrm>
-            <a:off x="4650000" y="2150000"/>
-            <a:ext cx="3400000" cy="450000"/>
+            <a:off x="7050000" y="4800000"/>
+            <a:ext cx="5100000" cy="1400000"/>
           </a:xfrm>
           <a:prstGeom prst="rect">
             <a:avLst/>
@@ -7699,269 +6850,22 @@
           <a:noFill/>
         </p:spPr>
         <p:txBody>
-          <a:bodyPr wrap="square" anchor="t">
+          <a:bodyPr wrap="square" anchor="ctr">
             <a:spAutoFit/>
           </a:bodyPr>
           <a:lstStyle/>
           <a:p>
-            <a:pPr algn="ctr"/>
-            <a:r>
-              <a:rPr sz="1400" b="1">
-                <a:solidFill>
-                  <a:srgbClr val="0D6B60"/>
-                </a:solidFill>
-                <a:latin typeface="Calibri"/>
-                <a:ea typeface="Calibri"/>
-                <a:cs typeface="Calibri"/>
+            <a:pPr algn="l"/>
+            <a:r>
+              <a:rPr sz="1300" b="0">
+                <a:solidFill>
+                  <a:srgbClr val="333333"/>
+                </a:solidFill>
+                <a:latin typeface="Open Sans"/>
+                <a:ea typeface="Open Sans"/>
+                <a:cs typeface="Open Sans"/>
               </a:rPr>
-              <a:t>Венозное</a:t>
-            </a:r>
-          </a:p>
-        </p:txBody>
-      </p:sp>
-      <p:pic>
-        <p:nvPicPr>
-          <p:cNvPr id="17" name="Picture 16" descr="bleed_venous.png"/>
-          <p:cNvPicPr>
-            <a:picLocks noChangeAspect="1"/>
-          </p:cNvPicPr>
-          <p:nvPr/>
-        </p:nvPicPr>
-        <p:blipFill>
-          <a:blip r:embed="rId3"/>
-          <a:stretch>
-            <a:fillRect/>
-          </a:stretch>
-        </p:blipFill>
-        <p:spPr>
-          <a:xfrm>
-            <a:off x="5405738" y="2700000"/>
-            <a:ext cx="1888524" cy="2400000"/>
-          </a:xfrm>
-          <a:prstGeom prst="rect">
-            <a:avLst/>
-          </a:prstGeom>
-        </p:spPr>
-      </p:pic>
-      <p:sp>
-        <p:nvSpPr>
-          <p:cNvPr id="18" name="TextBox 17"/>
-          <p:cNvSpPr txBox="1"/>
-          <p:nvPr/>
-        </p:nvSpPr>
-        <p:spPr>
-          <a:xfrm>
-            <a:off x="4700000" y="5300000"/>
-            <a:ext cx="3300000" cy="1000000"/>
-          </a:xfrm>
-          <a:prstGeom prst="rect">
-            <a:avLst/>
-          </a:prstGeom>
-          <a:noFill/>
-        </p:spPr>
-        <p:txBody>
-          <a:bodyPr wrap="square" anchor="t">
-            <a:spAutoFit/>
-          </a:bodyPr>
-          <a:lstStyle/>
-          <a:p>
-            <a:pPr algn="ctr"/>
-            <a:r>
-              <a:rPr sz="1100" b="0">
-                <a:solidFill>
-                  <a:srgbClr val="333333"/>
-                </a:solidFill>
-                <a:latin typeface="Calibri"/>
-                <a:ea typeface="Calibri"/>
-                <a:cs typeface="Calibri"/>
-              </a:rPr>
-              <a:t>Кровь тёмно-вишнёвая, вытекает «ручьём». Остановка обязательна.</a:t>
-            </a:r>
-          </a:p>
-        </p:txBody>
-      </p:sp>
-      <p:sp>
-        <p:nvSpPr>
-          <p:cNvPr id="19" name="Rounded Rectangle 18"/>
-          <p:cNvSpPr/>
-          <p:nvPr/>
-        </p:nvSpPr>
-        <p:spPr>
-          <a:xfrm>
-            <a:off x="8400000" y="1500000"/>
-            <a:ext cx="3600000" cy="5000000"/>
-          </a:xfrm>
-          <a:prstGeom prst="roundRect">
-            <a:avLst/>
-          </a:prstGeom>
-          <a:solidFill>
-            <a:srgbClr val="FFFFFF"/>
-          </a:solidFill>
-          <a:ln w="15875">
-            <a:solidFill>
-              <a:srgbClr val="8DDBCD"/>
-            </a:solidFill>
-          </a:ln>
-        </p:spPr>
-        <p:style>
-          <a:lnRef idx="1">
-            <a:schemeClr val="accent1"/>
-          </a:lnRef>
-          <a:fillRef idx="3">
-            <a:schemeClr val="accent1"/>
-          </a:fillRef>
-          <a:effectRef idx="2">
-            <a:schemeClr val="accent1"/>
-          </a:effectRef>
-          <a:fontRef idx="minor">
-            <a:schemeClr val="lt1"/>
-          </a:fontRef>
-        </p:style>
-        <p:txBody>
-          <a:bodyPr rtlCol="0" anchor="ctr"/>
-          <a:lstStyle/>
-          <a:p>
-            <a:pPr algn="ctr"/>
-          </a:p>
-        </p:txBody>
-      </p:sp>
-      <p:sp>
-        <p:nvSpPr>
-          <p:cNvPr id="20" name="Oval 19"/>
-          <p:cNvSpPr/>
-          <p:nvPr/>
-        </p:nvSpPr>
-        <p:spPr>
-          <a:xfrm>
-            <a:off x="9800000" y="1650000"/>
-            <a:ext cx="800000" cy="400000"/>
-          </a:xfrm>
-          <a:prstGeom prst="ellipse">
-            <a:avLst/>
-          </a:prstGeom>
-          <a:solidFill>
-            <a:srgbClr val="8DDBCD"/>
-          </a:solidFill>
-          <a:ln>
-            <a:noFill/>
-          </a:ln>
-        </p:spPr>
-        <p:style>
-          <a:lnRef idx="1">
-            <a:schemeClr val="accent1"/>
-          </a:lnRef>
-          <a:fillRef idx="3">
-            <a:schemeClr val="accent1"/>
-          </a:fillRef>
-          <a:effectRef idx="2">
-            <a:schemeClr val="accent1"/>
-          </a:effectRef>
-          <a:fontRef idx="minor">
-            <a:schemeClr val="lt1"/>
-          </a:fontRef>
-        </p:style>
-        <p:txBody>
-          <a:bodyPr rtlCol="0" anchor="ctr"/>
-          <a:lstStyle/>
-          <a:p>
-            <a:pPr algn="ctr"/>
-          </a:p>
-        </p:txBody>
-      </p:sp>
-      <p:sp>
-        <p:nvSpPr>
-          <p:cNvPr id="21" name="TextBox 20"/>
-          <p:cNvSpPr txBox="1"/>
-          <p:nvPr/>
-        </p:nvSpPr>
-        <p:spPr>
-          <a:xfrm>
-            <a:off x="8500000" y="2150000"/>
-            <a:ext cx="3400000" cy="450000"/>
-          </a:xfrm>
-          <a:prstGeom prst="rect">
-            <a:avLst/>
-          </a:prstGeom>
-          <a:noFill/>
-        </p:spPr>
-        <p:txBody>
-          <a:bodyPr wrap="square" anchor="t">
-            <a:spAutoFit/>
-          </a:bodyPr>
-          <a:lstStyle/>
-          <a:p>
-            <a:pPr algn="ctr"/>
-            <a:r>
-              <a:rPr sz="1400" b="1">
-                <a:solidFill>
-                  <a:srgbClr val="0D6B60"/>
-                </a:solidFill>
-                <a:latin typeface="Calibri"/>
-                <a:ea typeface="Calibri"/>
-                <a:cs typeface="Calibri"/>
-              </a:rPr>
-              <a:t>Капиллярное</a:t>
-            </a:r>
-          </a:p>
-        </p:txBody>
-      </p:sp>
-      <p:pic>
-        <p:nvPicPr>
-          <p:cNvPr id="22" name="Picture 21" descr="bleed_capillary.png"/>
-          <p:cNvPicPr>
-            <a:picLocks noChangeAspect="1"/>
-          </p:cNvPicPr>
-          <p:nvPr/>
-        </p:nvPicPr>
-        <p:blipFill>
-          <a:blip r:embed="rId4"/>
-          <a:stretch>
-            <a:fillRect/>
-          </a:stretch>
-        </p:blipFill>
-        <p:spPr>
-          <a:xfrm>
-            <a:off x="9177049" y="2700000"/>
-            <a:ext cx="2045901" cy="2400000"/>
-          </a:xfrm>
-          <a:prstGeom prst="rect">
-            <a:avLst/>
-          </a:prstGeom>
-        </p:spPr>
-      </p:pic>
-      <p:sp>
-        <p:nvSpPr>
-          <p:cNvPr id="23" name="TextBox 22"/>
-          <p:cNvSpPr txBox="1"/>
-          <p:nvPr/>
-        </p:nvSpPr>
-        <p:spPr>
-          <a:xfrm>
-            <a:off x="8550000" y="5300000"/>
-            <a:ext cx="3300000" cy="1000000"/>
-          </a:xfrm>
-          <a:prstGeom prst="rect">
-            <a:avLst/>
-          </a:prstGeom>
-          <a:noFill/>
-        </p:spPr>
-        <p:txBody>
-          <a:bodyPr wrap="square" anchor="t">
-            <a:spAutoFit/>
-          </a:bodyPr>
-          <a:lstStyle/>
-          <a:p>
-            <a:pPr algn="ctr"/>
-            <a:r>
-              <a:rPr sz="1100" b="0">
-                <a:solidFill>
-                  <a:srgbClr val="333333"/>
-                </a:solidFill>
-                <a:latin typeface="Calibri"/>
-                <a:ea typeface="Calibri"/>
-                <a:cs typeface="Calibri"/>
-              </a:rPr>
-              <a:t>Ссадины, порезы, царапины. Обычно без угрозы жизни.</a:t>
+              <a:t>Как только найдены признаки угрожающего жизни кровотечения — сразу переходите к его остановке всеми доступными способами.</a:t>
             </a:r>
           </a:p>
         </p:txBody>
@@ -8029,20 +6933,57 @@
       </p:sp>
       <p:sp>
         <p:nvSpPr>
-          <p:cNvPr id="3" name="Rectangle 2"/>
+          <p:cNvPr id="3" name="TextBox 2"/>
+          <p:cNvSpPr txBox="1"/>
+          <p:nvPr/>
+        </p:nvSpPr>
+        <p:spPr>
+          <a:xfrm>
+            <a:off x="700000" y="250000"/>
+            <a:ext cx="11200000" cy="550000"/>
+          </a:xfrm>
+          <a:prstGeom prst="rect">
+            <a:avLst/>
+          </a:prstGeom>
+          <a:noFill/>
+        </p:spPr>
+        <p:txBody>
+          <a:bodyPr wrap="square" anchor="t">
+            <a:spAutoFit/>
+          </a:bodyPr>
+          <a:lstStyle/>
+          <a:p>
+            <a:pPr algn="l"/>
+            <a:r>
+              <a:rPr sz="2200" b="1">
+                <a:solidFill>
+                  <a:srgbClr val="333333"/>
+                </a:solidFill>
+                <a:latin typeface="Open Sans"/>
+                <a:ea typeface="Open Sans"/>
+                <a:cs typeface="Open Sans"/>
+              </a:rPr>
+              <a:t>НЕСКОЛЬКО ПОСТРАДАВШИХ</a:t>
+            </a:r>
+          </a:p>
+        </p:txBody>
+      </p:sp>
+      <p:sp>
+        <p:nvSpPr>
+          <p:cNvPr id="4" name="Rectangle 3"/>
           <p:cNvSpPr/>
           <p:nvPr/>
         </p:nvSpPr>
         <p:spPr>
           <a:xfrm>
-            <a:off x="0" y="0"/>
-            <a:ext cx="12191695" cy="1300000"/>
+            <a:off x="700000" y="850000"/>
+            <a:ext cx="9000000" cy="28000"/>
           </a:xfrm>
           <a:prstGeom prst="rect">
             <a:avLst/>
           </a:prstGeom>
           <a:solidFill>
-            <a:srgbClr val="F8F8F8"/>
+            <a:srgbClr val="555555"/>
           </a:solidFill>
           <a:ln>
             <a:noFill/>
@@ -8072,14 +7013,14 @@
       </p:sp>
       <p:sp>
         <p:nvSpPr>
-          <p:cNvPr id="4" name="TextBox 3"/>
+          <p:cNvPr id="5" name="TextBox 4"/>
           <p:cNvSpPr txBox="1"/>
           <p:nvPr/>
         </p:nvSpPr>
         <p:spPr>
           <a:xfrm>
-            <a:off x="700000" y="220000"/>
-            <a:ext cx="11200000" cy="550000"/>
+            <a:off x="700000" y="920000"/>
+            <a:ext cx="11000000" cy="350000"/>
           </a:xfrm>
           <a:prstGeom prst="rect">
             <a:avLst/>
@@ -8094,35 +7035,35 @@
           <a:p>
             <a:pPr algn="l"/>
             <a:r>
-              <a:rPr sz="2000" b="1">
-                <a:solidFill>
-                  <a:srgbClr val="333333"/>
-                </a:solidFill>
-                <a:latin typeface="Calibri"/>
-                <a:ea typeface="Calibri"/>
-                <a:cs typeface="Calibri"/>
+              <a:rPr sz="1200" b="0">
+                <a:solidFill>
+                  <a:srgbClr val="666666"/>
+                </a:solidFill>
+                <a:latin typeface="Open Sans"/>
+                <a:ea typeface="Open Sans"/>
+                <a:cs typeface="Open Sans"/>
               </a:rPr>
-              <a:t>ОРИЕНТИР — ИНТЕНСИВНОСТЬ</a:t>
-            </a:r>
-          </a:p>
-        </p:txBody>
-      </p:sp>
-      <p:sp>
-        <p:nvSpPr>
-          <p:cNvPr id="5" name="Rectangle 4"/>
+              <a:t>Оказание первой помощи при наружных кровотечениях</a:t>
+            </a:r>
+          </a:p>
+        </p:txBody>
+      </p:sp>
+      <p:sp>
+        <p:nvSpPr>
+          <p:cNvPr id="6" name="Rectangle 5"/>
           <p:cNvSpPr/>
           <p:nvPr/>
         </p:nvSpPr>
         <p:spPr>
           <a:xfrm>
-            <a:off x="700000" y="820000"/>
-            <a:ext cx="8500000" cy="28000"/>
+            <a:off x="0" y="2800000"/>
+            <a:ext cx="420000" cy="420000"/>
           </a:xfrm>
           <a:prstGeom prst="rect">
             <a:avLst/>
           </a:prstGeom>
           <a:solidFill>
-            <a:srgbClr val="606060"/>
+            <a:srgbClr val="555555"/>
           </a:solidFill>
           <a:ln>
             <a:noFill/>
@@ -8152,14 +7093,14 @@
       </p:sp>
       <p:sp>
         <p:nvSpPr>
-          <p:cNvPr id="6" name="TextBox 5"/>
+          <p:cNvPr id="7" name="TextBox 6"/>
           <p:cNvSpPr txBox="1"/>
           <p:nvPr/>
         </p:nvSpPr>
         <p:spPr>
           <a:xfrm>
-            <a:off x="700000" y="880000"/>
-            <a:ext cx="11000000" cy="320000"/>
+            <a:off x="0" y="2800000"/>
+            <a:ext cx="420000" cy="420000"/>
           </a:xfrm>
           <a:prstGeom prst="rect">
             <a:avLst/>
@@ -8167,42 +7108,137 @@
           <a:noFill/>
         </p:spPr>
         <p:txBody>
-          <a:bodyPr wrap="square" anchor="t">
+          <a:bodyPr wrap="square" anchor="ctr">
             <a:spAutoFit/>
           </a:bodyPr>
           <a:lstStyle/>
           <a:p>
-            <a:pPr algn="l"/>
-            <a:r>
-              <a:rPr sz="1100" b="0">
-                <a:solidFill>
-                  <a:srgbClr val="777777"/>
-                </a:solidFill>
-                <a:latin typeface="Calibri"/>
-                <a:ea typeface="Calibri"/>
-                <a:cs typeface="Calibri"/>
+            <a:pPr algn="ctr"/>
+            <a:r>
+              <a:rPr sz="1400" b="1">
+                <a:solidFill>
+                  <a:srgbClr val="FFFFFF"/>
+                </a:solidFill>
+                <a:latin typeface="Open Sans"/>
+                <a:ea typeface="Open Sans"/>
+                <a:cs typeface="Open Sans"/>
               </a:rPr>
-              <a:t>Оказание первой помощи при наружных кровотечениях</a:t>
-            </a:r>
-          </a:p>
-        </p:txBody>
-      </p:sp>
-      <p:sp>
-        <p:nvSpPr>
-          <p:cNvPr id="7" name="Rectangle 6"/>
+              <a:t>6</a:t>
+            </a:r>
+          </a:p>
+        </p:txBody>
+      </p:sp>
+      <p:sp>
+        <p:nvSpPr>
+          <p:cNvPr id="8" name="TextBox 7"/>
+          <p:cNvSpPr txBox="1"/>
+          <p:nvPr/>
+        </p:nvSpPr>
+        <p:spPr>
+          <a:xfrm>
+            <a:off x="700000" y="1600000"/>
+            <a:ext cx="11000000" cy="3500000"/>
+          </a:xfrm>
+          <a:prstGeom prst="rect">
+            <a:avLst/>
+          </a:prstGeom>
+          <a:noFill/>
+        </p:spPr>
+        <p:txBody>
+          <a:bodyPr wrap="square">
+            <a:spAutoFit/>
+          </a:bodyPr>
+          <a:lstStyle/>
+          <a:p>
+            <a:pPr algn="l">
+              <a:spcAft>
+                <a:spcPts val="800"/>
+              </a:spcAft>
+            </a:pPr>
+            <a:r>
+              <a:rPr sz="1500" b="0">
+                <a:solidFill>
+                  <a:srgbClr val="333333"/>
+                </a:solidFill>
+                <a:latin typeface="Open Sans"/>
+                <a:ea typeface="Open Sans"/>
+                <a:cs typeface="Open Sans"/>
+              </a:rPr>
+              <a:t>•  Сначала быстро «пройдите» всех глазами: у кого кровь течёт сильнее.</a:t>
+            </a:r>
+          </a:p>
+          <a:p>
+            <a:pPr algn="l">
+              <a:spcAft>
+                <a:spcPts val="800"/>
+              </a:spcAft>
+            </a:pPr>
+            <a:r>
+              <a:rPr sz="1500" b="0">
+                <a:solidFill>
+                  <a:srgbClr val="333333"/>
+                </a:solidFill>
+                <a:latin typeface="Open Sans"/>
+                <a:ea typeface="Open Sans"/>
+                <a:cs typeface="Open Sans"/>
+              </a:rPr>
+              <a:t>•  Приоритет — тот, у кого интенсивное наружное кровотечение.</a:t>
+            </a:r>
+          </a:p>
+          <a:p>
+            <a:pPr algn="l">
+              <a:spcAft>
+                <a:spcPts val="800"/>
+              </a:spcAft>
+            </a:pPr>
+            <a:r>
+              <a:rPr sz="1500" b="0">
+                <a:solidFill>
+                  <a:srgbClr val="333333"/>
+                </a:solidFill>
+                <a:latin typeface="Open Sans"/>
+                <a:ea typeface="Open Sans"/>
+                <a:cs typeface="Open Sans"/>
+              </a:rPr>
+              <a:t>•  По возможности дайте указание на самопомощь (прямое давление на рану), пока помогаете другому.</a:t>
+            </a:r>
+          </a:p>
+          <a:p>
+            <a:pPr algn="l">
+              <a:spcAft>
+                <a:spcPts val="800"/>
+              </a:spcAft>
+            </a:pPr>
+            <a:r>
+              <a:rPr sz="1500" b="0">
+                <a:solidFill>
+                  <a:srgbClr val="333333"/>
+                </a:solidFill>
+                <a:latin typeface="Open Sans"/>
+                <a:ea typeface="Open Sans"/>
+                <a:cs typeface="Open Sans"/>
+              </a:rPr>
+              <a:t>•  Не застревайте на подробном осмотре одного, пока не закрыли угрожающие жизни кровотечения у остальных.</a:t>
+            </a:r>
+          </a:p>
+        </p:txBody>
+      </p:sp>
+      <p:sp>
+        <p:nvSpPr>
+          <p:cNvPr id="9" name="Rounded Rectangle 8"/>
           <p:cNvSpPr/>
           <p:nvPr/>
         </p:nvSpPr>
         <p:spPr>
           <a:xfrm>
-            <a:off x="0" y="2700000"/>
-            <a:ext cx="400000" cy="400000"/>
-          </a:xfrm>
-          <a:prstGeom prst="rect">
+            <a:off x="700000" y="5400000"/>
+            <a:ext cx="11000000" cy="1000000"/>
+          </a:xfrm>
+          <a:prstGeom prst="roundRect">
             <a:avLst/>
           </a:prstGeom>
           <a:solidFill>
-            <a:srgbClr val="606060"/>
+            <a:srgbClr val="F5F0E1"/>
           </a:solidFill>
           <a:ln>
             <a:noFill/>
@@ -8232,14 +7268,14 @@
       </p:sp>
       <p:sp>
         <p:nvSpPr>
-          <p:cNvPr id="8" name="TextBox 7"/>
+          <p:cNvPr id="10" name="TextBox 9"/>
           <p:cNvSpPr txBox="1"/>
           <p:nvPr/>
         </p:nvSpPr>
         <p:spPr>
           <a:xfrm>
-            <a:off x="0" y="2700000"/>
-            <a:ext cx="400000" cy="400000"/>
+            <a:off x="950000" y="5600000"/>
+            <a:ext cx="10500000" cy="600000"/>
           </a:xfrm>
           <a:prstGeom prst="rect">
             <a:avLst/>
@@ -8252,174 +7288,17 @@
           </a:bodyPr>
           <a:lstStyle/>
           <a:p>
-            <a:pPr algn="ctr"/>
-            <a:r>
-              <a:rPr sz="1300" b="1">
-                <a:solidFill>
-                  <a:srgbClr val="FFFFFF"/>
-                </a:solidFill>
-                <a:latin typeface="Calibri"/>
-                <a:ea typeface="Calibri"/>
-                <a:cs typeface="Calibri"/>
+            <a:pPr algn="l"/>
+            <a:r>
+              <a:rPr sz="1400" b="0">
+                <a:solidFill>
+                  <a:srgbClr val="333333"/>
+                </a:solidFill>
+                <a:latin typeface="Open Sans"/>
+                <a:ea typeface="Open Sans"/>
+                <a:cs typeface="Open Sans"/>
               </a:rPr>
-              <a:t>6</a:t>
-            </a:r>
-          </a:p>
-        </p:txBody>
-      </p:sp>
-      <p:sp>
-        <p:nvSpPr>
-          <p:cNvPr id="9" name="TextBox 8"/>
-          <p:cNvSpPr txBox="1"/>
-          <p:nvPr/>
-        </p:nvSpPr>
-        <p:spPr>
-          <a:xfrm>
-            <a:off x="700000" y="1600000"/>
-            <a:ext cx="11000000" cy="2500000"/>
-          </a:xfrm>
-          <a:prstGeom prst="rect">
-            <a:avLst/>
-          </a:prstGeom>
-          <a:noFill/>
-        </p:spPr>
-        <p:txBody>
-          <a:bodyPr wrap="square">
-            <a:spAutoFit/>
-          </a:bodyPr>
-          <a:lstStyle/>
-          <a:p>
-            <a:pPr algn="l">
-              <a:spcAft>
-                <a:spcPts val="700"/>
-              </a:spcAft>
-            </a:pPr>
-            <a:r>
-              <a:rPr sz="1500" b="0">
-                <a:solidFill>
-                  <a:srgbClr val="333333"/>
-                </a:solidFill>
-                <a:latin typeface="Calibri"/>
-                <a:ea typeface="Calibri"/>
-                <a:cs typeface="Calibri"/>
-              </a:rPr>
-              <a:t>•  Смешанные кровотечения часто бывают при отрыве конечности и опасны из‑за артериального компонента.</a:t>
-            </a:r>
-          </a:p>
-          <a:p>
-            <a:pPr algn="l">
-              <a:spcAft>
-                <a:spcPts val="700"/>
-              </a:spcAft>
-            </a:pPr>
-            <a:r>
-              <a:rPr sz="1500" b="0">
-                <a:solidFill>
-                  <a:srgbClr val="333333"/>
-                </a:solidFill>
-                <a:latin typeface="Calibri"/>
-                <a:ea typeface="Calibri"/>
-                <a:cs typeface="Calibri"/>
-              </a:rPr>
-              <a:t>•  Вид кровотечения на месте определить сложно.</a:t>
-            </a:r>
-          </a:p>
-          <a:p>
-            <a:pPr algn="l">
-              <a:spcAft>
-                <a:spcPts val="700"/>
-              </a:spcAft>
-            </a:pPr>
-            <a:r>
-              <a:rPr sz="1500" b="0">
-                <a:solidFill>
-                  <a:srgbClr val="333333"/>
-                </a:solidFill>
-                <a:latin typeface="Calibri"/>
-                <a:ea typeface="Calibri"/>
-                <a:cs typeface="Calibri"/>
-              </a:rPr>
-              <a:t>•  Ориентируйтесь на интенсивность и останавливайте любым доступным способом.</a:t>
-            </a:r>
-          </a:p>
-        </p:txBody>
-      </p:sp>
-      <p:sp>
-        <p:nvSpPr>
-          <p:cNvPr id="10" name="Rounded Rectangle 9"/>
-          <p:cNvSpPr/>
-          <p:nvPr/>
-        </p:nvSpPr>
-        <p:spPr>
-          <a:xfrm>
-            <a:off x="700000" y="4500000"/>
-            <a:ext cx="11000000" cy="1600000"/>
-          </a:xfrm>
-          <a:prstGeom prst="roundRect">
-            <a:avLst/>
-          </a:prstGeom>
-          <a:solidFill>
-            <a:srgbClr val="8DDBCD"/>
-          </a:solidFill>
-          <a:ln>
-            <a:noFill/>
-          </a:ln>
-        </p:spPr>
-        <p:style>
-          <a:lnRef idx="1">
-            <a:schemeClr val="accent1"/>
-          </a:lnRef>
-          <a:fillRef idx="3">
-            <a:schemeClr val="accent1"/>
-          </a:fillRef>
-          <a:effectRef idx="2">
-            <a:schemeClr val="accent1"/>
-          </a:effectRef>
-          <a:fontRef idx="minor">
-            <a:schemeClr val="lt1"/>
-          </a:fontRef>
-        </p:style>
-        <p:txBody>
-          <a:bodyPr rtlCol="0" anchor="ctr"/>
-          <a:lstStyle/>
-          <a:p>
-            <a:pPr algn="ctr"/>
-          </a:p>
-        </p:txBody>
-      </p:sp>
-      <p:sp>
-        <p:nvSpPr>
-          <p:cNvPr id="11" name="TextBox 10"/>
-          <p:cNvSpPr txBox="1"/>
-          <p:nvPr/>
-        </p:nvSpPr>
-        <p:spPr>
-          <a:xfrm>
-            <a:off x="1000000" y="4800000"/>
-            <a:ext cx="10400000" cy="1000000"/>
-          </a:xfrm>
-          <a:prstGeom prst="rect">
-            <a:avLst/>
-          </a:prstGeom>
-          <a:noFill/>
-        </p:spPr>
-        <p:txBody>
-          <a:bodyPr wrap="square" anchor="ctr">
-            <a:spAutoFit/>
-          </a:bodyPr>
-          <a:lstStyle/>
-          <a:p>
-            <a:pPr algn="l"/>
-            <a:r>
-              <a:rPr sz="1600" b="1">
-                <a:solidFill>
-                  <a:srgbClr val="0D6B60"/>
-                </a:solidFill>
-                <a:latin typeface="Calibri"/>
-                <a:ea typeface="Calibri"/>
-                <a:cs typeface="Calibri"/>
-              </a:rPr>
-              <a:t>Приоритет: угрожающее жизни кровотечение останавливают немедленно.</a:t>
+              <a:t>Обзорный осмотр — инструмент сортировки: сначала жизнь, потом детали.</a:t>
             </a:r>
           </a:p>
         </p:txBody>
@@ -8487,20 +7366,57 @@
       </p:sp>
       <p:sp>
         <p:nvSpPr>
-          <p:cNvPr id="3" name="Rectangle 2"/>
+          <p:cNvPr id="3" name="TextBox 2"/>
+          <p:cNvSpPr txBox="1"/>
+          <p:nvPr/>
+        </p:nvSpPr>
+        <p:spPr>
+          <a:xfrm>
+            <a:off x="700000" y="250000"/>
+            <a:ext cx="11200000" cy="550000"/>
+          </a:xfrm>
+          <a:prstGeom prst="rect">
+            <a:avLst/>
+          </a:prstGeom>
+          <a:noFill/>
+        </p:spPr>
+        <p:txBody>
+          <a:bodyPr wrap="square" anchor="t">
+            <a:spAutoFit/>
+          </a:bodyPr>
+          <a:lstStyle/>
+          <a:p>
+            <a:pPr algn="l"/>
+            <a:r>
+              <a:rPr sz="2200" b="1">
+                <a:solidFill>
+                  <a:srgbClr val="333333"/>
+                </a:solidFill>
+                <a:latin typeface="Open Sans"/>
+                <a:ea typeface="Open Sans"/>
+                <a:cs typeface="Open Sans"/>
+              </a:rPr>
+              <a:t>ДЕЙСТВИЯ ПРИ ОБНАРУЖЕНИИ КРОВОТЕЧЕНИЯ</a:t>
+            </a:r>
+          </a:p>
+        </p:txBody>
+      </p:sp>
+      <p:sp>
+        <p:nvSpPr>
+          <p:cNvPr id="4" name="Rectangle 3"/>
           <p:cNvSpPr/>
           <p:nvPr/>
         </p:nvSpPr>
         <p:spPr>
           <a:xfrm>
-            <a:off x="0" y="0"/>
-            <a:ext cx="12191695" cy="1300000"/>
+            <a:off x="700000" y="850000"/>
+            <a:ext cx="9000000" cy="28000"/>
           </a:xfrm>
           <a:prstGeom prst="rect">
             <a:avLst/>
           </a:prstGeom>
           <a:solidFill>
-            <a:srgbClr val="F8F8F8"/>
+            <a:srgbClr val="555555"/>
           </a:solidFill>
           <a:ln>
             <a:noFill/>
@@ -8530,14 +7446,14 @@
       </p:sp>
       <p:sp>
         <p:nvSpPr>
-          <p:cNvPr id="4" name="TextBox 3"/>
+          <p:cNvPr id="5" name="TextBox 4"/>
           <p:cNvSpPr txBox="1"/>
           <p:nvPr/>
         </p:nvSpPr>
         <p:spPr>
           <a:xfrm>
-            <a:off x="700000" y="220000"/>
-            <a:ext cx="11200000" cy="550000"/>
+            <a:off x="700000" y="920000"/>
+            <a:ext cx="11000000" cy="350000"/>
           </a:xfrm>
           <a:prstGeom prst="rect">
             <a:avLst/>
@@ -8552,35 +7468,35 @@
           <a:p>
             <a:pPr algn="l"/>
             <a:r>
-              <a:rPr sz="2000" b="1">
-                <a:solidFill>
-                  <a:srgbClr val="333333"/>
-                </a:solidFill>
-                <a:latin typeface="Calibri"/>
-                <a:ea typeface="Calibri"/>
-                <a:cs typeface="Calibri"/>
+              <a:rPr sz="1200" b="0">
+                <a:solidFill>
+                  <a:srgbClr val="666666"/>
+                </a:solidFill>
+                <a:latin typeface="Open Sans"/>
+                <a:ea typeface="Open Sans"/>
+                <a:cs typeface="Open Sans"/>
               </a:rPr>
-              <a:t>ЦЕЛЬ ОБЗОРНОГО ОСМОТРА</a:t>
-            </a:r>
-          </a:p>
-        </p:txBody>
-      </p:sp>
-      <p:sp>
-        <p:nvSpPr>
-          <p:cNvPr id="5" name="Rectangle 4"/>
+              <a:t>Оказание первой помощи при наружных кровотечениях</a:t>
+            </a:r>
+          </a:p>
+        </p:txBody>
+      </p:sp>
+      <p:sp>
+        <p:nvSpPr>
+          <p:cNvPr id="6" name="Rectangle 5"/>
           <p:cNvSpPr/>
           <p:nvPr/>
         </p:nvSpPr>
         <p:spPr>
           <a:xfrm>
-            <a:off x="700000" y="820000"/>
-            <a:ext cx="8500000" cy="28000"/>
+            <a:off x="0" y="2800000"/>
+            <a:ext cx="420000" cy="420000"/>
           </a:xfrm>
           <a:prstGeom prst="rect">
             <a:avLst/>
           </a:prstGeom>
           <a:solidFill>
-            <a:srgbClr val="606060"/>
+            <a:srgbClr val="555555"/>
           </a:solidFill>
           <a:ln>
             <a:noFill/>
@@ -8610,14 +7526,14 @@
       </p:sp>
       <p:sp>
         <p:nvSpPr>
-          <p:cNvPr id="6" name="TextBox 5"/>
+          <p:cNvPr id="7" name="TextBox 6"/>
           <p:cNvSpPr txBox="1"/>
           <p:nvPr/>
         </p:nvSpPr>
         <p:spPr>
           <a:xfrm>
-            <a:off x="700000" y="880000"/>
-            <a:ext cx="11000000" cy="320000"/>
+            <a:off x="0" y="2800000"/>
+            <a:ext cx="420000" cy="420000"/>
           </a:xfrm>
           <a:prstGeom prst="rect">
             <a:avLst/>
@@ -8625,42 +7541,42 @@
           <a:noFill/>
         </p:spPr>
         <p:txBody>
-          <a:bodyPr wrap="square" anchor="t">
+          <a:bodyPr wrap="square" anchor="ctr">
             <a:spAutoFit/>
           </a:bodyPr>
           <a:lstStyle/>
           <a:p>
-            <a:pPr algn="l"/>
-            <a:r>
-              <a:rPr sz="1100" b="0">
-                <a:solidFill>
-                  <a:srgbClr val="777777"/>
-                </a:solidFill>
-                <a:latin typeface="Calibri"/>
-                <a:ea typeface="Calibri"/>
-                <a:cs typeface="Calibri"/>
+            <a:pPr algn="ctr"/>
+            <a:r>
+              <a:rPr sz="1400" b="1">
+                <a:solidFill>
+                  <a:srgbClr val="FFFFFF"/>
+                </a:solidFill>
+                <a:latin typeface="Open Sans"/>
+                <a:ea typeface="Open Sans"/>
+                <a:cs typeface="Open Sans"/>
               </a:rPr>
-              <a:t>Оказание первой помощи при наружных кровотечениях</a:t>
-            </a:r>
-          </a:p>
-        </p:txBody>
-      </p:sp>
-      <p:sp>
-        <p:nvSpPr>
-          <p:cNvPr id="7" name="Rectangle 6"/>
+              <a:t>7</a:t>
+            </a:r>
+          </a:p>
+        </p:txBody>
+      </p:sp>
+      <p:sp>
+        <p:nvSpPr>
+          <p:cNvPr id="8" name="Oval 7"/>
           <p:cNvSpPr/>
           <p:nvPr/>
         </p:nvSpPr>
         <p:spPr>
           <a:xfrm>
-            <a:off x="0" y="2700000"/>
-            <a:ext cx="400000" cy="400000"/>
-          </a:xfrm>
-          <a:prstGeom prst="rect">
+            <a:off x="700000" y="1550000"/>
+            <a:ext cx="500000" cy="500000"/>
+          </a:xfrm>
+          <a:prstGeom prst="ellipse">
             <a:avLst/>
           </a:prstGeom>
           <a:solidFill>
-            <a:srgbClr val="606060"/>
+            <a:srgbClr val="CC0000"/>
           </a:solidFill>
           <a:ln>
             <a:noFill/>
@@ -8690,14 +7606,14 @@
       </p:sp>
       <p:sp>
         <p:nvSpPr>
-          <p:cNvPr id="8" name="TextBox 7"/>
+          <p:cNvPr id="9" name="TextBox 8"/>
           <p:cNvSpPr txBox="1"/>
           <p:nvPr/>
         </p:nvSpPr>
         <p:spPr>
           <a:xfrm>
-            <a:off x="0" y="2700000"/>
-            <a:ext cx="400000" cy="400000"/>
+            <a:off x="700000" y="1550000"/>
+            <a:ext cx="500000" cy="500000"/>
           </a:xfrm>
           <a:prstGeom prst="rect">
             <a:avLst/>
@@ -8712,112 +7628,40 @@
           <a:p>
             <a:pPr algn="ctr"/>
             <a:r>
-              <a:rPr sz="1300" b="1">
+              <a:rPr sz="1500" b="1">
                 <a:solidFill>
                   <a:srgbClr val="FFFFFF"/>
                 </a:solidFill>
-                <a:latin typeface="Calibri"/>
-                <a:ea typeface="Calibri"/>
-                <a:cs typeface="Calibri"/>
+                <a:latin typeface="Open Sans"/>
+                <a:ea typeface="Open Sans"/>
+                <a:cs typeface="Open Sans"/>
               </a:rPr>
-              <a:t>7</a:t>
-            </a:r>
-          </a:p>
-        </p:txBody>
-      </p:sp>
-      <p:sp>
-        <p:nvSpPr>
-          <p:cNvPr id="9" name="TextBox 8"/>
-          <p:cNvSpPr txBox="1"/>
-          <p:nvPr/>
-        </p:nvSpPr>
-        <p:spPr>
-          <a:xfrm>
-            <a:off x="700000" y="1550000"/>
-            <a:ext cx="11000000" cy="1000000"/>
-          </a:xfrm>
-          <a:prstGeom prst="rect">
-            <a:avLst/>
-          </a:prstGeom>
-          <a:noFill/>
-        </p:spPr>
-        <p:txBody>
-          <a:bodyPr wrap="square" anchor="t">
-            <a:spAutoFit/>
-          </a:bodyPr>
-          <a:lstStyle/>
-          <a:p>
-            <a:pPr algn="l"/>
-            <a:r>
-              <a:rPr sz="1500" b="0">
-                <a:solidFill>
-                  <a:srgbClr val="333333"/>
-                </a:solidFill>
-                <a:latin typeface="Calibri"/>
-                <a:ea typeface="Calibri"/>
-                <a:cs typeface="Calibri"/>
-              </a:rPr>
-              <a:t>Обзорный осмотр пострадавшего (пострадавших) — чтобы найти ранения с интенсивным наружным кровотечением, требующим немедленной остановки.</a:t>
-            </a:r>
-          </a:p>
-        </p:txBody>
-      </p:sp>
-      <p:sp>
-        <p:nvSpPr>
-          <p:cNvPr id="10" name="TextBox 9"/>
-          <p:cNvSpPr txBox="1"/>
-          <p:nvPr/>
-        </p:nvSpPr>
-        <p:spPr>
-          <a:xfrm>
-            <a:off x="700000" y="2800000"/>
-            <a:ext cx="11000000" cy="400000"/>
-          </a:xfrm>
-          <a:prstGeom prst="rect">
-            <a:avLst/>
-          </a:prstGeom>
-          <a:noFill/>
-        </p:spPr>
-        <p:txBody>
-          <a:bodyPr wrap="square" anchor="t">
-            <a:spAutoFit/>
-          </a:bodyPr>
-          <a:lstStyle/>
-          <a:p>
-            <a:pPr algn="l"/>
-            <a:r>
-              <a:rPr sz="1500" b="1">
-                <a:solidFill>
-                  <a:srgbClr val="1AA090"/>
-                </a:solidFill>
-                <a:latin typeface="Calibri"/>
-                <a:ea typeface="Calibri"/>
-                <a:cs typeface="Calibri"/>
-              </a:rPr>
-              <a:t>Признаки интенсивного наружного кровотечения:</a:t>
-            </a:r>
-          </a:p>
-        </p:txBody>
-      </p:sp>
-      <p:sp>
-        <p:nvSpPr>
-          <p:cNvPr id="11" name="Rounded Rectangle 10"/>
+              <a:t>1</a:t>
+            </a:r>
+          </a:p>
+        </p:txBody>
+      </p:sp>
+      <p:sp>
+        <p:nvSpPr>
+          <p:cNvPr id="10" name="Rectangle 9"/>
           <p:cNvSpPr/>
           <p:nvPr/>
         </p:nvSpPr>
         <p:spPr>
           <a:xfrm>
-            <a:off x="700000" y="3500000"/>
-            <a:ext cx="3600000" cy="2200000"/>
-          </a:xfrm>
-          <a:prstGeom prst="roundRect">
+            <a:off x="1400000" y="1550000"/>
+            <a:ext cx="10000000" cy="500000"/>
+          </a:xfrm>
+          <a:prstGeom prst="rect">
             <a:avLst/>
           </a:prstGeom>
           <a:solidFill>
-            <a:srgbClr val="8DDBCD"/>
+            <a:srgbClr val="FFFFFF"/>
           </a:solidFill>
-          <a:ln>
-            <a:noFill/>
+          <a:ln w="12700">
+            <a:solidFill>
+              <a:srgbClr val="999999"/>
+            </a:solidFill>
           </a:ln>
         </p:spPr>
         <p:style>
@@ -8844,14 +7688,14 @@
       </p:sp>
       <p:sp>
         <p:nvSpPr>
-          <p:cNvPr id="12" name="TextBox 11"/>
+          <p:cNvPr id="11" name="TextBox 10"/>
           <p:cNvSpPr txBox="1"/>
           <p:nvPr/>
         </p:nvSpPr>
         <p:spPr>
           <a:xfrm>
-            <a:off x="900000" y="3900000"/>
-            <a:ext cx="3200000" cy="1400000"/>
+            <a:off x="1600000" y="1550000"/>
+            <a:ext cx="9600000" cy="500000"/>
           </a:xfrm>
           <a:prstGeom prst="rect">
             <a:avLst/>
@@ -8864,37 +7708,37 @@
           </a:bodyPr>
           <a:lstStyle/>
           <a:p>
-            <a:pPr algn="ctr"/>
-            <a:r>
-              <a:rPr sz="1400" b="1">
-                <a:solidFill>
-                  <a:srgbClr val="0D6B60"/>
-                </a:solidFill>
-                <a:latin typeface="Calibri"/>
-                <a:ea typeface="Calibri"/>
-                <a:cs typeface="Calibri"/>
+            <a:pPr algn="l"/>
+            <a:r>
+              <a:rPr sz="1400" b="0">
+                <a:solidFill>
+                  <a:srgbClr val="333333"/>
+                </a:solidFill>
+                <a:latin typeface="Open Sans"/>
+                <a:ea typeface="Open Sans"/>
+                <a:cs typeface="Open Sans"/>
               </a:rPr>
-              <a:t>одежда, пропитанная кровью;</a:t>
-            </a:r>
-          </a:p>
-        </p:txBody>
-      </p:sp>
-      <p:sp>
-        <p:nvSpPr>
-          <p:cNvPr id="13" name="Rounded Rectangle 12"/>
+              <a:t>Убедиться в безопасности для себя и пострадавшего.</a:t>
+            </a:r>
+          </a:p>
+        </p:txBody>
+      </p:sp>
+      <p:sp>
+        <p:nvSpPr>
+          <p:cNvPr id="12" name="Oval 11"/>
           <p:cNvSpPr/>
           <p:nvPr/>
         </p:nvSpPr>
         <p:spPr>
           <a:xfrm>
-            <a:off x="4500000" y="3500000"/>
-            <a:ext cx="3600000" cy="2200000"/>
-          </a:xfrm>
-          <a:prstGeom prst="roundRect">
+            <a:off x="700000" y="2400000"/>
+            <a:ext cx="500000" cy="500000"/>
+          </a:xfrm>
+          <a:prstGeom prst="ellipse">
             <a:avLst/>
           </a:prstGeom>
           <a:solidFill>
-            <a:srgbClr val="8DDBCD"/>
+            <a:srgbClr val="CC0000"/>
           </a:solidFill>
           <a:ln>
             <a:noFill/>
@@ -8924,14 +7768,14 @@
       </p:sp>
       <p:sp>
         <p:nvSpPr>
-          <p:cNvPr id="14" name="TextBox 13"/>
+          <p:cNvPr id="13" name="TextBox 12"/>
           <p:cNvSpPr txBox="1"/>
           <p:nvPr/>
         </p:nvSpPr>
         <p:spPr>
           <a:xfrm>
-            <a:off x="4700000" y="3900000"/>
-            <a:ext cx="3200000" cy="1400000"/>
+            <a:off x="700000" y="2400000"/>
+            <a:ext cx="500000" cy="500000"/>
           </a:xfrm>
           <a:prstGeom prst="rect">
             <a:avLst/>
@@ -8946,38 +7790,40 @@
           <a:p>
             <a:pPr algn="ctr"/>
             <a:r>
-              <a:rPr sz="1400" b="1">
-                <a:solidFill>
-                  <a:srgbClr val="0D6B60"/>
-                </a:solidFill>
-                <a:latin typeface="Calibri"/>
-                <a:ea typeface="Calibri"/>
-                <a:cs typeface="Calibri"/>
+              <a:rPr sz="1500" b="1">
+                <a:solidFill>
+                  <a:srgbClr val="FFFFFF"/>
+                </a:solidFill>
+                <a:latin typeface="Open Sans"/>
+                <a:ea typeface="Open Sans"/>
+                <a:cs typeface="Open Sans"/>
               </a:rPr>
-              <a:t>скопление крови на земле возле пострадавшего;</a:t>
-            </a:r>
-          </a:p>
-        </p:txBody>
-      </p:sp>
-      <p:sp>
-        <p:nvSpPr>
-          <p:cNvPr id="15" name="Rounded Rectangle 14"/>
+              <a:t>2</a:t>
+            </a:r>
+          </a:p>
+        </p:txBody>
+      </p:sp>
+      <p:sp>
+        <p:nvSpPr>
+          <p:cNvPr id="14" name="Rectangle 13"/>
           <p:cNvSpPr/>
           <p:nvPr/>
         </p:nvSpPr>
         <p:spPr>
           <a:xfrm>
-            <a:off x="8300000" y="3500000"/>
-            <a:ext cx="3600000" cy="2200000"/>
-          </a:xfrm>
-          <a:prstGeom prst="roundRect">
+            <a:off x="1400000" y="2400000"/>
+            <a:ext cx="10000000" cy="500000"/>
+          </a:xfrm>
+          <a:prstGeom prst="rect">
             <a:avLst/>
           </a:prstGeom>
           <a:solidFill>
-            <a:srgbClr val="8DDBCD"/>
+            <a:srgbClr val="FFFFFF"/>
           </a:solidFill>
-          <a:ln>
-            <a:noFill/>
+          <a:ln w="12700">
+            <a:solidFill>
+              <a:srgbClr val="999999"/>
+            </a:solidFill>
           </a:ln>
         </p:spPr>
         <p:style>
@@ -9004,14 +7850,14 @@
       </p:sp>
       <p:sp>
         <p:nvSpPr>
-          <p:cNvPr id="16" name="TextBox 15"/>
+          <p:cNvPr id="15" name="TextBox 14"/>
           <p:cNvSpPr txBox="1"/>
           <p:nvPr/>
         </p:nvSpPr>
         <p:spPr>
           <a:xfrm>
-            <a:off x="8500000" y="3900000"/>
-            <a:ext cx="3200000" cy="1400000"/>
+            <a:off x="1600000" y="2400000"/>
+            <a:ext cx="9600000" cy="500000"/>
           </a:xfrm>
           <a:prstGeom prst="rect">
             <a:avLst/>
@@ -9024,17 +7870,503 @@
           </a:bodyPr>
           <a:lstStyle/>
           <a:p>
-            <a:pPr algn="ctr"/>
-            <a:r>
-              <a:rPr sz="1400" b="1">
-                <a:solidFill>
-                  <a:srgbClr val="0D6B60"/>
-                </a:solidFill>
-                <a:latin typeface="Calibri"/>
-                <a:ea typeface="Calibri"/>
-                <a:cs typeface="Calibri"/>
+            <a:pPr algn="l"/>
+            <a:r>
+              <a:rPr sz="1400" b="0">
+                <a:solidFill>
+                  <a:srgbClr val="333333"/>
+                </a:solidFill>
+                <a:latin typeface="Open Sans"/>
+                <a:ea typeface="Open Sans"/>
+                <a:cs typeface="Open Sans"/>
               </a:rPr>
-              <a:t>видимые раны с интенсивно вытекающей кровью.</a:t>
+              <a:t>Найти источник интенсивного наружного кровотечения (обзорный осмотр).</a:t>
+            </a:r>
+          </a:p>
+        </p:txBody>
+      </p:sp>
+      <p:sp>
+        <p:nvSpPr>
+          <p:cNvPr id="16" name="Oval 15"/>
+          <p:cNvSpPr/>
+          <p:nvPr/>
+        </p:nvSpPr>
+        <p:spPr>
+          <a:xfrm>
+            <a:off x="700000" y="3250000"/>
+            <a:ext cx="500000" cy="500000"/>
+          </a:xfrm>
+          <a:prstGeom prst="ellipse">
+            <a:avLst/>
+          </a:prstGeom>
+          <a:solidFill>
+            <a:srgbClr val="CC0000"/>
+          </a:solidFill>
+          <a:ln>
+            <a:noFill/>
+          </a:ln>
+        </p:spPr>
+        <p:style>
+          <a:lnRef idx="1">
+            <a:schemeClr val="accent1"/>
+          </a:lnRef>
+          <a:fillRef idx="3">
+            <a:schemeClr val="accent1"/>
+          </a:fillRef>
+          <a:effectRef idx="2">
+            <a:schemeClr val="accent1"/>
+          </a:effectRef>
+          <a:fontRef idx="minor">
+            <a:schemeClr val="lt1"/>
+          </a:fontRef>
+        </p:style>
+        <p:txBody>
+          <a:bodyPr rtlCol="0" anchor="ctr"/>
+          <a:lstStyle/>
+          <a:p>
+            <a:pPr algn="ctr"/>
+          </a:p>
+        </p:txBody>
+      </p:sp>
+      <p:sp>
+        <p:nvSpPr>
+          <p:cNvPr id="17" name="TextBox 16"/>
+          <p:cNvSpPr txBox="1"/>
+          <p:nvPr/>
+        </p:nvSpPr>
+        <p:spPr>
+          <a:xfrm>
+            <a:off x="700000" y="3250000"/>
+            <a:ext cx="500000" cy="500000"/>
+          </a:xfrm>
+          <a:prstGeom prst="rect">
+            <a:avLst/>
+          </a:prstGeom>
+          <a:noFill/>
+        </p:spPr>
+        <p:txBody>
+          <a:bodyPr wrap="square" anchor="ctr">
+            <a:spAutoFit/>
+          </a:bodyPr>
+          <a:lstStyle/>
+          <a:p>
+            <a:pPr algn="ctr"/>
+            <a:r>
+              <a:rPr sz="1500" b="1">
+                <a:solidFill>
+                  <a:srgbClr val="FFFFFF"/>
+                </a:solidFill>
+                <a:latin typeface="Open Sans"/>
+                <a:ea typeface="Open Sans"/>
+                <a:cs typeface="Open Sans"/>
+              </a:rPr>
+              <a:t>3</a:t>
+            </a:r>
+          </a:p>
+        </p:txBody>
+      </p:sp>
+      <p:sp>
+        <p:nvSpPr>
+          <p:cNvPr id="18" name="Rectangle 17"/>
+          <p:cNvSpPr/>
+          <p:nvPr/>
+        </p:nvSpPr>
+        <p:spPr>
+          <a:xfrm>
+            <a:off x="1400000" y="3250000"/>
+            <a:ext cx="10000000" cy="500000"/>
+          </a:xfrm>
+          <a:prstGeom prst="rect">
+            <a:avLst/>
+          </a:prstGeom>
+          <a:solidFill>
+            <a:srgbClr val="FFFFFF"/>
+          </a:solidFill>
+          <a:ln w="12700">
+            <a:solidFill>
+              <a:srgbClr val="999999"/>
+            </a:solidFill>
+          </a:ln>
+        </p:spPr>
+        <p:style>
+          <a:lnRef idx="1">
+            <a:schemeClr val="accent1"/>
+          </a:lnRef>
+          <a:fillRef idx="3">
+            <a:schemeClr val="accent1"/>
+          </a:fillRef>
+          <a:effectRef idx="2">
+            <a:schemeClr val="accent1"/>
+          </a:effectRef>
+          <a:fontRef idx="minor">
+            <a:schemeClr val="lt1"/>
+          </a:fontRef>
+        </p:style>
+        <p:txBody>
+          <a:bodyPr rtlCol="0" anchor="ctr"/>
+          <a:lstStyle/>
+          <a:p>
+            <a:pPr algn="ctr"/>
+          </a:p>
+        </p:txBody>
+      </p:sp>
+      <p:sp>
+        <p:nvSpPr>
+          <p:cNvPr id="19" name="TextBox 18"/>
+          <p:cNvSpPr txBox="1"/>
+          <p:nvPr/>
+        </p:nvSpPr>
+        <p:spPr>
+          <a:xfrm>
+            <a:off x="1600000" y="3250000"/>
+            <a:ext cx="9600000" cy="500000"/>
+          </a:xfrm>
+          <a:prstGeom prst="rect">
+            <a:avLst/>
+          </a:prstGeom>
+          <a:noFill/>
+        </p:spPr>
+        <p:txBody>
+          <a:bodyPr wrap="square" anchor="ctr">
+            <a:spAutoFit/>
+          </a:bodyPr>
+          <a:lstStyle/>
+          <a:p>
+            <a:pPr algn="l"/>
+            <a:r>
+              <a:rPr sz="1400" b="0">
+                <a:solidFill>
+                  <a:srgbClr val="333333"/>
+                </a:solidFill>
+                <a:latin typeface="Open Sans"/>
+                <a:ea typeface="Open Sans"/>
+                <a:cs typeface="Open Sans"/>
+              </a:rPr>
+              <a:t>Начать временную остановку: давление на рану → повязка → жгут по показаниям.</a:t>
+            </a:r>
+          </a:p>
+        </p:txBody>
+      </p:sp>
+      <p:sp>
+        <p:nvSpPr>
+          <p:cNvPr id="20" name="Oval 19"/>
+          <p:cNvSpPr/>
+          <p:nvPr/>
+        </p:nvSpPr>
+        <p:spPr>
+          <a:xfrm>
+            <a:off x="700000" y="4100000"/>
+            <a:ext cx="500000" cy="500000"/>
+          </a:xfrm>
+          <a:prstGeom prst="ellipse">
+            <a:avLst/>
+          </a:prstGeom>
+          <a:solidFill>
+            <a:srgbClr val="555555"/>
+          </a:solidFill>
+          <a:ln>
+            <a:noFill/>
+          </a:ln>
+        </p:spPr>
+        <p:style>
+          <a:lnRef idx="1">
+            <a:schemeClr val="accent1"/>
+          </a:lnRef>
+          <a:fillRef idx="3">
+            <a:schemeClr val="accent1"/>
+          </a:fillRef>
+          <a:effectRef idx="2">
+            <a:schemeClr val="accent1"/>
+          </a:effectRef>
+          <a:fontRef idx="minor">
+            <a:schemeClr val="lt1"/>
+          </a:fontRef>
+        </p:style>
+        <p:txBody>
+          <a:bodyPr rtlCol="0" anchor="ctr"/>
+          <a:lstStyle/>
+          <a:p>
+            <a:pPr algn="ctr"/>
+          </a:p>
+        </p:txBody>
+      </p:sp>
+      <p:sp>
+        <p:nvSpPr>
+          <p:cNvPr id="21" name="TextBox 20"/>
+          <p:cNvSpPr txBox="1"/>
+          <p:nvPr/>
+        </p:nvSpPr>
+        <p:spPr>
+          <a:xfrm>
+            <a:off x="700000" y="4100000"/>
+            <a:ext cx="500000" cy="500000"/>
+          </a:xfrm>
+          <a:prstGeom prst="rect">
+            <a:avLst/>
+          </a:prstGeom>
+          <a:noFill/>
+        </p:spPr>
+        <p:txBody>
+          <a:bodyPr wrap="square" anchor="ctr">
+            <a:spAutoFit/>
+          </a:bodyPr>
+          <a:lstStyle/>
+          <a:p>
+            <a:pPr algn="ctr"/>
+            <a:r>
+              <a:rPr sz="1500" b="1">
+                <a:solidFill>
+                  <a:srgbClr val="FFFFFF"/>
+                </a:solidFill>
+                <a:latin typeface="Open Sans"/>
+                <a:ea typeface="Open Sans"/>
+                <a:cs typeface="Open Sans"/>
+              </a:rPr>
+              <a:t>4</a:t>
+            </a:r>
+          </a:p>
+        </p:txBody>
+      </p:sp>
+      <p:sp>
+        <p:nvSpPr>
+          <p:cNvPr id="22" name="Rectangle 21"/>
+          <p:cNvSpPr/>
+          <p:nvPr/>
+        </p:nvSpPr>
+        <p:spPr>
+          <a:xfrm>
+            <a:off x="1400000" y="4100000"/>
+            <a:ext cx="10000000" cy="500000"/>
+          </a:xfrm>
+          <a:prstGeom prst="rect">
+            <a:avLst/>
+          </a:prstGeom>
+          <a:solidFill>
+            <a:srgbClr val="FFFFFF"/>
+          </a:solidFill>
+          <a:ln w="12700">
+            <a:solidFill>
+              <a:srgbClr val="999999"/>
+            </a:solidFill>
+          </a:ln>
+        </p:spPr>
+        <p:style>
+          <a:lnRef idx="1">
+            <a:schemeClr val="accent1"/>
+          </a:lnRef>
+          <a:fillRef idx="3">
+            <a:schemeClr val="accent1"/>
+          </a:fillRef>
+          <a:effectRef idx="2">
+            <a:schemeClr val="accent1"/>
+          </a:effectRef>
+          <a:fontRef idx="minor">
+            <a:schemeClr val="lt1"/>
+          </a:fontRef>
+        </p:style>
+        <p:txBody>
+          <a:bodyPr rtlCol="0" anchor="ctr"/>
+          <a:lstStyle/>
+          <a:p>
+            <a:pPr algn="ctr"/>
+          </a:p>
+        </p:txBody>
+      </p:sp>
+      <p:sp>
+        <p:nvSpPr>
+          <p:cNvPr id="23" name="TextBox 22"/>
+          <p:cNvSpPr txBox="1"/>
+          <p:nvPr/>
+        </p:nvSpPr>
+        <p:spPr>
+          <a:xfrm>
+            <a:off x="1600000" y="4100000"/>
+            <a:ext cx="9600000" cy="500000"/>
+          </a:xfrm>
+          <a:prstGeom prst="rect">
+            <a:avLst/>
+          </a:prstGeom>
+          <a:noFill/>
+        </p:spPr>
+        <p:txBody>
+          <a:bodyPr wrap="square" anchor="ctr">
+            <a:spAutoFit/>
+          </a:bodyPr>
+          <a:lstStyle/>
+          <a:p>
+            <a:pPr algn="l"/>
+            <a:r>
+              <a:rPr sz="1400" b="0">
+                <a:solidFill>
+                  <a:srgbClr val="333333"/>
+                </a:solidFill>
+                <a:latin typeface="Open Sans"/>
+                <a:ea typeface="Open Sans"/>
+                <a:cs typeface="Open Sans"/>
+              </a:rPr>
+              <a:t>Вызвать скорую медицинскую помощь (если ещё не вызвана).</a:t>
+            </a:r>
+          </a:p>
+        </p:txBody>
+      </p:sp>
+      <p:sp>
+        <p:nvSpPr>
+          <p:cNvPr id="24" name="Oval 23"/>
+          <p:cNvSpPr/>
+          <p:nvPr/>
+        </p:nvSpPr>
+        <p:spPr>
+          <a:xfrm>
+            <a:off x="700000" y="4950000"/>
+            <a:ext cx="500000" cy="500000"/>
+          </a:xfrm>
+          <a:prstGeom prst="ellipse">
+            <a:avLst/>
+          </a:prstGeom>
+          <a:solidFill>
+            <a:srgbClr val="555555"/>
+          </a:solidFill>
+          <a:ln>
+            <a:noFill/>
+          </a:ln>
+        </p:spPr>
+        <p:style>
+          <a:lnRef idx="1">
+            <a:schemeClr val="accent1"/>
+          </a:lnRef>
+          <a:fillRef idx="3">
+            <a:schemeClr val="accent1"/>
+          </a:fillRef>
+          <a:effectRef idx="2">
+            <a:schemeClr val="accent1"/>
+          </a:effectRef>
+          <a:fontRef idx="minor">
+            <a:schemeClr val="lt1"/>
+          </a:fontRef>
+        </p:style>
+        <p:txBody>
+          <a:bodyPr rtlCol="0" anchor="ctr"/>
+          <a:lstStyle/>
+          <a:p>
+            <a:pPr algn="ctr"/>
+          </a:p>
+        </p:txBody>
+      </p:sp>
+      <p:sp>
+        <p:nvSpPr>
+          <p:cNvPr id="25" name="TextBox 24"/>
+          <p:cNvSpPr txBox="1"/>
+          <p:nvPr/>
+        </p:nvSpPr>
+        <p:spPr>
+          <a:xfrm>
+            <a:off x="700000" y="4950000"/>
+            <a:ext cx="500000" cy="500000"/>
+          </a:xfrm>
+          <a:prstGeom prst="rect">
+            <a:avLst/>
+          </a:prstGeom>
+          <a:noFill/>
+        </p:spPr>
+        <p:txBody>
+          <a:bodyPr wrap="square" anchor="ctr">
+            <a:spAutoFit/>
+          </a:bodyPr>
+          <a:lstStyle/>
+          <a:p>
+            <a:pPr algn="ctr"/>
+            <a:r>
+              <a:rPr sz="1500" b="1">
+                <a:solidFill>
+                  <a:srgbClr val="FFFFFF"/>
+                </a:solidFill>
+                <a:latin typeface="Open Sans"/>
+                <a:ea typeface="Open Sans"/>
+                <a:cs typeface="Open Sans"/>
+              </a:rPr>
+              <a:t>5</a:t>
+            </a:r>
+          </a:p>
+        </p:txBody>
+      </p:sp>
+      <p:sp>
+        <p:nvSpPr>
+          <p:cNvPr id="26" name="Rectangle 25"/>
+          <p:cNvSpPr/>
+          <p:nvPr/>
+        </p:nvSpPr>
+        <p:spPr>
+          <a:xfrm>
+            <a:off x="1400000" y="4950000"/>
+            <a:ext cx="10000000" cy="500000"/>
+          </a:xfrm>
+          <a:prstGeom prst="rect">
+            <a:avLst/>
+          </a:prstGeom>
+          <a:solidFill>
+            <a:srgbClr val="FFFFFF"/>
+          </a:solidFill>
+          <a:ln w="12700">
+            <a:solidFill>
+              <a:srgbClr val="999999"/>
+            </a:solidFill>
+          </a:ln>
+        </p:spPr>
+        <p:style>
+          <a:lnRef idx="1">
+            <a:schemeClr val="accent1"/>
+          </a:lnRef>
+          <a:fillRef idx="3">
+            <a:schemeClr val="accent1"/>
+          </a:fillRef>
+          <a:effectRef idx="2">
+            <a:schemeClr val="accent1"/>
+          </a:effectRef>
+          <a:fontRef idx="minor">
+            <a:schemeClr val="lt1"/>
+          </a:fontRef>
+        </p:style>
+        <p:txBody>
+          <a:bodyPr rtlCol="0" anchor="ctr"/>
+          <a:lstStyle/>
+          <a:p>
+            <a:pPr algn="ctr"/>
+          </a:p>
+        </p:txBody>
+      </p:sp>
+      <p:sp>
+        <p:nvSpPr>
+          <p:cNvPr id="27" name="TextBox 26"/>
+          <p:cNvSpPr txBox="1"/>
+          <p:nvPr/>
+        </p:nvSpPr>
+        <p:spPr>
+          <a:xfrm>
+            <a:off x="1600000" y="4950000"/>
+            <a:ext cx="9600000" cy="500000"/>
+          </a:xfrm>
+          <a:prstGeom prst="rect">
+            <a:avLst/>
+          </a:prstGeom>
+          <a:noFill/>
+        </p:spPr>
+        <p:txBody>
+          <a:bodyPr wrap="square" anchor="ctr">
+            <a:spAutoFit/>
+          </a:bodyPr>
+          <a:lstStyle/>
+          <a:p>
+            <a:pPr algn="l"/>
+            <a:r>
+              <a:rPr sz="1400" b="0">
+                <a:solidFill>
+                  <a:srgbClr val="333333"/>
+                </a:solidFill>
+                <a:latin typeface="Open Sans"/>
+                <a:ea typeface="Open Sans"/>
+                <a:cs typeface="Open Sans"/>
+              </a:rPr>
+              <a:t>Контролировать состояние до прибытия бригады СМП.</a:t>
             </a:r>
           </a:p>
         </p:txBody>
@@ -9102,20 +8434,57 @@
       </p:sp>
       <p:sp>
         <p:nvSpPr>
-          <p:cNvPr id="3" name="Rectangle 2"/>
+          <p:cNvPr id="3" name="TextBox 2"/>
+          <p:cNvSpPr txBox="1"/>
+          <p:nvPr/>
+        </p:nvSpPr>
+        <p:spPr>
+          <a:xfrm>
+            <a:off x="700000" y="250000"/>
+            <a:ext cx="11200000" cy="550000"/>
+          </a:xfrm>
+          <a:prstGeom prst="rect">
+            <a:avLst/>
+          </a:prstGeom>
+          <a:noFill/>
+        </p:spPr>
+        <p:txBody>
+          <a:bodyPr wrap="square" anchor="t">
+            <a:spAutoFit/>
+          </a:bodyPr>
+          <a:lstStyle/>
+          <a:p>
+            <a:pPr algn="l"/>
+            <a:r>
+              <a:rPr sz="2200" b="1">
+                <a:solidFill>
+                  <a:srgbClr val="333333"/>
+                </a:solidFill>
+                <a:latin typeface="Open Sans"/>
+                <a:ea typeface="Open Sans"/>
+                <a:cs typeface="Open Sans"/>
+              </a:rPr>
+              <a:t>ОБЗОРНЫЙ И ПОДРОБНЫЙ ОСМОТР</a:t>
+            </a:r>
+          </a:p>
+        </p:txBody>
+      </p:sp>
+      <p:sp>
+        <p:nvSpPr>
+          <p:cNvPr id="4" name="Rectangle 3"/>
           <p:cNvSpPr/>
           <p:nvPr/>
         </p:nvSpPr>
         <p:spPr>
           <a:xfrm>
-            <a:off x="0" y="0"/>
-            <a:ext cx="12191695" cy="1300000"/>
+            <a:off x="700000" y="850000"/>
+            <a:ext cx="9000000" cy="28000"/>
           </a:xfrm>
           <a:prstGeom prst="rect">
             <a:avLst/>
           </a:prstGeom>
           <a:solidFill>
-            <a:srgbClr val="F8F8F8"/>
+            <a:srgbClr val="555555"/>
           </a:solidFill>
           <a:ln>
             <a:noFill/>
@@ -9145,14 +8514,14 @@
       </p:sp>
       <p:sp>
         <p:nvSpPr>
-          <p:cNvPr id="4" name="TextBox 3"/>
+          <p:cNvPr id="5" name="TextBox 4"/>
           <p:cNvSpPr txBox="1"/>
           <p:nvPr/>
         </p:nvSpPr>
         <p:spPr>
           <a:xfrm>
-            <a:off x="700000" y="220000"/>
-            <a:ext cx="11200000" cy="550000"/>
+            <a:off x="700000" y="920000"/>
+            <a:ext cx="11000000" cy="350000"/>
           </a:xfrm>
           <a:prstGeom prst="rect">
             <a:avLst/>
@@ -9167,35 +8536,35 @@
           <a:p>
             <a:pPr algn="l"/>
             <a:r>
-              <a:rPr sz="2000" b="1">
-                <a:solidFill>
-                  <a:srgbClr val="333333"/>
-                </a:solidFill>
-                <a:latin typeface="Calibri"/>
-                <a:ea typeface="Calibri"/>
-                <a:cs typeface="Calibri"/>
+              <a:rPr sz="1200" b="0">
+                <a:solidFill>
+                  <a:srgbClr val="666666"/>
+                </a:solidFill>
+                <a:latin typeface="Open Sans"/>
+                <a:ea typeface="Open Sans"/>
+                <a:cs typeface="Open Sans"/>
               </a:rPr>
-              <a:t>ОБЗОРНЫЙ ОСМОТР ПОСТРАДАВШЕГО</a:t>
-            </a:r>
-          </a:p>
-        </p:txBody>
-      </p:sp>
-      <p:sp>
-        <p:nvSpPr>
-          <p:cNvPr id="5" name="Rectangle 4"/>
+              <a:t>Оказание первой помощи при наружных кровотечениях</a:t>
+            </a:r>
+          </a:p>
+        </p:txBody>
+      </p:sp>
+      <p:sp>
+        <p:nvSpPr>
+          <p:cNvPr id="6" name="Rectangle 5"/>
           <p:cNvSpPr/>
           <p:nvPr/>
         </p:nvSpPr>
         <p:spPr>
           <a:xfrm>
-            <a:off x="700000" y="820000"/>
-            <a:ext cx="8500000" cy="28000"/>
+            <a:off x="0" y="2800000"/>
+            <a:ext cx="420000" cy="420000"/>
           </a:xfrm>
           <a:prstGeom prst="rect">
             <a:avLst/>
           </a:prstGeom>
           <a:solidFill>
-            <a:srgbClr val="606060"/>
+            <a:srgbClr val="555555"/>
           </a:solidFill>
           <a:ln>
             <a:noFill/>
@@ -9225,14 +8594,14 @@
       </p:sp>
       <p:sp>
         <p:nvSpPr>
-          <p:cNvPr id="6" name="TextBox 5"/>
+          <p:cNvPr id="7" name="TextBox 6"/>
           <p:cNvSpPr txBox="1"/>
           <p:nvPr/>
         </p:nvSpPr>
         <p:spPr>
           <a:xfrm>
-            <a:off x="700000" y="880000"/>
-            <a:ext cx="11000000" cy="320000"/>
+            <a:off x="0" y="2800000"/>
+            <a:ext cx="420000" cy="420000"/>
           </a:xfrm>
           <a:prstGeom prst="rect">
             <a:avLst/>
@@ -9240,45 +8609,47 @@
           <a:noFill/>
         </p:spPr>
         <p:txBody>
-          <a:bodyPr wrap="square" anchor="t">
+          <a:bodyPr wrap="square" anchor="ctr">
             <a:spAutoFit/>
           </a:bodyPr>
           <a:lstStyle/>
           <a:p>
-            <a:pPr algn="l"/>
-            <a:r>
-              <a:rPr sz="1100" b="0">
-                <a:solidFill>
-                  <a:srgbClr val="777777"/>
-                </a:solidFill>
-                <a:latin typeface="Calibri"/>
-                <a:ea typeface="Calibri"/>
-                <a:cs typeface="Calibri"/>
+            <a:pPr algn="ctr"/>
+            <a:r>
+              <a:rPr sz="1400" b="1">
+                <a:solidFill>
+                  <a:srgbClr val="FFFFFF"/>
+                </a:solidFill>
+                <a:latin typeface="Open Sans"/>
+                <a:ea typeface="Open Sans"/>
+                <a:cs typeface="Open Sans"/>
               </a:rPr>
-              <a:t>Оказание первой помощи при наружных кровотечениях</a:t>
-            </a:r>
-          </a:p>
-        </p:txBody>
-      </p:sp>
-      <p:sp>
-        <p:nvSpPr>
-          <p:cNvPr id="7" name="Rectangle 6"/>
+              <a:t>8</a:t>
+            </a:r>
+          </a:p>
+        </p:txBody>
+      </p:sp>
+      <p:sp>
+        <p:nvSpPr>
+          <p:cNvPr id="8" name="Rectangle 7"/>
           <p:cNvSpPr/>
           <p:nvPr/>
         </p:nvSpPr>
         <p:spPr>
           <a:xfrm>
-            <a:off x="0" y="2700000"/>
-            <a:ext cx="400000" cy="400000"/>
+            <a:off x="700000" y="1550000"/>
+            <a:ext cx="5400000" cy="4800000"/>
           </a:xfrm>
           <a:prstGeom prst="rect">
             <a:avLst/>
           </a:prstGeom>
           <a:solidFill>
-            <a:srgbClr val="606060"/>
+            <a:srgbClr val="FFFFFF"/>
           </a:solidFill>
-          <a:ln>
-            <a:noFill/>
+          <a:ln w="12700">
+            <a:solidFill>
+              <a:srgbClr val="999999"/>
+            </a:solidFill>
           </a:ln>
         </p:spPr>
         <p:style>
@@ -9305,86 +8676,23 @@
       </p:sp>
       <p:sp>
         <p:nvSpPr>
-          <p:cNvPr id="8" name="TextBox 7"/>
-          <p:cNvSpPr txBox="1"/>
-          <p:nvPr/>
-        </p:nvSpPr>
-        <p:spPr>
-          <a:xfrm>
-            <a:off x="0" y="2700000"/>
-            <a:ext cx="400000" cy="400000"/>
-          </a:xfrm>
-          <a:prstGeom prst="rect">
-            <a:avLst/>
-          </a:prstGeom>
-          <a:noFill/>
-        </p:spPr>
-        <p:txBody>
-          <a:bodyPr wrap="square" anchor="ctr">
-            <a:spAutoFit/>
-          </a:bodyPr>
-          <a:lstStyle/>
-          <a:p>
-            <a:pPr algn="ctr"/>
-            <a:r>
-              <a:rPr sz="1300" b="1">
-                <a:solidFill>
-                  <a:srgbClr val="FFFFFF"/>
-                </a:solidFill>
-                <a:latin typeface="Calibri"/>
-                <a:ea typeface="Calibri"/>
-                <a:cs typeface="Calibri"/>
-              </a:rPr>
-              <a:t>8</a:t>
-            </a:r>
-          </a:p>
-        </p:txBody>
-      </p:sp>
-      <p:pic>
-        <p:nvPicPr>
-          <p:cNvPr id="9" name="Picture 8" descr="overview_exam.png"/>
-          <p:cNvPicPr>
-            <a:picLocks noChangeAspect="1"/>
-          </p:cNvPicPr>
-          <p:nvPr/>
-        </p:nvPicPr>
-        <p:blipFill>
-          <a:blip r:embed="rId2"/>
-          <a:stretch>
-            <a:fillRect/>
-          </a:stretch>
-        </p:blipFill>
-        <p:spPr>
-          <a:xfrm>
-            <a:off x="500000" y="1518889"/>
-            <a:ext cx="5800000" cy="4962222"/>
-          </a:xfrm>
-          <a:prstGeom prst="rect">
-            <a:avLst/>
-          </a:prstGeom>
-        </p:spPr>
-      </p:pic>
-      <p:sp>
-        <p:nvSpPr>
-          <p:cNvPr id="10" name="Rounded Rectangle 9"/>
+          <p:cNvPr id="9" name="Rectangle 8"/>
           <p:cNvSpPr/>
           <p:nvPr/>
         </p:nvSpPr>
         <p:spPr>
           <a:xfrm>
-            <a:off x="6600000" y="2200000"/>
-            <a:ext cx="5600000" cy="2200000"/>
-          </a:xfrm>
-          <a:prstGeom prst="roundRect">
+            <a:off x="700000" y="1550000"/>
+            <a:ext cx="5400000" cy="700000"/>
+          </a:xfrm>
+          <a:prstGeom prst="rect">
             <a:avLst/>
           </a:prstGeom>
           <a:solidFill>
-            <a:srgbClr val="8DDBCD"/>
+            <a:srgbClr val="555555"/>
           </a:solidFill>
-          <a:ln w="15875">
-            <a:solidFill>
-              <a:srgbClr val="1AA090"/>
-            </a:solidFill>
+          <a:ln>
+            <a:noFill/>
           </a:ln>
         </p:spPr>
         <p:style>
@@ -9411,51 +8719,14 @@
       </p:sp>
       <p:sp>
         <p:nvSpPr>
-          <p:cNvPr id="11" name="TextBox 10"/>
+          <p:cNvPr id="10" name="TextBox 9"/>
           <p:cNvSpPr txBox="1"/>
           <p:nvPr/>
         </p:nvSpPr>
         <p:spPr>
           <a:xfrm>
-            <a:off x="6800000" y="2380000"/>
-            <a:ext cx="5200000" cy="1840000"/>
-          </a:xfrm>
-          <a:prstGeom prst="rect">
-            <a:avLst/>
-          </a:prstGeom>
-          <a:noFill/>
-        </p:spPr>
-        <p:txBody>
-          <a:bodyPr wrap="square" anchor="ctr">
-            <a:spAutoFit/>
-          </a:bodyPr>
-          <a:lstStyle/>
-          <a:p>
-            <a:pPr algn="l"/>
-            <a:r>
-              <a:rPr sz="1500" b="0">
-                <a:solidFill>
-                  <a:srgbClr val="0D6B60"/>
-                </a:solidFill>
-                <a:latin typeface="Calibri"/>
-                <a:ea typeface="Calibri"/>
-                <a:cs typeface="Calibri"/>
-              </a:rPr>
-              <a:t>Обзорный осмотр производится очень быстро, в течение нескольких секунд, с головы до ног.</a:t>
-            </a:r>
-          </a:p>
-        </p:txBody>
-      </p:sp>
-      <p:sp>
-        <p:nvSpPr>
-          <p:cNvPr id="12" name="TextBox 11"/>
-          <p:cNvSpPr txBox="1"/>
-          <p:nvPr/>
-        </p:nvSpPr>
-        <p:spPr>
-          <a:xfrm>
-            <a:off x="6600000" y="4800000"/>
-            <a:ext cx="5600000" cy="1400000"/>
+            <a:off x="900000" y="1650000"/>
+            <a:ext cx="5000000" cy="500000"/>
           </a:xfrm>
           <a:prstGeom prst="rect">
             <a:avLst/>
@@ -9468,17 +8739,332 @@
           </a:bodyPr>
           <a:lstStyle/>
           <a:p>
-            <a:pPr algn="l"/>
-            <a:r>
-              <a:rPr sz="1300" b="0">
-                <a:solidFill>
-                  <a:srgbClr val="777777"/>
-                </a:solidFill>
-                <a:latin typeface="Calibri"/>
-                <a:ea typeface="Calibri"/>
-                <a:cs typeface="Calibri"/>
+            <a:pPr algn="ctr"/>
+            <a:r>
+              <a:rPr sz="1600" b="1">
+                <a:solidFill>
+                  <a:srgbClr val="FFFFFF"/>
+                </a:solidFill>
+                <a:latin typeface="Open Sans"/>
+                <a:ea typeface="Open Sans"/>
+                <a:cs typeface="Open Sans"/>
               </a:rPr>
-              <a:t>Сразу после обнаружения признаков угрожающего жизни кровотечения приступают к его остановке всеми доступными способами.</a:t>
+              <a:t>Обзорный осмотр</a:t>
+            </a:r>
+          </a:p>
+        </p:txBody>
+      </p:sp>
+      <p:sp>
+        <p:nvSpPr>
+          <p:cNvPr id="11" name="TextBox 10"/>
+          <p:cNvSpPr txBox="1"/>
+          <p:nvPr/>
+        </p:nvSpPr>
+        <p:spPr>
+          <a:xfrm>
+            <a:off x="950000" y="2500000"/>
+            <a:ext cx="4900000" cy="3500000"/>
+          </a:xfrm>
+          <a:prstGeom prst="rect">
+            <a:avLst/>
+          </a:prstGeom>
+          <a:noFill/>
+        </p:spPr>
+        <p:txBody>
+          <a:bodyPr wrap="square">
+            <a:spAutoFit/>
+          </a:bodyPr>
+          <a:lstStyle/>
+          <a:p>
+            <a:pPr algn="l">
+              <a:spcAft>
+                <a:spcPts val="800"/>
+              </a:spcAft>
+            </a:pPr>
+            <a:r>
+              <a:rPr sz="1400" b="0">
+                <a:solidFill>
+                  <a:srgbClr val="333333"/>
+                </a:solidFill>
+                <a:latin typeface="Open Sans"/>
+                <a:ea typeface="Open Sans"/>
+                <a:cs typeface="Open Sans"/>
+              </a:rPr>
+              <a:t>•  Цель: найти интенсивное кровотечение</a:t>
+            </a:r>
+          </a:p>
+          <a:p>
+            <a:pPr algn="l">
+              <a:spcAft>
+                <a:spcPts val="800"/>
+              </a:spcAft>
+            </a:pPr>
+            <a:r>
+              <a:rPr sz="1400" b="0">
+                <a:solidFill>
+                  <a:srgbClr val="333333"/>
+                </a:solidFill>
+                <a:latin typeface="Open Sans"/>
+                <a:ea typeface="Open Sans"/>
+                <a:cs typeface="Open Sans"/>
+              </a:rPr>
+              <a:t>•  Время: несколько секунд</a:t>
+            </a:r>
+          </a:p>
+          <a:p>
+            <a:pPr algn="l">
+              <a:spcAft>
+                <a:spcPts val="800"/>
+              </a:spcAft>
+            </a:pPr>
+            <a:r>
+              <a:rPr sz="1400" b="0">
+                <a:solidFill>
+                  <a:srgbClr val="333333"/>
+                </a:solidFill>
+                <a:latin typeface="Open Sans"/>
+                <a:ea typeface="Open Sans"/>
+                <a:cs typeface="Open Sans"/>
+              </a:rPr>
+              <a:t>•  Объём: быстро с головы до ног</a:t>
+            </a:r>
+          </a:p>
+          <a:p>
+            <a:pPr algn="l">
+              <a:spcAft>
+                <a:spcPts val="800"/>
+              </a:spcAft>
+            </a:pPr>
+            <a:r>
+              <a:rPr sz="1400" b="0">
+                <a:solidFill>
+                  <a:srgbClr val="333333"/>
+                </a:solidFill>
+                <a:latin typeface="Open Sans"/>
+                <a:ea typeface="Open Sans"/>
+                <a:cs typeface="Open Sans"/>
+              </a:rPr>
+              <a:t>•  Когда: сразу после оценки обстановки</a:t>
+            </a:r>
+          </a:p>
+        </p:txBody>
+      </p:sp>
+      <p:sp>
+        <p:nvSpPr>
+          <p:cNvPr id="12" name="Rectangle 11"/>
+          <p:cNvSpPr/>
+          <p:nvPr/>
+        </p:nvSpPr>
+        <p:spPr>
+          <a:xfrm>
+            <a:off x="6500000" y="1550000"/>
+            <a:ext cx="5400000" cy="4800000"/>
+          </a:xfrm>
+          <a:prstGeom prst="rect">
+            <a:avLst/>
+          </a:prstGeom>
+          <a:solidFill>
+            <a:srgbClr val="FFFFFF"/>
+          </a:solidFill>
+          <a:ln w="12700">
+            <a:solidFill>
+              <a:srgbClr val="999999"/>
+            </a:solidFill>
+          </a:ln>
+        </p:spPr>
+        <p:style>
+          <a:lnRef idx="1">
+            <a:schemeClr val="accent1"/>
+          </a:lnRef>
+          <a:fillRef idx="3">
+            <a:schemeClr val="accent1"/>
+          </a:fillRef>
+          <a:effectRef idx="2">
+            <a:schemeClr val="accent1"/>
+          </a:effectRef>
+          <a:fontRef idx="minor">
+            <a:schemeClr val="lt1"/>
+          </a:fontRef>
+        </p:style>
+        <p:txBody>
+          <a:bodyPr rtlCol="0" anchor="ctr"/>
+          <a:lstStyle/>
+          <a:p>
+            <a:pPr algn="ctr"/>
+          </a:p>
+        </p:txBody>
+      </p:sp>
+      <p:sp>
+        <p:nvSpPr>
+          <p:cNvPr id="13" name="Rectangle 12"/>
+          <p:cNvSpPr/>
+          <p:nvPr/>
+        </p:nvSpPr>
+        <p:spPr>
+          <a:xfrm>
+            <a:off x="6500000" y="1550000"/>
+            <a:ext cx="5400000" cy="700000"/>
+          </a:xfrm>
+          <a:prstGeom prst="rect">
+            <a:avLst/>
+          </a:prstGeom>
+          <a:solidFill>
+            <a:srgbClr val="DDDDDD"/>
+          </a:solidFill>
+          <a:ln>
+            <a:noFill/>
+          </a:ln>
+        </p:spPr>
+        <p:style>
+          <a:lnRef idx="1">
+            <a:schemeClr val="accent1"/>
+          </a:lnRef>
+          <a:fillRef idx="3">
+            <a:schemeClr val="accent1"/>
+          </a:fillRef>
+          <a:effectRef idx="2">
+            <a:schemeClr val="accent1"/>
+          </a:effectRef>
+          <a:fontRef idx="minor">
+            <a:schemeClr val="lt1"/>
+          </a:fontRef>
+        </p:style>
+        <p:txBody>
+          <a:bodyPr rtlCol="0" anchor="ctr"/>
+          <a:lstStyle/>
+          <a:p>
+            <a:pPr algn="ctr"/>
+          </a:p>
+        </p:txBody>
+      </p:sp>
+      <p:sp>
+        <p:nvSpPr>
+          <p:cNvPr id="14" name="TextBox 13"/>
+          <p:cNvSpPr txBox="1"/>
+          <p:nvPr/>
+        </p:nvSpPr>
+        <p:spPr>
+          <a:xfrm>
+            <a:off x="6700000" y="1650000"/>
+            <a:ext cx="5000000" cy="500000"/>
+          </a:xfrm>
+          <a:prstGeom prst="rect">
+            <a:avLst/>
+          </a:prstGeom>
+          <a:noFill/>
+        </p:spPr>
+        <p:txBody>
+          <a:bodyPr wrap="square" anchor="t">
+            <a:spAutoFit/>
+          </a:bodyPr>
+          <a:lstStyle/>
+          <a:p>
+            <a:pPr algn="ctr"/>
+            <a:r>
+              <a:rPr sz="1600" b="1">
+                <a:solidFill>
+                  <a:srgbClr val="333333"/>
+                </a:solidFill>
+                <a:latin typeface="Open Sans"/>
+                <a:ea typeface="Open Sans"/>
+                <a:cs typeface="Open Sans"/>
+              </a:rPr>
+              <a:t>Подробный осмотр</a:t>
+            </a:r>
+          </a:p>
+        </p:txBody>
+      </p:sp>
+      <p:sp>
+        <p:nvSpPr>
+          <p:cNvPr id="15" name="TextBox 14"/>
+          <p:cNvSpPr txBox="1"/>
+          <p:nvPr/>
+        </p:nvSpPr>
+        <p:spPr>
+          <a:xfrm>
+            <a:off x="6750000" y="2500000"/>
+            <a:ext cx="4900000" cy="3500000"/>
+          </a:xfrm>
+          <a:prstGeom prst="rect">
+            <a:avLst/>
+          </a:prstGeom>
+          <a:noFill/>
+        </p:spPr>
+        <p:txBody>
+          <a:bodyPr wrap="square">
+            <a:spAutoFit/>
+          </a:bodyPr>
+          <a:lstStyle/>
+          <a:p>
+            <a:pPr algn="l">
+              <a:spcAft>
+                <a:spcPts val="800"/>
+              </a:spcAft>
+            </a:pPr>
+            <a:r>
+              <a:rPr sz="1400" b="0">
+                <a:solidFill>
+                  <a:srgbClr val="333333"/>
+                </a:solidFill>
+                <a:latin typeface="Open Sans"/>
+                <a:ea typeface="Open Sans"/>
+                <a:cs typeface="Open Sans"/>
+              </a:rPr>
+              <a:t>•  Цель: выявить травмы и другие угрозы</a:t>
+            </a:r>
+          </a:p>
+          <a:p>
+            <a:pPr algn="l">
+              <a:spcAft>
+                <a:spcPts val="800"/>
+              </a:spcAft>
+            </a:pPr>
+            <a:r>
+              <a:rPr sz="1400" b="0">
+                <a:solidFill>
+                  <a:srgbClr val="333333"/>
+                </a:solidFill>
+                <a:latin typeface="Open Sans"/>
+                <a:ea typeface="Open Sans"/>
+                <a:cs typeface="Open Sans"/>
+              </a:rPr>
+              <a:t>•  Время: несколько минут</a:t>
+            </a:r>
+          </a:p>
+          <a:p>
+            <a:pPr algn="l">
+              <a:spcAft>
+                <a:spcPts val="800"/>
+              </a:spcAft>
+            </a:pPr>
+            <a:r>
+              <a:rPr sz="1400" b="0">
+                <a:solidFill>
+                  <a:srgbClr val="333333"/>
+                </a:solidFill>
+                <a:latin typeface="Open Sans"/>
+                <a:ea typeface="Open Sans"/>
+                <a:cs typeface="Open Sans"/>
+              </a:rPr>
+              <a:t>•  Объём: голова → шея → грудь → … → руки</a:t>
+            </a:r>
+          </a:p>
+          <a:p>
+            <a:pPr algn="l">
+              <a:spcAft>
+                <a:spcPts val="800"/>
+              </a:spcAft>
+            </a:pPr>
+            <a:r>
+              <a:rPr sz="1400" b="0">
+                <a:solidFill>
+                  <a:srgbClr val="333333"/>
+                </a:solidFill>
+                <a:latin typeface="Open Sans"/>
+                <a:ea typeface="Open Sans"/>
+                <a:cs typeface="Open Sans"/>
+              </a:rPr>
+              <a:t>•  Когда: после остановки кровотечения</a:t>
             </a:r>
           </a:p>
         </p:txBody>
@@ -9546,20 +9132,57 @@
       </p:sp>
       <p:sp>
         <p:nvSpPr>
-          <p:cNvPr id="3" name="Rectangle 2"/>
+          <p:cNvPr id="3" name="TextBox 2"/>
+          <p:cNvSpPr txBox="1"/>
+          <p:nvPr/>
+        </p:nvSpPr>
+        <p:spPr>
+          <a:xfrm>
+            <a:off x="700000" y="250000"/>
+            <a:ext cx="11200000" cy="550000"/>
+          </a:xfrm>
+          <a:prstGeom prst="rect">
+            <a:avLst/>
+          </a:prstGeom>
+          <a:noFill/>
+        </p:spPr>
+        <p:txBody>
+          <a:bodyPr wrap="square" anchor="t">
+            <a:spAutoFit/>
+          </a:bodyPr>
+          <a:lstStyle/>
+          <a:p>
+            <a:pPr algn="l"/>
+            <a:r>
+              <a:rPr sz="2200" b="1">
+                <a:solidFill>
+                  <a:srgbClr val="333333"/>
+                </a:solidFill>
+                <a:latin typeface="Open Sans"/>
+                <a:ea typeface="Open Sans"/>
+                <a:cs typeface="Open Sans"/>
+              </a:rPr>
+              <a:t>ГЛАВНОЕ ЗАПОМНИТЬ</a:t>
+            </a:r>
+          </a:p>
+        </p:txBody>
+      </p:sp>
+      <p:sp>
+        <p:nvSpPr>
+          <p:cNvPr id="4" name="Rectangle 3"/>
           <p:cNvSpPr/>
           <p:nvPr/>
         </p:nvSpPr>
         <p:spPr>
           <a:xfrm>
-            <a:off x="0" y="0"/>
-            <a:ext cx="12191695" cy="1300000"/>
+            <a:off x="700000" y="850000"/>
+            <a:ext cx="9000000" cy="28000"/>
           </a:xfrm>
           <a:prstGeom prst="rect">
             <a:avLst/>
           </a:prstGeom>
           <a:solidFill>
-            <a:srgbClr val="F8F8F8"/>
+            <a:srgbClr val="555555"/>
           </a:solidFill>
           <a:ln>
             <a:noFill/>
@@ -9589,14 +9212,14 @@
       </p:sp>
       <p:sp>
         <p:nvSpPr>
-          <p:cNvPr id="4" name="TextBox 3"/>
+          <p:cNvPr id="5" name="TextBox 4"/>
           <p:cNvSpPr txBox="1"/>
           <p:nvPr/>
         </p:nvSpPr>
         <p:spPr>
           <a:xfrm>
-            <a:off x="700000" y="220000"/>
-            <a:ext cx="11200000" cy="550000"/>
+            <a:off x="700000" y="920000"/>
+            <a:ext cx="11000000" cy="350000"/>
           </a:xfrm>
           <a:prstGeom prst="rect">
             <a:avLst/>
@@ -9611,35 +9234,35 @@
           <a:p>
             <a:pPr algn="l"/>
             <a:r>
-              <a:rPr sz="2000" b="1">
-                <a:solidFill>
-                  <a:srgbClr val="333333"/>
-                </a:solidFill>
-                <a:latin typeface="Calibri"/>
-                <a:ea typeface="Calibri"/>
-                <a:cs typeface="Calibri"/>
+              <a:rPr sz="1200" b="0">
+                <a:solidFill>
+                  <a:srgbClr val="666666"/>
+                </a:solidFill>
+                <a:latin typeface="Open Sans"/>
+                <a:ea typeface="Open Sans"/>
+                <a:cs typeface="Open Sans"/>
               </a:rPr>
-              <a:t>ДЕЙСТВИЯ ПРИ ОБНАРУЖЕНИИ КРОВОТЕЧЕНИЯ</a:t>
-            </a:r>
-          </a:p>
-        </p:txBody>
-      </p:sp>
-      <p:sp>
-        <p:nvSpPr>
-          <p:cNvPr id="5" name="Rectangle 4"/>
+              <a:t>Оказание первой помощи при наружных кровотечениях</a:t>
+            </a:r>
+          </a:p>
+        </p:txBody>
+      </p:sp>
+      <p:sp>
+        <p:nvSpPr>
+          <p:cNvPr id="6" name="Rectangle 5"/>
           <p:cNvSpPr/>
           <p:nvPr/>
         </p:nvSpPr>
         <p:spPr>
           <a:xfrm>
-            <a:off x="700000" y="820000"/>
-            <a:ext cx="8500000" cy="28000"/>
+            <a:off x="0" y="2800000"/>
+            <a:ext cx="420000" cy="420000"/>
           </a:xfrm>
           <a:prstGeom prst="rect">
             <a:avLst/>
           </a:prstGeom>
           <a:solidFill>
-            <a:srgbClr val="606060"/>
+            <a:srgbClr val="555555"/>
           </a:solidFill>
           <a:ln>
             <a:noFill/>
@@ -9669,14 +9292,14 @@
       </p:sp>
       <p:sp>
         <p:nvSpPr>
-          <p:cNvPr id="6" name="TextBox 5"/>
+          <p:cNvPr id="7" name="TextBox 6"/>
           <p:cNvSpPr txBox="1"/>
           <p:nvPr/>
         </p:nvSpPr>
         <p:spPr>
           <a:xfrm>
-            <a:off x="700000" y="880000"/>
-            <a:ext cx="11000000" cy="320000"/>
+            <a:off x="0" y="2800000"/>
+            <a:ext cx="420000" cy="420000"/>
           </a:xfrm>
           <a:prstGeom prst="rect">
             <a:avLst/>
@@ -9684,45 +9307,47 @@
           <a:noFill/>
         </p:spPr>
         <p:txBody>
-          <a:bodyPr wrap="square" anchor="t">
+          <a:bodyPr wrap="square" anchor="ctr">
             <a:spAutoFit/>
           </a:bodyPr>
           <a:lstStyle/>
           <a:p>
-            <a:pPr algn="l"/>
-            <a:r>
-              <a:rPr sz="1100" b="0">
-                <a:solidFill>
-                  <a:srgbClr val="777777"/>
-                </a:solidFill>
-                <a:latin typeface="Calibri"/>
-                <a:ea typeface="Calibri"/>
-                <a:cs typeface="Calibri"/>
+            <a:pPr algn="ctr"/>
+            <a:r>
+              <a:rPr sz="1400" b="1">
+                <a:solidFill>
+                  <a:srgbClr val="FFFFFF"/>
+                </a:solidFill>
+                <a:latin typeface="Open Sans"/>
+                <a:ea typeface="Open Sans"/>
+                <a:cs typeface="Open Sans"/>
               </a:rPr>
-              <a:t>Оказание первой помощи при наружных кровотечениях</a:t>
-            </a:r>
-          </a:p>
-        </p:txBody>
-      </p:sp>
-      <p:sp>
-        <p:nvSpPr>
-          <p:cNvPr id="7" name="Rectangle 6"/>
+              <a:t>9</a:t>
+            </a:r>
+          </a:p>
+        </p:txBody>
+      </p:sp>
+      <p:sp>
+        <p:nvSpPr>
+          <p:cNvPr id="8" name="Rectangle 7"/>
           <p:cNvSpPr/>
           <p:nvPr/>
         </p:nvSpPr>
         <p:spPr>
           <a:xfrm>
-            <a:off x="0" y="2700000"/>
-            <a:ext cx="400000" cy="400000"/>
+            <a:off x="700000" y="1550000"/>
+            <a:ext cx="11000000" cy="1000000"/>
           </a:xfrm>
           <a:prstGeom prst="rect">
             <a:avLst/>
           </a:prstGeom>
           <a:solidFill>
-            <a:srgbClr val="606060"/>
+            <a:srgbClr val="FFFFFF"/>
           </a:solidFill>
-          <a:ln>
-            <a:noFill/>
+          <a:ln w="12700">
+            <a:solidFill>
+              <a:srgbClr val="999999"/>
+            </a:solidFill>
           </a:ln>
         </p:spPr>
         <p:style>
@@ -9749,62 +9374,23 @@
       </p:sp>
       <p:sp>
         <p:nvSpPr>
-          <p:cNvPr id="8" name="TextBox 7"/>
-          <p:cNvSpPr txBox="1"/>
-          <p:nvPr/>
-        </p:nvSpPr>
-        <p:spPr>
-          <a:xfrm>
-            <a:off x="0" y="2700000"/>
-            <a:ext cx="400000" cy="400000"/>
-          </a:xfrm>
-          <a:prstGeom prst="rect">
-            <a:avLst/>
-          </a:prstGeom>
-          <a:noFill/>
-        </p:spPr>
-        <p:txBody>
-          <a:bodyPr wrap="square" anchor="ctr">
-            <a:spAutoFit/>
-          </a:bodyPr>
-          <a:lstStyle/>
-          <a:p>
-            <a:pPr algn="ctr"/>
-            <a:r>
-              <a:rPr sz="1300" b="1">
-                <a:solidFill>
-                  <a:srgbClr val="FFFFFF"/>
-                </a:solidFill>
-                <a:latin typeface="Calibri"/>
-                <a:ea typeface="Calibri"/>
-                <a:cs typeface="Calibri"/>
-              </a:rPr>
-              <a:t>9</a:t>
-            </a:r>
-          </a:p>
-        </p:txBody>
-      </p:sp>
-      <p:sp>
-        <p:nvSpPr>
-          <p:cNvPr id="9" name="Oval 8"/>
+          <p:cNvPr id="9" name="Rectangle 8"/>
           <p:cNvSpPr/>
           <p:nvPr/>
         </p:nvSpPr>
         <p:spPr>
           <a:xfrm>
-            <a:off x="700000" y="1500000"/>
-            <a:ext cx="480000" cy="480000"/>
-          </a:xfrm>
-          <a:prstGeom prst="ellipse">
+            <a:off x="700000" y="1550000"/>
+            <a:ext cx="90000" cy="1000000"/>
+          </a:xfrm>
+          <a:prstGeom prst="rect">
             <a:avLst/>
           </a:prstGeom>
           <a:solidFill>
-            <a:srgbClr val="8DDBCD"/>
+            <a:srgbClr val="CC0000"/>
           </a:solidFill>
-          <a:ln w="12700">
-            <a:solidFill>
-              <a:srgbClr val="1AA090"/>
-            </a:solidFill>
+          <a:ln>
+            <a:noFill/>
           </a:ln>
         </p:spPr>
         <p:style>
@@ -9837,8 +9423,8 @@
         </p:nvSpPr>
         <p:spPr>
           <a:xfrm>
-            <a:off x="700000" y="1500000"/>
-            <a:ext cx="480000" cy="480000"/>
+            <a:off x="1000000" y="1750000"/>
+            <a:ext cx="10400000" cy="600000"/>
           </a:xfrm>
           <a:prstGeom prst="rect">
             <a:avLst/>
@@ -9851,40 +9437,42 @@
           </a:bodyPr>
           <a:lstStyle/>
           <a:p>
-            <a:pPr algn="ctr"/>
-            <a:r>
-              <a:rPr sz="1400" b="1">
-                <a:solidFill>
-                  <a:srgbClr val="0D6B60"/>
-                </a:solidFill>
-                <a:latin typeface="Calibri"/>
-                <a:ea typeface="Calibri"/>
-                <a:cs typeface="Calibri"/>
+            <a:pPr algn="l"/>
+            <a:r>
+              <a:rPr sz="1400" b="0">
+                <a:solidFill>
+                  <a:srgbClr val="333333"/>
+                </a:solidFill>
+                <a:latin typeface="Open Sans"/>
+                <a:ea typeface="Open Sans"/>
+                <a:cs typeface="Open Sans"/>
               </a:rPr>
-              <a:t>1</a:t>
-            </a:r>
-          </a:p>
-        </p:txBody>
-      </p:sp>
-      <p:sp>
-        <p:nvSpPr>
-          <p:cNvPr id="11" name="Rounded Rectangle 10"/>
+              <a:t>В алгоритме первой помощи угрожающее жизни кровотечение ищут сразу.</a:t>
+            </a:r>
+          </a:p>
+        </p:txBody>
+      </p:sp>
+      <p:sp>
+        <p:nvSpPr>
+          <p:cNvPr id="11" name="Rectangle 10"/>
           <p:cNvSpPr/>
           <p:nvPr/>
         </p:nvSpPr>
         <p:spPr>
           <a:xfrm>
-            <a:off x="1350000" y="1500000"/>
-            <a:ext cx="10000000" cy="480000"/>
-          </a:xfrm>
-          <a:prstGeom prst="roundRect">
+            <a:off x="700000" y="2700000"/>
+            <a:ext cx="11000000" cy="1000000"/>
+          </a:xfrm>
+          <a:prstGeom prst="rect">
             <a:avLst/>
           </a:prstGeom>
           <a:solidFill>
-            <a:srgbClr val="F0F0F0"/>
+            <a:srgbClr val="FFFFFF"/>
           </a:solidFill>
-          <a:ln>
-            <a:noFill/>
+          <a:ln w="12700">
+            <a:solidFill>
+              <a:srgbClr val="999999"/>
+            </a:solidFill>
           </a:ln>
         </p:spPr>
         <p:style>
@@ -9911,62 +9499,23 @@
       </p:sp>
       <p:sp>
         <p:nvSpPr>
-          <p:cNvPr id="12" name="TextBox 11"/>
-          <p:cNvSpPr txBox="1"/>
-          <p:nvPr/>
-        </p:nvSpPr>
-        <p:spPr>
-          <a:xfrm>
-            <a:off x="1550000" y="1500000"/>
-            <a:ext cx="9600000" cy="480000"/>
-          </a:xfrm>
-          <a:prstGeom prst="rect">
-            <a:avLst/>
-          </a:prstGeom>
-          <a:noFill/>
-        </p:spPr>
-        <p:txBody>
-          <a:bodyPr wrap="square" anchor="ctr">
-            <a:spAutoFit/>
-          </a:bodyPr>
-          <a:lstStyle/>
-          <a:p>
-            <a:pPr algn="l"/>
-            <a:r>
-              <a:rPr sz="1400" b="0">
-                <a:solidFill>
-                  <a:srgbClr val="333333"/>
-                </a:solidFill>
-                <a:latin typeface="Calibri"/>
-                <a:ea typeface="Calibri"/>
-                <a:cs typeface="Calibri"/>
-              </a:rPr>
-              <a:t>Оценить обстановку и безопасность.</a:t>
-            </a:r>
-          </a:p>
-        </p:txBody>
-      </p:sp>
-      <p:sp>
-        <p:nvSpPr>
-          <p:cNvPr id="13" name="Oval 12"/>
+          <p:cNvPr id="12" name="Rectangle 11"/>
           <p:cNvSpPr/>
           <p:nvPr/>
         </p:nvSpPr>
         <p:spPr>
           <a:xfrm>
-            <a:off x="700000" y="2220000"/>
-            <a:ext cx="480000" cy="480000"/>
-          </a:xfrm>
-          <a:prstGeom prst="ellipse">
+            <a:off x="700000" y="2700000"/>
+            <a:ext cx="90000" cy="1000000"/>
+          </a:xfrm>
+          <a:prstGeom prst="rect">
             <a:avLst/>
           </a:prstGeom>
           <a:solidFill>
-            <a:srgbClr val="8DDBCD"/>
+            <a:srgbClr val="CC0000"/>
           </a:solidFill>
-          <a:ln w="12700">
-            <a:solidFill>
-              <a:srgbClr val="1AA090"/>
-            </a:solidFill>
+          <a:ln>
+            <a:noFill/>
           </a:ln>
         </p:spPr>
         <p:style>
@@ -9993,14 +9542,14 @@
       </p:sp>
       <p:sp>
         <p:nvSpPr>
-          <p:cNvPr id="14" name="TextBox 13"/>
+          <p:cNvPr id="13" name="TextBox 12"/>
           <p:cNvSpPr txBox="1"/>
           <p:nvPr/>
         </p:nvSpPr>
         <p:spPr>
           <a:xfrm>
-            <a:off x="700000" y="2220000"/>
-            <a:ext cx="480000" cy="480000"/>
+            <a:off x="1000000" y="2900000"/>
+            <a:ext cx="10400000" cy="600000"/>
           </a:xfrm>
           <a:prstGeom prst="rect">
             <a:avLst/>
@@ -10013,40 +9562,42 @@
           </a:bodyPr>
           <a:lstStyle/>
           <a:p>
-            <a:pPr algn="ctr"/>
-            <a:r>
-              <a:rPr sz="1400" b="1">
-                <a:solidFill>
-                  <a:srgbClr val="0D6B60"/>
-                </a:solidFill>
-                <a:latin typeface="Calibri"/>
-                <a:ea typeface="Calibri"/>
-                <a:cs typeface="Calibri"/>
+            <a:pPr algn="l"/>
+            <a:r>
+              <a:rPr sz="1400" b="0">
+                <a:solidFill>
+                  <a:srgbClr val="333333"/>
+                </a:solidFill>
+                <a:latin typeface="Open Sans"/>
+                <a:ea typeface="Open Sans"/>
+                <a:cs typeface="Open Sans"/>
               </a:rPr>
-              <a:t>2</a:t>
-            </a:r>
-          </a:p>
-        </p:txBody>
-      </p:sp>
-      <p:sp>
-        <p:nvSpPr>
-          <p:cNvPr id="15" name="Rounded Rectangle 14"/>
+              <a:t>Обзорный осмотр — за несколько секунд, с головы до ног.</a:t>
+            </a:r>
+          </a:p>
+        </p:txBody>
+      </p:sp>
+      <p:sp>
+        <p:nvSpPr>
+          <p:cNvPr id="14" name="Rectangle 13"/>
           <p:cNvSpPr/>
           <p:nvPr/>
         </p:nvSpPr>
         <p:spPr>
           <a:xfrm>
-            <a:off x="1350000" y="2220000"/>
-            <a:ext cx="10000000" cy="480000"/>
-          </a:xfrm>
-          <a:prstGeom prst="roundRect">
+            <a:off x="700000" y="3850000"/>
+            <a:ext cx="11000000" cy="1000000"/>
+          </a:xfrm>
+          <a:prstGeom prst="rect">
             <a:avLst/>
           </a:prstGeom>
           <a:solidFill>
-            <a:srgbClr val="F0F0F0"/>
+            <a:srgbClr val="FFFFFF"/>
           </a:solidFill>
-          <a:ln>
-            <a:noFill/>
+          <a:ln w="12700">
+            <a:solidFill>
+              <a:srgbClr val="999999"/>
+            </a:solidFill>
           </a:ln>
         </p:spPr>
         <p:style>
@@ -10073,62 +9624,23 @@
       </p:sp>
       <p:sp>
         <p:nvSpPr>
-          <p:cNvPr id="16" name="TextBox 15"/>
-          <p:cNvSpPr txBox="1"/>
-          <p:nvPr/>
-        </p:nvSpPr>
-        <p:spPr>
-          <a:xfrm>
-            <a:off x="1550000" y="2220000"/>
-            <a:ext cx="9600000" cy="480000"/>
-          </a:xfrm>
-          <a:prstGeom prst="rect">
-            <a:avLst/>
-          </a:prstGeom>
-          <a:noFill/>
-        </p:spPr>
-        <p:txBody>
-          <a:bodyPr wrap="square" anchor="ctr">
-            <a:spAutoFit/>
-          </a:bodyPr>
-          <a:lstStyle/>
-          <a:p>
-            <a:pPr algn="l"/>
-            <a:r>
-              <a:rPr sz="1400" b="0">
-                <a:solidFill>
-                  <a:srgbClr val="333333"/>
-                </a:solidFill>
-                <a:latin typeface="Calibri"/>
-                <a:ea typeface="Calibri"/>
-                <a:cs typeface="Calibri"/>
-              </a:rPr>
-              <a:t>Провести обзорный осмотр — найти интенсивное кровотечение.</a:t>
-            </a:r>
-          </a:p>
-        </p:txBody>
-      </p:sp>
-      <p:sp>
-        <p:nvSpPr>
-          <p:cNvPr id="17" name="Oval 16"/>
+          <p:cNvPr id="15" name="Rectangle 14"/>
           <p:cNvSpPr/>
           <p:nvPr/>
         </p:nvSpPr>
         <p:spPr>
           <a:xfrm>
-            <a:off x="700000" y="2940000"/>
-            <a:ext cx="480000" cy="480000"/>
-          </a:xfrm>
-          <a:prstGeom prst="ellipse">
+            <a:off x="700000" y="3850000"/>
+            <a:ext cx="90000" cy="1000000"/>
+          </a:xfrm>
+          <a:prstGeom prst="rect">
             <a:avLst/>
           </a:prstGeom>
           <a:solidFill>
-            <a:srgbClr val="8DDBCD"/>
+            <a:srgbClr val="CC0000"/>
           </a:solidFill>
-          <a:ln w="12700">
-            <a:solidFill>
-              <a:srgbClr val="1AA090"/>
-            </a:solidFill>
+          <a:ln>
+            <a:noFill/>
           </a:ln>
         </p:spPr>
         <p:style>
@@ -10155,14 +9667,14 @@
       </p:sp>
       <p:sp>
         <p:nvSpPr>
-          <p:cNvPr id="18" name="TextBox 17"/>
+          <p:cNvPr id="16" name="TextBox 15"/>
           <p:cNvSpPr txBox="1"/>
           <p:nvPr/>
         </p:nvSpPr>
         <p:spPr>
           <a:xfrm>
-            <a:off x="700000" y="2940000"/>
-            <a:ext cx="480000" cy="480000"/>
+            <a:off x="1000000" y="4050000"/>
+            <a:ext cx="10400000" cy="600000"/>
           </a:xfrm>
           <a:prstGeom prst="rect">
             <a:avLst/>
@@ -10175,40 +9687,42 @@
           </a:bodyPr>
           <a:lstStyle/>
           <a:p>
-            <a:pPr algn="ctr"/>
-            <a:r>
-              <a:rPr sz="1400" b="1">
-                <a:solidFill>
-                  <a:srgbClr val="0D6B60"/>
-                </a:solidFill>
-                <a:latin typeface="Calibri"/>
-                <a:ea typeface="Calibri"/>
-                <a:cs typeface="Calibri"/>
+            <a:pPr algn="l"/>
+            <a:r>
+              <a:rPr sz="1400" b="0">
+                <a:solidFill>
+                  <a:srgbClr val="333333"/>
+                </a:solidFill>
+                <a:latin typeface="Open Sans"/>
+                <a:ea typeface="Open Sans"/>
+                <a:cs typeface="Open Sans"/>
               </a:rPr>
-              <a:t>3</a:t>
-            </a:r>
-          </a:p>
-        </p:txBody>
-      </p:sp>
-      <p:sp>
-        <p:nvSpPr>
-          <p:cNvPr id="19" name="Rounded Rectangle 18"/>
+              <a:t>Нашли интенсивное истечение крови — сразу останавливайте.</a:t>
+            </a:r>
+          </a:p>
+        </p:txBody>
+      </p:sp>
+      <p:sp>
+        <p:nvSpPr>
+          <p:cNvPr id="17" name="Rectangle 16"/>
           <p:cNvSpPr/>
           <p:nvPr/>
         </p:nvSpPr>
         <p:spPr>
           <a:xfrm>
-            <a:off x="1350000" y="2940000"/>
-            <a:ext cx="10000000" cy="480000"/>
-          </a:xfrm>
-          <a:prstGeom prst="roundRect">
+            <a:off x="700000" y="5000000"/>
+            <a:ext cx="11000000" cy="1000000"/>
+          </a:xfrm>
+          <a:prstGeom prst="rect">
             <a:avLst/>
           </a:prstGeom>
           <a:solidFill>
-            <a:srgbClr val="F0F0F0"/>
+            <a:srgbClr val="FFFFFF"/>
           </a:solidFill>
-          <a:ln>
-            <a:noFill/>
+          <a:ln w="12700">
+            <a:solidFill>
+              <a:srgbClr val="999999"/>
+            </a:solidFill>
           </a:ln>
         </p:spPr>
         <p:style>
@@ -10235,62 +9749,23 @@
       </p:sp>
       <p:sp>
         <p:nvSpPr>
-          <p:cNvPr id="20" name="TextBox 19"/>
-          <p:cNvSpPr txBox="1"/>
-          <p:nvPr/>
-        </p:nvSpPr>
-        <p:spPr>
-          <a:xfrm>
-            <a:off x="1550000" y="2940000"/>
-            <a:ext cx="9600000" cy="480000"/>
-          </a:xfrm>
-          <a:prstGeom prst="rect">
-            <a:avLst/>
-          </a:prstGeom>
-          <a:noFill/>
-        </p:spPr>
-        <p:txBody>
-          <a:bodyPr wrap="square" anchor="ctr">
-            <a:spAutoFit/>
-          </a:bodyPr>
-          <a:lstStyle/>
-          <a:p>
-            <a:pPr algn="l"/>
-            <a:r>
-              <a:rPr sz="1400" b="0">
-                <a:solidFill>
-                  <a:srgbClr val="333333"/>
-                </a:solidFill>
-                <a:latin typeface="Calibri"/>
-                <a:ea typeface="Calibri"/>
-                <a:cs typeface="Calibri"/>
-              </a:rPr>
-              <a:t>Немедленно начать временную остановку кровотечения.</a:t>
-            </a:r>
-          </a:p>
-        </p:txBody>
-      </p:sp>
-      <p:sp>
-        <p:nvSpPr>
-          <p:cNvPr id="21" name="Oval 20"/>
+          <p:cNvPr id="18" name="Rectangle 17"/>
           <p:cNvSpPr/>
           <p:nvPr/>
         </p:nvSpPr>
         <p:spPr>
           <a:xfrm>
-            <a:off x="700000" y="3660000"/>
-            <a:ext cx="480000" cy="480000"/>
-          </a:xfrm>
-          <a:prstGeom prst="ellipse">
+            <a:off x="700000" y="5000000"/>
+            <a:ext cx="90000" cy="1000000"/>
+          </a:xfrm>
+          <a:prstGeom prst="rect">
             <a:avLst/>
           </a:prstGeom>
           <a:solidFill>
-            <a:srgbClr val="8DDBCD"/>
+            <a:srgbClr val="CC0000"/>
           </a:solidFill>
-          <a:ln w="12700">
-            <a:solidFill>
-              <a:srgbClr val="1AA090"/>
-            </a:solidFill>
+          <a:ln>
+            <a:noFill/>
           </a:ln>
         </p:spPr>
         <p:style>
@@ -10317,14 +9792,14 @@
       </p:sp>
       <p:sp>
         <p:nvSpPr>
-          <p:cNvPr id="22" name="TextBox 21"/>
+          <p:cNvPr id="19" name="TextBox 18"/>
           <p:cNvSpPr txBox="1"/>
           <p:nvPr/>
         </p:nvSpPr>
         <p:spPr>
           <a:xfrm>
-            <a:off x="700000" y="3660000"/>
-            <a:ext cx="480000" cy="480000"/>
+            <a:off x="1000000" y="5200000"/>
+            <a:ext cx="10400000" cy="600000"/>
           </a:xfrm>
           <a:prstGeom prst="rect">
             <a:avLst/>
@@ -10337,421 +9812,17 @@
           </a:bodyPr>
           <a:lstStyle/>
           <a:p>
-            <a:pPr algn="ctr"/>
-            <a:r>
-              <a:rPr sz="1400" b="1">
-                <a:solidFill>
-                  <a:srgbClr val="0D6B60"/>
-                </a:solidFill>
-                <a:latin typeface="Calibri"/>
-                <a:ea typeface="Calibri"/>
-                <a:cs typeface="Calibri"/>
+            <a:pPr algn="l"/>
+            <a:r>
+              <a:rPr sz="1400" b="0">
+                <a:solidFill>
+                  <a:srgbClr val="333333"/>
+                </a:solidFill>
+                <a:latin typeface="Open Sans"/>
+                <a:ea typeface="Open Sans"/>
+                <a:cs typeface="Open Sans"/>
               </a:rPr>
-              <a:t>4</a:t>
-            </a:r>
-          </a:p>
-        </p:txBody>
-      </p:sp>
-      <p:sp>
-        <p:nvSpPr>
-          <p:cNvPr id="23" name="Rounded Rectangle 22"/>
-          <p:cNvSpPr/>
-          <p:nvPr/>
-        </p:nvSpPr>
-        <p:spPr>
-          <a:xfrm>
-            <a:off x="1350000" y="3660000"/>
-            <a:ext cx="10000000" cy="480000"/>
-          </a:xfrm>
-          <a:prstGeom prst="roundRect">
-            <a:avLst/>
-          </a:prstGeom>
-          <a:solidFill>
-            <a:srgbClr val="F0F0F0"/>
-          </a:solidFill>
-          <a:ln>
-            <a:noFill/>
-          </a:ln>
-        </p:spPr>
-        <p:style>
-          <a:lnRef idx="1">
-            <a:schemeClr val="accent1"/>
-          </a:lnRef>
-          <a:fillRef idx="3">
-            <a:schemeClr val="accent1"/>
-          </a:fillRef>
-          <a:effectRef idx="2">
-            <a:schemeClr val="accent1"/>
-          </a:effectRef>
-          <a:fontRef idx="minor">
-            <a:schemeClr val="lt1"/>
-          </a:fontRef>
-        </p:style>
-        <p:txBody>
-          <a:bodyPr rtlCol="0" anchor="ctr"/>
-          <a:lstStyle/>
-          <a:p>
-            <a:pPr algn="ctr"/>
-          </a:p>
-        </p:txBody>
-      </p:sp>
-      <p:sp>
-        <p:nvSpPr>
-          <p:cNvPr id="24" name="TextBox 23"/>
-          <p:cNvSpPr txBox="1"/>
-          <p:nvPr/>
-        </p:nvSpPr>
-        <p:spPr>
-          <a:xfrm>
-            <a:off x="1550000" y="3660000"/>
-            <a:ext cx="9600000" cy="480000"/>
-          </a:xfrm>
-          <a:prstGeom prst="rect">
-            <a:avLst/>
-          </a:prstGeom>
-          <a:noFill/>
-        </p:spPr>
-        <p:txBody>
-          <a:bodyPr wrap="square" anchor="ctr">
-            <a:spAutoFit/>
-          </a:bodyPr>
-          <a:lstStyle/>
-          <a:p>
-            <a:pPr algn="l"/>
-            <a:r>
-              <a:rPr sz="1400" b="0">
-                <a:solidFill>
-                  <a:srgbClr val="333333"/>
-                </a:solidFill>
-                <a:latin typeface="Calibri"/>
-                <a:ea typeface="Calibri"/>
-                <a:cs typeface="Calibri"/>
-              </a:rPr>
-              <a:t>Давление на рану → давящая повязка → жгут (по показаниям).</a:t>
-            </a:r>
-          </a:p>
-        </p:txBody>
-      </p:sp>
-      <p:sp>
-        <p:nvSpPr>
-          <p:cNvPr id="25" name="Oval 24"/>
-          <p:cNvSpPr/>
-          <p:nvPr/>
-        </p:nvSpPr>
-        <p:spPr>
-          <a:xfrm>
-            <a:off x="700000" y="4380000"/>
-            <a:ext cx="480000" cy="480000"/>
-          </a:xfrm>
-          <a:prstGeom prst="ellipse">
-            <a:avLst/>
-          </a:prstGeom>
-          <a:solidFill>
-            <a:srgbClr val="8DDBCD"/>
-          </a:solidFill>
-          <a:ln w="12700">
-            <a:solidFill>
-              <a:srgbClr val="1AA090"/>
-            </a:solidFill>
-          </a:ln>
-        </p:spPr>
-        <p:style>
-          <a:lnRef idx="1">
-            <a:schemeClr val="accent1"/>
-          </a:lnRef>
-          <a:fillRef idx="3">
-            <a:schemeClr val="accent1"/>
-          </a:fillRef>
-          <a:effectRef idx="2">
-            <a:schemeClr val="accent1"/>
-          </a:effectRef>
-          <a:fontRef idx="minor">
-            <a:schemeClr val="lt1"/>
-          </a:fontRef>
-        </p:style>
-        <p:txBody>
-          <a:bodyPr rtlCol="0" anchor="ctr"/>
-          <a:lstStyle/>
-          <a:p>
-            <a:pPr algn="ctr"/>
-          </a:p>
-        </p:txBody>
-      </p:sp>
-      <p:sp>
-        <p:nvSpPr>
-          <p:cNvPr id="26" name="TextBox 25"/>
-          <p:cNvSpPr txBox="1"/>
-          <p:nvPr/>
-        </p:nvSpPr>
-        <p:spPr>
-          <a:xfrm>
-            <a:off x="700000" y="4380000"/>
-            <a:ext cx="480000" cy="480000"/>
-          </a:xfrm>
-          <a:prstGeom prst="rect">
-            <a:avLst/>
-          </a:prstGeom>
-          <a:noFill/>
-        </p:spPr>
-        <p:txBody>
-          <a:bodyPr wrap="square" anchor="ctr">
-            <a:spAutoFit/>
-          </a:bodyPr>
-          <a:lstStyle/>
-          <a:p>
-            <a:pPr algn="ctr"/>
-            <a:r>
-              <a:rPr sz="1400" b="1">
-                <a:solidFill>
-                  <a:srgbClr val="0D6B60"/>
-                </a:solidFill>
-                <a:latin typeface="Calibri"/>
-                <a:ea typeface="Calibri"/>
-                <a:cs typeface="Calibri"/>
-              </a:rPr>
-              <a:t>5</a:t>
-            </a:r>
-          </a:p>
-        </p:txBody>
-      </p:sp>
-      <p:sp>
-        <p:nvSpPr>
-          <p:cNvPr id="27" name="Rounded Rectangle 26"/>
-          <p:cNvSpPr/>
-          <p:nvPr/>
-        </p:nvSpPr>
-        <p:spPr>
-          <a:xfrm>
-            <a:off x="1350000" y="4380000"/>
-            <a:ext cx="10000000" cy="480000"/>
-          </a:xfrm>
-          <a:prstGeom prst="roundRect">
-            <a:avLst/>
-          </a:prstGeom>
-          <a:solidFill>
-            <a:srgbClr val="F0F0F0"/>
-          </a:solidFill>
-          <a:ln>
-            <a:noFill/>
-          </a:ln>
-        </p:spPr>
-        <p:style>
-          <a:lnRef idx="1">
-            <a:schemeClr val="accent1"/>
-          </a:lnRef>
-          <a:fillRef idx="3">
-            <a:schemeClr val="accent1"/>
-          </a:fillRef>
-          <a:effectRef idx="2">
-            <a:schemeClr val="accent1"/>
-          </a:effectRef>
-          <a:fontRef idx="minor">
-            <a:schemeClr val="lt1"/>
-          </a:fontRef>
-        </p:style>
-        <p:txBody>
-          <a:bodyPr rtlCol="0" anchor="ctr"/>
-          <a:lstStyle/>
-          <a:p>
-            <a:pPr algn="ctr"/>
-          </a:p>
-        </p:txBody>
-      </p:sp>
-      <p:sp>
-        <p:nvSpPr>
-          <p:cNvPr id="28" name="TextBox 27"/>
-          <p:cNvSpPr txBox="1"/>
-          <p:nvPr/>
-        </p:nvSpPr>
-        <p:spPr>
-          <a:xfrm>
-            <a:off x="1550000" y="4380000"/>
-            <a:ext cx="9600000" cy="480000"/>
-          </a:xfrm>
-          <a:prstGeom prst="rect">
-            <a:avLst/>
-          </a:prstGeom>
-          <a:noFill/>
-        </p:spPr>
-        <p:txBody>
-          <a:bodyPr wrap="square" anchor="ctr">
-            <a:spAutoFit/>
-          </a:bodyPr>
-          <a:lstStyle/>
-          <a:p>
-            <a:pPr algn="l"/>
-            <a:r>
-              <a:rPr sz="1400" b="0">
-                <a:solidFill>
-                  <a:srgbClr val="333333"/>
-                </a:solidFill>
-                <a:latin typeface="Calibri"/>
-                <a:ea typeface="Calibri"/>
-                <a:cs typeface="Calibri"/>
-              </a:rPr>
-              <a:t>Вызвать скорую медицинскую помощь.</a:t>
-            </a:r>
-          </a:p>
-        </p:txBody>
-      </p:sp>
-      <p:sp>
-        <p:nvSpPr>
-          <p:cNvPr id="29" name="Oval 28"/>
-          <p:cNvSpPr/>
-          <p:nvPr/>
-        </p:nvSpPr>
-        <p:spPr>
-          <a:xfrm>
-            <a:off x="700000" y="5100000"/>
-            <a:ext cx="480000" cy="480000"/>
-          </a:xfrm>
-          <a:prstGeom prst="ellipse">
-            <a:avLst/>
-          </a:prstGeom>
-          <a:solidFill>
-            <a:srgbClr val="8DDBCD"/>
-          </a:solidFill>
-          <a:ln w="12700">
-            <a:solidFill>
-              <a:srgbClr val="1AA090"/>
-            </a:solidFill>
-          </a:ln>
-        </p:spPr>
-        <p:style>
-          <a:lnRef idx="1">
-            <a:schemeClr val="accent1"/>
-          </a:lnRef>
-          <a:fillRef idx="3">
-            <a:schemeClr val="accent1"/>
-          </a:fillRef>
-          <a:effectRef idx="2">
-            <a:schemeClr val="accent1"/>
-          </a:effectRef>
-          <a:fontRef idx="minor">
-            <a:schemeClr val="lt1"/>
-          </a:fontRef>
-        </p:style>
-        <p:txBody>
-          <a:bodyPr rtlCol="0" anchor="ctr"/>
-          <a:lstStyle/>
-          <a:p>
-            <a:pPr algn="ctr"/>
-          </a:p>
-        </p:txBody>
-      </p:sp>
-      <p:sp>
-        <p:nvSpPr>
-          <p:cNvPr id="30" name="TextBox 29"/>
-          <p:cNvSpPr txBox="1"/>
-          <p:nvPr/>
-        </p:nvSpPr>
-        <p:spPr>
-          <a:xfrm>
-            <a:off x="700000" y="5100000"/>
-            <a:ext cx="480000" cy="480000"/>
-          </a:xfrm>
-          <a:prstGeom prst="rect">
-            <a:avLst/>
-          </a:prstGeom>
-          <a:noFill/>
-        </p:spPr>
-        <p:txBody>
-          <a:bodyPr wrap="square" anchor="ctr">
-            <a:spAutoFit/>
-          </a:bodyPr>
-          <a:lstStyle/>
-          <a:p>
-            <a:pPr algn="ctr"/>
-            <a:r>
-              <a:rPr sz="1400" b="1">
-                <a:solidFill>
-                  <a:srgbClr val="0D6B60"/>
-                </a:solidFill>
-                <a:latin typeface="Calibri"/>
-                <a:ea typeface="Calibri"/>
-                <a:cs typeface="Calibri"/>
-              </a:rPr>
-              <a:t>6</a:t>
-            </a:r>
-          </a:p>
-        </p:txBody>
-      </p:sp>
-      <p:sp>
-        <p:nvSpPr>
-          <p:cNvPr id="31" name="Rounded Rectangle 30"/>
-          <p:cNvSpPr/>
-          <p:nvPr/>
-        </p:nvSpPr>
-        <p:spPr>
-          <a:xfrm>
-            <a:off x="1350000" y="5100000"/>
-            <a:ext cx="10000000" cy="480000"/>
-          </a:xfrm>
-          <a:prstGeom prst="roundRect">
-            <a:avLst/>
-          </a:prstGeom>
-          <a:solidFill>
-            <a:srgbClr val="F0F0F0"/>
-          </a:solidFill>
-          <a:ln>
-            <a:noFill/>
-          </a:ln>
-        </p:spPr>
-        <p:style>
-          <a:lnRef idx="1">
-            <a:schemeClr val="accent1"/>
-          </a:lnRef>
-          <a:fillRef idx="3">
-            <a:schemeClr val="accent1"/>
-          </a:fillRef>
-          <a:effectRef idx="2">
-            <a:schemeClr val="accent1"/>
-          </a:effectRef>
-          <a:fontRef idx="minor">
-            <a:schemeClr val="lt1"/>
-          </a:fontRef>
-        </p:style>
-        <p:txBody>
-          <a:bodyPr rtlCol="0" anchor="ctr"/>
-          <a:lstStyle/>
-          <a:p>
-            <a:pPr algn="ctr"/>
-          </a:p>
-        </p:txBody>
-      </p:sp>
-      <p:sp>
-        <p:nvSpPr>
-          <p:cNvPr id="32" name="TextBox 31"/>
-          <p:cNvSpPr txBox="1"/>
-          <p:nvPr/>
-        </p:nvSpPr>
-        <p:spPr>
-          <a:xfrm>
-            <a:off x="1550000" y="5100000"/>
-            <a:ext cx="9600000" cy="480000"/>
-          </a:xfrm>
-          <a:prstGeom prst="rect">
-            <a:avLst/>
-          </a:prstGeom>
-          <a:noFill/>
-        </p:spPr>
-        <p:txBody>
-          <a:bodyPr wrap="square" anchor="ctr">
-            <a:spAutoFit/>
-          </a:bodyPr>
-          <a:lstStyle/>
-          <a:p>
-            <a:pPr algn="l"/>
-            <a:r>
-              <a:rPr sz="1400" b="0">
-                <a:solidFill>
-                  <a:srgbClr val="333333"/>
-                </a:solidFill>
-                <a:latin typeface="Calibri"/>
-                <a:ea typeface="Calibri"/>
-                <a:cs typeface="Calibri"/>
-              </a:rPr>
-              <a:t>Контролировать состояние до прибытия СМП.</a:t>
+              <a:t>Подробный осмотр — только после остановки угрожающего жизни кровотечения.</a:t>
             </a:r>
           </a:p>
         </p:txBody>
